--- a/Presentacion/.build/candidate.pptx
+++ b/Presentacion/.build/candidate.pptx
@@ -2,19 +2,19 @@
 <file path=ppt/presentation.xml><?xml version="1.0" encoding="utf-8"?>
 <p:presentation xmlns:p="http://schemas.openxmlformats.org/presentationml/2006/main">
   <p:sldMasterIdLst>
-    <p:sldMasterId xmlns:r="http://schemas.openxmlformats.org/officeDocument/2006/relationships" id="2147483648" r:id="R7e27012c65a849e1"/>
+    <p:sldMasterId xmlns:r="http://schemas.openxmlformats.org/officeDocument/2006/relationships" id="2147483648" r:id="R79db63372756482b"/>
   </p:sldMasterIdLst>
   <p:notesMasterIdLst>
-    <p:notesMasterId xmlns:r="http://schemas.openxmlformats.org/officeDocument/2006/relationships" r:id="Rf49f23dbd36a416a"/>
+    <p:notesMasterId xmlns:r="http://schemas.openxmlformats.org/officeDocument/2006/relationships" r:id="R2543600c3afc4961"/>
   </p:notesMasterIdLst>
   <p:sldIdLst>
-    <p:sldId xmlns:r="http://schemas.openxmlformats.org/officeDocument/2006/relationships" id="256" r:id="R81477c988b664e3f"/>
-    <p:sldId xmlns:r="http://schemas.openxmlformats.org/officeDocument/2006/relationships" id="257" r:id="Rf445dc89513d4cb8"/>
-    <p:sldId xmlns:r="http://schemas.openxmlformats.org/officeDocument/2006/relationships" id="258" r:id="Ra3296b005de84e94"/>
-    <p:sldId xmlns:r="http://schemas.openxmlformats.org/officeDocument/2006/relationships" id="259" r:id="R65700945aa624fee"/>
-    <p:sldId xmlns:r="http://schemas.openxmlformats.org/officeDocument/2006/relationships" id="260" r:id="R05081ce1e9ea4ff8"/>
-    <p:sldId xmlns:r="http://schemas.openxmlformats.org/officeDocument/2006/relationships" id="261" r:id="R80541b8fe1b24cfc"/>
-    <p:sldId xmlns:r="http://schemas.openxmlformats.org/officeDocument/2006/relationships" id="262" r:id="R1049ac1582524d98"/>
+    <p:sldId xmlns:r="http://schemas.openxmlformats.org/officeDocument/2006/relationships" id="256" r:id="Rd0f4d89a32ef4d35"/>
+    <p:sldId xmlns:r="http://schemas.openxmlformats.org/officeDocument/2006/relationships" id="257" r:id="R9653c83f84394d38"/>
+    <p:sldId xmlns:r="http://schemas.openxmlformats.org/officeDocument/2006/relationships" id="258" r:id="R7d0f674606424ad5"/>
+    <p:sldId xmlns:r="http://schemas.openxmlformats.org/officeDocument/2006/relationships" id="259" r:id="R2d09abcf49dd49e6"/>
+    <p:sldId xmlns:r="http://schemas.openxmlformats.org/officeDocument/2006/relationships" id="260" r:id="R7f389c053d654e36"/>
+    <p:sldId xmlns:r="http://schemas.openxmlformats.org/officeDocument/2006/relationships" id="261" r:id="R6f1f1f7e2e6346e3"/>
+    <p:sldId xmlns:r="http://schemas.openxmlformats.org/officeDocument/2006/relationships" id="262" r:id="R4f252a6fae7845a4"/>
   </p:sldIdLst>
   <p:sldSz cx="12192000" cy="6858000"/>
   <p:notesSz cx="6858000" cy="9144000"/>
@@ -548,37 +548,7 @@
           <a:lstStyle xmlns:a="http://schemas.openxmlformats.org/drawingml/2006/main"/>
           <a:p xmlns:a="http://schemas.openxmlformats.org/drawingml/2006/main">
             <a:r>
-              <a:t>2. Problema y público objetivo</a:t>
-            </a:r>
-          </a:p>
-          <a:p xmlns:a="http://schemas.openxmlformats.org/drawingml/2006/main">
-            <a:r>
-              <a:t>Tiempo: 2:00. Expositor sugerido: Lautaro.</a:t>
-            </a:r>
-          </a:p>
-          <a:p xmlns:a="http://schemas.openxmlformats.org/drawingml/2006/main">
-            <a:r>
-              <a:t/>
-            </a:r>
-          </a:p>
-          <a:p xmlns:a="http://schemas.openxmlformats.org/drawingml/2006/main">
-            <a:r>
-              <a:t>Presentar a Juan como un personaje ficticio, no como una persona entrevistada. Describir una jornada: atiende, recibe mercadería y registra ventas mientras su empleado también trabaja. Su dificultad es mantener una visión actualizada de lo que ocurrió. Explicar las tareas, frustraciones y resultados deseados del perfil del cliente. El público objetivo son pequeños comercios que necesitan organizar su operación desde el celular. No afirmar que se validaron ahorros o reducción de errores sin un estudio. Transición: estas necesidades orientaron nuestra propuesta.</a:t>
-            </a:r>
-          </a:p>
-          <a:p xmlns:a="http://schemas.openxmlformats.org/drawingml/2006/main">
-            <a:r>
-              <a:t/>
-            </a:r>
-          </a:p>
-          <a:p xmlns:a="http://schemas.openxmlformats.org/drawingml/2006/main">
-            <a:r>
-              <a:t>Fuentes del proyecto: README.md; docs/GuiaDePantallas.md.</a:t>
-            </a:r>
-          </a:p>
-          <a:p xmlns:a="http://schemas.openxmlformats.org/drawingml/2006/main">
-            <a:r>
-              <a:t>Caso de Juan y cantidades: ejemplo ficticio para la demostración.</a:t>
+              <a:t>Fuente: Guion-de-defensa.md, apartado PowerPoint del punto 2. Ilustración ficticia creada con imagegen: un empleado y Juan en momentos diferentes, una persona por turno. Recursos editables: todos los títulos, preguntas y explicaciones. La ilustración se puede reemplazar como imagen independiente.</a:t>
             </a:r>
           </a:p>
         </p:txBody>
@@ -648,37 +618,7 @@
           <a:lstStyle xmlns:a="http://schemas.openxmlformats.org/drawingml/2006/main"/>
           <a:p xmlns:a="http://schemas.openxmlformats.org/drawingml/2006/main">
             <a:r>
-              <a:t>3. Nuestra solución y mapa de valor</a:t>
-            </a:r>
-          </a:p>
-          <a:p xmlns:a="http://schemas.openxmlformats.org/drawingml/2006/main">
-            <a:r>
-              <a:t>Tiempo: 1:00. Expositor sugerido: Lautaro.</a:t>
-            </a:r>
-          </a:p>
-          <a:p xmlns:a="http://schemas.openxmlformats.org/drawingml/2006/main">
-            <a:r>
-              <a:t/>
-            </a:r>
-          </a:p>
-          <a:p xmlns:a="http://schemas.openxmlformats.org/drawingml/2006/main">
-            <a:r>
-              <a:t>Explicar cada relación de izquierda a derecha. Para Juan, la compra y la venta modifican las existencias del producto que vamos a seguir. Para otros pequeños comercios, la propuesta es reunir la operación cotidiana y distribuir tareas. Este mapa resume la hipótesis de valor, no demuestra por sí mismo un impacto medido. Transición a Mariano: veamos quiénes usan la aplicación y cómo se organiza su trabajo.</a:t>
-            </a:r>
-          </a:p>
-          <a:p xmlns:a="http://schemas.openxmlformats.org/drawingml/2006/main">
-            <a:r>
-              <a:t/>
-            </a:r>
-          </a:p>
-          <a:p xmlns:a="http://schemas.openxmlformats.org/drawingml/2006/main">
-            <a:r>
-              <a:t>Fuentes del proyecto: README.md; docs/GuiaDePantallas.md.</a:t>
-            </a:r>
-          </a:p>
-          <a:p xmlns:a="http://schemas.openxmlformats.org/drawingml/2006/main">
-            <a:r>
-              <a:t>Caso de Juan y cantidades: ejemplo ficticio para la demostración.</a:t>
+              <a:t>Fuente: Guion-de-defensa.md, apartado PowerPoint del punto 3. Mapa de valor en tres recorridos verticales: dificultad, respuesta y utilidad. Capturas reales de ventas, productos y turnos del repositorio. Para Juan y otros comercios de barrio: registros y turnos en una misma herramienta.</a:t>
             </a:r>
           </a:p>
         </p:txBody>
@@ -748,37 +688,7 @@
           <a:lstStyle xmlns:a="http://schemas.openxmlformats.org/drawingml/2006/main"/>
           <a:p xmlns:a="http://schemas.openxmlformats.org/drawingml/2006/main">
             <a:r>
-              <a:t>4. Video: bienvenida y personas</a:t>
-            </a:r>
-          </a:p>
-          <a:p xmlns:a="http://schemas.openxmlformats.org/drawingml/2006/main">
-            <a:r>
-              <a:t>Tiempo: 1:30. Expositor sugerido: Mariano.</a:t>
-            </a:r>
-          </a:p>
-          <a:p xmlns:a="http://schemas.openxmlformats.org/drawingml/2006/main">
-            <a:r>
-              <a:t/>
-            </a:r>
-          </a:p>
-          <a:p xmlns:a="http://schemas.openxmlformats.org/drawingml/2006/main">
-            <a:r>
-              <a:t>Recorrido de grabación: 0:00 inicio de sesión; 0:10 breve registro del dueño con datos ficticios; 0:25 ingreso y orientación en dashboard; 0:35 cuenta de empleado y selección de rol; 0:55 jornada asignada en varias fechas; 1:15 acceso del empleado y consulta de sus turnos. Explicar que el dueño administra su cuenta y que las opciones visibles cambian según el rol. No convertir el registro en el centro de la demo. Las capturas actuales son un respaldo visual real del proyecto, no una grabación del caso. Transición: ya conocemos a las personas; ahora seguimos la mercadería.</a:t>
-            </a:r>
-          </a:p>
-          <a:p xmlns:a="http://schemas.openxmlformats.org/drawingml/2006/main">
-            <a:r>
-              <a:t/>
-            </a:r>
-          </a:p>
-          <a:p xmlns:a="http://schemas.openxmlformats.org/drawingml/2006/main">
-            <a:r>
-              <a:t>Fuentes del proyecto: README.md; docs/GuiaDePantallas.md.</a:t>
-            </a:r>
-          </a:p>
-          <a:p xmlns:a="http://schemas.openxmlformats.org/drawingml/2006/main">
-            <a:r>
-              <a:t>Caso de Juan y cantidades: ejemplo ficticio para la demostración.</a:t>
+              <a:t>Espacio reservado para el video local del punto 4. Guion-de-defensa.md, apartado PowerPoint.</a:t>
             </a:r>
           </a:p>
         </p:txBody>
@@ -848,37 +758,7 @@
           <a:lstStyle xmlns:a="http://schemas.openxmlformats.org/drawingml/2006/main"/>
           <a:p xmlns:a="http://schemas.openxmlformats.org/drawingml/2006/main">
             <a:r>
-              <a:t>5. Video: un día en el comercio</a:t>
-            </a:r>
-          </a:p>
-          <a:p xmlns:a="http://schemas.openxmlformats.org/drawingml/2006/main">
-            <a:r>
-              <a:t>Tiempo: 4:00. Expositor sugerido: Mariano.</a:t>
-            </a:r>
-          </a:p>
-          <a:p xmlns:a="http://schemas.openxmlformats.org/drawingml/2006/main">
-            <a:r>
-              <a:t/>
-            </a:r>
-          </a:p>
-          <a:p xmlns:a="http://schemas.openxmlformats.org/drawingml/2006/main">
-            <a:r>
-              <a:t>0:00 presentar arroz de 1 kg con 2 unidades y mínimo 5. 0:25 mostrar proveedor asociado y registrar una compra de 10 unidades. 1:20 confirmar la compra y consultar 12 unidades. 1:50 registrar una venta de 3 unidades. 2:50 volver al producto y comprobar 9 unidades. 3:15 revisar historial y dashboard. 3:45 cerrar la demostración: la misma operación queda conectada con las existencias y el resumen del negocio. Las cifras son un guion ficticio que debe prepararse antes de grabar. Restaurar el estado inicial antes de repetir. No afirmar que los importes de las capturas corresponden a este ejemplo.</a:t>
-            </a:r>
-          </a:p>
-          <a:p xmlns:a="http://schemas.openxmlformats.org/drawingml/2006/main">
-            <a:r>
-              <a:t/>
-            </a:r>
-          </a:p>
-          <a:p xmlns:a="http://schemas.openxmlformats.org/drawingml/2006/main">
-            <a:r>
-              <a:t>Fuentes del proyecto: README.md; docs/GuiaDePantallas.md.</a:t>
-            </a:r>
-          </a:p>
-          <a:p xmlns:a="http://schemas.openxmlformats.org/drawingml/2006/main">
-            <a:r>
-              <a:t>Caso de Juan y cantidades: ejemplo ficticio para la demostración.</a:t>
+              <a:t>Espacio reservado para el video local del punto 5. Guion-de-defensa.md, apartado PowerPoint.</a:t>
             </a:r>
           </a:p>
         </p:txBody>
@@ -948,37 +828,7 @@
           <a:lstStyle xmlns:a="http://schemas.openxmlformats.org/drawingml/2006/main"/>
           <a:p xmlns:a="http://schemas.openxmlformats.org/drawingml/2006/main">
             <a:r>
-              <a:t>6. Arquitectura, accesibilidad y responsabilidad</a:t>
-            </a:r>
-          </a:p>
-          <a:p xmlns:a="http://schemas.openxmlformats.org/drawingml/2006/main">
-            <a:r>
-              <a:t>Tiempo: 4:00. Expositor sugerido: Lautaro.</a:t>
-            </a:r>
-          </a:p>
-          <a:p xmlns:a="http://schemas.openxmlformats.org/drawingml/2006/main">
-            <a:r>
-              <a:t/>
-            </a:r>
-          </a:p>
-          <a:p xmlns:a="http://schemas.openxmlformats.org/drawingml/2006/main">
-            <a:r>
-              <a:t>Primer minuto: la app presenta información y envía solicitudes a la API; la API aplica la operación y accede a PostgreSQL mediante Prisma. El paquete compartido define contratos TypeScript. Segundo minuto: una compra y una venta incluyen varios cambios relacionados; las transacciones evitan que una parte se guarde y otra no. Tercer minuto: las contraseñas usan scrypt con salt aleatorio y comparación segura. La matriz por roles organiza la interfaz, pero aún debe reforzarse la autorización de cada operación sensible en la API. La versión actual no usa JWT. Cuarto minuto: hay etiquetas accesibles en controles y temas claro y oscuro. Esto no equivale a una auditoría completa de accesibilidad. Proponer evaluación con lectores de pantalla y contraste. Responsabilidad: usar datos ficticios en la demo y no exponer información personal. Repartir esta sección si refleja mejor las responsabilidades reales del equipo.</a:t>
-            </a:r>
-          </a:p>
-          <a:p xmlns:a="http://schemas.openxmlformats.org/drawingml/2006/main">
-            <a:r>
-              <a:t/>
-            </a:r>
-          </a:p>
-          <a:p xmlns:a="http://schemas.openxmlformats.org/drawingml/2006/main">
-            <a:r>
-              <a:t>Fuentes del proyecto: docs/Stack.md; docs/matriz_permisos_uml_almacen_bolsillo_md_2026.md; backend/src/modules/auth/password.ts; frontend/components/auth/CredentialsForm.tsx.</a:t>
-            </a:r>
-          </a:p>
-          <a:p xmlns:a="http://schemas.openxmlformats.org/drawingml/2006/main">
-            <a:r>
-              <a:t>Caso de Juan y cantidades: ejemplo ficticio para la demostración.</a:t>
+              <a:t>Fuente: Guion-de-defensa.md, apartado PowerPoint del punto 6. Recorrer las capas en orden. Prisma se menciona oralmente. Apoyar facilidad de uso en la captura real de nueva venta. Son objetivos de diseño e impacto social, no resultados certificados ni medidos.</a:t>
             </a:r>
           </a:p>
         </p:txBody>
@@ -1048,37 +898,7 @@
           <a:lstStyle xmlns:a="http://schemas.openxmlformats.org/drawingml/2006/main"/>
           <a:p xmlns:a="http://schemas.openxmlformats.org/drawingml/2006/main">
             <a:r>
-              <a:t>7. Resultados y futuro</a:t>
-            </a:r>
-          </a:p>
-          <a:p xmlns:a="http://schemas.openxmlformats.org/drawingml/2006/main">
-            <a:r>
-              <a:t>Tiempo: 2:00. Expositor sugerido: Mariano y Lautaro.</a:t>
-            </a:r>
-          </a:p>
-          <a:p xmlns:a="http://schemas.openxmlformats.org/drawingml/2006/main">
-            <a:r>
-              <a:t/>
-            </a:r>
-          </a:p>
-          <a:p xmlns:a="http://schemas.openxmlformats.org/drawingml/2006/main">
-            <a:r>
-              <a:t>Mariano, primer minuto: recuperar el caso de Juan y el circuito de arroz. El prototipo conecta registros de compra y venta con las existencias y permite consultar operaciones. También organiza personas y turnos. Lautaro, segundo minuto: reconocer la necesidad de reforzar la autorización en API, evaluar accesibilidad y ampliar pruebas. Los scripts test generales son marcadores, no una suite completa. El ahorro de tiempo y la reducción de errores son beneficios esperados que requieren validación con usuarios. Cierre: desarrollamos una herramienta para que el comerciante pueda consultar y organizar su actividad cotidiana desde el celular. Dar lugar a preguntas.</a:t>
-            </a:r>
-          </a:p>
-          <a:p xmlns:a="http://schemas.openxmlformats.org/drawingml/2006/main">
-            <a:r>
-              <a:t/>
-            </a:r>
-          </a:p>
-          <a:p xmlns:a="http://schemas.openxmlformats.org/drawingml/2006/main">
-            <a:r>
-              <a:t>Fuentes del proyecto: README.md; docs/Stack.md; docs/matriz_permisos_uml_almacen_bolsillo_md_2026.md.</a:t>
-            </a:r>
-          </a:p>
-          <a:p xmlns:a="http://schemas.openxmlformats.org/drawingml/2006/main">
-            <a:r>
-              <a:t>Caso de Juan y cantidades: ejemplo ficticio para la demostración.</a:t>
+              <a:t>Fuente: Guion-de-defensa.md, apartado PowerPoint del punto 7. Base propia por comercio: propuesta multi tenant futura. Captura real de dashboard oscuro. Recuperar a Juan al cerrar. Diferenciar el aporte del proyecto y el impacto esperado de las mejoras propuestas.</a:t>
             </a:r>
           </a:p>
         </p:txBody>
@@ -1125,7 +945,7 @@
           <p:cNvPr id="3" name="Title">
             <a:extLst xmlns:a="http://schemas.openxmlformats.org/drawingml/2006/main">
               <a:ext uri="{FF2B5EF4-FFF2-40B4-BE49-F238E27FC236}">
-                <a16:creationId xmlns:a16="http://schemas.microsoft.com/office/drawing/2014/main" id="{A66ADAEE-389F-4FAB-AA23-18275D7B0FA5}"/>
+                <a16:creationId xmlns:a16="http://schemas.microsoft.com/office/drawing/2014/main" id="{164B4AC8-02AD-4F86-BE42-B4DF6968A2B3}"/>
               </a:ext>
             </a:extLst>
           </p:cNvPr>
@@ -1354,7 +1174,7 @@
           <p:cNvPr id="2" name="Subtitle">
             <a:extLst xmlns:a="http://schemas.openxmlformats.org/drawingml/2006/main">
               <a:ext uri="{FF2B5EF4-FFF2-40B4-BE49-F238E27FC236}">
-                <a16:creationId xmlns:a16="http://schemas.microsoft.com/office/drawing/2014/main" id="{2D5B4C7D-9055-493A-8666-E13AF7BAD54F}"/>
+                <a16:creationId xmlns:a16="http://schemas.microsoft.com/office/drawing/2014/main" id="{D419E2BE-91B7-4760-B0A5-A3C008AA5DAD}"/>
               </a:ext>
             </a:extLst>
           </p:cNvPr>
@@ -1600,7 +1420,7 @@
           <p:cNvPr id="2" name="Section title">
             <a:extLst xmlns:a="http://schemas.openxmlformats.org/drawingml/2006/main">
               <a:ext uri="{FF2B5EF4-FFF2-40B4-BE49-F238E27FC236}">
-                <a16:creationId xmlns:a16="http://schemas.microsoft.com/office/drawing/2014/main" id="{C143F5C1-D333-4246-B642-E0377D3A57BB}"/>
+                <a16:creationId xmlns:a16="http://schemas.microsoft.com/office/drawing/2014/main" id="{A51427D6-2D00-45D6-A986-2D1BF342E5C8}"/>
               </a:ext>
             </a:extLst>
           </p:cNvPr>
@@ -1846,7 +1666,7 @@
           <p:cNvPr id="3" name="Title">
             <a:extLst xmlns:a="http://schemas.openxmlformats.org/drawingml/2006/main">
               <a:ext uri="{FF2B5EF4-FFF2-40B4-BE49-F238E27FC236}">
-                <a16:creationId xmlns:a16="http://schemas.microsoft.com/office/drawing/2014/main" id="{600A5F8D-EB42-41AB-992B-06FDED7DDC84}"/>
+                <a16:creationId xmlns:a16="http://schemas.microsoft.com/office/drawing/2014/main" id="{8513D9B5-6702-49B0-90C8-51924B2DA1BC}"/>
               </a:ext>
             </a:extLst>
           </p:cNvPr>
@@ -2075,7 +1895,7 @@
           <p:cNvPr id="2" name="Body">
             <a:extLst xmlns:a="http://schemas.openxmlformats.org/drawingml/2006/main">
               <a:ext uri="{FF2B5EF4-FFF2-40B4-BE49-F238E27FC236}">
-                <a16:creationId xmlns:a16="http://schemas.microsoft.com/office/drawing/2014/main" id="{9D943798-E69D-4945-8147-9B458DCC5642}"/>
+                <a16:creationId xmlns:a16="http://schemas.microsoft.com/office/drawing/2014/main" id="{82BA8F8A-96EB-4D28-8F9C-718813734B77}"/>
               </a:ext>
             </a:extLst>
           </p:cNvPr>
@@ -2321,7 +2141,7 @@
           <p:cNvPr id="4" name="Title">
             <a:extLst xmlns:a="http://schemas.openxmlformats.org/drawingml/2006/main">
               <a:ext uri="{FF2B5EF4-FFF2-40B4-BE49-F238E27FC236}">
-                <a16:creationId xmlns:a16="http://schemas.microsoft.com/office/drawing/2014/main" id="{1C10FF8A-87FA-42BF-BDD2-B0BF43D6C6AB}"/>
+                <a16:creationId xmlns:a16="http://schemas.microsoft.com/office/drawing/2014/main" id="{6AEA428A-ED14-40C4-A9CB-B022C5CA665C}"/>
               </a:ext>
             </a:extLst>
           </p:cNvPr>
@@ -2550,7 +2370,7 @@
           <p:cNvPr id="2" name="Left column">
             <a:extLst xmlns:a="http://schemas.openxmlformats.org/drawingml/2006/main">
               <a:ext uri="{FF2B5EF4-FFF2-40B4-BE49-F238E27FC236}">
-                <a16:creationId xmlns:a16="http://schemas.microsoft.com/office/drawing/2014/main" id="{DBDF7625-FF45-4554-9D16-216D2575B69A}"/>
+                <a16:creationId xmlns:a16="http://schemas.microsoft.com/office/drawing/2014/main" id="{089755ED-F5F1-4962-A4A9-FABF73687234}"/>
               </a:ext>
             </a:extLst>
           </p:cNvPr>
@@ -2779,7 +2599,7 @@
           <p:cNvPr id="3" name="Right column">
             <a:extLst xmlns:a="http://schemas.openxmlformats.org/drawingml/2006/main">
               <a:ext uri="{FF2B5EF4-FFF2-40B4-BE49-F238E27FC236}">
-                <a16:creationId xmlns:a16="http://schemas.microsoft.com/office/drawing/2014/main" id="{3E9932B1-AA88-42F4-8E9E-F609BAF2BAA9}"/>
+                <a16:creationId xmlns:a16="http://schemas.microsoft.com/office/drawing/2014/main" id="{38459DF4-2462-41D6-825B-03C964101C7C}"/>
               </a:ext>
             </a:extLst>
           </p:cNvPr>
@@ -3025,7 +2845,7 @@
           <p:cNvPr id="3" name="Title">
             <a:extLst xmlns:a="http://schemas.openxmlformats.org/drawingml/2006/main">
               <a:ext uri="{FF2B5EF4-FFF2-40B4-BE49-F238E27FC236}">
-                <a16:creationId xmlns:a16="http://schemas.microsoft.com/office/drawing/2014/main" id="{329BB77E-EAB0-4F84-8FFC-E704F4EE0DA4}"/>
+                <a16:creationId xmlns:a16="http://schemas.microsoft.com/office/drawing/2014/main" id="{C9DC1246-2E93-438F-A9A5-EB2ADA51C627}"/>
               </a:ext>
             </a:extLst>
           </p:cNvPr>
@@ -3254,7 +3074,7 @@
           <p:cNvPr id="2" name="Left column">
             <a:extLst xmlns:a="http://schemas.openxmlformats.org/drawingml/2006/main">
               <a:ext uri="{FF2B5EF4-FFF2-40B4-BE49-F238E27FC236}">
-                <a16:creationId xmlns:a16="http://schemas.microsoft.com/office/drawing/2014/main" id="{0AF90F41-84C1-4E73-8DB8-315D3E9D2F9E}"/>
+                <a16:creationId xmlns:a16="http://schemas.microsoft.com/office/drawing/2014/main" id="{AD477375-6C68-48D3-9E7E-AEF57AD3B13A}"/>
               </a:ext>
             </a:extLst>
           </p:cNvPr>
@@ -3521,12 +3341,12 @@
   </p:cSld>
   <p:clrMap bg1="lt1" tx1="dk1" bg2="lt2" tx2="dk2" accent1="accent1" accent2="accent2" accent3="accent3" accent4="accent4" accent5="accent5" accent6="accent6" hlink="hlink" folHlink="folHlink"/>
   <p:sldLayoutIdLst>
-    <p:sldLayoutId xmlns:r="http://schemas.openxmlformats.org/officeDocument/2006/relationships" id="2147483649" r:id="Ra2598685253d4dbf"/>
-    <p:sldLayoutId xmlns:r="http://schemas.openxmlformats.org/officeDocument/2006/relationships" id="2147483650" r:id="Rfc62cfca049d4422"/>
-    <p:sldLayoutId xmlns:r="http://schemas.openxmlformats.org/officeDocument/2006/relationships" id="2147483651" r:id="R068ec7cd1d684926"/>
-    <p:sldLayoutId xmlns:r="http://schemas.openxmlformats.org/officeDocument/2006/relationships" id="2147483652" r:id="Rc33c0493e2084ea6"/>
-    <p:sldLayoutId xmlns:r="http://schemas.openxmlformats.org/officeDocument/2006/relationships" id="2147483653" r:id="Rc3413f38bae44a99"/>
-    <p:sldLayoutId xmlns:r="http://schemas.openxmlformats.org/officeDocument/2006/relationships" id="2147483654" r:id="R3c97732c10624620"/>
+    <p:sldLayoutId xmlns:r="http://schemas.openxmlformats.org/officeDocument/2006/relationships" id="2147483649" r:id="R61f0d220a5ef4bfb"/>
+    <p:sldLayoutId xmlns:r="http://schemas.openxmlformats.org/officeDocument/2006/relationships" id="2147483650" r:id="Rae9227a65c3145cd"/>
+    <p:sldLayoutId xmlns:r="http://schemas.openxmlformats.org/officeDocument/2006/relationships" id="2147483651" r:id="Rbdfac43dc54c43c0"/>
+    <p:sldLayoutId xmlns:r="http://schemas.openxmlformats.org/officeDocument/2006/relationships" id="2147483652" r:id="R9e73b303a46c4bb1"/>
+    <p:sldLayoutId xmlns:r="http://schemas.openxmlformats.org/officeDocument/2006/relationships" id="2147483653" r:id="Rc37e2fbcc24548e8"/>
+    <p:sldLayoutId xmlns:r="http://schemas.openxmlformats.org/officeDocument/2006/relationships" id="2147483654" r:id="Rc3d817c250c64e02"/>
   </p:sldLayoutIdLst>
   <p:txStyles>
     <p:titleStyle>
@@ -4077,7 +3897,7 @@
           <p:cNvPr id="37" name="">
             <a:extLst xmlns:a="http://schemas.openxmlformats.org/drawingml/2006/main">
               <a:ext uri="{FF2B5EF4-FFF2-40B4-BE49-F238E27FC236}">
-                <a16:creationId xmlns:a16="http://schemas.microsoft.com/office/drawing/2014/main" id="{7FF0003D-E535-4044-9CC0-4661B786F2A7}"/>
+                <a16:creationId xmlns:a16="http://schemas.microsoft.com/office/drawing/2014/main" id="{284C8882-4BAF-44FE-8493-846C678FA2FC}"/>
               </a:ext>
             </a:extLst>
           </p:cNvPr>
@@ -4107,7 +3927,7 @@
           <p:cNvPr id="2" name="">
             <a:extLst xmlns:a="http://schemas.openxmlformats.org/drawingml/2006/main">
               <a:ext uri="{FF2B5EF4-FFF2-40B4-BE49-F238E27FC236}">
-                <a16:creationId xmlns:a16="http://schemas.microsoft.com/office/drawing/2014/main" id="{3CD32B43-604B-4009-8CC6-5D588430706D}"/>
+                <a16:creationId xmlns:a16="http://schemas.microsoft.com/office/drawing/2014/main" id="{45689C1D-7796-4B55-BADC-4CAEDE23DD07}"/>
               </a:ext>
             </a:extLst>
           </p:cNvPr>
@@ -4137,7 +3957,7 @@
           <p:cNvPr id="3" name="">
             <a:extLst xmlns:a="http://schemas.openxmlformats.org/drawingml/2006/main">
               <a:ext uri="{FF2B5EF4-FFF2-40B4-BE49-F238E27FC236}">
-                <a16:creationId xmlns:a16="http://schemas.microsoft.com/office/drawing/2014/main" id="{F2EC98A3-EDAD-4209-B0EA-DCDE4214392D}"/>
+                <a16:creationId xmlns:a16="http://schemas.microsoft.com/office/drawing/2014/main" id="{92014165-909F-49F0-A78B-9776A790B5BB}"/>
               </a:ext>
             </a:extLst>
           </p:cNvPr>
@@ -4167,7 +3987,7 @@
           <p:cNvPr id="4" name="">
             <a:extLst xmlns:a="http://schemas.openxmlformats.org/drawingml/2006/main">
               <a:ext uri="{FF2B5EF4-FFF2-40B4-BE49-F238E27FC236}">
-                <a16:creationId xmlns:a16="http://schemas.microsoft.com/office/drawing/2014/main" id="{D08C7AD6-951A-4341-BB19-7BAA91316B18}"/>
+                <a16:creationId xmlns:a16="http://schemas.microsoft.com/office/drawing/2014/main" id="{876FDECA-164F-4B20-BA1D-9DC834B2F189}"/>
               </a:ext>
             </a:extLst>
           </p:cNvPr>
@@ -4197,7 +4017,7 @@
           <p:cNvPr id="5" name="">
             <a:extLst xmlns:a="http://schemas.openxmlformats.org/drawingml/2006/main">
               <a:ext uri="{FF2B5EF4-FFF2-40B4-BE49-F238E27FC236}">
-                <a16:creationId xmlns:a16="http://schemas.microsoft.com/office/drawing/2014/main" id="{53C34DC6-CD91-46AD-A853-20EC61732F55}"/>
+                <a16:creationId xmlns:a16="http://schemas.microsoft.com/office/drawing/2014/main" id="{9A764FB0-2C85-49A9-8DBB-058A5E6D8B8F}"/>
               </a:ext>
             </a:extLst>
           </p:cNvPr>
@@ -4227,7 +4047,7 @@
           <p:cNvPr id="6" name="">
             <a:extLst xmlns:a="http://schemas.openxmlformats.org/drawingml/2006/main">
               <a:ext uri="{FF2B5EF4-FFF2-40B4-BE49-F238E27FC236}">
-                <a16:creationId xmlns:a16="http://schemas.microsoft.com/office/drawing/2014/main" id="{35A3D008-3D59-4C68-828B-763F9B69DDF9}"/>
+                <a16:creationId xmlns:a16="http://schemas.microsoft.com/office/drawing/2014/main" id="{024257F7-F071-479D-87DF-D9071B3F6B8C}"/>
               </a:ext>
             </a:extLst>
           </p:cNvPr>
@@ -4347,7 +4167,7 @@
           <p:cNvPr id="7" name="">
             <a:extLst xmlns:a="http://schemas.openxmlformats.org/drawingml/2006/main">
               <a:ext uri="{FF2B5EF4-FFF2-40B4-BE49-F238E27FC236}">
-                <a16:creationId xmlns:a16="http://schemas.microsoft.com/office/drawing/2014/main" id="{C56EA5D4-4157-4208-BFEF-8EC9AD42F811}"/>
+                <a16:creationId xmlns:a16="http://schemas.microsoft.com/office/drawing/2014/main" id="{D1165DC9-DFEC-4266-BB43-D3EC7C07C8FA}"/>
               </a:ext>
             </a:extLst>
           </p:cNvPr>
@@ -4467,7 +4287,7 @@
           <p:cNvPr id="8" name="">
             <a:extLst xmlns:a="http://schemas.openxmlformats.org/drawingml/2006/main">
               <a:ext uri="{FF2B5EF4-FFF2-40B4-BE49-F238E27FC236}">
-                <a16:creationId xmlns:a16="http://schemas.microsoft.com/office/drawing/2014/main" id="{4562D674-9878-45F2-8B42-9627F32FC659}"/>
+                <a16:creationId xmlns:a16="http://schemas.microsoft.com/office/drawing/2014/main" id="{C2195334-F588-42C8-9A45-706CEBA5610D}"/>
               </a:ext>
             </a:extLst>
           </p:cNvPr>
@@ -4587,7 +4407,7 @@
           <p:cNvPr id="9" name="">
             <a:extLst xmlns:a="http://schemas.openxmlformats.org/drawingml/2006/main">
               <a:ext uri="{FF2B5EF4-FFF2-40B4-BE49-F238E27FC236}">
-                <a16:creationId xmlns:a16="http://schemas.microsoft.com/office/drawing/2014/main" id="{A0354B94-5905-4DB9-8806-E400678DE3CA}"/>
+                <a16:creationId xmlns:a16="http://schemas.microsoft.com/office/drawing/2014/main" id="{1FCE8866-3852-4DF2-BD2C-939B8DBA9B48}"/>
               </a:ext>
             </a:extLst>
           </p:cNvPr>
@@ -4619,7 +4439,7 @@
           <p:cNvPr id="10" name="">
             <a:extLst xmlns:a="http://schemas.openxmlformats.org/drawingml/2006/main">
               <a:ext uri="{FF2B5EF4-FFF2-40B4-BE49-F238E27FC236}">
-                <a16:creationId xmlns:a16="http://schemas.microsoft.com/office/drawing/2014/main" id="{477FBAB5-AF88-48AA-B6CF-7EBC8AE76E95}"/>
+                <a16:creationId xmlns:a16="http://schemas.microsoft.com/office/drawing/2014/main" id="{C168F065-7DA9-4F5F-9B17-FB776F942EB3}"/>
               </a:ext>
             </a:extLst>
           </p:cNvPr>
@@ -4739,7 +4559,7 @@
           <p:cNvPr id="11" name="">
             <a:extLst xmlns:a="http://schemas.openxmlformats.org/drawingml/2006/main">
               <a:ext uri="{FF2B5EF4-FFF2-40B4-BE49-F238E27FC236}">
-                <a16:creationId xmlns:a16="http://schemas.microsoft.com/office/drawing/2014/main" id="{0ADD904A-3A84-4781-8294-8F821AF4E821}"/>
+                <a16:creationId xmlns:a16="http://schemas.microsoft.com/office/drawing/2014/main" id="{547AA905-3751-4167-80B0-A88826649EF1}"/>
               </a:ext>
             </a:extLst>
           </p:cNvPr>
@@ -4859,7 +4679,7 @@
           <p:cNvPr id="12" name="">
             <a:extLst xmlns:a="http://schemas.openxmlformats.org/drawingml/2006/main">
               <a:ext uri="{FF2B5EF4-FFF2-40B4-BE49-F238E27FC236}">
-                <a16:creationId xmlns:a16="http://schemas.microsoft.com/office/drawing/2014/main" id="{4E034247-C097-4F4B-8E72-6CADECC3EC74}"/>
+                <a16:creationId xmlns:a16="http://schemas.microsoft.com/office/drawing/2014/main" id="{5DFC6681-822C-494C-B0EB-369451D9A151}"/>
               </a:ext>
             </a:extLst>
           </p:cNvPr>
@@ -4979,7 +4799,7 @@
           <p:cNvPr id="13" name="">
             <a:extLst xmlns:a="http://schemas.openxmlformats.org/drawingml/2006/main">
               <a:ext uri="{FF2B5EF4-FFF2-40B4-BE49-F238E27FC236}">
-                <a16:creationId xmlns:a16="http://schemas.microsoft.com/office/drawing/2014/main" id="{AAD61A7C-3255-4D79-BD22-6923D9F4A7A6}"/>
+                <a16:creationId xmlns:a16="http://schemas.microsoft.com/office/drawing/2014/main" id="{6C07CFBB-A17F-4085-B762-64EA298B0583}"/>
               </a:ext>
             </a:extLst>
           </p:cNvPr>
@@ -5009,7 +4829,7 @@
           <p:cNvPr id="14" name="">
             <a:extLst xmlns:a="http://schemas.openxmlformats.org/drawingml/2006/main">
               <a:ext uri="{FF2B5EF4-FFF2-40B4-BE49-F238E27FC236}">
-                <a16:creationId xmlns:a16="http://schemas.microsoft.com/office/drawing/2014/main" id="{4D1F3CEC-A51B-4A42-B44F-1CB14930BFB1}"/>
+                <a16:creationId xmlns:a16="http://schemas.microsoft.com/office/drawing/2014/main" id="{55F24970-6EAE-424F-9F55-3A5AB5E82125}"/>
               </a:ext>
             </a:extLst>
           </p:cNvPr>
@@ -5039,7 +4859,7 @@
           <p:cNvPr id="15" name="">
             <a:extLst xmlns:a="http://schemas.openxmlformats.org/drawingml/2006/main">
               <a:ext uri="{FF2B5EF4-FFF2-40B4-BE49-F238E27FC236}">
-                <a16:creationId xmlns:a16="http://schemas.microsoft.com/office/drawing/2014/main" id="{CE152E08-F5C6-45AE-B6BB-DF202B3A897B}"/>
+                <a16:creationId xmlns:a16="http://schemas.microsoft.com/office/drawing/2014/main" id="{19C3A01A-954A-4E7E-82EC-A0505A7A21A8}"/>
               </a:ext>
             </a:extLst>
           </p:cNvPr>
@@ -5069,7 +4889,7 @@
           <p:cNvPr id="16" name="">
             <a:extLst xmlns:a="http://schemas.openxmlformats.org/drawingml/2006/main">
               <a:ext uri="{FF2B5EF4-FFF2-40B4-BE49-F238E27FC236}">
-                <a16:creationId xmlns:a16="http://schemas.microsoft.com/office/drawing/2014/main" id="{A2B29347-B2AA-4A2C-9941-BA74AAC5D258}"/>
+                <a16:creationId xmlns:a16="http://schemas.microsoft.com/office/drawing/2014/main" id="{0A9F7EE2-3E2C-49FB-8841-39CEEB41F641}"/>
               </a:ext>
             </a:extLst>
           </p:cNvPr>
@@ -5099,7 +4919,7 @@
           <p:cNvPr id="17" name="">
             <a:extLst xmlns:a="http://schemas.openxmlformats.org/drawingml/2006/main">
               <a:ext uri="{FF2B5EF4-FFF2-40B4-BE49-F238E27FC236}">
-                <a16:creationId xmlns:a16="http://schemas.microsoft.com/office/drawing/2014/main" id="{63ED20EC-A325-4065-8914-3865890621FD}"/>
+                <a16:creationId xmlns:a16="http://schemas.microsoft.com/office/drawing/2014/main" id="{2BB11F53-2831-4F72-A8E7-DB95A067FA76}"/>
               </a:ext>
             </a:extLst>
           </p:cNvPr>
@@ -5129,7 +4949,7 @@
           <p:cNvPr id="18" name="">
             <a:extLst xmlns:a="http://schemas.openxmlformats.org/drawingml/2006/main">
               <a:ext uri="{FF2B5EF4-FFF2-40B4-BE49-F238E27FC236}">
-                <a16:creationId xmlns:a16="http://schemas.microsoft.com/office/drawing/2014/main" id="{8D69FA39-029D-4F73-A321-66194912EA77}"/>
+                <a16:creationId xmlns:a16="http://schemas.microsoft.com/office/drawing/2014/main" id="{DBD5823E-72CE-41F3-8617-87B009B33132}"/>
               </a:ext>
             </a:extLst>
           </p:cNvPr>
@@ -5161,7 +4981,7 @@
           <p:cNvPr id="19" name="">
             <a:extLst xmlns:a="http://schemas.openxmlformats.org/drawingml/2006/main">
               <a:ext uri="{FF2B5EF4-FFF2-40B4-BE49-F238E27FC236}">
-                <a16:creationId xmlns:a16="http://schemas.microsoft.com/office/drawing/2014/main" id="{0319FB9C-A87A-4050-92B0-FCD558F070A5}"/>
+                <a16:creationId xmlns:a16="http://schemas.microsoft.com/office/drawing/2014/main" id="{D3971B8B-C499-4FAB-9B17-ED226C8C24EB}"/>
               </a:ext>
             </a:extLst>
           </p:cNvPr>
@@ -5191,7 +5011,7 @@
           <p:cNvPr id="20" name="">
             <a:extLst xmlns:a="http://schemas.openxmlformats.org/drawingml/2006/main">
               <a:ext uri="{FF2B5EF4-FFF2-40B4-BE49-F238E27FC236}">
-                <a16:creationId xmlns:a16="http://schemas.microsoft.com/office/drawing/2014/main" id="{069AA00A-C2F4-40D3-B4D9-0F8E599C1C44}"/>
+                <a16:creationId xmlns:a16="http://schemas.microsoft.com/office/drawing/2014/main" id="{97864C10-B90F-4921-B16B-8D60C57AE664}"/>
               </a:ext>
             </a:extLst>
           </p:cNvPr>
@@ -5221,7 +5041,7 @@
           <p:cNvPr id="21" name="">
             <a:extLst xmlns:a="http://schemas.openxmlformats.org/drawingml/2006/main">
               <a:ext uri="{FF2B5EF4-FFF2-40B4-BE49-F238E27FC236}">
-                <a16:creationId xmlns:a16="http://schemas.microsoft.com/office/drawing/2014/main" id="{3844BF9B-0E06-43E8-B635-FC444DACBA7B}"/>
+                <a16:creationId xmlns:a16="http://schemas.microsoft.com/office/drawing/2014/main" id="{68C9817D-CB0A-4B25-A197-ADE16857B56C}"/>
               </a:ext>
             </a:extLst>
           </p:cNvPr>
@@ -5253,7 +5073,7 @@
           <p:cNvPr id="22" name="">
             <a:extLst xmlns:a="http://schemas.openxmlformats.org/drawingml/2006/main">
               <a:ext uri="{FF2B5EF4-FFF2-40B4-BE49-F238E27FC236}">
-                <a16:creationId xmlns:a16="http://schemas.microsoft.com/office/drawing/2014/main" id="{ACDABCD4-EB29-4D92-BFB2-396F93FEC55F}"/>
+                <a16:creationId xmlns:a16="http://schemas.microsoft.com/office/drawing/2014/main" id="{2366F02A-E188-4032-9620-7997E5F5BD2C}"/>
               </a:ext>
             </a:extLst>
           </p:cNvPr>
@@ -5283,7 +5103,7 @@
           <p:cNvPr id="23" name="">
             <a:extLst xmlns:a="http://schemas.openxmlformats.org/drawingml/2006/main">
               <a:ext uri="{FF2B5EF4-FFF2-40B4-BE49-F238E27FC236}">
-                <a16:creationId xmlns:a16="http://schemas.microsoft.com/office/drawing/2014/main" id="{4B0A33FF-6F20-4150-B080-8B85BC39622E}"/>
+                <a16:creationId xmlns:a16="http://schemas.microsoft.com/office/drawing/2014/main" id="{3E219CA3-08B7-41D1-96F8-FBC057C4709E}"/>
               </a:ext>
             </a:extLst>
           </p:cNvPr>
@@ -5313,7 +5133,7 @@
           <p:cNvPr id="24" name="">
             <a:extLst xmlns:a="http://schemas.openxmlformats.org/drawingml/2006/main">
               <a:ext uri="{FF2B5EF4-FFF2-40B4-BE49-F238E27FC236}">
-                <a16:creationId xmlns:a16="http://schemas.microsoft.com/office/drawing/2014/main" id="{4E72EA3F-BA7F-40F1-AD9A-21F607DA8AAD}"/>
+                <a16:creationId xmlns:a16="http://schemas.microsoft.com/office/drawing/2014/main" id="{2587045E-3D7C-4AD1-918E-CE99CDF91479}"/>
               </a:ext>
             </a:extLst>
           </p:cNvPr>
@@ -5345,7 +5165,7 @@
           <p:cNvPr id="25" name="">
             <a:extLst xmlns:a="http://schemas.openxmlformats.org/drawingml/2006/main">
               <a:ext uri="{FF2B5EF4-FFF2-40B4-BE49-F238E27FC236}">
-                <a16:creationId xmlns:a16="http://schemas.microsoft.com/office/drawing/2014/main" id="{782A846D-1065-4AD3-A5ED-DB7BDB513C38}"/>
+                <a16:creationId xmlns:a16="http://schemas.microsoft.com/office/drawing/2014/main" id="{26D1B61C-B2A9-406E-952A-8389E8D15856}"/>
               </a:ext>
             </a:extLst>
           </p:cNvPr>
@@ -5377,7 +5197,7 @@
           <p:cNvPr id="26" name="">
             <a:extLst xmlns:a="http://schemas.openxmlformats.org/drawingml/2006/main">
               <a:ext uri="{FF2B5EF4-FFF2-40B4-BE49-F238E27FC236}">
-                <a16:creationId xmlns:a16="http://schemas.microsoft.com/office/drawing/2014/main" id="{8CABA788-CC64-49D1-9E86-C7C722C4F365}"/>
+                <a16:creationId xmlns:a16="http://schemas.microsoft.com/office/drawing/2014/main" id="{791896B8-1CEB-438B-9984-9FD1A033D6B1}"/>
               </a:ext>
             </a:extLst>
           </p:cNvPr>
@@ -5409,7 +5229,7 @@
           <p:cNvPr id="27" name="">
             <a:extLst xmlns:a="http://schemas.openxmlformats.org/drawingml/2006/main">
               <a:ext uri="{FF2B5EF4-FFF2-40B4-BE49-F238E27FC236}">
-                <a16:creationId xmlns:a16="http://schemas.microsoft.com/office/drawing/2014/main" id="{4CB515AC-8D24-4655-8A38-784F6E9E9280}"/>
+                <a16:creationId xmlns:a16="http://schemas.microsoft.com/office/drawing/2014/main" id="{41C90482-E685-485B-B131-A5DAD980317F}"/>
               </a:ext>
             </a:extLst>
           </p:cNvPr>
@@ -5546,7 +5366,7 @@
           <p:cNvPr id="28" name="">
             <a:extLst xmlns:a="http://schemas.openxmlformats.org/drawingml/2006/main">
               <a:ext uri="{FF2B5EF4-FFF2-40B4-BE49-F238E27FC236}">
-                <a16:creationId xmlns:a16="http://schemas.microsoft.com/office/drawing/2014/main" id="{10E91712-F090-409E-BA63-1A3B8AF68162}"/>
+                <a16:creationId xmlns:a16="http://schemas.microsoft.com/office/drawing/2014/main" id="{004DAF92-F7DF-480F-A47C-45E079F6EA55}"/>
               </a:ext>
             </a:extLst>
           </p:cNvPr>
@@ -5683,7 +5503,7 @@
           <p:cNvPr id="29" name="">
             <a:extLst xmlns:a="http://schemas.openxmlformats.org/drawingml/2006/main">
               <a:ext uri="{FF2B5EF4-FFF2-40B4-BE49-F238E27FC236}">
-                <a16:creationId xmlns:a16="http://schemas.microsoft.com/office/drawing/2014/main" id="{5DB377AA-8002-454D-B34A-FC3799348972}"/>
+                <a16:creationId xmlns:a16="http://schemas.microsoft.com/office/drawing/2014/main" id="{972D70E9-817A-4940-8286-9D8E4DEF2302}"/>
               </a:ext>
             </a:extLst>
           </p:cNvPr>
@@ -5820,7 +5640,7 @@
           <p:cNvPr id="30" name="Logo UTN editable">
             <a:extLst xmlns:a="http://schemas.openxmlformats.org/drawingml/2006/main">
               <a:ext uri="{FF2B5EF4-FFF2-40B4-BE49-F238E27FC236}">
-                <a16:creationId xmlns:a16="http://schemas.microsoft.com/office/drawing/2014/main" id="{A4C0CC19-ED21-4998-9CB9-834C100CBA63}"/>
+                <a16:creationId xmlns:a16="http://schemas.microsoft.com/office/drawing/2014/main" id="{FE8C1560-64B3-44DB-81C7-21D24FE85947}"/>
               </a:ext>
             </a:extLst>
           </p:cNvPr>
@@ -11469,7 +11289,7 @@
           <p:cNvPr id="31" name="">
             <a:extLst xmlns:a="http://schemas.openxmlformats.org/drawingml/2006/main">
               <a:ext uri="{FF2B5EF4-FFF2-40B4-BE49-F238E27FC236}">
-                <a16:creationId xmlns:a16="http://schemas.microsoft.com/office/drawing/2014/main" id="{68812818-176C-4197-B380-9084F3C08BD8}"/>
+                <a16:creationId xmlns:a16="http://schemas.microsoft.com/office/drawing/2014/main" id="{FA45C3BA-9B70-40C5-9928-4A5C71E81126}"/>
               </a:ext>
             </a:extLst>
           </p:cNvPr>
@@ -11499,7 +11319,7 @@
           <p:cNvPr id="32" name="">
             <a:extLst xmlns:a="http://schemas.openxmlformats.org/drawingml/2006/main">
               <a:ext uri="{FF2B5EF4-FFF2-40B4-BE49-F238E27FC236}">
-                <a16:creationId xmlns:a16="http://schemas.microsoft.com/office/drawing/2014/main" id="{BAF86146-D962-4F24-BAD1-515F5BAF3F15}"/>
+                <a16:creationId xmlns:a16="http://schemas.microsoft.com/office/drawing/2014/main" id="{58950CC4-4654-4762-9602-2E8AA276FF0D}"/>
               </a:ext>
             </a:extLst>
           </p:cNvPr>
@@ -11636,7 +11456,7 @@
           <p:cNvPr id="33" name="">
             <a:extLst xmlns:a="http://schemas.openxmlformats.org/drawingml/2006/main">
               <a:ext uri="{FF2B5EF4-FFF2-40B4-BE49-F238E27FC236}">
-                <a16:creationId xmlns:a16="http://schemas.microsoft.com/office/drawing/2014/main" id="{197807B0-DA89-4FEF-8A6F-E2A6F76EC4C0}"/>
+                <a16:creationId xmlns:a16="http://schemas.microsoft.com/office/drawing/2014/main" id="{FD3758AA-C5FA-4BF1-B515-E5BD6D6ECD8A}"/>
               </a:ext>
             </a:extLst>
           </p:cNvPr>
@@ -11668,7 +11488,7 @@
           <p:cNvPr id="34" name="">
             <a:extLst xmlns:a="http://schemas.openxmlformats.org/drawingml/2006/main">
               <a:ext uri="{FF2B5EF4-FFF2-40B4-BE49-F238E27FC236}">
-                <a16:creationId xmlns:a16="http://schemas.microsoft.com/office/drawing/2014/main" id="{53BF3C15-B075-4C3C-A9A7-6808B97D3D55}"/>
+                <a16:creationId xmlns:a16="http://schemas.microsoft.com/office/drawing/2014/main" id="{1D186CA8-8C93-429E-8195-7D16F798B556}"/>
               </a:ext>
             </a:extLst>
           </p:cNvPr>
@@ -11788,7 +11608,7 @@
           <p:cNvPr id="35" name="">
             <a:extLst xmlns:a="http://schemas.openxmlformats.org/drawingml/2006/main">
               <a:ext uri="{FF2B5EF4-FFF2-40B4-BE49-F238E27FC236}">
-                <a16:creationId xmlns:a16="http://schemas.microsoft.com/office/drawing/2014/main" id="{15E52278-16E6-424E-ACC4-721D3A923D1D}"/>
+                <a16:creationId xmlns:a16="http://schemas.microsoft.com/office/drawing/2014/main" id="{7B081893-9C6D-4FB8-832B-C700178DA33C}"/>
               </a:ext>
             </a:extLst>
           </p:cNvPr>
@@ -11798,7 +11618,7 @@
           <p:nvPr/>
         </p:nvPicPr>
         <p:blipFill>
-          <a:blip xmlns:r="http://schemas.openxmlformats.org/officeDocument/2006/relationships" xmlns:a="http://schemas.openxmlformats.org/drawingml/2006/main" r:embed="R6cec8e551ea64fb9"/>
+          <a:blip xmlns:r="http://schemas.openxmlformats.org/officeDocument/2006/relationships" xmlns:a="http://schemas.openxmlformats.org/drawingml/2006/main" r:embed="Red377fce0be042ae"/>
           <a:stretch xmlns:a="http://schemas.openxmlformats.org/drawingml/2006/main"/>
         </p:blipFill>
         <p:spPr>
@@ -11816,7 +11636,7 @@
           <p:cNvPr id="36" name="">
             <a:extLst xmlns:a="http://schemas.openxmlformats.org/drawingml/2006/main">
               <a:ext uri="{FF2B5EF4-FFF2-40B4-BE49-F238E27FC236}">
-                <a16:creationId xmlns:a16="http://schemas.microsoft.com/office/drawing/2014/main" id="{8B51B27B-4689-45A7-9B5A-06ABF6AFB451}"/>
+                <a16:creationId xmlns:a16="http://schemas.microsoft.com/office/drawing/2014/main" id="{DC31462B-0A4D-444F-91D9-E3EA8CDD3034}"/>
               </a:ext>
             </a:extLst>
           </p:cNvPr>
@@ -11826,7 +11646,7 @@
           <p:nvPr/>
         </p:nvPicPr>
         <p:blipFill>
-          <a:blip xmlns:r="http://schemas.openxmlformats.org/officeDocument/2006/relationships" xmlns:a="http://schemas.openxmlformats.org/drawingml/2006/main" r:embed="R095a521ac8f34321"/>
+          <a:blip xmlns:r="http://schemas.openxmlformats.org/officeDocument/2006/relationships" xmlns:a="http://schemas.openxmlformats.org/drawingml/2006/main" r:embed="R85998aa539824a95"/>
           <a:stretch xmlns:a="http://schemas.openxmlformats.org/drawingml/2006/main"/>
         </p:blipFill>
         <p:spPr>
@@ -11842,7 +11662,7 @@
     </p:spTree>
     <p:extLst>
       <p:ext uri="{BB962C8B-B14F-4D97-AF65-F5344CB8AC3E}">
-        <p14:creationId xmlns:p14="http://schemas.microsoft.com/office/powerpoint/2010/main" val="796203076"/>
+        <p14:creationId xmlns:p14="http://schemas.microsoft.com/office/powerpoint/2010/main" val="188812884"/>
       </p:ext>
     </p:extLst>
   </p:cSld>
@@ -11870,10 +11690,10 @@
       </p:grpSpPr>
       <p:sp>
         <p:nvSpPr>
-          <p:cNvPr id="9" name="">
+          <p:cNvPr id="13" name="">
             <a:extLst xmlns:a="http://schemas.openxmlformats.org/drawingml/2006/main">
               <a:ext uri="{FF2B5EF4-FFF2-40B4-BE49-F238E27FC236}">
-                <a16:creationId xmlns:a16="http://schemas.microsoft.com/office/drawing/2014/main" id="{648B6477-127C-4D3C-881D-282AA6E8A9D8}"/>
+                <a16:creationId xmlns:a16="http://schemas.microsoft.com/office/drawing/2014/main" id="{33F823C9-C31B-441C-8EE7-2BB6B709F86D}"/>
               </a:ext>
             </a:extLst>
           </p:cNvPr>
@@ -11983,7 +11803,7 @@
                   <a:srgbClr val="061A35"/>
                 </a:solidFill>
               </a:rPr>
-              <a:t>El problema y nuestro público</a:t>
+              <a:t>¿Qué pasó mientras Juan no estaba?</a:t>
             </a:r>
           </a:p>
         </p:txBody>
@@ -11993,7 +11813,7 @@
           <p:cNvPr id="2" name="">
             <a:extLst xmlns:a="http://schemas.openxmlformats.org/drawingml/2006/main">
               <a:ext uri="{FF2B5EF4-FFF2-40B4-BE49-F238E27FC236}">
-                <a16:creationId xmlns:a16="http://schemas.microsoft.com/office/drawing/2014/main" id="{924DA121-CFAD-4A23-A278-5BF75BA35E24}"/>
+                <a16:creationId xmlns:a16="http://schemas.microsoft.com/office/drawing/2014/main" id="{326031EB-CBBA-4E9C-B241-BE7DD74D337B}"/>
               </a:ext>
             </a:extLst>
           </p:cNvPr>
@@ -12113,7 +11933,7 @@
           <p:cNvPr id="3" name="">
             <a:extLst xmlns:a="http://schemas.openxmlformats.org/drawingml/2006/main">
               <a:ext uri="{FF2B5EF4-FFF2-40B4-BE49-F238E27FC236}">
-                <a16:creationId xmlns:a16="http://schemas.microsoft.com/office/drawing/2014/main" id="{48194452-3263-4451-AE90-640BCEC5F243}"/>
+                <a16:creationId xmlns:a16="http://schemas.microsoft.com/office/drawing/2014/main" id="{9C5C9BCC-05A4-4E9A-912F-2ECFDE4B7ED7}"/>
               </a:ext>
             </a:extLst>
           </p:cNvPr>
@@ -12124,8 +11944,8 @@
         </p:nvSpPr>
         <p:spPr>
           <a:xfrm xmlns:a="http://schemas.openxmlformats.org/drawingml/2006/main">
-            <a:off x="609600" y="1476375"/>
-            <a:ext cx="6858000" cy="1285875"/>
+            <a:off x="609600" y="1323975"/>
+            <a:ext cx="6667500" cy="333375"/>
           </a:xfrm>
           <a:prstGeom xmlns:a="http://schemas.openxmlformats.org/drawingml/2006/main" prst="rect">
             <a:avLst/>
@@ -12139,118 +11959,129 @@
           <a:bodyPr xmlns:a="http://schemas.openxmlformats.org/drawingml/2006/main"/>
           <a:lstStyle xmlns:a="http://schemas.openxmlformats.org/drawingml/2006/main">
             <a:defPPr>
-              <a:defRPr sz="3675" b="1">
-                <a:solidFill>
-                  <a:srgbClr val="0860FF"/>
+              <a:defRPr sz="1350" b="1">
+                <a:solidFill>
+                  <a:srgbClr val="536B91"/>
                 </a:solidFill>
               </a:defRPr>
             </a:defPPr>
             <a:lvl1pPr>
-              <a:defRPr sz="3675" b="1">
-                <a:solidFill>
-                  <a:srgbClr val="0860FF"/>
+              <a:defRPr sz="1350" b="1">
+                <a:solidFill>
+                  <a:srgbClr val="536B91"/>
                 </a:solidFill>
               </a:defRPr>
             </a:lvl1pPr>
             <a:lvl2pPr>
-              <a:defRPr sz="3675" b="1">
-                <a:solidFill>
-                  <a:srgbClr val="0860FF"/>
+              <a:defRPr sz="1350" b="1">
+                <a:solidFill>
+                  <a:srgbClr val="536B91"/>
                 </a:solidFill>
               </a:defRPr>
             </a:lvl2pPr>
             <a:lvl3pPr>
-              <a:defRPr sz="3675" b="1">
-                <a:solidFill>
-                  <a:srgbClr val="0860FF"/>
+              <a:defRPr sz="1350" b="1">
+                <a:solidFill>
+                  <a:srgbClr val="536B91"/>
                 </a:solidFill>
               </a:defRPr>
             </a:lvl3pPr>
             <a:lvl4pPr>
-              <a:defRPr sz="3675" b="1">
-                <a:solidFill>
-                  <a:srgbClr val="0860FF"/>
+              <a:defRPr sz="1350" b="1">
+                <a:solidFill>
+                  <a:srgbClr val="536B91"/>
                 </a:solidFill>
               </a:defRPr>
             </a:lvl4pPr>
             <a:lvl5pPr>
-              <a:defRPr sz="3675" b="1">
-                <a:solidFill>
-                  <a:srgbClr val="0860FF"/>
+              <a:defRPr sz="1350" b="1">
+                <a:solidFill>
+                  <a:srgbClr val="536B91"/>
                 </a:solidFill>
               </a:defRPr>
             </a:lvl5pPr>
             <a:lvl6pPr>
-              <a:defRPr sz="3675" b="1">
-                <a:solidFill>
-                  <a:srgbClr val="0860FF"/>
+              <a:defRPr sz="1350" b="1">
+                <a:solidFill>
+                  <a:srgbClr val="536B91"/>
                 </a:solidFill>
               </a:defRPr>
             </a:lvl6pPr>
             <a:lvl7pPr>
-              <a:defRPr sz="3675" b="1">
-                <a:solidFill>
-                  <a:srgbClr val="0860FF"/>
+              <a:defRPr sz="1350" b="1">
+                <a:solidFill>
+                  <a:srgbClr val="536B91"/>
                 </a:solidFill>
               </a:defRPr>
             </a:lvl7pPr>
             <a:lvl8pPr>
-              <a:defRPr sz="3675" b="1">
-                <a:solidFill>
-                  <a:srgbClr val="0860FF"/>
+              <a:defRPr sz="1350" b="1">
+                <a:solidFill>
+                  <a:srgbClr val="536B91"/>
                 </a:solidFill>
               </a:defRPr>
             </a:lvl8pPr>
             <a:lvl9pPr>
-              <a:defRPr sz="3675" b="1">
-                <a:solidFill>
-                  <a:srgbClr val="0860FF"/>
+              <a:defRPr sz="1350" b="1">
+                <a:solidFill>
+                  <a:srgbClr val="536B91"/>
                 </a:solidFill>
               </a:defRPr>
             </a:lvl9pPr>
           </a:lstStyle>
           <a:p xmlns:a="http://schemas.openxmlformats.org/drawingml/2006/main">
             <a:pPr>
-              <a:defRPr sz="3675" b="1">
-                <a:solidFill>
-                  <a:srgbClr val="0860FF"/>
+              <a:defRPr sz="1350" b="1">
+                <a:solidFill>
+                  <a:srgbClr val="536B91"/>
                 </a:solidFill>
               </a:defRPr>
             </a:pPr>
             <a:r>
-              <a:rPr sz="3675" b="1">
-                <a:solidFill>
-                  <a:srgbClr val="0860FF"/>
+              <a:rPr sz="1350" b="1">
+                <a:solidFill>
+                  <a:srgbClr val="536B91"/>
                 </a:solidFill>
               </a:rPr>
-              <a:t>Juan atiende</a:t>
-            </a:r>
-          </a:p>
-          <a:p xmlns:a="http://schemas.openxmlformats.org/drawingml/2006/main">
-            <a:pPr>
-              <a:defRPr sz="3675" b="1">
-                <a:solidFill>
-                  <a:srgbClr val="0860FF"/>
-                </a:solidFill>
-              </a:defRPr>
-            </a:pPr>
-            <a:r>
-              <a:rPr sz="3675" b="1">
-                <a:solidFill>
-                  <a:srgbClr val="0860FF"/>
-                </a:solidFill>
-              </a:rPr>
-              <a:t>un pequeño almacén</a:t>
+              <a:t>UN COMERCIO, DOS TURNOS</a:t>
             </a:r>
           </a:p>
         </p:txBody>
       </p:sp>
-      <p:sp>
-        <p:nvSpPr>
+      <p:pic>
+        <p:nvPicPr>
           <p:cNvPr id="4" name="">
             <a:extLst xmlns:a="http://schemas.openxmlformats.org/drawingml/2006/main">
               <a:ext uri="{FF2B5EF4-FFF2-40B4-BE49-F238E27FC236}">
-                <a16:creationId xmlns:a16="http://schemas.microsoft.com/office/drawing/2014/main" id="{C7D5794D-7035-437C-A1C8-0CED41E9C8EC}"/>
+                <a16:creationId xmlns:a16="http://schemas.microsoft.com/office/drawing/2014/main" id="{2EB9B4F7-6F74-4BCC-8276-7A10C5B32D22}"/>
+              </a:ext>
+            </a:extLst>
+          </p:cNvPr>
+          <p:cNvPicPr>
+            <a:picLocks xmlns:a="http://schemas.openxmlformats.org/drawingml/2006/main" noChangeAspect="1"/>
+          </p:cNvPicPr>
+          <p:nvPr/>
+        </p:nvPicPr>
+        <p:blipFill>
+          <a:blip xmlns:r="http://schemas.openxmlformats.org/officeDocument/2006/relationships" xmlns:a="http://schemas.openxmlformats.org/drawingml/2006/main" r:embed="R3b7d53cd91304a5b"/>
+          <a:stretch xmlns:a="http://schemas.openxmlformats.org/drawingml/2006/main"/>
+        </p:blipFill>
+        <p:spPr>
+          <a:xfrm xmlns:a="http://schemas.openxmlformats.org/drawingml/2006/main">
+            <a:off x="1004888" y="1771650"/>
+            <a:ext cx="6143625" cy="4095750"/>
+          </a:xfrm>
+          <a:prstGeom xmlns:a="http://schemas.openxmlformats.org/drawingml/2006/main" prst="rect">
+            <a:avLst/>
+          </a:prstGeom>
+        </p:spPr>
+      </p:pic>
+      <p:sp>
+        <p:nvSpPr>
+          <p:cNvPr id="5" name="">
+            <a:extLst xmlns:a="http://schemas.openxmlformats.org/drawingml/2006/main">
+              <a:ext uri="{FF2B5EF4-FFF2-40B4-BE49-F238E27FC236}">
+                <a16:creationId xmlns:a16="http://schemas.microsoft.com/office/drawing/2014/main" id="{0ACB3310-F27D-42CA-A171-4E571725E048}"/>
               </a:ext>
             </a:extLst>
           </p:cNvPr>
@@ -12261,8 +12092,8 @@
         </p:nvSpPr>
         <p:spPr>
           <a:xfrm xmlns:a="http://schemas.openxmlformats.org/drawingml/2006/main">
-            <a:off x="609600" y="3000375"/>
-            <a:ext cx="6667500" cy="952500"/>
+            <a:off x="742950" y="5857875"/>
+            <a:ext cx="2857500" cy="381000"/>
           </a:xfrm>
           <a:prstGeom xmlns:a="http://schemas.openxmlformats.org/drawingml/2006/main" prst="rect">
             <a:avLst/>
@@ -12276,118 +12107,101 @@
           <a:bodyPr xmlns:a="http://schemas.openxmlformats.org/drawingml/2006/main"/>
           <a:lstStyle xmlns:a="http://schemas.openxmlformats.org/drawingml/2006/main">
             <a:defPPr>
-              <a:defRPr sz="2250" b="0">
-                <a:solidFill>
-                  <a:srgbClr val="061A35"/>
+              <a:defRPr sz="1800" b="1">
+                <a:solidFill>
+                  <a:srgbClr val="0860FF"/>
                 </a:solidFill>
               </a:defRPr>
             </a:defPPr>
             <a:lvl1pPr>
-              <a:defRPr sz="2250" b="0">
-                <a:solidFill>
-                  <a:srgbClr val="061A35"/>
+              <a:defRPr sz="1800" b="1">
+                <a:solidFill>
+                  <a:srgbClr val="0860FF"/>
                 </a:solidFill>
               </a:defRPr>
             </a:lvl1pPr>
             <a:lvl2pPr>
-              <a:defRPr sz="2250" b="0">
-                <a:solidFill>
-                  <a:srgbClr val="061A35"/>
+              <a:defRPr sz="1800" b="1">
+                <a:solidFill>
+                  <a:srgbClr val="0860FF"/>
                 </a:solidFill>
               </a:defRPr>
             </a:lvl2pPr>
             <a:lvl3pPr>
-              <a:defRPr sz="2250" b="0">
-                <a:solidFill>
-                  <a:srgbClr val="061A35"/>
+              <a:defRPr sz="1800" b="1">
+                <a:solidFill>
+                  <a:srgbClr val="0860FF"/>
                 </a:solidFill>
               </a:defRPr>
             </a:lvl3pPr>
             <a:lvl4pPr>
-              <a:defRPr sz="2250" b="0">
-                <a:solidFill>
-                  <a:srgbClr val="061A35"/>
+              <a:defRPr sz="1800" b="1">
+                <a:solidFill>
+                  <a:srgbClr val="0860FF"/>
                 </a:solidFill>
               </a:defRPr>
             </a:lvl4pPr>
             <a:lvl5pPr>
-              <a:defRPr sz="2250" b="0">
-                <a:solidFill>
-                  <a:srgbClr val="061A35"/>
+              <a:defRPr sz="1800" b="1">
+                <a:solidFill>
+                  <a:srgbClr val="0860FF"/>
                 </a:solidFill>
               </a:defRPr>
             </a:lvl5pPr>
             <a:lvl6pPr>
-              <a:defRPr sz="2250" b="0">
-                <a:solidFill>
-                  <a:srgbClr val="061A35"/>
+              <a:defRPr sz="1800" b="1">
+                <a:solidFill>
+                  <a:srgbClr val="0860FF"/>
                 </a:solidFill>
               </a:defRPr>
             </a:lvl6pPr>
             <a:lvl7pPr>
-              <a:defRPr sz="2250" b="0">
-                <a:solidFill>
-                  <a:srgbClr val="061A35"/>
+              <a:defRPr sz="1800" b="1">
+                <a:solidFill>
+                  <a:srgbClr val="0860FF"/>
                 </a:solidFill>
               </a:defRPr>
             </a:lvl7pPr>
             <a:lvl8pPr>
-              <a:defRPr sz="2250" b="0">
-                <a:solidFill>
-                  <a:srgbClr val="061A35"/>
+              <a:defRPr sz="1800" b="1">
+                <a:solidFill>
+                  <a:srgbClr val="0860FF"/>
                 </a:solidFill>
               </a:defRPr>
             </a:lvl8pPr>
             <a:lvl9pPr>
-              <a:defRPr sz="2250" b="0">
-                <a:solidFill>
-                  <a:srgbClr val="061A35"/>
+              <a:defRPr sz="1800" b="1">
+                <a:solidFill>
+                  <a:srgbClr val="0860FF"/>
                 </a:solidFill>
               </a:defRPr>
             </a:lvl9pPr>
           </a:lstStyle>
           <a:p xmlns:a="http://schemas.openxmlformats.org/drawingml/2006/main">
             <a:pPr>
-              <a:defRPr sz="2250" b="0">
-                <a:solidFill>
-                  <a:srgbClr val="061A35"/>
+              <a:defRPr sz="1800" b="1">
+                <a:solidFill>
+                  <a:srgbClr val="0860FF"/>
                 </a:solidFill>
               </a:defRPr>
             </a:pPr>
             <a:r>
-              <a:rPr sz="2250" b="0">
-                <a:solidFill>
-                  <a:srgbClr val="061A35"/>
+              <a:rPr sz="1800" b="1">
+                <a:solidFill>
+                  <a:srgbClr val="0860FF"/>
                 </a:solidFill>
               </a:rPr>
-              <a:t>Atiende clientes, recibe mercadería</a:t>
-            </a:r>
-          </a:p>
-          <a:p xmlns:a="http://schemas.openxmlformats.org/drawingml/2006/main">
-            <a:pPr>
-              <a:defRPr sz="2250" b="0">
-                <a:solidFill>
-                  <a:srgbClr val="061A35"/>
-                </a:solidFill>
-              </a:defRPr>
-            </a:pPr>
-            <a:r>
-              <a:rPr sz="2250" b="0">
-                <a:solidFill>
-                  <a:srgbClr val="061A35"/>
-                </a:solidFill>
-              </a:rPr>
-              <a:t>y comparte tareas con un empleado.</a:t>
+              <a:t>Empleado</a:t>
             </a:r>
           </a:p>
         </p:txBody>
       </p:sp>
       <p:sp>
         <p:nvSpPr>
-          <p:cNvPr id="5" name="">
+          <p:cNvPr id="6" name="">
             <a:extLst xmlns:a="http://schemas.openxmlformats.org/drawingml/2006/main">
               <a:ext uri="{FF2B5EF4-FFF2-40B4-BE49-F238E27FC236}">
-                <a16:creationId xmlns:a16="http://schemas.microsoft.com/office/drawing/2014/main" id="{C66C0E51-62CA-41D4-A9CE-7617A8552B96}"/>
+                <a16:creationId xmlns:a16="http://schemas.microsoft.com/office/drawing/2014/main" id="{A78BC00B-C193-4413-A07F-6AD52BDC78FA}"/>
               </a:ext>
             </a:extLst>
           </p:cNvPr>
@@ -12398,8 +12212,8 @@
         </p:nvSpPr>
         <p:spPr>
           <a:xfrm xmlns:a="http://schemas.openxmlformats.org/drawingml/2006/main">
-            <a:off x="609600" y="4238625"/>
-            <a:ext cx="6762750" cy="1047750"/>
+            <a:off x="4524375" y="5857875"/>
+            <a:ext cx="2857500" cy="381000"/>
           </a:xfrm>
           <a:prstGeom xmlns:a="http://schemas.openxmlformats.org/drawingml/2006/main" prst="rect">
             <a:avLst/>
@@ -12413,118 +12227,101 @@
           <a:bodyPr xmlns:a="http://schemas.openxmlformats.org/drawingml/2006/main"/>
           <a:lstStyle xmlns:a="http://schemas.openxmlformats.org/drawingml/2006/main">
             <a:defPPr>
-              <a:defRPr sz="2625" b="1">
-                <a:solidFill>
-                  <a:srgbClr val="061A35"/>
+              <a:defRPr sz="1800" b="1">
+                <a:solidFill>
+                  <a:srgbClr val="0860FF"/>
                 </a:solidFill>
               </a:defRPr>
             </a:defPPr>
             <a:lvl1pPr>
-              <a:defRPr sz="2625" b="1">
-                <a:solidFill>
-                  <a:srgbClr val="061A35"/>
+              <a:defRPr sz="1800" b="1">
+                <a:solidFill>
+                  <a:srgbClr val="0860FF"/>
                 </a:solidFill>
               </a:defRPr>
             </a:lvl1pPr>
             <a:lvl2pPr>
-              <a:defRPr sz="2625" b="1">
-                <a:solidFill>
-                  <a:srgbClr val="061A35"/>
+              <a:defRPr sz="1800" b="1">
+                <a:solidFill>
+                  <a:srgbClr val="0860FF"/>
                 </a:solidFill>
               </a:defRPr>
             </a:lvl2pPr>
             <a:lvl3pPr>
-              <a:defRPr sz="2625" b="1">
-                <a:solidFill>
-                  <a:srgbClr val="061A35"/>
+              <a:defRPr sz="1800" b="1">
+                <a:solidFill>
+                  <a:srgbClr val="0860FF"/>
                 </a:solidFill>
               </a:defRPr>
             </a:lvl3pPr>
             <a:lvl4pPr>
-              <a:defRPr sz="2625" b="1">
-                <a:solidFill>
-                  <a:srgbClr val="061A35"/>
+              <a:defRPr sz="1800" b="1">
+                <a:solidFill>
+                  <a:srgbClr val="0860FF"/>
                 </a:solidFill>
               </a:defRPr>
             </a:lvl4pPr>
             <a:lvl5pPr>
-              <a:defRPr sz="2625" b="1">
-                <a:solidFill>
-                  <a:srgbClr val="061A35"/>
+              <a:defRPr sz="1800" b="1">
+                <a:solidFill>
+                  <a:srgbClr val="0860FF"/>
                 </a:solidFill>
               </a:defRPr>
             </a:lvl5pPr>
             <a:lvl6pPr>
-              <a:defRPr sz="2625" b="1">
-                <a:solidFill>
-                  <a:srgbClr val="061A35"/>
+              <a:defRPr sz="1800" b="1">
+                <a:solidFill>
+                  <a:srgbClr val="0860FF"/>
                 </a:solidFill>
               </a:defRPr>
             </a:lvl6pPr>
             <a:lvl7pPr>
-              <a:defRPr sz="2625" b="1">
-                <a:solidFill>
-                  <a:srgbClr val="061A35"/>
+              <a:defRPr sz="1800" b="1">
+                <a:solidFill>
+                  <a:srgbClr val="0860FF"/>
                 </a:solidFill>
               </a:defRPr>
             </a:lvl7pPr>
             <a:lvl8pPr>
-              <a:defRPr sz="2625" b="1">
-                <a:solidFill>
-                  <a:srgbClr val="061A35"/>
+              <a:defRPr sz="1800" b="1">
+                <a:solidFill>
+                  <a:srgbClr val="0860FF"/>
                 </a:solidFill>
               </a:defRPr>
             </a:lvl8pPr>
             <a:lvl9pPr>
-              <a:defRPr sz="2625" b="1">
-                <a:solidFill>
-                  <a:srgbClr val="061A35"/>
+              <a:defRPr sz="1800" b="1">
+                <a:solidFill>
+                  <a:srgbClr val="0860FF"/>
                 </a:solidFill>
               </a:defRPr>
             </a:lvl9pPr>
           </a:lstStyle>
           <a:p xmlns:a="http://schemas.openxmlformats.org/drawingml/2006/main">
             <a:pPr>
-              <a:defRPr sz="2625" b="1">
-                <a:solidFill>
-                  <a:srgbClr val="061A35"/>
+              <a:defRPr sz="1800" b="1">
+                <a:solidFill>
+                  <a:srgbClr val="0860FF"/>
                 </a:solidFill>
               </a:defRPr>
             </a:pPr>
             <a:r>
-              <a:rPr sz="2625" b="1">
-                <a:solidFill>
-                  <a:srgbClr val="061A35"/>
+              <a:rPr sz="1800" b="1">
+                <a:solidFill>
+                  <a:srgbClr val="0860FF"/>
                 </a:solidFill>
               </a:rPr>
-              <a:t>¿Qué queda?</a:t>
-            </a:r>
-          </a:p>
-          <a:p xmlns:a="http://schemas.openxmlformats.org/drawingml/2006/main">
-            <a:pPr>
-              <a:defRPr sz="2625" b="1">
-                <a:solidFill>
-                  <a:srgbClr val="061A35"/>
-                </a:solidFill>
-              </a:defRPr>
-            </a:pPr>
-            <a:r>
-              <a:rPr sz="2625" b="1">
-                <a:solidFill>
-                  <a:srgbClr val="061A35"/>
-                </a:solidFill>
-              </a:rPr>
-              <a:t>¿Qué se compró y qué se vendió?</a:t>
+              <a:t>Juan</a:t>
             </a:r>
           </a:p>
         </p:txBody>
       </p:sp>
       <p:sp>
         <p:nvSpPr>
-          <p:cNvPr id="6" name="">
+          <p:cNvPr id="7" name="">
             <a:extLst xmlns:a="http://schemas.openxmlformats.org/drawingml/2006/main">
               <a:ext uri="{FF2B5EF4-FFF2-40B4-BE49-F238E27FC236}">
-                <a16:creationId xmlns:a16="http://schemas.microsoft.com/office/drawing/2014/main" id="{0F12C144-13A0-454B-A0DD-6E4FC1C168CE}"/>
+                <a16:creationId xmlns:a16="http://schemas.microsoft.com/office/drawing/2014/main" id="{A3E2029F-315F-4851-A948-60E4C08DD2E3}"/>
               </a:ext>
             </a:extLst>
           </p:cNvPr>
@@ -12535,8 +12332,38 @@
         </p:nvSpPr>
         <p:spPr>
           <a:xfrm xmlns:a="http://schemas.openxmlformats.org/drawingml/2006/main">
-            <a:off x="609600" y="5429250"/>
-            <a:ext cx="7048500" cy="762000"/>
+            <a:off x="8096250" y="1619250"/>
+            <a:ext cx="28575" cy="4143375"/>
+          </a:xfrm>
+          <a:prstGeom xmlns:a="http://schemas.openxmlformats.org/drawingml/2006/main" prst="rect">
+            <a:avLst/>
+          </a:prstGeom>
+          <a:solidFill xmlns:a="http://schemas.openxmlformats.org/drawingml/2006/main">
+            <a:srgbClr val="C4D9F8"/>
+          </a:solidFill>
+          <a:ln xmlns:a="http://schemas.openxmlformats.org/drawingml/2006/main" w="0">
+            <a:noFill/>
+          </a:ln>
+        </p:spPr>
+      </p:sp>
+      <p:sp>
+        <p:nvSpPr>
+          <p:cNvPr id="8" name="">
+            <a:extLst xmlns:a="http://schemas.openxmlformats.org/drawingml/2006/main">
+              <a:ext uri="{FF2B5EF4-FFF2-40B4-BE49-F238E27FC236}">
+                <a16:creationId xmlns:a16="http://schemas.microsoft.com/office/drawing/2014/main" id="{918D1D2E-B7D4-41B2-BB9F-A0227907AECE}"/>
+              </a:ext>
+            </a:extLst>
+          </p:cNvPr>
+          <p:cNvSpPr>
+            <a:spLocks xmlns:a="http://schemas.openxmlformats.org/drawingml/2006/main" noGrp="1"/>
+          </p:cNvSpPr>
+          <p:nvPr/>
+        </p:nvSpPr>
+        <p:spPr>
+          <a:xfrm xmlns:a="http://schemas.openxmlformats.org/drawingml/2006/main">
+            <a:off x="8524875" y="1619250"/>
+            <a:ext cx="3048000" cy="952500"/>
           </a:xfrm>
           <a:prstGeom xmlns:a="http://schemas.openxmlformats.org/drawingml/2006/main" prst="rect">
             <a:avLst/>
@@ -12550,146 +12377,118 @@
           <a:bodyPr xmlns:a="http://schemas.openxmlformats.org/drawingml/2006/main"/>
           <a:lstStyle xmlns:a="http://schemas.openxmlformats.org/drawingml/2006/main">
             <a:defPPr>
-              <a:defRPr sz="2025" b="0">
-                <a:solidFill>
-                  <a:srgbClr val="536B91"/>
+              <a:defRPr sz="2400" b="1">
+                <a:solidFill>
+                  <a:srgbClr val="0860FF"/>
                 </a:solidFill>
               </a:defRPr>
             </a:defPPr>
             <a:lvl1pPr>
-              <a:defRPr sz="2025" b="0">
-                <a:solidFill>
-                  <a:srgbClr val="536B91"/>
+              <a:defRPr sz="2400" b="1">
+                <a:solidFill>
+                  <a:srgbClr val="0860FF"/>
                 </a:solidFill>
               </a:defRPr>
             </a:lvl1pPr>
             <a:lvl2pPr>
-              <a:defRPr sz="2025" b="0">
-                <a:solidFill>
-                  <a:srgbClr val="536B91"/>
+              <a:defRPr sz="2400" b="1">
+                <a:solidFill>
+                  <a:srgbClr val="0860FF"/>
                 </a:solidFill>
               </a:defRPr>
             </a:lvl2pPr>
             <a:lvl3pPr>
-              <a:defRPr sz="2025" b="0">
-                <a:solidFill>
-                  <a:srgbClr val="536B91"/>
+              <a:defRPr sz="2400" b="1">
+                <a:solidFill>
+                  <a:srgbClr val="0860FF"/>
                 </a:solidFill>
               </a:defRPr>
             </a:lvl3pPr>
             <a:lvl4pPr>
-              <a:defRPr sz="2025" b="0">
-                <a:solidFill>
-                  <a:srgbClr val="536B91"/>
+              <a:defRPr sz="2400" b="1">
+                <a:solidFill>
+                  <a:srgbClr val="0860FF"/>
                 </a:solidFill>
               </a:defRPr>
             </a:lvl4pPr>
             <a:lvl5pPr>
-              <a:defRPr sz="2025" b="0">
-                <a:solidFill>
-                  <a:srgbClr val="536B91"/>
+              <a:defRPr sz="2400" b="1">
+                <a:solidFill>
+                  <a:srgbClr val="0860FF"/>
                 </a:solidFill>
               </a:defRPr>
             </a:lvl5pPr>
             <a:lvl6pPr>
-              <a:defRPr sz="2025" b="0">
-                <a:solidFill>
-                  <a:srgbClr val="536B91"/>
+              <a:defRPr sz="2400" b="1">
+                <a:solidFill>
+                  <a:srgbClr val="0860FF"/>
                 </a:solidFill>
               </a:defRPr>
             </a:lvl6pPr>
             <a:lvl7pPr>
-              <a:defRPr sz="2025" b="0">
-                <a:solidFill>
-                  <a:srgbClr val="536B91"/>
+              <a:defRPr sz="2400" b="1">
+                <a:solidFill>
+                  <a:srgbClr val="0860FF"/>
                 </a:solidFill>
               </a:defRPr>
             </a:lvl7pPr>
             <a:lvl8pPr>
-              <a:defRPr sz="2025" b="0">
-                <a:solidFill>
-                  <a:srgbClr val="536B91"/>
+              <a:defRPr sz="2400" b="1">
+                <a:solidFill>
+                  <a:srgbClr val="0860FF"/>
                 </a:solidFill>
               </a:defRPr>
             </a:lvl8pPr>
             <a:lvl9pPr>
-              <a:defRPr sz="2025" b="0">
-                <a:solidFill>
-                  <a:srgbClr val="536B91"/>
+              <a:defRPr sz="2400" b="1">
+                <a:solidFill>
+                  <a:srgbClr val="0860FF"/>
                 </a:solidFill>
               </a:defRPr>
             </a:lvl9pPr>
           </a:lstStyle>
           <a:p xmlns:a="http://schemas.openxmlformats.org/drawingml/2006/main">
             <a:pPr>
-              <a:defRPr sz="2025" b="0">
-                <a:solidFill>
-                  <a:srgbClr val="536B91"/>
+              <a:defRPr sz="2400" b="1">
+                <a:solidFill>
+                  <a:srgbClr val="0860FF"/>
                 </a:solidFill>
               </a:defRPr>
             </a:pPr>
             <a:r>
-              <a:rPr sz="2025" b="0">
-                <a:solidFill>
-                  <a:srgbClr val="536B91"/>
+              <a:rPr sz="2400" b="1">
+                <a:solidFill>
+                  <a:srgbClr val="0860FF"/>
                 </a:solidFill>
               </a:rPr>
-              <a:t>Necesita reunir sus registros y consultar</a:t>
+              <a:t>La información queda</a:t>
             </a:r>
           </a:p>
           <a:p xmlns:a="http://schemas.openxmlformats.org/drawingml/2006/main">
             <a:pPr>
-              <a:defRPr sz="2025" b="0">
-                <a:solidFill>
-                  <a:srgbClr val="536B91"/>
+              <a:defRPr sz="2400" b="1">
+                <a:solidFill>
+                  <a:srgbClr val="0860FF"/>
                 </a:solidFill>
               </a:defRPr>
             </a:pPr>
             <a:r>
-              <a:rPr sz="2025" b="0">
-                <a:solidFill>
-                  <a:srgbClr val="536B91"/>
+              <a:rPr sz="2400" b="1">
+                <a:solidFill>
+                  <a:srgbClr val="0860FF"/>
                 </a:solidFill>
               </a:rPr>
-              <a:t>la actividad mientras trabaja.</a:t>
+              <a:t>entre papeles y mensajes</a:t>
             </a:r>
           </a:p>
         </p:txBody>
       </p:sp>
-      <p:pic>
-        <p:nvPicPr>
-          <p:cNvPr id="7" name="">
+      <p:sp>
+        <p:nvSpPr>
+          <p:cNvPr id="9" name="">
             <a:extLst xmlns:a="http://schemas.openxmlformats.org/drawingml/2006/main">
               <a:ext uri="{FF2B5EF4-FFF2-40B4-BE49-F238E27FC236}">
-                <a16:creationId xmlns:a16="http://schemas.microsoft.com/office/drawing/2014/main" id="{0A4E1F97-431F-478E-B0DE-B74C760D45F1}"/>
-              </a:ext>
-            </a:extLst>
-          </p:cNvPr>
-          <p:cNvPicPr>
-            <a:picLocks xmlns:a="http://schemas.openxmlformats.org/drawingml/2006/main" noChangeAspect="1"/>
-          </p:cNvPicPr>
-          <p:nvPr/>
-        </p:nvPicPr>
-        <p:blipFill>
-          <a:blip xmlns:r="http://schemas.openxmlformats.org/officeDocument/2006/relationships" xmlns:a="http://schemas.openxmlformats.org/drawingml/2006/main" r:embed="R3bdac7fe8400436a"/>
-          <a:stretch xmlns:a="http://schemas.openxmlformats.org/drawingml/2006/main"/>
-        </p:blipFill>
-        <p:spPr>
-          <a:xfrm xmlns:a="http://schemas.openxmlformats.org/drawingml/2006/main">
-            <a:off x="8250490" y="1333500"/>
-            <a:ext cx="2644271" cy="4572000"/>
-          </a:xfrm>
-          <a:prstGeom xmlns:a="http://schemas.openxmlformats.org/drawingml/2006/main" prst="rect">
-            <a:avLst/>
-          </a:prstGeom>
-        </p:spPr>
-      </p:pic>
-      <p:sp>
-        <p:nvSpPr>
-          <p:cNvPr id="8" name="">
-            <a:extLst xmlns:a="http://schemas.openxmlformats.org/drawingml/2006/main">
-              <a:ext uri="{FF2B5EF4-FFF2-40B4-BE49-F238E27FC236}">
-                <a16:creationId xmlns:a16="http://schemas.microsoft.com/office/drawing/2014/main" id="{30A0778B-FE9F-411E-9016-F8D0DEDE48A1}"/>
+                <a16:creationId xmlns:a16="http://schemas.microsoft.com/office/drawing/2014/main" id="{38F4320B-2671-41D8-A311-BC1021F9DF96}"/>
               </a:ext>
             </a:extLst>
           </p:cNvPr>
@@ -12700,8 +12499,8 @@
         </p:nvSpPr>
         <p:spPr>
           <a:xfrm xmlns:a="http://schemas.openxmlformats.org/drawingml/2006/main">
-            <a:off x="8096250" y="5981700"/>
-            <a:ext cx="3333750" cy="333375"/>
+            <a:off x="8524875" y="2876550"/>
+            <a:ext cx="3095625" cy="1285875"/>
           </a:xfrm>
           <a:prstGeom xmlns:a="http://schemas.openxmlformats.org/drawingml/2006/main" prst="rect">
             <a:avLst/>
@@ -12715,91 +12514,502 @@
           <a:bodyPr xmlns:a="http://schemas.openxmlformats.org/drawingml/2006/main"/>
           <a:lstStyle xmlns:a="http://schemas.openxmlformats.org/drawingml/2006/main">
             <a:defPPr>
-              <a:defRPr sz="1425" b="0">
-                <a:solidFill>
-                  <a:srgbClr val="536B91"/>
+              <a:defRPr sz="1800" b="0">
+                <a:solidFill>
+                  <a:srgbClr val="061A35"/>
                 </a:solidFill>
               </a:defRPr>
             </a:defPPr>
             <a:lvl1pPr>
-              <a:defRPr sz="1425" b="0">
-                <a:solidFill>
-                  <a:srgbClr val="536B91"/>
+              <a:defRPr sz="1800" b="0">
+                <a:solidFill>
+                  <a:srgbClr val="061A35"/>
                 </a:solidFill>
               </a:defRPr>
             </a:lvl1pPr>
             <a:lvl2pPr>
-              <a:defRPr sz="1425" b="0">
-                <a:solidFill>
-                  <a:srgbClr val="536B91"/>
+              <a:defRPr sz="1800" b="0">
+                <a:solidFill>
+                  <a:srgbClr val="061A35"/>
                 </a:solidFill>
               </a:defRPr>
             </a:lvl2pPr>
             <a:lvl3pPr>
-              <a:defRPr sz="1425" b="0">
-                <a:solidFill>
-                  <a:srgbClr val="536B91"/>
+              <a:defRPr sz="1800" b="0">
+                <a:solidFill>
+                  <a:srgbClr val="061A35"/>
                 </a:solidFill>
               </a:defRPr>
             </a:lvl3pPr>
             <a:lvl4pPr>
-              <a:defRPr sz="1425" b="0">
-                <a:solidFill>
-                  <a:srgbClr val="536B91"/>
+              <a:defRPr sz="1800" b="0">
+                <a:solidFill>
+                  <a:srgbClr val="061A35"/>
                 </a:solidFill>
               </a:defRPr>
             </a:lvl4pPr>
             <a:lvl5pPr>
-              <a:defRPr sz="1425" b="0">
-                <a:solidFill>
-                  <a:srgbClr val="536B91"/>
+              <a:defRPr sz="1800" b="0">
+                <a:solidFill>
+                  <a:srgbClr val="061A35"/>
                 </a:solidFill>
               </a:defRPr>
             </a:lvl5pPr>
             <a:lvl6pPr>
-              <a:defRPr sz="1425" b="0">
-                <a:solidFill>
-                  <a:srgbClr val="536B91"/>
+              <a:defRPr sz="1800" b="0">
+                <a:solidFill>
+                  <a:srgbClr val="061A35"/>
                 </a:solidFill>
               </a:defRPr>
             </a:lvl6pPr>
             <a:lvl7pPr>
-              <a:defRPr sz="1425" b="0">
-                <a:solidFill>
-                  <a:srgbClr val="536B91"/>
+              <a:defRPr sz="1800" b="0">
+                <a:solidFill>
+                  <a:srgbClr val="061A35"/>
                 </a:solidFill>
               </a:defRPr>
             </a:lvl7pPr>
             <a:lvl8pPr>
-              <a:defRPr sz="1425" b="0">
-                <a:solidFill>
-                  <a:srgbClr val="536B91"/>
+              <a:defRPr sz="1800" b="0">
+                <a:solidFill>
+                  <a:srgbClr val="061A35"/>
                 </a:solidFill>
               </a:defRPr>
             </a:lvl8pPr>
             <a:lvl9pPr>
-              <a:defRPr sz="1425" b="0">
-                <a:solidFill>
-                  <a:srgbClr val="536B91"/>
+              <a:defRPr sz="1800" b="0">
+                <a:solidFill>
+                  <a:srgbClr val="061A35"/>
                 </a:solidFill>
               </a:defRPr>
             </a:lvl9pPr>
           </a:lstStyle>
           <a:p xmlns:a="http://schemas.openxmlformats.org/drawingml/2006/main">
             <a:pPr>
-              <a:defRPr sz="1425" b="0">
-                <a:solidFill>
-                  <a:srgbClr val="536B91"/>
+              <a:defRPr sz="1800" b="0">
+                <a:solidFill>
+                  <a:srgbClr val="061A35"/>
                 </a:solidFill>
               </a:defRPr>
             </a:pPr>
             <a:r>
-              <a:rPr sz="1425" b="0">
+              <a:rPr sz="1800" b="0">
+                <a:solidFill>
+                  <a:srgbClr val="061A35"/>
+                </a:solidFill>
+              </a:rPr>
+              <a:t>Anotaciones dispersas</a:t>
+            </a:r>
+          </a:p>
+          <a:p xmlns:a="http://schemas.openxmlformats.org/drawingml/2006/main">
+            <a:pPr>
+              <a:defRPr sz="1800" b="0">
+                <a:solidFill>
+                  <a:srgbClr val="061A35"/>
+                </a:solidFill>
+              </a:defRPr>
+            </a:pPr>
+            <a:r>
+              <a:rPr sz="1800" b="0">
+                <a:solidFill>
+                  <a:srgbClr val="061A35"/>
+                </a:solidFill>
+              </a:rPr>
+              <a:t>Novedades sin comunicar</a:t>
+            </a:r>
+          </a:p>
+          <a:p xmlns:a="http://schemas.openxmlformats.org/drawingml/2006/main">
+            <a:pPr>
+              <a:defRPr sz="1800" b="0">
+                <a:solidFill>
+                  <a:srgbClr val="061A35"/>
+                </a:solidFill>
+              </a:defRPr>
+            </a:pPr>
+            <a:r>
+              <a:rPr sz="1800" b="0">
+                <a:solidFill>
+                  <a:srgbClr val="061A35"/>
+                </a:solidFill>
+              </a:rPr>
+              <a:t>Dudas sobre la mercadería</a:t>
+            </a:r>
+          </a:p>
+        </p:txBody>
+      </p:sp>
+      <p:sp>
+        <p:nvSpPr>
+          <p:cNvPr id="10" name="">
+            <a:extLst xmlns:a="http://schemas.openxmlformats.org/drawingml/2006/main">
+              <a:ext uri="{FF2B5EF4-FFF2-40B4-BE49-F238E27FC236}">
+                <a16:creationId xmlns:a16="http://schemas.microsoft.com/office/drawing/2014/main" id="{7F8AEB84-9498-4CEA-9AC9-7A3A52A952A4}"/>
+              </a:ext>
+            </a:extLst>
+          </p:cNvPr>
+          <p:cNvSpPr>
+            <a:spLocks xmlns:a="http://schemas.openxmlformats.org/drawingml/2006/main" noGrp="1"/>
+          </p:cNvSpPr>
+          <p:nvPr/>
+        </p:nvSpPr>
+        <p:spPr>
+          <a:xfrm xmlns:a="http://schemas.openxmlformats.org/drawingml/2006/main">
+            <a:off x="8524875" y="4381500"/>
+            <a:ext cx="3000375" cy="1000125"/>
+          </a:xfrm>
+          <a:prstGeom xmlns:a="http://schemas.openxmlformats.org/drawingml/2006/main" prst="rect">
+            <a:avLst/>
+          </a:prstGeom>
+          <a:noFill xmlns:a="http://schemas.openxmlformats.org/drawingml/2006/main"/>
+          <a:ln xmlns:a="http://schemas.openxmlformats.org/drawingml/2006/main" w="0">
+            <a:noFill/>
+          </a:ln>
+        </p:spPr>
+        <p:txBody>
+          <a:bodyPr xmlns:a="http://schemas.openxmlformats.org/drawingml/2006/main"/>
+          <a:lstStyle xmlns:a="http://schemas.openxmlformats.org/drawingml/2006/main">
+            <a:defPPr>
+              <a:defRPr sz="1875" b="0">
                 <a:solidFill>
                   <a:srgbClr val="536B91"/>
                 </a:solidFill>
+              </a:defRPr>
+            </a:defPPr>
+            <a:lvl1pPr>
+              <a:defRPr sz="1875" b="0">
+                <a:solidFill>
+                  <a:srgbClr val="536B91"/>
+                </a:solidFill>
+              </a:defRPr>
+            </a:lvl1pPr>
+            <a:lvl2pPr>
+              <a:defRPr sz="1875" b="0">
+                <a:solidFill>
+                  <a:srgbClr val="536B91"/>
+                </a:solidFill>
+              </a:defRPr>
+            </a:lvl2pPr>
+            <a:lvl3pPr>
+              <a:defRPr sz="1875" b="0">
+                <a:solidFill>
+                  <a:srgbClr val="536B91"/>
+                </a:solidFill>
+              </a:defRPr>
+            </a:lvl3pPr>
+            <a:lvl4pPr>
+              <a:defRPr sz="1875" b="0">
+                <a:solidFill>
+                  <a:srgbClr val="536B91"/>
+                </a:solidFill>
+              </a:defRPr>
+            </a:lvl4pPr>
+            <a:lvl5pPr>
+              <a:defRPr sz="1875" b="0">
+                <a:solidFill>
+                  <a:srgbClr val="536B91"/>
+                </a:solidFill>
+              </a:defRPr>
+            </a:lvl5pPr>
+            <a:lvl6pPr>
+              <a:defRPr sz="1875" b="0">
+                <a:solidFill>
+                  <a:srgbClr val="536B91"/>
+                </a:solidFill>
+              </a:defRPr>
+            </a:lvl6pPr>
+            <a:lvl7pPr>
+              <a:defRPr sz="1875" b="0">
+                <a:solidFill>
+                  <a:srgbClr val="536B91"/>
+                </a:solidFill>
+              </a:defRPr>
+            </a:lvl7pPr>
+            <a:lvl8pPr>
+              <a:defRPr sz="1875" b="0">
+                <a:solidFill>
+                  <a:srgbClr val="536B91"/>
+                </a:solidFill>
+              </a:defRPr>
+            </a:lvl8pPr>
+            <a:lvl9pPr>
+              <a:defRPr sz="1875" b="0">
+                <a:solidFill>
+                  <a:srgbClr val="536B91"/>
+                </a:solidFill>
+              </a:defRPr>
+            </a:lvl9pPr>
+          </a:lstStyle>
+          <a:p xmlns:a="http://schemas.openxmlformats.org/drawingml/2006/main">
+            <a:pPr>
+              <a:defRPr sz="1875" b="0">
+                <a:solidFill>
+                  <a:srgbClr val="536B91"/>
+                </a:solidFill>
+              </a:defRPr>
+            </a:pPr>
+            <a:r>
+              <a:rPr sz="1875" b="0">
+                <a:solidFill>
+                  <a:srgbClr val="536B91"/>
+                </a:solidFill>
               </a:rPr>
-              <a:t>Caso ficticio del público objetivo</a:t>
+              <a:t>Volver a contar. Reconstruir lo ocurrido. Detectar faltantes tarde.</a:t>
+            </a:r>
+          </a:p>
+        </p:txBody>
+      </p:sp>
+      <p:sp>
+        <p:nvSpPr>
+          <p:cNvPr id="11" name="">
+            <a:extLst xmlns:a="http://schemas.openxmlformats.org/drawingml/2006/main">
+              <a:ext uri="{FF2B5EF4-FFF2-40B4-BE49-F238E27FC236}">
+                <a16:creationId xmlns:a16="http://schemas.microsoft.com/office/drawing/2014/main" id="{A1918A70-57FE-46C3-847F-462C556D1C3D}"/>
+              </a:ext>
+            </a:extLst>
+          </p:cNvPr>
+          <p:cNvSpPr>
+            <a:spLocks xmlns:a="http://schemas.openxmlformats.org/drawingml/2006/main" noGrp="1"/>
+          </p:cNvSpPr>
+          <p:nvPr/>
+        </p:nvSpPr>
+        <p:spPr>
+          <a:xfrm xmlns:a="http://schemas.openxmlformats.org/drawingml/2006/main">
+            <a:off x="8524875" y="5572125"/>
+            <a:ext cx="3000375" cy="762000"/>
+          </a:xfrm>
+          <a:prstGeom xmlns:a="http://schemas.openxmlformats.org/drawingml/2006/main" prst="rect">
+            <a:avLst/>
+          </a:prstGeom>
+          <a:noFill xmlns:a="http://schemas.openxmlformats.org/drawingml/2006/main"/>
+          <a:ln xmlns:a="http://schemas.openxmlformats.org/drawingml/2006/main" w="0">
+            <a:noFill/>
+          </a:ln>
+        </p:spPr>
+        <p:txBody>
+          <a:bodyPr xmlns:a="http://schemas.openxmlformats.org/drawingml/2006/main"/>
+          <a:lstStyle xmlns:a="http://schemas.openxmlformats.org/drawingml/2006/main">
+            <a:defPPr>
+              <a:defRPr sz="2250" b="1">
+                <a:solidFill>
+                  <a:srgbClr val="061A35"/>
+                </a:solidFill>
+              </a:defRPr>
+            </a:defPPr>
+            <a:lvl1pPr>
+              <a:defRPr sz="2250" b="1">
+                <a:solidFill>
+                  <a:srgbClr val="061A35"/>
+                </a:solidFill>
+              </a:defRPr>
+            </a:lvl1pPr>
+            <a:lvl2pPr>
+              <a:defRPr sz="2250" b="1">
+                <a:solidFill>
+                  <a:srgbClr val="061A35"/>
+                </a:solidFill>
+              </a:defRPr>
+            </a:lvl2pPr>
+            <a:lvl3pPr>
+              <a:defRPr sz="2250" b="1">
+                <a:solidFill>
+                  <a:srgbClr val="061A35"/>
+                </a:solidFill>
+              </a:defRPr>
+            </a:lvl3pPr>
+            <a:lvl4pPr>
+              <a:defRPr sz="2250" b="1">
+                <a:solidFill>
+                  <a:srgbClr val="061A35"/>
+                </a:solidFill>
+              </a:defRPr>
+            </a:lvl4pPr>
+            <a:lvl5pPr>
+              <a:defRPr sz="2250" b="1">
+                <a:solidFill>
+                  <a:srgbClr val="061A35"/>
+                </a:solidFill>
+              </a:defRPr>
+            </a:lvl5pPr>
+            <a:lvl6pPr>
+              <a:defRPr sz="2250" b="1">
+                <a:solidFill>
+                  <a:srgbClr val="061A35"/>
+                </a:solidFill>
+              </a:defRPr>
+            </a:lvl6pPr>
+            <a:lvl7pPr>
+              <a:defRPr sz="2250" b="1">
+                <a:solidFill>
+                  <a:srgbClr val="061A35"/>
+                </a:solidFill>
+              </a:defRPr>
+            </a:lvl7pPr>
+            <a:lvl8pPr>
+              <a:defRPr sz="2250" b="1">
+                <a:solidFill>
+                  <a:srgbClr val="061A35"/>
+                </a:solidFill>
+              </a:defRPr>
+            </a:lvl8pPr>
+            <a:lvl9pPr>
+              <a:defRPr sz="2250" b="1">
+                <a:solidFill>
+                  <a:srgbClr val="061A35"/>
+                </a:solidFill>
+              </a:defRPr>
+            </a:lvl9pPr>
+          </a:lstStyle>
+          <a:p xmlns:a="http://schemas.openxmlformats.org/drawingml/2006/main">
+            <a:pPr>
+              <a:defRPr sz="2250" b="1">
+                <a:solidFill>
+                  <a:srgbClr val="061A35"/>
+                </a:solidFill>
+              </a:defRPr>
+            </a:pPr>
+            <a:r>
+              <a:rPr sz="2250" b="1">
+                <a:solidFill>
+                  <a:srgbClr val="061A35"/>
+                </a:solidFill>
+              </a:rPr>
+              <a:t>¿Qué se vendió?</a:t>
+            </a:r>
+          </a:p>
+          <a:p xmlns:a="http://schemas.openxmlformats.org/drawingml/2006/main">
+            <a:pPr>
+              <a:defRPr sz="2250" b="1">
+                <a:solidFill>
+                  <a:srgbClr val="061A35"/>
+                </a:solidFill>
+              </a:defRPr>
+            </a:pPr>
+            <a:r>
+              <a:rPr sz="2250" b="1">
+                <a:solidFill>
+                  <a:srgbClr val="061A35"/>
+                </a:solidFill>
+              </a:rPr>
+              <a:t>¿Cuánto queda?</a:t>
+            </a:r>
+          </a:p>
+        </p:txBody>
+      </p:sp>
+      <p:sp>
+        <p:nvSpPr>
+          <p:cNvPr id="12" name="">
+            <a:extLst xmlns:a="http://schemas.openxmlformats.org/drawingml/2006/main">
+              <a:ext uri="{FF2B5EF4-FFF2-40B4-BE49-F238E27FC236}">
+                <a16:creationId xmlns:a16="http://schemas.microsoft.com/office/drawing/2014/main" id="{C68DD786-43E8-4BEC-B3B0-6DC44342D6CB}"/>
+              </a:ext>
+            </a:extLst>
+          </p:cNvPr>
+          <p:cNvSpPr>
+            <a:spLocks xmlns:a="http://schemas.openxmlformats.org/drawingml/2006/main" noGrp="1"/>
+          </p:cNvSpPr>
+          <p:nvPr/>
+        </p:nvSpPr>
+        <p:spPr>
+          <a:xfrm xmlns:a="http://schemas.openxmlformats.org/drawingml/2006/main">
+            <a:off x="609600" y="6334125"/>
+            <a:ext cx="7048500" cy="285750"/>
+          </a:xfrm>
+          <a:prstGeom xmlns:a="http://schemas.openxmlformats.org/drawingml/2006/main" prst="rect">
+            <a:avLst/>
+          </a:prstGeom>
+          <a:noFill xmlns:a="http://schemas.openxmlformats.org/drawingml/2006/main"/>
+          <a:ln xmlns:a="http://schemas.openxmlformats.org/drawingml/2006/main" w="0">
+            <a:noFill/>
+          </a:ln>
+        </p:spPr>
+        <p:txBody>
+          <a:bodyPr xmlns:a="http://schemas.openxmlformats.org/drawingml/2006/main"/>
+          <a:lstStyle xmlns:a="http://schemas.openxmlformats.org/drawingml/2006/main">
+            <a:defPPr>
+              <a:defRPr sz="1350" b="0">
+                <a:solidFill>
+                  <a:srgbClr val="536B91"/>
+                </a:solidFill>
+              </a:defRPr>
+            </a:defPPr>
+            <a:lvl1pPr>
+              <a:defRPr sz="1350" b="0">
+                <a:solidFill>
+                  <a:srgbClr val="536B91"/>
+                </a:solidFill>
+              </a:defRPr>
+            </a:lvl1pPr>
+            <a:lvl2pPr>
+              <a:defRPr sz="1350" b="0">
+                <a:solidFill>
+                  <a:srgbClr val="536B91"/>
+                </a:solidFill>
+              </a:defRPr>
+            </a:lvl2pPr>
+            <a:lvl3pPr>
+              <a:defRPr sz="1350" b="0">
+                <a:solidFill>
+                  <a:srgbClr val="536B91"/>
+                </a:solidFill>
+              </a:defRPr>
+            </a:lvl3pPr>
+            <a:lvl4pPr>
+              <a:defRPr sz="1350" b="0">
+                <a:solidFill>
+                  <a:srgbClr val="536B91"/>
+                </a:solidFill>
+              </a:defRPr>
+            </a:lvl4pPr>
+            <a:lvl5pPr>
+              <a:defRPr sz="1350" b="0">
+                <a:solidFill>
+                  <a:srgbClr val="536B91"/>
+                </a:solidFill>
+              </a:defRPr>
+            </a:lvl5pPr>
+            <a:lvl6pPr>
+              <a:defRPr sz="1350" b="0">
+                <a:solidFill>
+                  <a:srgbClr val="536B91"/>
+                </a:solidFill>
+              </a:defRPr>
+            </a:lvl6pPr>
+            <a:lvl7pPr>
+              <a:defRPr sz="1350" b="0">
+                <a:solidFill>
+                  <a:srgbClr val="536B91"/>
+                </a:solidFill>
+              </a:defRPr>
+            </a:lvl7pPr>
+            <a:lvl8pPr>
+              <a:defRPr sz="1350" b="0">
+                <a:solidFill>
+                  <a:srgbClr val="536B91"/>
+                </a:solidFill>
+              </a:defRPr>
+            </a:lvl8pPr>
+            <a:lvl9pPr>
+              <a:defRPr sz="1350" b="0">
+                <a:solidFill>
+                  <a:srgbClr val="536B91"/>
+                </a:solidFill>
+              </a:defRPr>
+            </a:lvl9pPr>
+          </a:lstStyle>
+          <a:p xmlns:a="http://schemas.openxmlformats.org/drawingml/2006/main">
+            <a:pPr>
+              <a:defRPr sz="1350" b="0">
+                <a:solidFill>
+                  <a:srgbClr val="536B91"/>
+                </a:solidFill>
+              </a:defRPr>
+            </a:pPr>
+            <a:r>
+              <a:rPr sz="1350" b="0">
+                <a:solidFill>
+                  <a:srgbClr val="536B91"/>
+                </a:solidFill>
+              </a:rPr>
+              <a:t>Caso ficticio. Una persona atiende en cada turno.</a:t>
             </a:r>
           </a:p>
         </p:txBody>
@@ -12807,7 +13017,7 @@
     </p:spTree>
     <p:extLst>
       <p:ext uri="{BB962C8B-B14F-4D97-AF65-F5344CB8AC3E}">
-        <p14:creationId xmlns:p14="http://schemas.microsoft.com/office/powerpoint/2010/main" val="1536829237"/>
+        <p14:creationId xmlns:p14="http://schemas.microsoft.com/office/powerpoint/2010/main" val="1102370478"/>
       </p:ext>
     </p:extLst>
   </p:cSld>
@@ -12838,7 +13048,7 @@
           <p:cNvPr id="15" name="">
             <a:extLst xmlns:a="http://schemas.openxmlformats.org/drawingml/2006/main">
               <a:ext uri="{FF2B5EF4-FFF2-40B4-BE49-F238E27FC236}">
-                <a16:creationId xmlns:a16="http://schemas.microsoft.com/office/drawing/2014/main" id="{02A76F5F-41E7-4608-9224-BC3FB63C8C4D}"/>
+                <a16:creationId xmlns:a16="http://schemas.microsoft.com/office/drawing/2014/main" id="{54EA91B3-2362-45F2-97EC-33FEE2E681C2}"/>
               </a:ext>
             </a:extLst>
           </p:cNvPr>
@@ -12948,7 +13158,7 @@
                   <a:srgbClr val="FFFFFF"/>
                 </a:solidFill>
               </a:rPr>
-              <a:t>Nuestra propuesta de valor</a:t>
+              <a:t>Una gestión compartida desde el celular</a:t>
             </a:r>
           </a:p>
         </p:txBody>
@@ -12958,7 +13168,7 @@
           <p:cNvPr id="2" name="">
             <a:extLst xmlns:a="http://schemas.openxmlformats.org/drawingml/2006/main">
               <a:ext uri="{FF2B5EF4-FFF2-40B4-BE49-F238E27FC236}">
-                <a16:creationId xmlns:a16="http://schemas.microsoft.com/office/drawing/2014/main" id="{F2A48B95-3E43-4AA4-89AD-94C01AD60102}"/>
+                <a16:creationId xmlns:a16="http://schemas.microsoft.com/office/drawing/2014/main" id="{3A8B6B16-EA55-4FDD-B1E9-93BB1C476BD8}"/>
               </a:ext>
             </a:extLst>
           </p:cNvPr>
@@ -13078,7 +13288,7 @@
           <p:cNvPr id="3" name="">
             <a:extLst xmlns:a="http://schemas.openxmlformats.org/drawingml/2006/main">
               <a:ext uri="{FF2B5EF4-FFF2-40B4-BE49-F238E27FC236}">
-                <a16:creationId xmlns:a16="http://schemas.microsoft.com/office/drawing/2014/main" id="{8AACBCB6-D353-4419-8816-06AAA638F6A2}"/>
+                <a16:creationId xmlns:a16="http://schemas.microsoft.com/office/drawing/2014/main" id="{1EFD43C9-FAEE-4852-AC56-1E569C82136C}"/>
               </a:ext>
             </a:extLst>
           </p:cNvPr>
@@ -13089,8 +13299,8 @@
         </p:nvSpPr>
         <p:spPr>
           <a:xfrm xmlns:a="http://schemas.openxmlformats.org/drawingml/2006/main">
-            <a:off x="609600" y="1809750"/>
-            <a:ext cx="3333750" cy="523875"/>
+            <a:off x="609600" y="1352550"/>
+            <a:ext cx="3381375" cy="552450"/>
           </a:xfrm>
           <a:prstGeom xmlns:a="http://schemas.openxmlformats.org/drawingml/2006/main" prst="rect">
             <a:avLst/>
@@ -13104,91 +13314,91 @@
           <a:bodyPr xmlns:a="http://schemas.openxmlformats.org/drawingml/2006/main"/>
           <a:lstStyle xmlns:a="http://schemas.openxmlformats.org/drawingml/2006/main">
             <a:defPPr>
-              <a:defRPr sz="2175" b="1">
-                <a:solidFill>
-                  <a:srgbClr val="FFFFFF"/>
+              <a:defRPr sz="1875" b="0">
+                <a:solidFill>
+                  <a:srgbClr val="B6CCE9"/>
                 </a:solidFill>
               </a:defRPr>
             </a:defPPr>
             <a:lvl1pPr>
-              <a:defRPr sz="2175" b="1">
-                <a:solidFill>
-                  <a:srgbClr val="FFFFFF"/>
+              <a:defRPr sz="1875" b="0">
+                <a:solidFill>
+                  <a:srgbClr val="B6CCE9"/>
                 </a:solidFill>
               </a:defRPr>
             </a:lvl1pPr>
             <a:lvl2pPr>
-              <a:defRPr sz="2175" b="1">
-                <a:solidFill>
-                  <a:srgbClr val="FFFFFF"/>
+              <a:defRPr sz="1875" b="0">
+                <a:solidFill>
+                  <a:srgbClr val="B6CCE9"/>
                 </a:solidFill>
               </a:defRPr>
             </a:lvl2pPr>
             <a:lvl3pPr>
-              <a:defRPr sz="2175" b="1">
-                <a:solidFill>
-                  <a:srgbClr val="FFFFFF"/>
+              <a:defRPr sz="1875" b="0">
+                <a:solidFill>
+                  <a:srgbClr val="B6CCE9"/>
                 </a:solidFill>
               </a:defRPr>
             </a:lvl3pPr>
             <a:lvl4pPr>
-              <a:defRPr sz="2175" b="1">
-                <a:solidFill>
-                  <a:srgbClr val="FFFFFF"/>
+              <a:defRPr sz="1875" b="0">
+                <a:solidFill>
+                  <a:srgbClr val="B6CCE9"/>
                 </a:solidFill>
               </a:defRPr>
             </a:lvl4pPr>
             <a:lvl5pPr>
-              <a:defRPr sz="2175" b="1">
-                <a:solidFill>
-                  <a:srgbClr val="FFFFFF"/>
+              <a:defRPr sz="1875" b="0">
+                <a:solidFill>
+                  <a:srgbClr val="B6CCE9"/>
                 </a:solidFill>
               </a:defRPr>
             </a:lvl5pPr>
             <a:lvl6pPr>
-              <a:defRPr sz="2175" b="1">
-                <a:solidFill>
-                  <a:srgbClr val="FFFFFF"/>
+              <a:defRPr sz="1875" b="0">
+                <a:solidFill>
+                  <a:srgbClr val="B6CCE9"/>
                 </a:solidFill>
               </a:defRPr>
             </a:lvl6pPr>
             <a:lvl7pPr>
-              <a:defRPr sz="2175" b="1">
-                <a:solidFill>
-                  <a:srgbClr val="FFFFFF"/>
+              <a:defRPr sz="1875" b="0">
+                <a:solidFill>
+                  <a:srgbClr val="B6CCE9"/>
                 </a:solidFill>
               </a:defRPr>
             </a:lvl7pPr>
             <a:lvl8pPr>
-              <a:defRPr sz="2175" b="1">
-                <a:solidFill>
-                  <a:srgbClr val="FFFFFF"/>
+              <a:defRPr sz="1875" b="0">
+                <a:solidFill>
+                  <a:srgbClr val="B6CCE9"/>
                 </a:solidFill>
               </a:defRPr>
             </a:lvl8pPr>
             <a:lvl9pPr>
-              <a:defRPr sz="2175" b="1">
-                <a:solidFill>
-                  <a:srgbClr val="FFFFFF"/>
+              <a:defRPr sz="1875" b="0">
+                <a:solidFill>
+                  <a:srgbClr val="B6CCE9"/>
                 </a:solidFill>
               </a:defRPr>
             </a:lvl9pPr>
           </a:lstStyle>
           <a:p xmlns:a="http://schemas.openxmlformats.org/drawingml/2006/main">
             <a:pPr>
-              <a:defRPr sz="2175" b="1">
-                <a:solidFill>
-                  <a:srgbClr val="FFFFFF"/>
+              <a:defRPr sz="1875" b="0">
+                <a:solidFill>
+                  <a:srgbClr val="B6CCE9"/>
                 </a:solidFill>
               </a:defRPr>
             </a:pPr>
             <a:r>
-              <a:rPr sz="2175" b="1">
-                <a:solidFill>
-                  <a:srgbClr val="FFFFFF"/>
+              <a:rPr sz="1875" b="0">
+                <a:solidFill>
+                  <a:srgbClr val="B6CCE9"/>
                 </a:solidFill>
               </a:rPr>
-              <a:t>Registros dispersos</a:t>
+              <a:t>Anotaciones dispersas</a:t>
             </a:r>
           </a:p>
         </p:txBody>
@@ -13198,7 +13408,7 @@
           <p:cNvPr id="4" name="">
             <a:extLst xmlns:a="http://schemas.openxmlformats.org/drawingml/2006/main">
               <a:ext uri="{FF2B5EF4-FFF2-40B4-BE49-F238E27FC236}">
-                <a16:creationId xmlns:a16="http://schemas.microsoft.com/office/drawing/2014/main" id="{9A9C32EE-B52B-4E97-8083-8823BC224AE6}"/>
+                <a16:creationId xmlns:a16="http://schemas.microsoft.com/office/drawing/2014/main" id="{521F5910-169A-4733-A770-902300C7DEE6}"/>
               </a:ext>
             </a:extLst>
           </p:cNvPr>
@@ -13209,8 +13419,8 @@
         </p:nvSpPr>
         <p:spPr>
           <a:xfrm xmlns:a="http://schemas.openxmlformats.org/drawingml/2006/main">
-            <a:off x="609600" y="3143250"/>
-            <a:ext cx="3333750" cy="523875"/>
+            <a:off x="4333875" y="1352550"/>
+            <a:ext cx="3381375" cy="552450"/>
           </a:xfrm>
           <a:prstGeom xmlns:a="http://schemas.openxmlformats.org/drawingml/2006/main" prst="rect">
             <a:avLst/>
@@ -13224,91 +13434,91 @@
           <a:bodyPr xmlns:a="http://schemas.openxmlformats.org/drawingml/2006/main"/>
           <a:lstStyle xmlns:a="http://schemas.openxmlformats.org/drawingml/2006/main">
             <a:defPPr>
-              <a:defRPr sz="2175" b="1">
-                <a:solidFill>
-                  <a:srgbClr val="FFFFFF"/>
+              <a:defRPr sz="1875" b="0">
+                <a:solidFill>
+                  <a:srgbClr val="B6CCE9"/>
                 </a:solidFill>
               </a:defRPr>
             </a:defPPr>
             <a:lvl1pPr>
-              <a:defRPr sz="2175" b="1">
-                <a:solidFill>
-                  <a:srgbClr val="FFFFFF"/>
+              <a:defRPr sz="1875" b="0">
+                <a:solidFill>
+                  <a:srgbClr val="B6CCE9"/>
                 </a:solidFill>
               </a:defRPr>
             </a:lvl1pPr>
             <a:lvl2pPr>
-              <a:defRPr sz="2175" b="1">
-                <a:solidFill>
-                  <a:srgbClr val="FFFFFF"/>
+              <a:defRPr sz="1875" b="0">
+                <a:solidFill>
+                  <a:srgbClr val="B6CCE9"/>
                 </a:solidFill>
               </a:defRPr>
             </a:lvl2pPr>
             <a:lvl3pPr>
-              <a:defRPr sz="2175" b="1">
-                <a:solidFill>
-                  <a:srgbClr val="FFFFFF"/>
+              <a:defRPr sz="1875" b="0">
+                <a:solidFill>
+                  <a:srgbClr val="B6CCE9"/>
                 </a:solidFill>
               </a:defRPr>
             </a:lvl3pPr>
             <a:lvl4pPr>
-              <a:defRPr sz="2175" b="1">
-                <a:solidFill>
-                  <a:srgbClr val="FFFFFF"/>
+              <a:defRPr sz="1875" b="0">
+                <a:solidFill>
+                  <a:srgbClr val="B6CCE9"/>
                 </a:solidFill>
               </a:defRPr>
             </a:lvl4pPr>
             <a:lvl5pPr>
-              <a:defRPr sz="2175" b="1">
-                <a:solidFill>
-                  <a:srgbClr val="FFFFFF"/>
+              <a:defRPr sz="1875" b="0">
+                <a:solidFill>
+                  <a:srgbClr val="B6CCE9"/>
                 </a:solidFill>
               </a:defRPr>
             </a:lvl5pPr>
             <a:lvl6pPr>
-              <a:defRPr sz="2175" b="1">
-                <a:solidFill>
-                  <a:srgbClr val="FFFFFF"/>
+              <a:defRPr sz="1875" b="0">
+                <a:solidFill>
+                  <a:srgbClr val="B6CCE9"/>
                 </a:solidFill>
               </a:defRPr>
             </a:lvl6pPr>
             <a:lvl7pPr>
-              <a:defRPr sz="2175" b="1">
-                <a:solidFill>
-                  <a:srgbClr val="FFFFFF"/>
+              <a:defRPr sz="1875" b="0">
+                <a:solidFill>
+                  <a:srgbClr val="B6CCE9"/>
                 </a:solidFill>
               </a:defRPr>
             </a:lvl7pPr>
             <a:lvl8pPr>
-              <a:defRPr sz="2175" b="1">
-                <a:solidFill>
-                  <a:srgbClr val="FFFFFF"/>
+              <a:defRPr sz="1875" b="0">
+                <a:solidFill>
+                  <a:srgbClr val="B6CCE9"/>
                 </a:solidFill>
               </a:defRPr>
             </a:lvl8pPr>
             <a:lvl9pPr>
-              <a:defRPr sz="2175" b="1">
-                <a:solidFill>
-                  <a:srgbClr val="FFFFFF"/>
+              <a:defRPr sz="1875" b="0">
+                <a:solidFill>
+                  <a:srgbClr val="B6CCE9"/>
                 </a:solidFill>
               </a:defRPr>
             </a:lvl9pPr>
           </a:lstStyle>
           <a:p xmlns:a="http://schemas.openxmlformats.org/drawingml/2006/main">
             <a:pPr>
-              <a:defRPr sz="2175" b="1">
-                <a:solidFill>
-                  <a:srgbClr val="FFFFFF"/>
+              <a:defRPr sz="1875" b="0">
+                <a:solidFill>
+                  <a:srgbClr val="B6CCE9"/>
                 </a:solidFill>
               </a:defRPr>
             </a:pPr>
             <a:r>
-              <a:rPr sz="2175" b="1">
-                <a:solidFill>
-                  <a:srgbClr val="FFFFFF"/>
+              <a:rPr sz="1875" b="0">
+                <a:solidFill>
+                  <a:srgbClr val="B6CCE9"/>
                 </a:solidFill>
               </a:rPr>
-              <a:t>Cantidades desactualizadas</a:t>
+              <a:t>Dudas sobre cuánto queda</a:t>
             </a:r>
           </a:p>
         </p:txBody>
@@ -13318,7 +13528,7 @@
           <p:cNvPr id="5" name="">
             <a:extLst xmlns:a="http://schemas.openxmlformats.org/drawingml/2006/main">
               <a:ext uri="{FF2B5EF4-FFF2-40B4-BE49-F238E27FC236}">
-                <a16:creationId xmlns:a16="http://schemas.microsoft.com/office/drawing/2014/main" id="{53928FAF-A54C-4993-BA63-04EF07F24AAB}"/>
+                <a16:creationId xmlns:a16="http://schemas.microsoft.com/office/drawing/2014/main" id="{3C75EAB2-F294-42BE-8522-7C0E8D4DFF0C}"/>
               </a:ext>
             </a:extLst>
           </p:cNvPr>
@@ -13329,8 +13539,8 @@
         </p:nvSpPr>
         <p:spPr>
           <a:xfrm xmlns:a="http://schemas.openxmlformats.org/drawingml/2006/main">
-            <a:off x="609600" y="4476750"/>
-            <a:ext cx="3333750" cy="523875"/>
+            <a:off x="8058150" y="1352550"/>
+            <a:ext cx="3381375" cy="552450"/>
           </a:xfrm>
           <a:prstGeom xmlns:a="http://schemas.openxmlformats.org/drawingml/2006/main" prst="rect">
             <a:avLst/>
@@ -13344,91 +13554,91 @@
           <a:bodyPr xmlns:a="http://schemas.openxmlformats.org/drawingml/2006/main"/>
           <a:lstStyle xmlns:a="http://schemas.openxmlformats.org/drawingml/2006/main">
             <a:defPPr>
-              <a:defRPr sz="2175" b="1">
-                <a:solidFill>
-                  <a:srgbClr val="FFFFFF"/>
+              <a:defRPr sz="1875" b="0">
+                <a:solidFill>
+                  <a:srgbClr val="B6CCE9"/>
                 </a:solidFill>
               </a:defRPr>
             </a:defPPr>
             <a:lvl1pPr>
-              <a:defRPr sz="2175" b="1">
-                <a:solidFill>
-                  <a:srgbClr val="FFFFFF"/>
+              <a:defRPr sz="1875" b="0">
+                <a:solidFill>
+                  <a:srgbClr val="B6CCE9"/>
                 </a:solidFill>
               </a:defRPr>
             </a:lvl1pPr>
             <a:lvl2pPr>
-              <a:defRPr sz="2175" b="1">
-                <a:solidFill>
-                  <a:srgbClr val="FFFFFF"/>
+              <a:defRPr sz="1875" b="0">
+                <a:solidFill>
+                  <a:srgbClr val="B6CCE9"/>
                 </a:solidFill>
               </a:defRPr>
             </a:lvl2pPr>
             <a:lvl3pPr>
-              <a:defRPr sz="2175" b="1">
-                <a:solidFill>
-                  <a:srgbClr val="FFFFFF"/>
+              <a:defRPr sz="1875" b="0">
+                <a:solidFill>
+                  <a:srgbClr val="B6CCE9"/>
                 </a:solidFill>
               </a:defRPr>
             </a:lvl3pPr>
             <a:lvl4pPr>
-              <a:defRPr sz="2175" b="1">
-                <a:solidFill>
-                  <a:srgbClr val="FFFFFF"/>
+              <a:defRPr sz="1875" b="0">
+                <a:solidFill>
+                  <a:srgbClr val="B6CCE9"/>
                 </a:solidFill>
               </a:defRPr>
             </a:lvl4pPr>
             <a:lvl5pPr>
-              <a:defRPr sz="2175" b="1">
-                <a:solidFill>
-                  <a:srgbClr val="FFFFFF"/>
+              <a:defRPr sz="1875" b="0">
+                <a:solidFill>
+                  <a:srgbClr val="B6CCE9"/>
                 </a:solidFill>
               </a:defRPr>
             </a:lvl5pPr>
             <a:lvl6pPr>
-              <a:defRPr sz="2175" b="1">
-                <a:solidFill>
-                  <a:srgbClr val="FFFFFF"/>
+              <a:defRPr sz="1875" b="0">
+                <a:solidFill>
+                  <a:srgbClr val="B6CCE9"/>
                 </a:solidFill>
               </a:defRPr>
             </a:lvl6pPr>
             <a:lvl7pPr>
-              <a:defRPr sz="2175" b="1">
-                <a:solidFill>
-                  <a:srgbClr val="FFFFFF"/>
+              <a:defRPr sz="1875" b="0">
+                <a:solidFill>
+                  <a:srgbClr val="B6CCE9"/>
                 </a:solidFill>
               </a:defRPr>
             </a:lvl7pPr>
             <a:lvl8pPr>
-              <a:defRPr sz="2175" b="1">
-                <a:solidFill>
-                  <a:srgbClr val="FFFFFF"/>
+              <a:defRPr sz="1875" b="0">
+                <a:solidFill>
+                  <a:srgbClr val="B6CCE9"/>
                 </a:solidFill>
               </a:defRPr>
             </a:lvl8pPr>
             <a:lvl9pPr>
-              <a:defRPr sz="2175" b="1">
-                <a:solidFill>
-                  <a:srgbClr val="FFFFFF"/>
+              <a:defRPr sz="1875" b="0">
+                <a:solidFill>
+                  <a:srgbClr val="B6CCE9"/>
                 </a:solidFill>
               </a:defRPr>
             </a:lvl9pPr>
           </a:lstStyle>
           <a:p xmlns:a="http://schemas.openxmlformats.org/drawingml/2006/main">
             <a:pPr>
-              <a:defRPr sz="2175" b="1">
-                <a:solidFill>
-                  <a:srgbClr val="FFFFFF"/>
+              <a:defRPr sz="1875" b="0">
+                <a:solidFill>
+                  <a:srgbClr val="B6CCE9"/>
                 </a:solidFill>
               </a:defRPr>
             </a:pPr>
             <a:r>
-              <a:rPr sz="2175" b="1">
-                <a:solidFill>
-                  <a:srgbClr val="FFFFFF"/>
+              <a:rPr sz="1875" b="0">
+                <a:solidFill>
+                  <a:srgbClr val="B6CCE9"/>
                 </a:solidFill>
               </a:rPr>
-              <a:t>Trabajo compartido</a:t>
+              <a:t>Horarios de palabra</a:t>
             </a:r>
           </a:p>
         </p:txBody>
@@ -13438,7 +13648,7 @@
           <p:cNvPr id="6" name="">
             <a:extLst xmlns:a="http://schemas.openxmlformats.org/drawingml/2006/main">
               <a:ext uri="{FF2B5EF4-FFF2-40B4-BE49-F238E27FC236}">
-                <a16:creationId xmlns:a16="http://schemas.microsoft.com/office/drawing/2014/main" id="{7E41FC30-4701-471C-872A-7CF67DF5662F}"/>
+                <a16:creationId xmlns:a16="http://schemas.microsoft.com/office/drawing/2014/main" id="{C7C01B81-CA46-4A6D-917A-458EBB62E59C}"/>
               </a:ext>
             </a:extLst>
           </p:cNvPr>
@@ -13449,8 +13659,8 @@
         </p:nvSpPr>
         <p:spPr>
           <a:xfrm xmlns:a="http://schemas.openxmlformats.org/drawingml/2006/main">
-            <a:off x="4381500" y="1809750"/>
-            <a:ext cx="3524250" cy="952500"/>
+            <a:off x="609600" y="2000250"/>
+            <a:ext cx="3333750" cy="857250"/>
           </a:xfrm>
           <a:prstGeom xmlns:a="http://schemas.openxmlformats.org/drawingml/2006/main" prst="rect">
             <a:avLst/>
@@ -13464,70 +13674,70 @@
           <a:bodyPr xmlns:a="http://schemas.openxmlformats.org/drawingml/2006/main"/>
           <a:lstStyle xmlns:a="http://schemas.openxmlformats.org/drawingml/2006/main">
             <a:defPPr>
-              <a:defRPr sz="2100" b="1">
+              <a:defRPr sz="2250" b="1">
                 <a:solidFill>
                   <a:srgbClr val="67B9FF"/>
                 </a:solidFill>
               </a:defRPr>
             </a:defPPr>
             <a:lvl1pPr>
-              <a:defRPr sz="2100" b="1">
+              <a:defRPr sz="2250" b="1">
                 <a:solidFill>
                   <a:srgbClr val="67B9FF"/>
                 </a:solidFill>
               </a:defRPr>
             </a:lvl1pPr>
             <a:lvl2pPr>
-              <a:defRPr sz="2100" b="1">
+              <a:defRPr sz="2250" b="1">
                 <a:solidFill>
                   <a:srgbClr val="67B9FF"/>
                 </a:solidFill>
               </a:defRPr>
             </a:lvl2pPr>
             <a:lvl3pPr>
-              <a:defRPr sz="2100" b="1">
+              <a:defRPr sz="2250" b="1">
                 <a:solidFill>
                   <a:srgbClr val="67B9FF"/>
                 </a:solidFill>
               </a:defRPr>
             </a:lvl3pPr>
             <a:lvl4pPr>
-              <a:defRPr sz="2100" b="1">
+              <a:defRPr sz="2250" b="1">
                 <a:solidFill>
                   <a:srgbClr val="67B9FF"/>
                 </a:solidFill>
               </a:defRPr>
             </a:lvl4pPr>
             <a:lvl5pPr>
-              <a:defRPr sz="2100" b="1">
+              <a:defRPr sz="2250" b="1">
                 <a:solidFill>
                   <a:srgbClr val="67B9FF"/>
                 </a:solidFill>
               </a:defRPr>
             </a:lvl5pPr>
             <a:lvl6pPr>
-              <a:defRPr sz="2100" b="1">
+              <a:defRPr sz="2250" b="1">
                 <a:solidFill>
                   <a:srgbClr val="67B9FF"/>
                 </a:solidFill>
               </a:defRPr>
             </a:lvl6pPr>
             <a:lvl7pPr>
-              <a:defRPr sz="2100" b="1">
+              <a:defRPr sz="2250" b="1">
                 <a:solidFill>
                   <a:srgbClr val="67B9FF"/>
                 </a:solidFill>
               </a:defRPr>
             </a:lvl7pPr>
             <a:lvl8pPr>
-              <a:defRPr sz="2100" b="1">
+              <a:defRPr sz="2250" b="1">
                 <a:solidFill>
                   <a:srgbClr val="67B9FF"/>
                 </a:solidFill>
               </a:defRPr>
             </a:lvl8pPr>
             <a:lvl9pPr>
-              <a:defRPr sz="2100" b="1">
+              <a:defRPr sz="2250" b="1">
                 <a:solidFill>
                   <a:srgbClr val="67B9FF"/>
                 </a:solidFill>
@@ -13536,36 +13746,36 @@
           </a:lstStyle>
           <a:p xmlns:a="http://schemas.openxmlformats.org/drawingml/2006/main">
             <a:pPr>
-              <a:defRPr sz="2100" b="1">
+              <a:defRPr sz="2250" b="1">
                 <a:solidFill>
                   <a:srgbClr val="67B9FF"/>
                 </a:solidFill>
               </a:defRPr>
             </a:pPr>
             <a:r>
-              <a:rPr sz="2100" b="1">
+              <a:rPr sz="2250" b="1">
                 <a:solidFill>
                   <a:srgbClr val="67B9FF"/>
                 </a:solidFill>
               </a:rPr>
-              <a:t>Productos y movimientos</a:t>
+              <a:t>Registro e historial</a:t>
             </a:r>
           </a:p>
           <a:p xmlns:a="http://schemas.openxmlformats.org/drawingml/2006/main">
             <a:pPr>
-              <a:defRPr sz="2100" b="1">
+              <a:defRPr sz="2250" b="1">
                 <a:solidFill>
                   <a:srgbClr val="67B9FF"/>
                 </a:solidFill>
               </a:defRPr>
             </a:pPr>
             <a:r>
-              <a:rPr sz="2100" b="1">
+              <a:rPr sz="2250" b="1">
                 <a:solidFill>
                   <a:srgbClr val="67B9FF"/>
                 </a:solidFill>
               </a:rPr>
-              <a:t>en un mismo sistema</a:t>
+              <a:t>de ventas</a:t>
             </a:r>
           </a:p>
         </p:txBody>
@@ -13575,7 +13785,7 @@
           <p:cNvPr id="7" name="">
             <a:extLst xmlns:a="http://schemas.openxmlformats.org/drawingml/2006/main">
               <a:ext uri="{FF2B5EF4-FFF2-40B4-BE49-F238E27FC236}">
-                <a16:creationId xmlns:a16="http://schemas.microsoft.com/office/drawing/2014/main" id="{F9B427E1-5CFA-4BA1-909A-ED1ABD277D25}"/>
+                <a16:creationId xmlns:a16="http://schemas.microsoft.com/office/drawing/2014/main" id="{C988B6E9-5224-4EA1-B342-939E585A53FB}"/>
               </a:ext>
             </a:extLst>
           </p:cNvPr>
@@ -13586,8 +13796,8 @@
         </p:nvSpPr>
         <p:spPr>
           <a:xfrm xmlns:a="http://schemas.openxmlformats.org/drawingml/2006/main">
-            <a:off x="4381500" y="3143250"/>
-            <a:ext cx="3524250" cy="952500"/>
+            <a:off x="4333875" y="2000250"/>
+            <a:ext cx="3333750" cy="857250"/>
           </a:xfrm>
           <a:prstGeom xmlns:a="http://schemas.openxmlformats.org/drawingml/2006/main" prst="rect">
             <a:avLst/>
@@ -13601,70 +13811,70 @@
           <a:bodyPr xmlns:a="http://schemas.openxmlformats.org/drawingml/2006/main"/>
           <a:lstStyle xmlns:a="http://schemas.openxmlformats.org/drawingml/2006/main">
             <a:defPPr>
-              <a:defRPr sz="2100" b="1">
+              <a:defRPr sz="2250" b="1">
                 <a:solidFill>
                   <a:srgbClr val="67B9FF"/>
                 </a:solidFill>
               </a:defRPr>
             </a:defPPr>
             <a:lvl1pPr>
-              <a:defRPr sz="2100" b="1">
+              <a:defRPr sz="2250" b="1">
                 <a:solidFill>
                   <a:srgbClr val="67B9FF"/>
                 </a:solidFill>
               </a:defRPr>
             </a:lvl1pPr>
             <a:lvl2pPr>
-              <a:defRPr sz="2100" b="1">
+              <a:defRPr sz="2250" b="1">
                 <a:solidFill>
                   <a:srgbClr val="67B9FF"/>
                 </a:solidFill>
               </a:defRPr>
             </a:lvl2pPr>
             <a:lvl3pPr>
-              <a:defRPr sz="2100" b="1">
+              <a:defRPr sz="2250" b="1">
                 <a:solidFill>
                   <a:srgbClr val="67B9FF"/>
                 </a:solidFill>
               </a:defRPr>
             </a:lvl3pPr>
             <a:lvl4pPr>
-              <a:defRPr sz="2100" b="1">
+              <a:defRPr sz="2250" b="1">
                 <a:solidFill>
                   <a:srgbClr val="67B9FF"/>
                 </a:solidFill>
               </a:defRPr>
             </a:lvl4pPr>
             <a:lvl5pPr>
-              <a:defRPr sz="2100" b="1">
+              <a:defRPr sz="2250" b="1">
                 <a:solidFill>
                   <a:srgbClr val="67B9FF"/>
                 </a:solidFill>
               </a:defRPr>
             </a:lvl5pPr>
             <a:lvl6pPr>
-              <a:defRPr sz="2100" b="1">
+              <a:defRPr sz="2250" b="1">
                 <a:solidFill>
                   <a:srgbClr val="67B9FF"/>
                 </a:solidFill>
               </a:defRPr>
             </a:lvl6pPr>
             <a:lvl7pPr>
-              <a:defRPr sz="2100" b="1">
+              <a:defRPr sz="2250" b="1">
                 <a:solidFill>
                   <a:srgbClr val="67B9FF"/>
                 </a:solidFill>
               </a:defRPr>
             </a:lvl7pPr>
             <a:lvl8pPr>
-              <a:defRPr sz="2100" b="1">
+              <a:defRPr sz="2250" b="1">
                 <a:solidFill>
                   <a:srgbClr val="67B9FF"/>
                 </a:solidFill>
               </a:defRPr>
             </a:lvl8pPr>
             <a:lvl9pPr>
-              <a:defRPr sz="2100" b="1">
+              <a:defRPr sz="2250" b="1">
                 <a:solidFill>
                   <a:srgbClr val="67B9FF"/>
                 </a:solidFill>
@@ -13673,36 +13883,36 @@
           </a:lstStyle>
           <a:p xmlns:a="http://schemas.openxmlformats.org/drawingml/2006/main">
             <a:pPr>
-              <a:defRPr sz="2100" b="1">
+              <a:defRPr sz="2250" b="1">
                 <a:solidFill>
                   <a:srgbClr val="67B9FF"/>
                 </a:solidFill>
               </a:defRPr>
             </a:pPr>
             <a:r>
-              <a:rPr sz="2100" b="1">
+              <a:rPr sz="2250" b="1">
                 <a:solidFill>
                   <a:srgbClr val="67B9FF"/>
                 </a:solidFill>
               </a:rPr>
-              <a:t>Compras y ventas</a:t>
+              <a:t>Existencias al registrar</a:t>
             </a:r>
           </a:p>
           <a:p xmlns:a="http://schemas.openxmlformats.org/drawingml/2006/main">
             <a:pPr>
-              <a:defRPr sz="2100" b="1">
+              <a:defRPr sz="2250" b="1">
                 <a:solidFill>
                   <a:srgbClr val="67B9FF"/>
                 </a:solidFill>
               </a:defRPr>
             </a:pPr>
             <a:r>
-              <a:rPr sz="2100" b="1">
+              <a:rPr sz="2250" b="1">
                 <a:solidFill>
                   <a:srgbClr val="67B9FF"/>
                 </a:solidFill>
               </a:rPr>
-              <a:t>vinculadas al stock</a:t>
+              <a:t>las operaciones</a:t>
             </a:r>
           </a:p>
         </p:txBody>
@@ -13712,7 +13922,7 @@
           <p:cNvPr id="8" name="">
             <a:extLst xmlns:a="http://schemas.openxmlformats.org/drawingml/2006/main">
               <a:ext uri="{FF2B5EF4-FFF2-40B4-BE49-F238E27FC236}">
-                <a16:creationId xmlns:a16="http://schemas.microsoft.com/office/drawing/2014/main" id="{9CAE795B-BAA4-434A-90DA-7C3C4C31D6FF}"/>
+                <a16:creationId xmlns:a16="http://schemas.microsoft.com/office/drawing/2014/main" id="{68861529-F2CC-4C69-8C68-306A32750F66}"/>
               </a:ext>
             </a:extLst>
           </p:cNvPr>
@@ -13723,8 +13933,8 @@
         </p:nvSpPr>
         <p:spPr>
           <a:xfrm xmlns:a="http://schemas.openxmlformats.org/drawingml/2006/main">
-            <a:off x="4381500" y="4476750"/>
-            <a:ext cx="3524250" cy="952500"/>
+            <a:off x="8058150" y="2000250"/>
+            <a:ext cx="3333750" cy="857250"/>
           </a:xfrm>
           <a:prstGeom xmlns:a="http://schemas.openxmlformats.org/drawingml/2006/main" prst="rect">
             <a:avLst/>
@@ -13738,70 +13948,70 @@
           <a:bodyPr xmlns:a="http://schemas.openxmlformats.org/drawingml/2006/main"/>
           <a:lstStyle xmlns:a="http://schemas.openxmlformats.org/drawingml/2006/main">
             <a:defPPr>
-              <a:defRPr sz="2100" b="1">
+              <a:defRPr sz="2250" b="1">
                 <a:solidFill>
                   <a:srgbClr val="67B9FF"/>
                 </a:solidFill>
               </a:defRPr>
             </a:defPPr>
             <a:lvl1pPr>
-              <a:defRPr sz="2100" b="1">
+              <a:defRPr sz="2250" b="1">
                 <a:solidFill>
                   <a:srgbClr val="67B9FF"/>
                 </a:solidFill>
               </a:defRPr>
             </a:lvl1pPr>
             <a:lvl2pPr>
-              <a:defRPr sz="2100" b="1">
+              <a:defRPr sz="2250" b="1">
                 <a:solidFill>
                   <a:srgbClr val="67B9FF"/>
                 </a:solidFill>
               </a:defRPr>
             </a:lvl2pPr>
             <a:lvl3pPr>
-              <a:defRPr sz="2100" b="1">
+              <a:defRPr sz="2250" b="1">
                 <a:solidFill>
                   <a:srgbClr val="67B9FF"/>
                 </a:solidFill>
               </a:defRPr>
             </a:lvl3pPr>
             <a:lvl4pPr>
-              <a:defRPr sz="2100" b="1">
+              <a:defRPr sz="2250" b="1">
                 <a:solidFill>
                   <a:srgbClr val="67B9FF"/>
                 </a:solidFill>
               </a:defRPr>
             </a:lvl4pPr>
             <a:lvl5pPr>
-              <a:defRPr sz="2100" b="1">
+              <a:defRPr sz="2250" b="1">
                 <a:solidFill>
                   <a:srgbClr val="67B9FF"/>
                 </a:solidFill>
               </a:defRPr>
             </a:lvl5pPr>
             <a:lvl6pPr>
-              <a:defRPr sz="2100" b="1">
+              <a:defRPr sz="2250" b="1">
                 <a:solidFill>
                   <a:srgbClr val="67B9FF"/>
                 </a:solidFill>
               </a:defRPr>
             </a:lvl6pPr>
             <a:lvl7pPr>
-              <a:defRPr sz="2100" b="1">
+              <a:defRPr sz="2250" b="1">
                 <a:solidFill>
                   <a:srgbClr val="67B9FF"/>
                 </a:solidFill>
               </a:defRPr>
             </a:lvl7pPr>
             <a:lvl8pPr>
-              <a:defRPr sz="2100" b="1">
+              <a:defRPr sz="2250" b="1">
                 <a:solidFill>
                   <a:srgbClr val="67B9FF"/>
                 </a:solidFill>
               </a:defRPr>
             </a:lvl8pPr>
             <a:lvl9pPr>
-              <a:defRPr sz="2100" b="1">
+              <a:defRPr sz="2250" b="1">
                 <a:solidFill>
                   <a:srgbClr val="67B9FF"/>
                 </a:solidFill>
@@ -13810,46 +14020,130 @@
           </a:lstStyle>
           <a:p xmlns:a="http://schemas.openxmlformats.org/drawingml/2006/main">
             <a:pPr>
-              <a:defRPr sz="2100" b="1">
+              <a:defRPr sz="2250" b="1">
                 <a:solidFill>
                   <a:srgbClr val="67B9FF"/>
                 </a:solidFill>
               </a:defRPr>
             </a:pPr>
             <a:r>
-              <a:rPr sz="2100" b="1">
+              <a:rPr sz="2250" b="1">
                 <a:solidFill>
                   <a:srgbClr val="67B9FF"/>
                 </a:solidFill>
               </a:rPr>
-              <a:t>Roles y turnos</a:t>
+              <a:t>Asignación y consulta</a:t>
             </a:r>
           </a:p>
           <a:p xmlns:a="http://schemas.openxmlformats.org/drawingml/2006/main">
             <a:pPr>
-              <a:defRPr sz="2100" b="1">
+              <a:defRPr sz="2250" b="1">
                 <a:solidFill>
                   <a:srgbClr val="67B9FF"/>
                 </a:solidFill>
               </a:defRPr>
             </a:pPr>
             <a:r>
-              <a:rPr sz="2100" b="1">
+              <a:rPr sz="2250" b="1">
                 <a:solidFill>
                   <a:srgbClr val="67B9FF"/>
                 </a:solidFill>
               </a:rPr>
-              <a:t>según la tarea</a:t>
+              <a:t>de turnos</a:t>
             </a:r>
           </a:p>
         </p:txBody>
       </p:sp>
-      <p:sp>
-        <p:nvSpPr>
+      <p:pic>
+        <p:nvPicPr>
           <p:cNvPr id="9" name="">
             <a:extLst xmlns:a="http://schemas.openxmlformats.org/drawingml/2006/main">
               <a:ext uri="{FF2B5EF4-FFF2-40B4-BE49-F238E27FC236}">
-                <a16:creationId xmlns:a16="http://schemas.microsoft.com/office/drawing/2014/main" id="{F6989771-FD47-413C-8F6E-9C16E6A3955F}"/>
+                <a16:creationId xmlns:a16="http://schemas.microsoft.com/office/drawing/2014/main" id="{EA38F30A-AA12-4B81-A01D-2018306FE60C}"/>
+              </a:ext>
+            </a:extLst>
+          </p:cNvPr>
+          <p:cNvPicPr>
+            <a:picLocks xmlns:a="http://schemas.openxmlformats.org/drawingml/2006/main" noChangeAspect="1"/>
+          </p:cNvPicPr>
+          <p:nvPr/>
+        </p:nvPicPr>
+        <p:blipFill>
+          <a:blip xmlns:r="http://schemas.openxmlformats.org/officeDocument/2006/relationships" xmlns:a="http://schemas.openxmlformats.org/drawingml/2006/main" r:embed="Rcadf64d6198e40a8"/>
+          <a:stretch xmlns:a="http://schemas.openxmlformats.org/drawingml/2006/main"/>
+        </p:blipFill>
+        <p:spPr>
+          <a:xfrm xmlns:a="http://schemas.openxmlformats.org/drawingml/2006/main">
+            <a:off x="1513342" y="2981325"/>
+            <a:ext cx="1402442" cy="2571750"/>
+          </a:xfrm>
+          <a:prstGeom xmlns:a="http://schemas.openxmlformats.org/drawingml/2006/main" prst="rect">
+            <a:avLst/>
+          </a:prstGeom>
+        </p:spPr>
+      </p:pic>
+      <p:pic>
+        <p:nvPicPr>
+          <p:cNvPr id="10" name="">
+            <a:extLst xmlns:a="http://schemas.openxmlformats.org/drawingml/2006/main">
+              <a:ext uri="{FF2B5EF4-FFF2-40B4-BE49-F238E27FC236}">
+                <a16:creationId xmlns:a16="http://schemas.microsoft.com/office/drawing/2014/main" id="{0250ACE9-3489-4CA4-8D33-EC5A38618634}"/>
+              </a:ext>
+            </a:extLst>
+          </p:cNvPr>
+          <p:cNvPicPr>
+            <a:picLocks xmlns:a="http://schemas.openxmlformats.org/drawingml/2006/main" noChangeAspect="1"/>
+          </p:cNvPicPr>
+          <p:nvPr/>
+        </p:nvPicPr>
+        <p:blipFill>
+          <a:blip xmlns:r="http://schemas.openxmlformats.org/officeDocument/2006/relationships" xmlns:a="http://schemas.openxmlformats.org/drawingml/2006/main" r:embed="Ra058195178534a86"/>
+          <a:stretch xmlns:a="http://schemas.openxmlformats.org/drawingml/2006/main"/>
+        </p:blipFill>
+        <p:spPr>
+          <a:xfrm xmlns:a="http://schemas.openxmlformats.org/drawingml/2006/main">
+            <a:off x="5228092" y="2981325"/>
+            <a:ext cx="1402442" cy="2571750"/>
+          </a:xfrm>
+          <a:prstGeom xmlns:a="http://schemas.openxmlformats.org/drawingml/2006/main" prst="rect">
+            <a:avLst/>
+          </a:prstGeom>
+        </p:spPr>
+      </p:pic>
+      <p:pic>
+        <p:nvPicPr>
+          <p:cNvPr id="11" name="">
+            <a:extLst xmlns:a="http://schemas.openxmlformats.org/drawingml/2006/main">
+              <a:ext uri="{FF2B5EF4-FFF2-40B4-BE49-F238E27FC236}">
+                <a16:creationId xmlns:a16="http://schemas.microsoft.com/office/drawing/2014/main" id="{E250ABD5-1594-4FF4-BBC0-DB1F1757CF5A}"/>
+              </a:ext>
+            </a:extLst>
+          </p:cNvPr>
+          <p:cNvPicPr>
+            <a:picLocks xmlns:a="http://schemas.openxmlformats.org/drawingml/2006/main" noChangeAspect="1"/>
+          </p:cNvPicPr>
+          <p:nvPr/>
+        </p:nvPicPr>
+        <p:blipFill>
+          <a:blip xmlns:r="http://schemas.openxmlformats.org/officeDocument/2006/relationships" xmlns:a="http://schemas.openxmlformats.org/drawingml/2006/main" r:embed="Rcd80d87f220b4ad1"/>
+          <a:stretch xmlns:a="http://schemas.openxmlformats.org/drawingml/2006/main"/>
+        </p:blipFill>
+        <p:spPr>
+          <a:xfrm xmlns:a="http://schemas.openxmlformats.org/drawingml/2006/main">
+            <a:off x="8942842" y="2981325"/>
+            <a:ext cx="1402442" cy="2571750"/>
+          </a:xfrm>
+          <a:prstGeom xmlns:a="http://schemas.openxmlformats.org/drawingml/2006/main" prst="rect">
+            <a:avLst/>
+          </a:prstGeom>
+        </p:spPr>
+      </p:pic>
+      <p:sp>
+        <p:nvSpPr>
+          <p:cNvPr id="12" name="">
+            <a:extLst xmlns:a="http://schemas.openxmlformats.org/drawingml/2006/main">
+              <a:ext uri="{FF2B5EF4-FFF2-40B4-BE49-F238E27FC236}">
+                <a16:creationId xmlns:a16="http://schemas.microsoft.com/office/drawing/2014/main" id="{F56E4F9D-50CF-43F0-9F90-52D262E3D81B}"/>
               </a:ext>
             </a:extLst>
           </p:cNvPr>
@@ -13860,8 +14154,8 @@
         </p:nvSpPr>
         <p:spPr>
           <a:xfrm xmlns:a="http://schemas.openxmlformats.org/drawingml/2006/main">
-            <a:off x="8477250" y="1809750"/>
-            <a:ext cx="3048000" cy="952500"/>
+            <a:off x="609600" y="5619750"/>
+            <a:ext cx="3333750" cy="819150"/>
           </a:xfrm>
           <a:prstGeom xmlns:a="http://schemas.openxmlformats.org/drawingml/2006/main" prst="rect">
             <a:avLst/>
@@ -13875,70 +14169,70 @@
           <a:bodyPr xmlns:a="http://schemas.openxmlformats.org/drawingml/2006/main"/>
           <a:lstStyle xmlns:a="http://schemas.openxmlformats.org/drawingml/2006/main">
             <a:defPPr>
-              <a:defRPr sz="1950" b="0">
+              <a:defRPr sz="1875" b="1">
                 <a:solidFill>
                   <a:srgbClr val="FFFFFF"/>
                 </a:solidFill>
               </a:defRPr>
             </a:defPPr>
             <a:lvl1pPr>
-              <a:defRPr sz="1950" b="0">
+              <a:defRPr sz="1875" b="1">
                 <a:solidFill>
                   <a:srgbClr val="FFFFFF"/>
                 </a:solidFill>
               </a:defRPr>
             </a:lvl1pPr>
             <a:lvl2pPr>
-              <a:defRPr sz="1950" b="0">
+              <a:defRPr sz="1875" b="1">
                 <a:solidFill>
                   <a:srgbClr val="FFFFFF"/>
                 </a:solidFill>
               </a:defRPr>
             </a:lvl2pPr>
             <a:lvl3pPr>
-              <a:defRPr sz="1950" b="0">
+              <a:defRPr sz="1875" b="1">
                 <a:solidFill>
                   <a:srgbClr val="FFFFFF"/>
                 </a:solidFill>
               </a:defRPr>
             </a:lvl3pPr>
             <a:lvl4pPr>
-              <a:defRPr sz="1950" b="0">
+              <a:defRPr sz="1875" b="1">
                 <a:solidFill>
                   <a:srgbClr val="FFFFFF"/>
                 </a:solidFill>
               </a:defRPr>
             </a:lvl4pPr>
             <a:lvl5pPr>
-              <a:defRPr sz="1950" b="0">
+              <a:defRPr sz="1875" b="1">
                 <a:solidFill>
                   <a:srgbClr val="FFFFFF"/>
                 </a:solidFill>
               </a:defRPr>
             </a:lvl5pPr>
             <a:lvl6pPr>
-              <a:defRPr sz="1950" b="0">
+              <a:defRPr sz="1875" b="1">
                 <a:solidFill>
                   <a:srgbClr val="FFFFFF"/>
                 </a:solidFill>
               </a:defRPr>
             </a:lvl6pPr>
             <a:lvl7pPr>
-              <a:defRPr sz="1950" b="0">
+              <a:defRPr sz="1875" b="1">
                 <a:solidFill>
                   <a:srgbClr val="FFFFFF"/>
                 </a:solidFill>
               </a:defRPr>
             </a:lvl7pPr>
             <a:lvl8pPr>
-              <a:defRPr sz="1950" b="0">
+              <a:defRPr sz="1875" b="1">
                 <a:solidFill>
                   <a:srgbClr val="FFFFFF"/>
                 </a:solidFill>
               </a:defRPr>
             </a:lvl8pPr>
             <a:lvl9pPr>
-              <a:defRPr sz="1950" b="0">
+              <a:defRPr sz="1875" b="1">
                 <a:solidFill>
                   <a:srgbClr val="FFFFFF"/>
                 </a:solidFill>
@@ -13947,29 +14241,29 @@
           </a:lstStyle>
           <a:p xmlns:a="http://schemas.openxmlformats.org/drawingml/2006/main">
             <a:pPr>
-              <a:defRPr sz="1950" b="0">
+              <a:defRPr sz="1875" b="1">
                 <a:solidFill>
                   <a:srgbClr val="FFFFFF"/>
                 </a:solidFill>
               </a:defRPr>
             </a:pPr>
             <a:r>
-              <a:rPr sz="1950" b="0">
+              <a:rPr sz="1875" b="1">
                 <a:solidFill>
                   <a:srgbClr val="FFFFFF"/>
                 </a:solidFill>
               </a:rPr>
-              <a:t>Consultar la actividad</a:t>
+              <a:t>Consultar qué se vendió durante cada turno</a:t>
             </a:r>
           </a:p>
         </p:txBody>
       </p:sp>
       <p:sp>
         <p:nvSpPr>
-          <p:cNvPr id="10" name="">
+          <p:cNvPr id="13" name="">
             <a:extLst xmlns:a="http://schemas.openxmlformats.org/drawingml/2006/main">
               <a:ext uri="{FF2B5EF4-FFF2-40B4-BE49-F238E27FC236}">
-                <a16:creationId xmlns:a16="http://schemas.microsoft.com/office/drawing/2014/main" id="{F705C2B3-1E0C-4B8C-8930-867D6013B171}"/>
+                <a16:creationId xmlns:a16="http://schemas.microsoft.com/office/drawing/2014/main" id="{0D228B84-F1FC-4EF6-A6F8-4E492A745C3F}"/>
               </a:ext>
             </a:extLst>
           </p:cNvPr>
@@ -13980,8 +14274,8 @@
         </p:nvSpPr>
         <p:spPr>
           <a:xfrm xmlns:a="http://schemas.openxmlformats.org/drawingml/2006/main">
-            <a:off x="8477250" y="3143250"/>
-            <a:ext cx="3048000" cy="952500"/>
+            <a:off x="4333875" y="5619750"/>
+            <a:ext cx="3333750" cy="819150"/>
           </a:xfrm>
           <a:prstGeom xmlns:a="http://schemas.openxmlformats.org/drawingml/2006/main" prst="rect">
             <a:avLst/>
@@ -13995,70 +14289,70 @@
           <a:bodyPr xmlns:a="http://schemas.openxmlformats.org/drawingml/2006/main"/>
           <a:lstStyle xmlns:a="http://schemas.openxmlformats.org/drawingml/2006/main">
             <a:defPPr>
-              <a:defRPr sz="1950" b="0">
+              <a:defRPr sz="1875" b="1">
                 <a:solidFill>
                   <a:srgbClr val="FFFFFF"/>
                 </a:solidFill>
               </a:defRPr>
             </a:defPPr>
             <a:lvl1pPr>
-              <a:defRPr sz="1950" b="0">
+              <a:defRPr sz="1875" b="1">
                 <a:solidFill>
                   <a:srgbClr val="FFFFFF"/>
                 </a:solidFill>
               </a:defRPr>
             </a:lvl1pPr>
             <a:lvl2pPr>
-              <a:defRPr sz="1950" b="0">
+              <a:defRPr sz="1875" b="1">
                 <a:solidFill>
                   <a:srgbClr val="FFFFFF"/>
                 </a:solidFill>
               </a:defRPr>
             </a:lvl2pPr>
             <a:lvl3pPr>
-              <a:defRPr sz="1950" b="0">
+              <a:defRPr sz="1875" b="1">
                 <a:solidFill>
                   <a:srgbClr val="FFFFFF"/>
                 </a:solidFill>
               </a:defRPr>
             </a:lvl3pPr>
             <a:lvl4pPr>
-              <a:defRPr sz="1950" b="0">
+              <a:defRPr sz="1875" b="1">
                 <a:solidFill>
                   <a:srgbClr val="FFFFFF"/>
                 </a:solidFill>
               </a:defRPr>
             </a:lvl4pPr>
             <a:lvl5pPr>
-              <a:defRPr sz="1950" b="0">
+              <a:defRPr sz="1875" b="1">
                 <a:solidFill>
                   <a:srgbClr val="FFFFFF"/>
                 </a:solidFill>
               </a:defRPr>
             </a:lvl5pPr>
             <a:lvl6pPr>
-              <a:defRPr sz="1950" b="0">
+              <a:defRPr sz="1875" b="1">
                 <a:solidFill>
                   <a:srgbClr val="FFFFFF"/>
                 </a:solidFill>
               </a:defRPr>
             </a:lvl6pPr>
             <a:lvl7pPr>
-              <a:defRPr sz="1950" b="0">
+              <a:defRPr sz="1875" b="1">
                 <a:solidFill>
                   <a:srgbClr val="FFFFFF"/>
                 </a:solidFill>
               </a:defRPr>
             </a:lvl7pPr>
             <a:lvl8pPr>
-              <a:defRPr sz="1950" b="0">
+              <a:defRPr sz="1875" b="1">
                 <a:solidFill>
                   <a:srgbClr val="FFFFFF"/>
                 </a:solidFill>
               </a:defRPr>
             </a:lvl8pPr>
             <a:lvl9pPr>
-              <a:defRPr sz="1950" b="0">
+              <a:defRPr sz="1875" b="1">
                 <a:solidFill>
                   <a:srgbClr val="FFFFFF"/>
                 </a:solidFill>
@@ -14067,29 +14361,29 @@
           </a:lstStyle>
           <a:p xmlns:a="http://schemas.openxmlformats.org/drawingml/2006/main">
             <a:pPr>
-              <a:defRPr sz="1950" b="0">
+              <a:defRPr sz="1875" b="1">
                 <a:solidFill>
                   <a:srgbClr val="FFFFFF"/>
                 </a:solidFill>
               </a:defRPr>
             </a:pPr>
             <a:r>
-              <a:rPr sz="1950" b="0">
+              <a:rPr sz="1875" b="1">
                 <a:solidFill>
                   <a:srgbClr val="FFFFFF"/>
                 </a:solidFill>
               </a:rPr>
-              <a:t>Ver las existencias</a:t>
+              <a:t>Consultar disponibilidad y orientar la reposición</a:t>
             </a:r>
           </a:p>
         </p:txBody>
       </p:sp>
       <p:sp>
         <p:nvSpPr>
-          <p:cNvPr id="11" name="">
+          <p:cNvPr id="14" name="">
             <a:extLst xmlns:a="http://schemas.openxmlformats.org/drawingml/2006/main">
               <a:ext uri="{FF2B5EF4-FFF2-40B4-BE49-F238E27FC236}">
-                <a16:creationId xmlns:a16="http://schemas.microsoft.com/office/drawing/2014/main" id="{C92F91D3-A952-420E-8553-FEAF3D973BAD}"/>
+                <a16:creationId xmlns:a16="http://schemas.microsoft.com/office/drawing/2014/main" id="{A3E61DB4-0B5F-4C20-91DA-E2E02FFF9B91}"/>
               </a:ext>
             </a:extLst>
           </p:cNvPr>
@@ -14100,8 +14394,8 @@
         </p:nvSpPr>
         <p:spPr>
           <a:xfrm xmlns:a="http://schemas.openxmlformats.org/drawingml/2006/main">
-            <a:off x="8477250" y="4476750"/>
-            <a:ext cx="3048000" cy="952500"/>
+            <a:off x="8058150" y="5619750"/>
+            <a:ext cx="3333750" cy="819150"/>
           </a:xfrm>
           <a:prstGeom xmlns:a="http://schemas.openxmlformats.org/drawingml/2006/main" prst="rect">
             <a:avLst/>
@@ -14115,70 +14409,70 @@
           <a:bodyPr xmlns:a="http://schemas.openxmlformats.org/drawingml/2006/main"/>
           <a:lstStyle xmlns:a="http://schemas.openxmlformats.org/drawingml/2006/main">
             <a:defPPr>
-              <a:defRPr sz="1950" b="0">
+              <a:defRPr sz="1875" b="1">
                 <a:solidFill>
                   <a:srgbClr val="FFFFFF"/>
                 </a:solidFill>
               </a:defRPr>
             </a:defPPr>
             <a:lvl1pPr>
-              <a:defRPr sz="1950" b="0">
+              <a:defRPr sz="1875" b="1">
                 <a:solidFill>
                   <a:srgbClr val="FFFFFF"/>
                 </a:solidFill>
               </a:defRPr>
             </a:lvl1pPr>
             <a:lvl2pPr>
-              <a:defRPr sz="1950" b="0">
+              <a:defRPr sz="1875" b="1">
                 <a:solidFill>
                   <a:srgbClr val="FFFFFF"/>
                 </a:solidFill>
               </a:defRPr>
             </a:lvl2pPr>
             <a:lvl3pPr>
-              <a:defRPr sz="1950" b="0">
+              <a:defRPr sz="1875" b="1">
                 <a:solidFill>
                   <a:srgbClr val="FFFFFF"/>
                 </a:solidFill>
               </a:defRPr>
             </a:lvl3pPr>
             <a:lvl4pPr>
-              <a:defRPr sz="1950" b="0">
+              <a:defRPr sz="1875" b="1">
                 <a:solidFill>
                   <a:srgbClr val="FFFFFF"/>
                 </a:solidFill>
               </a:defRPr>
             </a:lvl4pPr>
             <a:lvl5pPr>
-              <a:defRPr sz="1950" b="0">
+              <a:defRPr sz="1875" b="1">
                 <a:solidFill>
                   <a:srgbClr val="FFFFFF"/>
                 </a:solidFill>
               </a:defRPr>
             </a:lvl5pPr>
             <a:lvl6pPr>
-              <a:defRPr sz="1950" b="0">
+              <a:defRPr sz="1875" b="1">
                 <a:solidFill>
                   <a:srgbClr val="FFFFFF"/>
                 </a:solidFill>
               </a:defRPr>
             </a:lvl6pPr>
             <a:lvl7pPr>
-              <a:defRPr sz="1950" b="0">
+              <a:defRPr sz="1875" b="1">
                 <a:solidFill>
                   <a:srgbClr val="FFFFFF"/>
                 </a:solidFill>
               </a:defRPr>
             </a:lvl7pPr>
             <a:lvl8pPr>
-              <a:defRPr sz="1950" b="0">
+              <a:defRPr sz="1875" b="1">
                 <a:solidFill>
                   <a:srgbClr val="FFFFFF"/>
                 </a:solidFill>
               </a:defRPr>
             </a:lvl8pPr>
             <a:lvl9pPr>
-              <a:defRPr sz="1950" b="0">
+              <a:defRPr sz="1875" b="1">
                 <a:solidFill>
                   <a:srgbClr val="FFFFFF"/>
                 </a:solidFill>
@@ -14187,379 +14481,19 @@
           </a:lstStyle>
           <a:p xmlns:a="http://schemas.openxmlformats.org/drawingml/2006/main">
             <a:pPr>
-              <a:defRPr sz="1950" b="0">
+              <a:defRPr sz="1875" b="1">
                 <a:solidFill>
                   <a:srgbClr val="FFFFFF"/>
                 </a:solidFill>
               </a:defRPr>
             </a:pPr>
             <a:r>
-              <a:rPr sz="1950" b="0">
+              <a:rPr sz="1875" b="1">
                 <a:solidFill>
                   <a:srgbClr val="FFFFFF"/>
                 </a:solidFill>
               </a:rPr>
-              <a:t>Organizar responsabilidades</a:t>
-            </a:r>
-          </a:p>
-        </p:txBody>
-      </p:sp>
-      <p:sp>
-        <p:nvSpPr>
-          <p:cNvPr id="12" name="">
-            <a:extLst xmlns:a="http://schemas.openxmlformats.org/drawingml/2006/main">
-              <a:ext uri="{FF2B5EF4-FFF2-40B4-BE49-F238E27FC236}">
-                <a16:creationId xmlns:a16="http://schemas.microsoft.com/office/drawing/2014/main" id="{68115AFA-E514-473C-AD0C-1BE60E05317A}"/>
-              </a:ext>
-            </a:extLst>
-          </p:cNvPr>
-          <p:cNvSpPr>
-            <a:spLocks xmlns:a="http://schemas.openxmlformats.org/drawingml/2006/main" noGrp="1"/>
-          </p:cNvSpPr>
-          <p:nvPr/>
-        </p:nvSpPr>
-        <p:spPr>
-          <a:xfrm xmlns:a="http://schemas.openxmlformats.org/drawingml/2006/main">
-            <a:off x="609600" y="1238250"/>
-            <a:ext cx="3333750" cy="333375"/>
-          </a:xfrm>
-          <a:prstGeom xmlns:a="http://schemas.openxmlformats.org/drawingml/2006/main" prst="rect">
-            <a:avLst/>
-          </a:prstGeom>
-          <a:noFill xmlns:a="http://schemas.openxmlformats.org/drawingml/2006/main"/>
-          <a:ln xmlns:a="http://schemas.openxmlformats.org/drawingml/2006/main" w="0">
-            <a:noFill/>
-          </a:ln>
-        </p:spPr>
-        <p:txBody>
-          <a:bodyPr xmlns:a="http://schemas.openxmlformats.org/drawingml/2006/main"/>
-          <a:lstStyle xmlns:a="http://schemas.openxmlformats.org/drawingml/2006/main">
-            <a:defPPr>
-              <a:defRPr sz="1500" b="0">
-                <a:solidFill>
-                  <a:srgbClr val="B6CCE9"/>
-                </a:solidFill>
-              </a:defRPr>
-            </a:defPPr>
-            <a:lvl1pPr>
-              <a:defRPr sz="1500" b="0">
-                <a:solidFill>
-                  <a:srgbClr val="B6CCE9"/>
-                </a:solidFill>
-              </a:defRPr>
-            </a:lvl1pPr>
-            <a:lvl2pPr>
-              <a:defRPr sz="1500" b="0">
-                <a:solidFill>
-                  <a:srgbClr val="B6CCE9"/>
-                </a:solidFill>
-              </a:defRPr>
-            </a:lvl2pPr>
-            <a:lvl3pPr>
-              <a:defRPr sz="1500" b="0">
-                <a:solidFill>
-                  <a:srgbClr val="B6CCE9"/>
-                </a:solidFill>
-              </a:defRPr>
-            </a:lvl3pPr>
-            <a:lvl4pPr>
-              <a:defRPr sz="1500" b="0">
-                <a:solidFill>
-                  <a:srgbClr val="B6CCE9"/>
-                </a:solidFill>
-              </a:defRPr>
-            </a:lvl4pPr>
-            <a:lvl5pPr>
-              <a:defRPr sz="1500" b="0">
-                <a:solidFill>
-                  <a:srgbClr val="B6CCE9"/>
-                </a:solidFill>
-              </a:defRPr>
-            </a:lvl5pPr>
-            <a:lvl6pPr>
-              <a:defRPr sz="1500" b="0">
-                <a:solidFill>
-                  <a:srgbClr val="B6CCE9"/>
-                </a:solidFill>
-              </a:defRPr>
-            </a:lvl6pPr>
-            <a:lvl7pPr>
-              <a:defRPr sz="1500" b="0">
-                <a:solidFill>
-                  <a:srgbClr val="B6CCE9"/>
-                </a:solidFill>
-              </a:defRPr>
-            </a:lvl7pPr>
-            <a:lvl8pPr>
-              <a:defRPr sz="1500" b="0">
-                <a:solidFill>
-                  <a:srgbClr val="B6CCE9"/>
-                </a:solidFill>
-              </a:defRPr>
-            </a:lvl8pPr>
-            <a:lvl9pPr>
-              <a:defRPr sz="1500" b="0">
-                <a:solidFill>
-                  <a:srgbClr val="B6CCE9"/>
-                </a:solidFill>
-              </a:defRPr>
-            </a:lvl9pPr>
-          </a:lstStyle>
-          <a:p xmlns:a="http://schemas.openxmlformats.org/drawingml/2006/main">
-            <a:pPr>
-              <a:defRPr sz="1500" b="0">
-                <a:solidFill>
-                  <a:srgbClr val="B6CCE9"/>
-                </a:solidFill>
-              </a:defRPr>
-            </a:pPr>
-            <a:r>
-              <a:rPr sz="1500" b="0">
-                <a:solidFill>
-                  <a:srgbClr val="B6CCE9"/>
-                </a:solidFill>
-              </a:rPr>
-              <a:t>Dificultad</a:t>
-            </a:r>
-          </a:p>
-        </p:txBody>
-      </p:sp>
-      <p:sp>
-        <p:nvSpPr>
-          <p:cNvPr id="13" name="">
-            <a:extLst xmlns:a="http://schemas.openxmlformats.org/drawingml/2006/main">
-              <a:ext uri="{FF2B5EF4-FFF2-40B4-BE49-F238E27FC236}">
-                <a16:creationId xmlns:a16="http://schemas.microsoft.com/office/drawing/2014/main" id="{51242C7B-9AC4-4A8A-BBAE-397A8AB2FCCA}"/>
-              </a:ext>
-            </a:extLst>
-          </p:cNvPr>
-          <p:cNvSpPr>
-            <a:spLocks xmlns:a="http://schemas.openxmlformats.org/drawingml/2006/main" noGrp="1"/>
-          </p:cNvSpPr>
-          <p:nvPr/>
-        </p:nvSpPr>
-        <p:spPr>
-          <a:xfrm xmlns:a="http://schemas.openxmlformats.org/drawingml/2006/main">
-            <a:off x="4381500" y="1238250"/>
-            <a:ext cx="3619500" cy="333375"/>
-          </a:xfrm>
-          <a:prstGeom xmlns:a="http://schemas.openxmlformats.org/drawingml/2006/main" prst="rect">
-            <a:avLst/>
-          </a:prstGeom>
-          <a:noFill xmlns:a="http://schemas.openxmlformats.org/drawingml/2006/main"/>
-          <a:ln xmlns:a="http://schemas.openxmlformats.org/drawingml/2006/main" w="0">
-            <a:noFill/>
-          </a:ln>
-        </p:spPr>
-        <p:txBody>
-          <a:bodyPr xmlns:a="http://schemas.openxmlformats.org/drawingml/2006/main"/>
-          <a:lstStyle xmlns:a="http://schemas.openxmlformats.org/drawingml/2006/main">
-            <a:defPPr>
-              <a:defRPr sz="1500" b="0">
-                <a:solidFill>
-                  <a:srgbClr val="B6CCE9"/>
-                </a:solidFill>
-              </a:defRPr>
-            </a:defPPr>
-            <a:lvl1pPr>
-              <a:defRPr sz="1500" b="0">
-                <a:solidFill>
-                  <a:srgbClr val="B6CCE9"/>
-                </a:solidFill>
-              </a:defRPr>
-            </a:lvl1pPr>
-            <a:lvl2pPr>
-              <a:defRPr sz="1500" b="0">
-                <a:solidFill>
-                  <a:srgbClr val="B6CCE9"/>
-                </a:solidFill>
-              </a:defRPr>
-            </a:lvl2pPr>
-            <a:lvl3pPr>
-              <a:defRPr sz="1500" b="0">
-                <a:solidFill>
-                  <a:srgbClr val="B6CCE9"/>
-                </a:solidFill>
-              </a:defRPr>
-            </a:lvl3pPr>
-            <a:lvl4pPr>
-              <a:defRPr sz="1500" b="0">
-                <a:solidFill>
-                  <a:srgbClr val="B6CCE9"/>
-                </a:solidFill>
-              </a:defRPr>
-            </a:lvl4pPr>
-            <a:lvl5pPr>
-              <a:defRPr sz="1500" b="0">
-                <a:solidFill>
-                  <a:srgbClr val="B6CCE9"/>
-                </a:solidFill>
-              </a:defRPr>
-            </a:lvl5pPr>
-            <a:lvl6pPr>
-              <a:defRPr sz="1500" b="0">
-                <a:solidFill>
-                  <a:srgbClr val="B6CCE9"/>
-                </a:solidFill>
-              </a:defRPr>
-            </a:lvl6pPr>
-            <a:lvl7pPr>
-              <a:defRPr sz="1500" b="0">
-                <a:solidFill>
-                  <a:srgbClr val="B6CCE9"/>
-                </a:solidFill>
-              </a:defRPr>
-            </a:lvl7pPr>
-            <a:lvl8pPr>
-              <a:defRPr sz="1500" b="0">
-                <a:solidFill>
-                  <a:srgbClr val="B6CCE9"/>
-                </a:solidFill>
-              </a:defRPr>
-            </a:lvl8pPr>
-            <a:lvl9pPr>
-              <a:defRPr sz="1500" b="0">
-                <a:solidFill>
-                  <a:srgbClr val="B6CCE9"/>
-                </a:solidFill>
-              </a:defRPr>
-            </a:lvl9pPr>
-          </a:lstStyle>
-          <a:p xmlns:a="http://schemas.openxmlformats.org/drawingml/2006/main">
-            <a:pPr>
-              <a:defRPr sz="1500" b="0">
-                <a:solidFill>
-                  <a:srgbClr val="B6CCE9"/>
-                </a:solidFill>
-              </a:defRPr>
-            </a:pPr>
-            <a:r>
-              <a:rPr sz="1500" b="0">
-                <a:solidFill>
-                  <a:srgbClr val="B6CCE9"/>
-                </a:solidFill>
-              </a:rPr>
-              <a:t>Respuesta de la aplicación</a:t>
-            </a:r>
-          </a:p>
-        </p:txBody>
-      </p:sp>
-      <p:sp>
-        <p:nvSpPr>
-          <p:cNvPr id="14" name="">
-            <a:extLst xmlns:a="http://schemas.openxmlformats.org/drawingml/2006/main">
-              <a:ext uri="{FF2B5EF4-FFF2-40B4-BE49-F238E27FC236}">
-                <a16:creationId xmlns:a16="http://schemas.microsoft.com/office/drawing/2014/main" id="{4568C30A-1A86-4705-9331-252E6B2FD894}"/>
-              </a:ext>
-            </a:extLst>
-          </p:cNvPr>
-          <p:cNvSpPr>
-            <a:spLocks xmlns:a="http://schemas.openxmlformats.org/drawingml/2006/main" noGrp="1"/>
-          </p:cNvSpPr>
-          <p:nvPr/>
-        </p:nvSpPr>
-        <p:spPr>
-          <a:xfrm xmlns:a="http://schemas.openxmlformats.org/drawingml/2006/main">
-            <a:off x="8477250" y="1238250"/>
-            <a:ext cx="3048000" cy="333375"/>
-          </a:xfrm>
-          <a:prstGeom xmlns:a="http://schemas.openxmlformats.org/drawingml/2006/main" prst="rect">
-            <a:avLst/>
-          </a:prstGeom>
-          <a:noFill xmlns:a="http://schemas.openxmlformats.org/drawingml/2006/main"/>
-          <a:ln xmlns:a="http://schemas.openxmlformats.org/drawingml/2006/main" w="0">
-            <a:noFill/>
-          </a:ln>
-        </p:spPr>
-        <p:txBody>
-          <a:bodyPr xmlns:a="http://schemas.openxmlformats.org/drawingml/2006/main"/>
-          <a:lstStyle xmlns:a="http://schemas.openxmlformats.org/drawingml/2006/main">
-            <a:defPPr>
-              <a:defRPr sz="1500" b="0">
-                <a:solidFill>
-                  <a:srgbClr val="B6CCE9"/>
-                </a:solidFill>
-              </a:defRPr>
-            </a:defPPr>
-            <a:lvl1pPr>
-              <a:defRPr sz="1500" b="0">
-                <a:solidFill>
-                  <a:srgbClr val="B6CCE9"/>
-                </a:solidFill>
-              </a:defRPr>
-            </a:lvl1pPr>
-            <a:lvl2pPr>
-              <a:defRPr sz="1500" b="0">
-                <a:solidFill>
-                  <a:srgbClr val="B6CCE9"/>
-                </a:solidFill>
-              </a:defRPr>
-            </a:lvl2pPr>
-            <a:lvl3pPr>
-              <a:defRPr sz="1500" b="0">
-                <a:solidFill>
-                  <a:srgbClr val="B6CCE9"/>
-                </a:solidFill>
-              </a:defRPr>
-            </a:lvl3pPr>
-            <a:lvl4pPr>
-              <a:defRPr sz="1500" b="0">
-                <a:solidFill>
-                  <a:srgbClr val="B6CCE9"/>
-                </a:solidFill>
-              </a:defRPr>
-            </a:lvl4pPr>
-            <a:lvl5pPr>
-              <a:defRPr sz="1500" b="0">
-                <a:solidFill>
-                  <a:srgbClr val="B6CCE9"/>
-                </a:solidFill>
-              </a:defRPr>
-            </a:lvl5pPr>
-            <a:lvl6pPr>
-              <a:defRPr sz="1500" b="0">
-                <a:solidFill>
-                  <a:srgbClr val="B6CCE9"/>
-                </a:solidFill>
-              </a:defRPr>
-            </a:lvl6pPr>
-            <a:lvl7pPr>
-              <a:defRPr sz="1500" b="0">
-                <a:solidFill>
-                  <a:srgbClr val="B6CCE9"/>
-                </a:solidFill>
-              </a:defRPr>
-            </a:lvl7pPr>
-            <a:lvl8pPr>
-              <a:defRPr sz="1500" b="0">
-                <a:solidFill>
-                  <a:srgbClr val="B6CCE9"/>
-                </a:solidFill>
-              </a:defRPr>
-            </a:lvl8pPr>
-            <a:lvl9pPr>
-              <a:defRPr sz="1500" b="0">
-                <a:solidFill>
-                  <a:srgbClr val="B6CCE9"/>
-                </a:solidFill>
-              </a:defRPr>
-            </a:lvl9pPr>
-          </a:lstStyle>
-          <a:p xmlns:a="http://schemas.openxmlformats.org/drawingml/2006/main">
-            <a:pPr>
-              <a:defRPr sz="1500" b="0">
-                <a:solidFill>
-                  <a:srgbClr val="B6CCE9"/>
-                </a:solidFill>
-              </a:defRPr>
-            </a:pPr>
-            <a:r>
-              <a:rPr sz="1500" b="0">
-                <a:solidFill>
-                  <a:srgbClr val="B6CCE9"/>
-                </a:solidFill>
-              </a:rPr>
-              <a:t>Valor esperado</a:t>
+              <a:t>Saber qué horarios tiene asignados el empleado</a:t>
             </a:r>
           </a:p>
         </p:txBody>
@@ -14567,7 +14501,7 @@
     </p:spTree>
     <p:extLst>
       <p:ext uri="{BB962C8B-B14F-4D97-AF65-F5344CB8AC3E}">
-        <p14:creationId xmlns:p14="http://schemas.microsoft.com/office/powerpoint/2010/main" val="883597952"/>
+        <p14:creationId xmlns:p14="http://schemas.microsoft.com/office/powerpoint/2010/main" val="1993174391"/>
       </p:ext>
     </p:extLst>
   </p:cSld>
@@ -14595,10 +14529,10 @@
       </p:grpSpPr>
       <p:sp>
         <p:nvSpPr>
-          <p:cNvPr id="10" name="">
+          <p:cNvPr id="3" name="">
             <a:extLst xmlns:a="http://schemas.openxmlformats.org/drawingml/2006/main">
               <a:ext uri="{FF2B5EF4-FFF2-40B4-BE49-F238E27FC236}">
-                <a16:creationId xmlns:a16="http://schemas.microsoft.com/office/drawing/2014/main" id="{8111F227-4FB0-437A-A4FA-8E1D1FC00341}"/>
+                <a16:creationId xmlns:a16="http://schemas.microsoft.com/office/drawing/2014/main" id="{408490AC-158B-4610-A851-516BE7DFD57F}"/>
               </a:ext>
             </a:extLst>
           </p:cNvPr>
@@ -14718,7 +14652,7 @@
           <p:cNvPr id="2" name="">
             <a:extLst xmlns:a="http://schemas.openxmlformats.org/drawingml/2006/main">
               <a:ext uri="{FF2B5EF4-FFF2-40B4-BE49-F238E27FC236}">
-                <a16:creationId xmlns:a16="http://schemas.microsoft.com/office/drawing/2014/main" id="{38FF9070-1AB4-4C05-8997-F9A376C9B499}"/>
+                <a16:creationId xmlns:a16="http://schemas.microsoft.com/office/drawing/2014/main" id="{FE8DA2F7-F7DE-4723-A0A0-6A8CCE99F019}"/>
               </a:ext>
             </a:extLst>
           </p:cNvPr>
@@ -14833,591 +14767,10 @@
           </a:p>
         </p:txBody>
       </p:sp>
-      <p:pic>
-        <p:nvPicPr>
-          <p:cNvPr id="3" name="">
-            <a:extLst xmlns:a="http://schemas.openxmlformats.org/drawingml/2006/main">
-              <a:ext uri="{FF2B5EF4-FFF2-40B4-BE49-F238E27FC236}">
-                <a16:creationId xmlns:a16="http://schemas.microsoft.com/office/drawing/2014/main" id="{3687062B-2C8A-4454-925F-E4E711907B5F}"/>
-              </a:ext>
-            </a:extLst>
-          </p:cNvPr>
-          <p:cNvPicPr>
-            <a:picLocks xmlns:a="http://schemas.openxmlformats.org/drawingml/2006/main" noChangeAspect="1"/>
-          </p:cNvPicPr>
-          <p:nvPr/>
-        </p:nvPicPr>
-        <p:blipFill>
-          <a:blip xmlns:r="http://schemas.openxmlformats.org/officeDocument/2006/relationships" xmlns:a="http://schemas.openxmlformats.org/drawingml/2006/main" r:embed="R8d4b4ed54c3a4827"/>
-          <a:stretch xmlns:a="http://schemas.openxmlformats.org/drawingml/2006/main"/>
-        </p:blipFill>
-        <p:spPr>
-          <a:xfrm xmlns:a="http://schemas.openxmlformats.org/drawingml/2006/main">
-            <a:off x="883491" y="1524000"/>
-            <a:ext cx="2233518" cy="4095750"/>
-          </a:xfrm>
-          <a:prstGeom xmlns:a="http://schemas.openxmlformats.org/drawingml/2006/main" prst="rect">
-            <a:avLst/>
-          </a:prstGeom>
-        </p:spPr>
-      </p:pic>
-      <p:pic>
-        <p:nvPicPr>
-          <p:cNvPr id="4" name="">
-            <a:extLst xmlns:a="http://schemas.openxmlformats.org/drawingml/2006/main">
-              <a:ext uri="{FF2B5EF4-FFF2-40B4-BE49-F238E27FC236}">
-                <a16:creationId xmlns:a16="http://schemas.microsoft.com/office/drawing/2014/main" id="{2FD0C940-6FD1-4BAD-9EF7-AA0F31171DC9}"/>
-              </a:ext>
-            </a:extLst>
-          </p:cNvPr>
-          <p:cNvPicPr>
-            <a:picLocks xmlns:a="http://schemas.openxmlformats.org/drawingml/2006/main" noChangeAspect="1"/>
-          </p:cNvPicPr>
-          <p:nvPr/>
-        </p:nvPicPr>
-        <p:blipFill>
-          <a:blip xmlns:r="http://schemas.openxmlformats.org/officeDocument/2006/relationships" xmlns:a="http://schemas.openxmlformats.org/drawingml/2006/main" r:embed="R2a12d470722f4ca7"/>
-          <a:stretch xmlns:a="http://schemas.openxmlformats.org/drawingml/2006/main"/>
-        </p:blipFill>
-        <p:spPr>
-          <a:xfrm xmlns:a="http://schemas.openxmlformats.org/drawingml/2006/main">
-            <a:off x="3836241" y="1524000"/>
-            <a:ext cx="2233518" cy="4095750"/>
-          </a:xfrm>
-          <a:prstGeom xmlns:a="http://schemas.openxmlformats.org/drawingml/2006/main" prst="rect">
-            <a:avLst/>
-          </a:prstGeom>
-        </p:spPr>
-      </p:pic>
-      <p:pic>
-        <p:nvPicPr>
-          <p:cNvPr id="5" name="">
-            <a:extLst xmlns:a="http://schemas.openxmlformats.org/drawingml/2006/main">
-              <a:ext uri="{FF2B5EF4-FFF2-40B4-BE49-F238E27FC236}">
-                <a16:creationId xmlns:a16="http://schemas.microsoft.com/office/drawing/2014/main" id="{E576FBC1-4D1F-4C54-9713-735EBDA7E3EA}"/>
-              </a:ext>
-            </a:extLst>
-          </p:cNvPr>
-          <p:cNvPicPr>
-            <a:picLocks xmlns:a="http://schemas.openxmlformats.org/drawingml/2006/main" noChangeAspect="1"/>
-          </p:cNvPicPr>
-          <p:nvPr/>
-        </p:nvPicPr>
-        <p:blipFill>
-          <a:blip xmlns:r="http://schemas.openxmlformats.org/officeDocument/2006/relationships" xmlns:a="http://schemas.openxmlformats.org/drawingml/2006/main" r:embed="Radbc35e7d58a4f0a"/>
-          <a:stretch xmlns:a="http://schemas.openxmlformats.org/drawingml/2006/main"/>
-        </p:blipFill>
-        <p:spPr>
-          <a:xfrm xmlns:a="http://schemas.openxmlformats.org/drawingml/2006/main">
-            <a:off x="6788991" y="1524000"/>
-            <a:ext cx="2233518" cy="4095750"/>
-          </a:xfrm>
-          <a:prstGeom xmlns:a="http://schemas.openxmlformats.org/drawingml/2006/main" prst="rect">
-            <a:avLst/>
-          </a:prstGeom>
-        </p:spPr>
-      </p:pic>
-      <p:sp>
-        <p:nvSpPr>
-          <p:cNvPr id="6" name="">
-            <a:extLst xmlns:a="http://schemas.openxmlformats.org/drawingml/2006/main">
-              <a:ext uri="{FF2B5EF4-FFF2-40B4-BE49-F238E27FC236}">
-                <a16:creationId xmlns:a16="http://schemas.microsoft.com/office/drawing/2014/main" id="{7130F299-0FE1-4553-8BFC-03A4C461762A}"/>
-              </a:ext>
-            </a:extLst>
-          </p:cNvPr>
-          <p:cNvSpPr>
-            <a:spLocks xmlns:a="http://schemas.openxmlformats.org/drawingml/2006/main" noGrp="1"/>
-          </p:cNvSpPr>
-          <p:nvPr/>
-        </p:nvSpPr>
-        <p:spPr>
-          <a:xfrm xmlns:a="http://schemas.openxmlformats.org/drawingml/2006/main">
-            <a:off x="1000125" y="5715000"/>
-            <a:ext cx="2286000" cy="381000"/>
-          </a:xfrm>
-          <a:prstGeom xmlns:a="http://schemas.openxmlformats.org/drawingml/2006/main" prst="rect">
-            <a:avLst/>
-          </a:prstGeom>
-          <a:noFill xmlns:a="http://schemas.openxmlformats.org/drawingml/2006/main"/>
-          <a:ln xmlns:a="http://schemas.openxmlformats.org/drawingml/2006/main" w="0">
-            <a:noFill/>
-          </a:ln>
-        </p:spPr>
-        <p:txBody>
-          <a:bodyPr xmlns:a="http://schemas.openxmlformats.org/drawingml/2006/main"/>
-          <a:lstStyle xmlns:a="http://schemas.openxmlformats.org/drawingml/2006/main">
-            <a:defPPr>
-              <a:defRPr sz="1875" b="1">
-                <a:solidFill>
-                  <a:srgbClr val="0860FF"/>
-                </a:solidFill>
-              </a:defRPr>
-            </a:defPPr>
-            <a:lvl1pPr>
-              <a:defRPr sz="1875" b="1">
-                <a:solidFill>
-                  <a:srgbClr val="0860FF"/>
-                </a:solidFill>
-              </a:defRPr>
-            </a:lvl1pPr>
-            <a:lvl2pPr>
-              <a:defRPr sz="1875" b="1">
-                <a:solidFill>
-                  <a:srgbClr val="0860FF"/>
-                </a:solidFill>
-              </a:defRPr>
-            </a:lvl2pPr>
-            <a:lvl3pPr>
-              <a:defRPr sz="1875" b="1">
-                <a:solidFill>
-                  <a:srgbClr val="0860FF"/>
-                </a:solidFill>
-              </a:defRPr>
-            </a:lvl3pPr>
-            <a:lvl4pPr>
-              <a:defRPr sz="1875" b="1">
-                <a:solidFill>
-                  <a:srgbClr val="0860FF"/>
-                </a:solidFill>
-              </a:defRPr>
-            </a:lvl4pPr>
-            <a:lvl5pPr>
-              <a:defRPr sz="1875" b="1">
-                <a:solidFill>
-                  <a:srgbClr val="0860FF"/>
-                </a:solidFill>
-              </a:defRPr>
-            </a:lvl5pPr>
-            <a:lvl6pPr>
-              <a:defRPr sz="1875" b="1">
-                <a:solidFill>
-                  <a:srgbClr val="0860FF"/>
-                </a:solidFill>
-              </a:defRPr>
-            </a:lvl6pPr>
-            <a:lvl7pPr>
-              <a:defRPr sz="1875" b="1">
-                <a:solidFill>
-                  <a:srgbClr val="0860FF"/>
-                </a:solidFill>
-              </a:defRPr>
-            </a:lvl7pPr>
-            <a:lvl8pPr>
-              <a:defRPr sz="1875" b="1">
-                <a:solidFill>
-                  <a:srgbClr val="0860FF"/>
-                </a:solidFill>
-              </a:defRPr>
-            </a:lvl8pPr>
-            <a:lvl9pPr>
-              <a:defRPr sz="1875" b="1">
-                <a:solidFill>
-                  <a:srgbClr val="0860FF"/>
-                </a:solidFill>
-              </a:defRPr>
-            </a:lvl9pPr>
-          </a:lstStyle>
-          <a:p xmlns:a="http://schemas.openxmlformats.org/drawingml/2006/main">
-            <a:pPr>
-              <a:defRPr sz="1875" b="1">
-                <a:solidFill>
-                  <a:srgbClr val="0860FF"/>
-                </a:solidFill>
-              </a:defRPr>
-            </a:pPr>
-            <a:r>
-              <a:rPr sz="1875" b="1">
-                <a:solidFill>
-                  <a:srgbClr val="0860FF"/>
-                </a:solidFill>
-              </a:rPr>
-              <a:t>Acceso</a:t>
-            </a:r>
-          </a:p>
-        </p:txBody>
-      </p:sp>
-      <p:sp>
-        <p:nvSpPr>
-          <p:cNvPr id="7" name="">
-            <a:extLst xmlns:a="http://schemas.openxmlformats.org/drawingml/2006/main">
-              <a:ext uri="{FF2B5EF4-FFF2-40B4-BE49-F238E27FC236}">
-                <a16:creationId xmlns:a16="http://schemas.microsoft.com/office/drawing/2014/main" id="{72F6DD4B-E7D4-4270-8DCD-5199C442F0F8}"/>
-              </a:ext>
-            </a:extLst>
-          </p:cNvPr>
-          <p:cNvSpPr>
-            <a:spLocks xmlns:a="http://schemas.openxmlformats.org/drawingml/2006/main" noGrp="1"/>
-          </p:cNvSpPr>
-          <p:nvPr/>
-        </p:nvSpPr>
-        <p:spPr>
-          <a:xfrm xmlns:a="http://schemas.openxmlformats.org/drawingml/2006/main">
-            <a:off x="3762375" y="5715000"/>
-            <a:ext cx="2667000" cy="381000"/>
-          </a:xfrm>
-          <a:prstGeom xmlns:a="http://schemas.openxmlformats.org/drawingml/2006/main" prst="rect">
-            <a:avLst/>
-          </a:prstGeom>
-          <a:noFill xmlns:a="http://schemas.openxmlformats.org/drawingml/2006/main"/>
-          <a:ln xmlns:a="http://schemas.openxmlformats.org/drawingml/2006/main" w="0">
-            <a:noFill/>
-          </a:ln>
-        </p:spPr>
-        <p:txBody>
-          <a:bodyPr xmlns:a="http://schemas.openxmlformats.org/drawingml/2006/main"/>
-          <a:lstStyle xmlns:a="http://schemas.openxmlformats.org/drawingml/2006/main">
-            <a:defPPr>
-              <a:defRPr sz="1875" b="1">
-                <a:solidFill>
-                  <a:srgbClr val="0860FF"/>
-                </a:solidFill>
-              </a:defRPr>
-            </a:defPPr>
-            <a:lvl1pPr>
-              <a:defRPr sz="1875" b="1">
-                <a:solidFill>
-                  <a:srgbClr val="0860FF"/>
-                </a:solidFill>
-              </a:defRPr>
-            </a:lvl1pPr>
-            <a:lvl2pPr>
-              <a:defRPr sz="1875" b="1">
-                <a:solidFill>
-                  <a:srgbClr val="0860FF"/>
-                </a:solidFill>
-              </a:defRPr>
-            </a:lvl2pPr>
-            <a:lvl3pPr>
-              <a:defRPr sz="1875" b="1">
-                <a:solidFill>
-                  <a:srgbClr val="0860FF"/>
-                </a:solidFill>
-              </a:defRPr>
-            </a:lvl3pPr>
-            <a:lvl4pPr>
-              <a:defRPr sz="1875" b="1">
-                <a:solidFill>
-                  <a:srgbClr val="0860FF"/>
-                </a:solidFill>
-              </a:defRPr>
-            </a:lvl4pPr>
-            <a:lvl5pPr>
-              <a:defRPr sz="1875" b="1">
-                <a:solidFill>
-                  <a:srgbClr val="0860FF"/>
-                </a:solidFill>
-              </a:defRPr>
-            </a:lvl5pPr>
-            <a:lvl6pPr>
-              <a:defRPr sz="1875" b="1">
-                <a:solidFill>
-                  <a:srgbClr val="0860FF"/>
-                </a:solidFill>
-              </a:defRPr>
-            </a:lvl6pPr>
-            <a:lvl7pPr>
-              <a:defRPr sz="1875" b="1">
-                <a:solidFill>
-                  <a:srgbClr val="0860FF"/>
-                </a:solidFill>
-              </a:defRPr>
-            </a:lvl7pPr>
-            <a:lvl8pPr>
-              <a:defRPr sz="1875" b="1">
-                <a:solidFill>
-                  <a:srgbClr val="0860FF"/>
-                </a:solidFill>
-              </a:defRPr>
-            </a:lvl8pPr>
-            <a:lvl9pPr>
-              <a:defRPr sz="1875" b="1">
-                <a:solidFill>
-                  <a:srgbClr val="0860FF"/>
-                </a:solidFill>
-              </a:defRPr>
-            </a:lvl9pPr>
-          </a:lstStyle>
-          <a:p xmlns:a="http://schemas.openxmlformats.org/drawingml/2006/main">
-            <a:pPr>
-              <a:defRPr sz="1875" b="1">
-                <a:solidFill>
-                  <a:srgbClr val="0860FF"/>
-                </a:solidFill>
-              </a:defRPr>
-            </a:pPr>
-            <a:r>
-              <a:rPr sz="1875" b="1">
-                <a:solidFill>
-                  <a:srgbClr val="0860FF"/>
-                </a:solidFill>
-              </a:rPr>
-              <a:t>Personas y roles</a:t>
-            </a:r>
-          </a:p>
-        </p:txBody>
-      </p:sp>
-      <p:sp>
-        <p:nvSpPr>
-          <p:cNvPr id="8" name="">
-            <a:extLst xmlns:a="http://schemas.openxmlformats.org/drawingml/2006/main">
-              <a:ext uri="{FF2B5EF4-FFF2-40B4-BE49-F238E27FC236}">
-                <a16:creationId xmlns:a16="http://schemas.microsoft.com/office/drawing/2014/main" id="{AD518FEF-7C60-4B13-8DA2-B29B566E1E7B}"/>
-              </a:ext>
-            </a:extLst>
-          </p:cNvPr>
-          <p:cNvSpPr>
-            <a:spLocks xmlns:a="http://schemas.openxmlformats.org/drawingml/2006/main" noGrp="1"/>
-          </p:cNvSpPr>
-          <p:nvPr/>
-        </p:nvSpPr>
-        <p:spPr>
-          <a:xfrm xmlns:a="http://schemas.openxmlformats.org/drawingml/2006/main">
-            <a:off x="7286625" y="5715000"/>
-            <a:ext cx="1905000" cy="381000"/>
-          </a:xfrm>
-          <a:prstGeom xmlns:a="http://schemas.openxmlformats.org/drawingml/2006/main" prst="rect">
-            <a:avLst/>
-          </a:prstGeom>
-          <a:noFill xmlns:a="http://schemas.openxmlformats.org/drawingml/2006/main"/>
-          <a:ln xmlns:a="http://schemas.openxmlformats.org/drawingml/2006/main" w="0">
-            <a:noFill/>
-          </a:ln>
-        </p:spPr>
-        <p:txBody>
-          <a:bodyPr xmlns:a="http://schemas.openxmlformats.org/drawingml/2006/main"/>
-          <a:lstStyle xmlns:a="http://schemas.openxmlformats.org/drawingml/2006/main">
-            <a:defPPr>
-              <a:defRPr sz="1875" b="1">
-                <a:solidFill>
-                  <a:srgbClr val="0860FF"/>
-                </a:solidFill>
-              </a:defRPr>
-            </a:defPPr>
-            <a:lvl1pPr>
-              <a:defRPr sz="1875" b="1">
-                <a:solidFill>
-                  <a:srgbClr val="0860FF"/>
-                </a:solidFill>
-              </a:defRPr>
-            </a:lvl1pPr>
-            <a:lvl2pPr>
-              <a:defRPr sz="1875" b="1">
-                <a:solidFill>
-                  <a:srgbClr val="0860FF"/>
-                </a:solidFill>
-              </a:defRPr>
-            </a:lvl2pPr>
-            <a:lvl3pPr>
-              <a:defRPr sz="1875" b="1">
-                <a:solidFill>
-                  <a:srgbClr val="0860FF"/>
-                </a:solidFill>
-              </a:defRPr>
-            </a:lvl3pPr>
-            <a:lvl4pPr>
-              <a:defRPr sz="1875" b="1">
-                <a:solidFill>
-                  <a:srgbClr val="0860FF"/>
-                </a:solidFill>
-              </a:defRPr>
-            </a:lvl4pPr>
-            <a:lvl5pPr>
-              <a:defRPr sz="1875" b="1">
-                <a:solidFill>
-                  <a:srgbClr val="0860FF"/>
-                </a:solidFill>
-              </a:defRPr>
-            </a:lvl5pPr>
-            <a:lvl6pPr>
-              <a:defRPr sz="1875" b="1">
-                <a:solidFill>
-                  <a:srgbClr val="0860FF"/>
-                </a:solidFill>
-              </a:defRPr>
-            </a:lvl6pPr>
-            <a:lvl7pPr>
-              <a:defRPr sz="1875" b="1">
-                <a:solidFill>
-                  <a:srgbClr val="0860FF"/>
-                </a:solidFill>
-              </a:defRPr>
-            </a:lvl7pPr>
-            <a:lvl8pPr>
-              <a:defRPr sz="1875" b="1">
-                <a:solidFill>
-                  <a:srgbClr val="0860FF"/>
-                </a:solidFill>
-              </a:defRPr>
-            </a:lvl8pPr>
-            <a:lvl9pPr>
-              <a:defRPr sz="1875" b="1">
-                <a:solidFill>
-                  <a:srgbClr val="0860FF"/>
-                </a:solidFill>
-              </a:defRPr>
-            </a:lvl9pPr>
-          </a:lstStyle>
-          <a:p xmlns:a="http://schemas.openxmlformats.org/drawingml/2006/main">
-            <a:pPr>
-              <a:defRPr sz="1875" b="1">
-                <a:solidFill>
-                  <a:srgbClr val="0860FF"/>
-                </a:solidFill>
-              </a:defRPr>
-            </a:pPr>
-            <a:r>
-              <a:rPr sz="1875" b="1">
-                <a:solidFill>
-                  <a:srgbClr val="0860FF"/>
-                </a:solidFill>
-              </a:rPr>
-              <a:t>Turnos</a:t>
-            </a:r>
-          </a:p>
-        </p:txBody>
-      </p:sp>
-      <p:sp>
-        <p:nvSpPr>
-          <p:cNvPr id="9" name="">
-            <a:extLst xmlns:a="http://schemas.openxmlformats.org/drawingml/2006/main">
-              <a:ext uri="{FF2B5EF4-FFF2-40B4-BE49-F238E27FC236}">
-                <a16:creationId xmlns:a16="http://schemas.microsoft.com/office/drawing/2014/main" id="{9BBDB858-FCE4-40D7-8E3E-29E1DD26972F}"/>
-              </a:ext>
-            </a:extLst>
-          </p:cNvPr>
-          <p:cNvSpPr>
-            <a:spLocks xmlns:a="http://schemas.openxmlformats.org/drawingml/2006/main" noGrp="1"/>
-          </p:cNvSpPr>
-          <p:nvPr/>
-        </p:nvSpPr>
-        <p:spPr>
-          <a:xfrm xmlns:a="http://schemas.openxmlformats.org/drawingml/2006/main">
-            <a:off x="9620250" y="2714625"/>
-            <a:ext cx="1952625" cy="952500"/>
-          </a:xfrm>
-          <a:prstGeom xmlns:a="http://schemas.openxmlformats.org/drawingml/2006/main" prst="rect">
-            <a:avLst/>
-          </a:prstGeom>
-          <a:noFill xmlns:a="http://schemas.openxmlformats.org/drawingml/2006/main"/>
-          <a:ln xmlns:a="http://schemas.openxmlformats.org/drawingml/2006/main" w="0">
-            <a:noFill/>
-          </a:ln>
-        </p:spPr>
-        <p:txBody>
-          <a:bodyPr xmlns:a="http://schemas.openxmlformats.org/drawingml/2006/main"/>
-          <a:lstStyle xmlns:a="http://schemas.openxmlformats.org/drawingml/2006/main">
-            <a:defPPr>
-              <a:defRPr sz="2025" b="0">
-                <a:solidFill>
-                  <a:srgbClr val="536B91"/>
-                </a:solidFill>
-              </a:defRPr>
-            </a:defPPr>
-            <a:lvl1pPr>
-              <a:defRPr sz="2025" b="0">
-                <a:solidFill>
-                  <a:srgbClr val="536B91"/>
-                </a:solidFill>
-              </a:defRPr>
-            </a:lvl1pPr>
-            <a:lvl2pPr>
-              <a:defRPr sz="2025" b="0">
-                <a:solidFill>
-                  <a:srgbClr val="536B91"/>
-                </a:solidFill>
-              </a:defRPr>
-            </a:lvl2pPr>
-            <a:lvl3pPr>
-              <a:defRPr sz="2025" b="0">
-                <a:solidFill>
-                  <a:srgbClr val="536B91"/>
-                </a:solidFill>
-              </a:defRPr>
-            </a:lvl3pPr>
-            <a:lvl4pPr>
-              <a:defRPr sz="2025" b="0">
-                <a:solidFill>
-                  <a:srgbClr val="536B91"/>
-                </a:solidFill>
-              </a:defRPr>
-            </a:lvl4pPr>
-            <a:lvl5pPr>
-              <a:defRPr sz="2025" b="0">
-                <a:solidFill>
-                  <a:srgbClr val="536B91"/>
-                </a:solidFill>
-              </a:defRPr>
-            </a:lvl5pPr>
-            <a:lvl6pPr>
-              <a:defRPr sz="2025" b="0">
-                <a:solidFill>
-                  <a:srgbClr val="536B91"/>
-                </a:solidFill>
-              </a:defRPr>
-            </a:lvl6pPr>
-            <a:lvl7pPr>
-              <a:defRPr sz="2025" b="0">
-                <a:solidFill>
-                  <a:srgbClr val="536B91"/>
-                </a:solidFill>
-              </a:defRPr>
-            </a:lvl7pPr>
-            <a:lvl8pPr>
-              <a:defRPr sz="2025" b="0">
-                <a:solidFill>
-                  <a:srgbClr val="536B91"/>
-                </a:solidFill>
-              </a:defRPr>
-            </a:lvl8pPr>
-            <a:lvl9pPr>
-              <a:defRPr sz="2025" b="0">
-                <a:solidFill>
-                  <a:srgbClr val="536B91"/>
-                </a:solidFill>
-              </a:defRPr>
-            </a:lvl9pPr>
-          </a:lstStyle>
-          <a:p xmlns:a="http://schemas.openxmlformats.org/drawingml/2006/main">
-            <a:pPr>
-              <a:defRPr sz="2025" b="0">
-                <a:solidFill>
-                  <a:srgbClr val="536B91"/>
-                </a:solidFill>
-              </a:defRPr>
-            </a:pPr>
-            <a:r>
-              <a:rPr sz="2025" b="0">
-                <a:solidFill>
-                  <a:srgbClr val="536B91"/>
-                </a:solidFill>
-              </a:rPr>
-              <a:t>Video local</a:t>
-            </a:r>
-          </a:p>
-          <a:p xmlns:a="http://schemas.openxmlformats.org/drawingml/2006/main">
-            <a:pPr>
-              <a:defRPr sz="2025" b="0">
-                <a:solidFill>
-                  <a:srgbClr val="536B91"/>
-                </a:solidFill>
-              </a:defRPr>
-            </a:pPr>
-            <a:r>
-              <a:rPr sz="2025" b="0">
-                <a:solidFill>
-                  <a:srgbClr val="536B91"/>
-                </a:solidFill>
-              </a:rPr>
-              <a:t>pendiente</a:t>
-            </a:r>
-          </a:p>
-        </p:txBody>
-      </p:sp>
     </p:spTree>
     <p:extLst>
       <p:ext uri="{BB962C8B-B14F-4D97-AF65-F5344CB8AC3E}">
-        <p14:creationId xmlns:p14="http://schemas.microsoft.com/office/powerpoint/2010/main" val="110810835"/>
+        <p14:creationId xmlns:p14="http://schemas.microsoft.com/office/powerpoint/2010/main" val="963156763"/>
       </p:ext>
     </p:extLst>
   </p:cSld>
@@ -15445,10 +14798,10 @@
       </p:grpSpPr>
       <p:sp>
         <p:nvSpPr>
-          <p:cNvPr id="11" name="">
+          <p:cNvPr id="3" name="">
             <a:extLst xmlns:a="http://schemas.openxmlformats.org/drawingml/2006/main">
               <a:ext uri="{FF2B5EF4-FFF2-40B4-BE49-F238E27FC236}">
-                <a16:creationId xmlns:a16="http://schemas.microsoft.com/office/drawing/2014/main" id="{9ADBE513-EF9F-4415-A3D9-4EABDD102534}"/>
+                <a16:creationId xmlns:a16="http://schemas.microsoft.com/office/drawing/2014/main" id="{25713FB3-F7AB-4FF0-9EB6-79D482496415}"/>
               </a:ext>
             </a:extLst>
           </p:cNvPr>
@@ -15568,7 +14921,7 @@
           <p:cNvPr id="2" name="">
             <a:extLst xmlns:a="http://schemas.openxmlformats.org/drawingml/2006/main">
               <a:ext uri="{FF2B5EF4-FFF2-40B4-BE49-F238E27FC236}">
-                <a16:creationId xmlns:a16="http://schemas.microsoft.com/office/drawing/2014/main" id="{B2AD93D9-8627-4B77-8D12-A454EE31B141}"/>
+                <a16:creationId xmlns:a16="http://schemas.microsoft.com/office/drawing/2014/main" id="{74CCA0EA-DF9A-4BA0-99F2-5DE25C7C1DF6}"/>
               </a:ext>
             </a:extLst>
           </p:cNvPr>
@@ -15683,728 +15036,10 @@
           </a:p>
         </p:txBody>
       </p:sp>
-      <p:pic>
-        <p:nvPicPr>
-          <p:cNvPr id="3" name="">
-            <a:extLst xmlns:a="http://schemas.openxmlformats.org/drawingml/2006/main">
-              <a:ext uri="{FF2B5EF4-FFF2-40B4-BE49-F238E27FC236}">
-                <a16:creationId xmlns:a16="http://schemas.microsoft.com/office/drawing/2014/main" id="{AECDC543-000C-4AD0-93F8-CB637DC7E9AA}"/>
-              </a:ext>
-            </a:extLst>
-          </p:cNvPr>
-          <p:cNvPicPr>
-            <a:picLocks xmlns:a="http://schemas.openxmlformats.org/drawingml/2006/main" noChangeAspect="1"/>
-          </p:cNvPicPr>
-          <p:nvPr/>
-        </p:nvPicPr>
-        <p:blipFill>
-          <a:blip xmlns:r="http://schemas.openxmlformats.org/officeDocument/2006/relationships" xmlns:a="http://schemas.openxmlformats.org/drawingml/2006/main" r:embed="R611532d44a544305"/>
-          <a:stretch xmlns:a="http://schemas.openxmlformats.org/drawingml/2006/main"/>
-        </p:blipFill>
-        <p:spPr>
-          <a:xfrm xmlns:a="http://schemas.openxmlformats.org/drawingml/2006/main">
-            <a:off x="816371" y="1428750"/>
-            <a:ext cx="2129633" cy="3905250"/>
-          </a:xfrm>
-          <a:prstGeom xmlns:a="http://schemas.openxmlformats.org/drawingml/2006/main" prst="rect">
-            <a:avLst/>
-          </a:prstGeom>
-        </p:spPr>
-      </p:pic>
-      <p:pic>
-        <p:nvPicPr>
-          <p:cNvPr id="4" name="">
-            <a:extLst xmlns:a="http://schemas.openxmlformats.org/drawingml/2006/main">
-              <a:ext uri="{FF2B5EF4-FFF2-40B4-BE49-F238E27FC236}">
-                <a16:creationId xmlns:a16="http://schemas.microsoft.com/office/drawing/2014/main" id="{76BF8FD0-49F7-424A-9577-A29903267F16}"/>
-              </a:ext>
-            </a:extLst>
-          </p:cNvPr>
-          <p:cNvPicPr>
-            <a:picLocks xmlns:a="http://schemas.openxmlformats.org/drawingml/2006/main" noChangeAspect="1"/>
-          </p:cNvPicPr>
-          <p:nvPr/>
-        </p:nvPicPr>
-        <p:blipFill>
-          <a:blip xmlns:r="http://schemas.openxmlformats.org/officeDocument/2006/relationships" xmlns:a="http://schemas.openxmlformats.org/drawingml/2006/main" r:embed="R5732ad84dea94d05"/>
-          <a:stretch xmlns:a="http://schemas.openxmlformats.org/drawingml/2006/main"/>
-        </p:blipFill>
-        <p:spPr>
-          <a:xfrm xmlns:a="http://schemas.openxmlformats.org/drawingml/2006/main">
-            <a:off x="3626246" y="1428750"/>
-            <a:ext cx="2129633" cy="3905250"/>
-          </a:xfrm>
-          <a:prstGeom xmlns:a="http://schemas.openxmlformats.org/drawingml/2006/main" prst="rect">
-            <a:avLst/>
-          </a:prstGeom>
-        </p:spPr>
-      </p:pic>
-      <p:pic>
-        <p:nvPicPr>
-          <p:cNvPr id="5" name="">
-            <a:extLst xmlns:a="http://schemas.openxmlformats.org/drawingml/2006/main">
-              <a:ext uri="{FF2B5EF4-FFF2-40B4-BE49-F238E27FC236}">
-                <a16:creationId xmlns:a16="http://schemas.microsoft.com/office/drawing/2014/main" id="{B6661134-F497-43D1-A21C-68F33416306C}"/>
-              </a:ext>
-            </a:extLst>
-          </p:cNvPr>
-          <p:cNvPicPr>
-            <a:picLocks xmlns:a="http://schemas.openxmlformats.org/drawingml/2006/main" noChangeAspect="1"/>
-          </p:cNvPicPr>
-          <p:nvPr/>
-        </p:nvPicPr>
-        <p:blipFill>
-          <a:blip xmlns:r="http://schemas.openxmlformats.org/officeDocument/2006/relationships" xmlns:a="http://schemas.openxmlformats.org/drawingml/2006/main" r:embed="R6521c56b77544a09"/>
-          <a:stretch xmlns:a="http://schemas.openxmlformats.org/drawingml/2006/main"/>
-        </p:blipFill>
-        <p:spPr>
-          <a:xfrm xmlns:a="http://schemas.openxmlformats.org/drawingml/2006/main">
-            <a:off x="6436121" y="1428750"/>
-            <a:ext cx="2129633" cy="3905250"/>
-          </a:xfrm>
-          <a:prstGeom xmlns:a="http://schemas.openxmlformats.org/drawingml/2006/main" prst="rect">
-            <a:avLst/>
-          </a:prstGeom>
-        </p:spPr>
-      </p:pic>
-      <p:sp>
-        <p:nvSpPr>
-          <p:cNvPr id="6" name="">
-            <a:extLst xmlns:a="http://schemas.openxmlformats.org/drawingml/2006/main">
-              <a:ext uri="{FF2B5EF4-FFF2-40B4-BE49-F238E27FC236}">
-                <a16:creationId xmlns:a16="http://schemas.microsoft.com/office/drawing/2014/main" id="{79CAF323-F8EE-445F-A90C-AF7DA18A7D0C}"/>
-              </a:ext>
-            </a:extLst>
-          </p:cNvPr>
-          <p:cNvSpPr>
-            <a:spLocks xmlns:a="http://schemas.openxmlformats.org/drawingml/2006/main" noGrp="1"/>
-          </p:cNvSpPr>
-          <p:nvPr/>
-        </p:nvSpPr>
-        <p:spPr>
-          <a:xfrm xmlns:a="http://schemas.openxmlformats.org/drawingml/2006/main">
-            <a:off x="9144000" y="1714500"/>
-            <a:ext cx="2476500" cy="476250"/>
-          </a:xfrm>
-          <a:prstGeom xmlns:a="http://schemas.openxmlformats.org/drawingml/2006/main" prst="rect">
-            <a:avLst/>
-          </a:prstGeom>
-          <a:noFill xmlns:a="http://schemas.openxmlformats.org/drawingml/2006/main"/>
-          <a:ln xmlns:a="http://schemas.openxmlformats.org/drawingml/2006/main" w="0">
-            <a:noFill/>
-          </a:ln>
-        </p:spPr>
-        <p:txBody>
-          <a:bodyPr xmlns:a="http://schemas.openxmlformats.org/drawingml/2006/main"/>
-          <a:lstStyle xmlns:a="http://schemas.openxmlformats.org/drawingml/2006/main">
-            <a:defPPr>
-              <a:defRPr sz="2100" b="1">
-                <a:solidFill>
-                  <a:srgbClr val="67B9FF"/>
-                </a:solidFill>
-              </a:defRPr>
-            </a:defPPr>
-            <a:lvl1pPr>
-              <a:defRPr sz="2100" b="1">
-                <a:solidFill>
-                  <a:srgbClr val="67B9FF"/>
-                </a:solidFill>
-              </a:defRPr>
-            </a:lvl1pPr>
-            <a:lvl2pPr>
-              <a:defRPr sz="2100" b="1">
-                <a:solidFill>
-                  <a:srgbClr val="67B9FF"/>
-                </a:solidFill>
-              </a:defRPr>
-            </a:lvl2pPr>
-            <a:lvl3pPr>
-              <a:defRPr sz="2100" b="1">
-                <a:solidFill>
-                  <a:srgbClr val="67B9FF"/>
-                </a:solidFill>
-              </a:defRPr>
-            </a:lvl3pPr>
-            <a:lvl4pPr>
-              <a:defRPr sz="2100" b="1">
-                <a:solidFill>
-                  <a:srgbClr val="67B9FF"/>
-                </a:solidFill>
-              </a:defRPr>
-            </a:lvl4pPr>
-            <a:lvl5pPr>
-              <a:defRPr sz="2100" b="1">
-                <a:solidFill>
-                  <a:srgbClr val="67B9FF"/>
-                </a:solidFill>
-              </a:defRPr>
-            </a:lvl5pPr>
-            <a:lvl6pPr>
-              <a:defRPr sz="2100" b="1">
-                <a:solidFill>
-                  <a:srgbClr val="67B9FF"/>
-                </a:solidFill>
-              </a:defRPr>
-            </a:lvl6pPr>
-            <a:lvl7pPr>
-              <a:defRPr sz="2100" b="1">
-                <a:solidFill>
-                  <a:srgbClr val="67B9FF"/>
-                </a:solidFill>
-              </a:defRPr>
-            </a:lvl7pPr>
-            <a:lvl8pPr>
-              <a:defRPr sz="2100" b="1">
-                <a:solidFill>
-                  <a:srgbClr val="67B9FF"/>
-                </a:solidFill>
-              </a:defRPr>
-            </a:lvl8pPr>
-            <a:lvl9pPr>
-              <a:defRPr sz="2100" b="1">
-                <a:solidFill>
-                  <a:srgbClr val="67B9FF"/>
-                </a:solidFill>
-              </a:defRPr>
-            </a:lvl9pPr>
-          </a:lstStyle>
-          <a:p xmlns:a="http://schemas.openxmlformats.org/drawingml/2006/main">
-            <a:pPr>
-              <a:defRPr sz="2100" b="1">
-                <a:solidFill>
-                  <a:srgbClr val="67B9FF"/>
-                </a:solidFill>
-              </a:defRPr>
-            </a:pPr>
-            <a:r>
-              <a:rPr sz="2100" b="1">
-                <a:solidFill>
-                  <a:srgbClr val="67B9FF"/>
-                </a:solidFill>
-              </a:rPr>
-              <a:t>Arroz de 1 kg</a:t>
-            </a:r>
-          </a:p>
-        </p:txBody>
-      </p:sp>
-      <p:sp>
-        <p:nvSpPr>
-          <p:cNvPr id="7" name="">
-            <a:extLst xmlns:a="http://schemas.openxmlformats.org/drawingml/2006/main">
-              <a:ext uri="{FF2B5EF4-FFF2-40B4-BE49-F238E27FC236}">
-                <a16:creationId xmlns:a16="http://schemas.microsoft.com/office/drawing/2014/main" id="{4ACA05DA-069C-4636-B7C3-8CA48DE35DFB}"/>
-              </a:ext>
-            </a:extLst>
-          </p:cNvPr>
-          <p:cNvSpPr>
-            <a:spLocks xmlns:a="http://schemas.openxmlformats.org/drawingml/2006/main" noGrp="1"/>
-          </p:cNvSpPr>
-          <p:nvPr/>
-        </p:nvSpPr>
-        <p:spPr>
-          <a:xfrm xmlns:a="http://schemas.openxmlformats.org/drawingml/2006/main">
-            <a:off x="9144000" y="2428875"/>
-            <a:ext cx="2476500" cy="1428750"/>
-          </a:xfrm>
-          <a:prstGeom xmlns:a="http://schemas.openxmlformats.org/drawingml/2006/main" prst="rect">
-            <a:avLst/>
-          </a:prstGeom>
-          <a:noFill xmlns:a="http://schemas.openxmlformats.org/drawingml/2006/main"/>
-          <a:ln xmlns:a="http://schemas.openxmlformats.org/drawingml/2006/main" w="0">
-            <a:noFill/>
-          </a:ln>
-        </p:spPr>
-        <p:txBody>
-          <a:bodyPr xmlns:a="http://schemas.openxmlformats.org/drawingml/2006/main"/>
-          <a:lstStyle xmlns:a="http://schemas.openxmlformats.org/drawingml/2006/main">
-            <a:defPPr>
-              <a:defRPr sz="2250" b="0">
-                <a:solidFill>
-                  <a:srgbClr val="FFFFFF"/>
-                </a:solidFill>
-              </a:defRPr>
-            </a:defPPr>
-            <a:lvl1pPr>
-              <a:defRPr sz="2250" b="0">
-                <a:solidFill>
-                  <a:srgbClr val="FFFFFF"/>
-                </a:solidFill>
-              </a:defRPr>
-            </a:lvl1pPr>
-            <a:lvl2pPr>
-              <a:defRPr sz="2250" b="0">
-                <a:solidFill>
-                  <a:srgbClr val="FFFFFF"/>
-                </a:solidFill>
-              </a:defRPr>
-            </a:lvl2pPr>
-            <a:lvl3pPr>
-              <a:defRPr sz="2250" b="0">
-                <a:solidFill>
-                  <a:srgbClr val="FFFFFF"/>
-                </a:solidFill>
-              </a:defRPr>
-            </a:lvl3pPr>
-            <a:lvl4pPr>
-              <a:defRPr sz="2250" b="0">
-                <a:solidFill>
-                  <a:srgbClr val="FFFFFF"/>
-                </a:solidFill>
-              </a:defRPr>
-            </a:lvl4pPr>
-            <a:lvl5pPr>
-              <a:defRPr sz="2250" b="0">
-                <a:solidFill>
-                  <a:srgbClr val="FFFFFF"/>
-                </a:solidFill>
-              </a:defRPr>
-            </a:lvl5pPr>
-            <a:lvl6pPr>
-              <a:defRPr sz="2250" b="0">
-                <a:solidFill>
-                  <a:srgbClr val="FFFFFF"/>
-                </a:solidFill>
-              </a:defRPr>
-            </a:lvl6pPr>
-            <a:lvl7pPr>
-              <a:defRPr sz="2250" b="0">
-                <a:solidFill>
-                  <a:srgbClr val="FFFFFF"/>
-                </a:solidFill>
-              </a:defRPr>
-            </a:lvl7pPr>
-            <a:lvl8pPr>
-              <a:defRPr sz="2250" b="0">
-                <a:solidFill>
-                  <a:srgbClr val="FFFFFF"/>
-                </a:solidFill>
-              </a:defRPr>
-            </a:lvl8pPr>
-            <a:lvl9pPr>
-              <a:defRPr sz="2250" b="0">
-                <a:solidFill>
-                  <a:srgbClr val="FFFFFF"/>
-                </a:solidFill>
-              </a:defRPr>
-            </a:lvl9pPr>
-          </a:lstStyle>
-          <a:p xmlns:a="http://schemas.openxmlformats.org/drawingml/2006/main">
-            <a:pPr>
-              <a:defRPr sz="2250" b="0">
-                <a:solidFill>
-                  <a:srgbClr val="FFFFFF"/>
-                </a:solidFill>
-              </a:defRPr>
-            </a:pPr>
-            <a:r>
-              <a:rPr sz="2250" b="0">
-                <a:solidFill>
-                  <a:srgbClr val="FFFFFF"/>
-                </a:solidFill>
-              </a:rPr>
-              <a:t>2 iniciales</a:t>
-            </a:r>
-          </a:p>
-          <a:p xmlns:a="http://schemas.openxmlformats.org/drawingml/2006/main">
-            <a:pPr>
-              <a:defRPr sz="2250" b="0">
-                <a:solidFill>
-                  <a:srgbClr val="FFFFFF"/>
-                </a:solidFill>
-              </a:defRPr>
-            </a:pPr>
-            <a:r>
-              <a:rPr sz="2250" b="0">
-                <a:solidFill>
-                  <a:srgbClr val="FFFFFF"/>
-                </a:solidFill>
-              </a:rPr>
-              <a:t>+ 10 compradas</a:t>
-            </a:r>
-          </a:p>
-          <a:p xmlns:a="http://schemas.openxmlformats.org/drawingml/2006/main">
-            <a:pPr>
-              <a:defRPr sz="2250" b="0">
-                <a:solidFill>
-                  <a:srgbClr val="FFFFFF"/>
-                </a:solidFill>
-              </a:defRPr>
-            </a:pPr>
-            <a:r>
-              <a:rPr sz="2250" b="0">
-                <a:solidFill>
-                  <a:srgbClr val="FFFFFF"/>
-                </a:solidFill>
-              </a:rPr>
-              <a:t>− 3 vendidas</a:t>
-            </a:r>
-          </a:p>
-        </p:txBody>
-      </p:sp>
-      <p:sp>
-        <p:nvSpPr>
-          <p:cNvPr id="8" name="">
-            <a:extLst xmlns:a="http://schemas.openxmlformats.org/drawingml/2006/main">
-              <a:ext uri="{FF2B5EF4-FFF2-40B4-BE49-F238E27FC236}">
-                <a16:creationId xmlns:a16="http://schemas.microsoft.com/office/drawing/2014/main" id="{FC8319A0-6195-4DFE-AE26-BFB69D446FC0}"/>
-              </a:ext>
-            </a:extLst>
-          </p:cNvPr>
-          <p:cNvSpPr>
-            <a:spLocks xmlns:a="http://schemas.openxmlformats.org/drawingml/2006/main" noGrp="1"/>
-          </p:cNvSpPr>
-          <p:nvPr/>
-        </p:nvSpPr>
-        <p:spPr>
-          <a:xfrm xmlns:a="http://schemas.openxmlformats.org/drawingml/2006/main">
-            <a:off x="9144000" y="4095750"/>
-            <a:ext cx="2571750" cy="666750"/>
-          </a:xfrm>
-          <a:prstGeom xmlns:a="http://schemas.openxmlformats.org/drawingml/2006/main" prst="rect">
-            <a:avLst/>
-          </a:prstGeom>
-          <a:noFill xmlns:a="http://schemas.openxmlformats.org/drawingml/2006/main"/>
-          <a:ln xmlns:a="http://schemas.openxmlformats.org/drawingml/2006/main" w="0">
-            <a:noFill/>
-          </a:ln>
-        </p:spPr>
-        <p:txBody>
-          <a:bodyPr xmlns:a="http://schemas.openxmlformats.org/drawingml/2006/main"/>
-          <a:lstStyle xmlns:a="http://schemas.openxmlformats.org/drawingml/2006/main">
-            <a:defPPr>
-              <a:defRPr sz="3000" b="1">
-                <a:solidFill>
-                  <a:srgbClr val="67B9FF"/>
-                </a:solidFill>
-              </a:defRPr>
-            </a:defPPr>
-            <a:lvl1pPr>
-              <a:defRPr sz="3000" b="1">
-                <a:solidFill>
-                  <a:srgbClr val="67B9FF"/>
-                </a:solidFill>
-              </a:defRPr>
-            </a:lvl1pPr>
-            <a:lvl2pPr>
-              <a:defRPr sz="3000" b="1">
-                <a:solidFill>
-                  <a:srgbClr val="67B9FF"/>
-                </a:solidFill>
-              </a:defRPr>
-            </a:lvl2pPr>
-            <a:lvl3pPr>
-              <a:defRPr sz="3000" b="1">
-                <a:solidFill>
-                  <a:srgbClr val="67B9FF"/>
-                </a:solidFill>
-              </a:defRPr>
-            </a:lvl3pPr>
-            <a:lvl4pPr>
-              <a:defRPr sz="3000" b="1">
-                <a:solidFill>
-                  <a:srgbClr val="67B9FF"/>
-                </a:solidFill>
-              </a:defRPr>
-            </a:lvl4pPr>
-            <a:lvl5pPr>
-              <a:defRPr sz="3000" b="1">
-                <a:solidFill>
-                  <a:srgbClr val="67B9FF"/>
-                </a:solidFill>
-              </a:defRPr>
-            </a:lvl5pPr>
-            <a:lvl6pPr>
-              <a:defRPr sz="3000" b="1">
-                <a:solidFill>
-                  <a:srgbClr val="67B9FF"/>
-                </a:solidFill>
-              </a:defRPr>
-            </a:lvl6pPr>
-            <a:lvl7pPr>
-              <a:defRPr sz="3000" b="1">
-                <a:solidFill>
-                  <a:srgbClr val="67B9FF"/>
-                </a:solidFill>
-              </a:defRPr>
-            </a:lvl7pPr>
-            <a:lvl8pPr>
-              <a:defRPr sz="3000" b="1">
-                <a:solidFill>
-                  <a:srgbClr val="67B9FF"/>
-                </a:solidFill>
-              </a:defRPr>
-            </a:lvl8pPr>
-            <a:lvl9pPr>
-              <a:defRPr sz="3000" b="1">
-                <a:solidFill>
-                  <a:srgbClr val="67B9FF"/>
-                </a:solidFill>
-              </a:defRPr>
-            </a:lvl9pPr>
-          </a:lstStyle>
-          <a:p xmlns:a="http://schemas.openxmlformats.org/drawingml/2006/main">
-            <a:pPr>
-              <a:defRPr sz="3000" b="1">
-                <a:solidFill>
-                  <a:srgbClr val="67B9FF"/>
-                </a:solidFill>
-              </a:defRPr>
-            </a:pPr>
-            <a:r>
-              <a:rPr sz="3000" b="1">
-                <a:solidFill>
-                  <a:srgbClr val="67B9FF"/>
-                </a:solidFill>
-              </a:rPr>
-              <a:t>9 unidades</a:t>
-            </a:r>
-          </a:p>
-        </p:txBody>
-      </p:sp>
-      <p:sp>
-        <p:nvSpPr>
-          <p:cNvPr id="9" name="">
-            <a:extLst xmlns:a="http://schemas.openxmlformats.org/drawingml/2006/main">
-              <a:ext uri="{FF2B5EF4-FFF2-40B4-BE49-F238E27FC236}">
-                <a16:creationId xmlns:a16="http://schemas.microsoft.com/office/drawing/2014/main" id="{57B550D9-BBF9-4BFA-8743-0D994ED0C552}"/>
-              </a:ext>
-            </a:extLst>
-          </p:cNvPr>
-          <p:cNvSpPr>
-            <a:spLocks xmlns:a="http://schemas.openxmlformats.org/drawingml/2006/main" noGrp="1"/>
-          </p:cNvSpPr>
-          <p:nvPr/>
-        </p:nvSpPr>
-        <p:spPr>
-          <a:xfrm xmlns:a="http://schemas.openxmlformats.org/drawingml/2006/main">
-            <a:off x="609600" y="5619750"/>
-            <a:ext cx="10858500" cy="476250"/>
-          </a:xfrm>
-          <a:prstGeom xmlns:a="http://schemas.openxmlformats.org/drawingml/2006/main" prst="rect">
-            <a:avLst/>
-          </a:prstGeom>
-          <a:noFill xmlns:a="http://schemas.openxmlformats.org/drawingml/2006/main"/>
-          <a:ln xmlns:a="http://schemas.openxmlformats.org/drawingml/2006/main" w="0">
-            <a:noFill/>
-          </a:ln>
-        </p:spPr>
-        <p:txBody>
-          <a:bodyPr xmlns:a="http://schemas.openxmlformats.org/drawingml/2006/main"/>
-          <a:lstStyle xmlns:a="http://schemas.openxmlformats.org/drawingml/2006/main">
-            <a:defPPr>
-              <a:defRPr sz="1575" b="0">
-                <a:solidFill>
-                  <a:srgbClr val="B6CCE9"/>
-                </a:solidFill>
-              </a:defRPr>
-            </a:defPPr>
-            <a:lvl1pPr>
-              <a:defRPr sz="1575" b="0">
-                <a:solidFill>
-                  <a:srgbClr val="B6CCE9"/>
-                </a:solidFill>
-              </a:defRPr>
-            </a:lvl1pPr>
-            <a:lvl2pPr>
-              <a:defRPr sz="1575" b="0">
-                <a:solidFill>
-                  <a:srgbClr val="B6CCE9"/>
-                </a:solidFill>
-              </a:defRPr>
-            </a:lvl2pPr>
-            <a:lvl3pPr>
-              <a:defRPr sz="1575" b="0">
-                <a:solidFill>
-                  <a:srgbClr val="B6CCE9"/>
-                </a:solidFill>
-              </a:defRPr>
-            </a:lvl3pPr>
-            <a:lvl4pPr>
-              <a:defRPr sz="1575" b="0">
-                <a:solidFill>
-                  <a:srgbClr val="B6CCE9"/>
-                </a:solidFill>
-              </a:defRPr>
-            </a:lvl4pPr>
-            <a:lvl5pPr>
-              <a:defRPr sz="1575" b="0">
-                <a:solidFill>
-                  <a:srgbClr val="B6CCE9"/>
-                </a:solidFill>
-              </a:defRPr>
-            </a:lvl5pPr>
-            <a:lvl6pPr>
-              <a:defRPr sz="1575" b="0">
-                <a:solidFill>
-                  <a:srgbClr val="B6CCE9"/>
-                </a:solidFill>
-              </a:defRPr>
-            </a:lvl6pPr>
-            <a:lvl7pPr>
-              <a:defRPr sz="1575" b="0">
-                <a:solidFill>
-                  <a:srgbClr val="B6CCE9"/>
-                </a:solidFill>
-              </a:defRPr>
-            </a:lvl7pPr>
-            <a:lvl8pPr>
-              <a:defRPr sz="1575" b="0">
-                <a:solidFill>
-                  <a:srgbClr val="B6CCE9"/>
-                </a:solidFill>
-              </a:defRPr>
-            </a:lvl8pPr>
-            <a:lvl9pPr>
-              <a:defRPr sz="1575" b="0">
-                <a:solidFill>
-                  <a:srgbClr val="B6CCE9"/>
-                </a:solidFill>
-              </a:defRPr>
-            </a:lvl9pPr>
-          </a:lstStyle>
-          <a:p xmlns:a="http://schemas.openxmlformats.org/drawingml/2006/main">
-            <a:pPr>
-              <a:defRPr sz="1575" b="0">
-                <a:solidFill>
-                  <a:srgbClr val="B6CCE9"/>
-                </a:solidFill>
-              </a:defRPr>
-            </a:pPr>
-            <a:r>
-              <a:rPr sz="1575" b="0">
-                <a:solidFill>
-                  <a:srgbClr val="B6CCE9"/>
-                </a:solidFill>
-              </a:rPr>
-              <a:t>Caso propuesto para grabar. Las capturas muestran otras operaciones del proyecto.</a:t>
-            </a:r>
-          </a:p>
-        </p:txBody>
-      </p:sp>
-      <p:sp>
-        <p:nvSpPr>
-          <p:cNvPr id="10" name="">
-            <a:extLst xmlns:a="http://schemas.openxmlformats.org/drawingml/2006/main">
-              <a:ext uri="{FF2B5EF4-FFF2-40B4-BE49-F238E27FC236}">
-                <a16:creationId xmlns:a16="http://schemas.microsoft.com/office/drawing/2014/main" id="{1079F29D-E552-4B3A-9E2C-62B79CD2A314}"/>
-              </a:ext>
-            </a:extLst>
-          </p:cNvPr>
-          <p:cNvSpPr>
-            <a:spLocks xmlns:a="http://schemas.openxmlformats.org/drawingml/2006/main" noGrp="1"/>
-          </p:cNvSpPr>
-          <p:nvPr/>
-        </p:nvSpPr>
-        <p:spPr>
-          <a:xfrm xmlns:a="http://schemas.openxmlformats.org/drawingml/2006/main">
-            <a:off x="609600" y="6172200"/>
-            <a:ext cx="7143750" cy="333375"/>
-          </a:xfrm>
-          <a:prstGeom xmlns:a="http://schemas.openxmlformats.org/drawingml/2006/main" prst="rect">
-            <a:avLst/>
-          </a:prstGeom>
-          <a:noFill xmlns:a="http://schemas.openxmlformats.org/drawingml/2006/main"/>
-          <a:ln xmlns:a="http://schemas.openxmlformats.org/drawingml/2006/main" w="0">
-            <a:noFill/>
-          </a:ln>
-        </p:spPr>
-        <p:txBody>
-          <a:bodyPr xmlns:a="http://schemas.openxmlformats.org/drawingml/2006/main"/>
-          <a:lstStyle xmlns:a="http://schemas.openxmlformats.org/drawingml/2006/main">
-            <a:defPPr>
-              <a:defRPr sz="1500" b="0">
-                <a:solidFill>
-                  <a:srgbClr val="B6CCE9"/>
-                </a:solidFill>
-              </a:defRPr>
-            </a:defPPr>
-            <a:lvl1pPr>
-              <a:defRPr sz="1500" b="0">
-                <a:solidFill>
-                  <a:srgbClr val="B6CCE9"/>
-                </a:solidFill>
-              </a:defRPr>
-            </a:lvl1pPr>
-            <a:lvl2pPr>
-              <a:defRPr sz="1500" b="0">
-                <a:solidFill>
-                  <a:srgbClr val="B6CCE9"/>
-                </a:solidFill>
-              </a:defRPr>
-            </a:lvl2pPr>
-            <a:lvl3pPr>
-              <a:defRPr sz="1500" b="0">
-                <a:solidFill>
-                  <a:srgbClr val="B6CCE9"/>
-                </a:solidFill>
-              </a:defRPr>
-            </a:lvl3pPr>
-            <a:lvl4pPr>
-              <a:defRPr sz="1500" b="0">
-                <a:solidFill>
-                  <a:srgbClr val="B6CCE9"/>
-                </a:solidFill>
-              </a:defRPr>
-            </a:lvl4pPr>
-            <a:lvl5pPr>
-              <a:defRPr sz="1500" b="0">
-                <a:solidFill>
-                  <a:srgbClr val="B6CCE9"/>
-                </a:solidFill>
-              </a:defRPr>
-            </a:lvl5pPr>
-            <a:lvl6pPr>
-              <a:defRPr sz="1500" b="0">
-                <a:solidFill>
-                  <a:srgbClr val="B6CCE9"/>
-                </a:solidFill>
-              </a:defRPr>
-            </a:lvl6pPr>
-            <a:lvl7pPr>
-              <a:defRPr sz="1500" b="0">
-                <a:solidFill>
-                  <a:srgbClr val="B6CCE9"/>
-                </a:solidFill>
-              </a:defRPr>
-            </a:lvl7pPr>
-            <a:lvl8pPr>
-              <a:defRPr sz="1500" b="0">
-                <a:solidFill>
-                  <a:srgbClr val="B6CCE9"/>
-                </a:solidFill>
-              </a:defRPr>
-            </a:lvl8pPr>
-            <a:lvl9pPr>
-              <a:defRPr sz="1500" b="0">
-                <a:solidFill>
-                  <a:srgbClr val="B6CCE9"/>
-                </a:solidFill>
-              </a:defRPr>
-            </a:lvl9pPr>
-          </a:lstStyle>
-          <a:p xmlns:a="http://schemas.openxmlformats.org/drawingml/2006/main">
-            <a:pPr>
-              <a:defRPr sz="1500" b="0">
-                <a:solidFill>
-                  <a:srgbClr val="B6CCE9"/>
-                </a:solidFill>
-              </a:defRPr>
-            </a:pPr>
-            <a:r>
-              <a:rPr sz="1500" b="0">
-                <a:solidFill>
-                  <a:srgbClr val="B6CCE9"/>
-                </a:solidFill>
-              </a:rPr>
-              <a:t>Video local pendiente</a:t>
-            </a:r>
-          </a:p>
-        </p:txBody>
-      </p:sp>
     </p:spTree>
     <p:extLst>
       <p:ext uri="{BB962C8B-B14F-4D97-AF65-F5344CB8AC3E}">
-        <p14:creationId xmlns:p14="http://schemas.microsoft.com/office/powerpoint/2010/main" val="49030753"/>
+        <p14:creationId xmlns:p14="http://schemas.microsoft.com/office/powerpoint/2010/main" val="2142742367"/>
       </p:ext>
     </p:extLst>
   </p:cSld>
@@ -16432,10 +15067,10 @@
       </p:grpSpPr>
       <p:sp>
         <p:nvSpPr>
-          <p:cNvPr id="16" name="">
+          <p:cNvPr id="27" name="">
             <a:extLst xmlns:a="http://schemas.openxmlformats.org/drawingml/2006/main">
               <a:ext uri="{FF2B5EF4-FFF2-40B4-BE49-F238E27FC236}">
-                <a16:creationId xmlns:a16="http://schemas.microsoft.com/office/drawing/2014/main" id="{E5EED7AD-3982-413E-919F-6E38E7BBF1F3}"/>
+                <a16:creationId xmlns:a16="http://schemas.microsoft.com/office/drawing/2014/main" id="{E24695AA-9E50-470F-B95E-A0F2E480A210}"/>
               </a:ext>
             </a:extLst>
           </p:cNvPr>
@@ -16545,7 +15180,7 @@
                   <a:srgbClr val="061A35"/>
                 </a:solidFill>
               </a:rPr>
-              <a:t>Cómo está construida</a:t>
+              <a:t>¿Cómo funciona por dentro?</a:t>
             </a:r>
           </a:p>
         </p:txBody>
@@ -16555,7 +15190,7 @@
           <p:cNvPr id="2" name="">
             <a:extLst xmlns:a="http://schemas.openxmlformats.org/drawingml/2006/main">
               <a:ext uri="{FF2B5EF4-FFF2-40B4-BE49-F238E27FC236}">
-                <a16:creationId xmlns:a16="http://schemas.microsoft.com/office/drawing/2014/main" id="{A7ED494A-CB6B-4CF7-BECF-9A4371C3FF5B}"/>
+                <a16:creationId xmlns:a16="http://schemas.microsoft.com/office/drawing/2014/main" id="{97A61657-E790-4F72-A96C-77E94ABE849D}"/>
               </a:ext>
             </a:extLst>
           </p:cNvPr>
@@ -16675,7 +15310,7 @@
           <p:cNvPr id="3" name="">
             <a:extLst xmlns:a="http://schemas.openxmlformats.org/drawingml/2006/main">
               <a:ext uri="{FF2B5EF4-FFF2-40B4-BE49-F238E27FC236}">
-                <a16:creationId xmlns:a16="http://schemas.microsoft.com/office/drawing/2014/main" id="{C2B72220-661D-42E4-B909-C1B68BB28391}"/>
+                <a16:creationId xmlns:a16="http://schemas.microsoft.com/office/drawing/2014/main" id="{F7FCDA7B-2A29-4880-A79B-815AE8F9974F}"/>
               </a:ext>
             </a:extLst>
           </p:cNvPr>
@@ -16686,8 +15321,8 @@
         </p:nvSpPr>
         <p:spPr>
           <a:xfrm xmlns:a="http://schemas.openxmlformats.org/drawingml/2006/main">
-            <a:off x="609600" y="1571625"/>
-            <a:ext cx="3333750" cy="495300"/>
+            <a:off x="609600" y="1314450"/>
+            <a:ext cx="8001000" cy="304800"/>
           </a:xfrm>
           <a:prstGeom xmlns:a="http://schemas.openxmlformats.org/drawingml/2006/main" prst="rect">
             <a:avLst/>
@@ -16701,91 +15336,91 @@
           <a:bodyPr xmlns:a="http://schemas.openxmlformats.org/drawingml/2006/main"/>
           <a:lstStyle xmlns:a="http://schemas.openxmlformats.org/drawingml/2006/main">
             <a:defPPr>
-              <a:defRPr sz="2475" b="1">
-                <a:solidFill>
-                  <a:srgbClr val="0860FF"/>
+              <a:defRPr sz="1350" b="1">
+                <a:solidFill>
+                  <a:srgbClr val="536B91"/>
                 </a:solidFill>
               </a:defRPr>
             </a:defPPr>
             <a:lvl1pPr>
-              <a:defRPr sz="2475" b="1">
-                <a:solidFill>
-                  <a:srgbClr val="0860FF"/>
+              <a:defRPr sz="1350" b="1">
+                <a:solidFill>
+                  <a:srgbClr val="536B91"/>
                 </a:solidFill>
               </a:defRPr>
             </a:lvl1pPr>
             <a:lvl2pPr>
-              <a:defRPr sz="2475" b="1">
-                <a:solidFill>
-                  <a:srgbClr val="0860FF"/>
+              <a:defRPr sz="1350" b="1">
+                <a:solidFill>
+                  <a:srgbClr val="536B91"/>
                 </a:solidFill>
               </a:defRPr>
             </a:lvl2pPr>
             <a:lvl3pPr>
-              <a:defRPr sz="2475" b="1">
-                <a:solidFill>
-                  <a:srgbClr val="0860FF"/>
+              <a:defRPr sz="1350" b="1">
+                <a:solidFill>
+                  <a:srgbClr val="536B91"/>
                 </a:solidFill>
               </a:defRPr>
             </a:lvl3pPr>
             <a:lvl4pPr>
-              <a:defRPr sz="2475" b="1">
-                <a:solidFill>
-                  <a:srgbClr val="0860FF"/>
+              <a:defRPr sz="1350" b="1">
+                <a:solidFill>
+                  <a:srgbClr val="536B91"/>
                 </a:solidFill>
               </a:defRPr>
             </a:lvl4pPr>
             <a:lvl5pPr>
-              <a:defRPr sz="2475" b="1">
-                <a:solidFill>
-                  <a:srgbClr val="0860FF"/>
+              <a:defRPr sz="1350" b="1">
+                <a:solidFill>
+                  <a:srgbClr val="536B91"/>
                 </a:solidFill>
               </a:defRPr>
             </a:lvl5pPr>
             <a:lvl6pPr>
-              <a:defRPr sz="2475" b="1">
-                <a:solidFill>
-                  <a:srgbClr val="0860FF"/>
+              <a:defRPr sz="1350" b="1">
+                <a:solidFill>
+                  <a:srgbClr val="536B91"/>
                 </a:solidFill>
               </a:defRPr>
             </a:lvl6pPr>
             <a:lvl7pPr>
-              <a:defRPr sz="2475" b="1">
-                <a:solidFill>
-                  <a:srgbClr val="0860FF"/>
+              <a:defRPr sz="1350" b="1">
+                <a:solidFill>
+                  <a:srgbClr val="536B91"/>
                 </a:solidFill>
               </a:defRPr>
             </a:lvl7pPr>
             <a:lvl8pPr>
-              <a:defRPr sz="2475" b="1">
-                <a:solidFill>
-                  <a:srgbClr val="0860FF"/>
+              <a:defRPr sz="1350" b="1">
+                <a:solidFill>
+                  <a:srgbClr val="536B91"/>
                 </a:solidFill>
               </a:defRPr>
             </a:lvl8pPr>
             <a:lvl9pPr>
-              <a:defRPr sz="2475" b="1">
-                <a:solidFill>
-                  <a:srgbClr val="0860FF"/>
+              <a:defRPr sz="1350" b="1">
+                <a:solidFill>
+                  <a:srgbClr val="536B91"/>
                 </a:solidFill>
               </a:defRPr>
             </a:lvl9pPr>
           </a:lstStyle>
           <a:p xmlns:a="http://schemas.openxmlformats.org/drawingml/2006/main">
             <a:pPr>
-              <a:defRPr sz="2475" b="1">
-                <a:solidFill>
-                  <a:srgbClr val="0860FF"/>
+              <a:defRPr sz="1350" b="1">
+                <a:solidFill>
+                  <a:srgbClr val="536B91"/>
                 </a:solidFill>
               </a:defRPr>
             </a:pPr>
             <a:r>
-              <a:rPr sz="2475" b="1">
-                <a:solidFill>
-                  <a:srgbClr val="0860FF"/>
+              <a:rPr sz="1350" b="1">
+                <a:solidFill>
+                  <a:srgbClr val="536B91"/>
                 </a:solidFill>
               </a:rPr>
-              <a:t>Aplicación</a:t>
+              <a:t>UNA VENTA CONECTA LAS TRES CAPAS</a:t>
             </a:r>
           </a:p>
         </p:txBody>
@@ -16795,7 +15430,7 @@
           <p:cNvPr id="4" name="">
             <a:extLst xmlns:a="http://schemas.openxmlformats.org/drawingml/2006/main">
               <a:ext uri="{FF2B5EF4-FFF2-40B4-BE49-F238E27FC236}">
-                <a16:creationId xmlns:a16="http://schemas.microsoft.com/office/drawing/2014/main" id="{F94A5D3A-E14E-4B8A-9EC4-8C9659DB2318}"/>
+                <a16:creationId xmlns:a16="http://schemas.microsoft.com/office/drawing/2014/main" id="{30975DC2-30FF-41AE-9C13-D48A3F494F0A}"/>
               </a:ext>
             </a:extLst>
           </p:cNvPr>
@@ -16806,8 +15441,8 @@
         </p:nvSpPr>
         <p:spPr>
           <a:xfrm xmlns:a="http://schemas.openxmlformats.org/drawingml/2006/main">
-            <a:off x="609600" y="2209800"/>
-            <a:ext cx="3333750" cy="952500"/>
+            <a:off x="609600" y="1838325"/>
+            <a:ext cx="857250" cy="619125"/>
           </a:xfrm>
           <a:prstGeom xmlns:a="http://schemas.openxmlformats.org/drawingml/2006/main" prst="rect">
             <a:avLst/>
@@ -16821,108 +15456,91 @@
           <a:bodyPr xmlns:a="http://schemas.openxmlformats.org/drawingml/2006/main"/>
           <a:lstStyle xmlns:a="http://schemas.openxmlformats.org/drawingml/2006/main">
             <a:defPPr>
-              <a:defRPr sz="2100" b="0">
-                <a:solidFill>
-                  <a:srgbClr val="061A35"/>
+              <a:defRPr sz="3450" b="1">
+                <a:solidFill>
+                  <a:srgbClr val="0860FF"/>
                 </a:solidFill>
               </a:defRPr>
             </a:defPPr>
             <a:lvl1pPr>
-              <a:defRPr sz="2100" b="0">
-                <a:solidFill>
-                  <a:srgbClr val="061A35"/>
+              <a:defRPr sz="3450" b="1">
+                <a:solidFill>
+                  <a:srgbClr val="0860FF"/>
                 </a:solidFill>
               </a:defRPr>
             </a:lvl1pPr>
             <a:lvl2pPr>
-              <a:defRPr sz="2100" b="0">
-                <a:solidFill>
-                  <a:srgbClr val="061A35"/>
+              <a:defRPr sz="3450" b="1">
+                <a:solidFill>
+                  <a:srgbClr val="0860FF"/>
                 </a:solidFill>
               </a:defRPr>
             </a:lvl2pPr>
             <a:lvl3pPr>
-              <a:defRPr sz="2100" b="0">
-                <a:solidFill>
-                  <a:srgbClr val="061A35"/>
+              <a:defRPr sz="3450" b="1">
+                <a:solidFill>
+                  <a:srgbClr val="0860FF"/>
                 </a:solidFill>
               </a:defRPr>
             </a:lvl3pPr>
             <a:lvl4pPr>
-              <a:defRPr sz="2100" b="0">
-                <a:solidFill>
-                  <a:srgbClr val="061A35"/>
+              <a:defRPr sz="3450" b="1">
+                <a:solidFill>
+                  <a:srgbClr val="0860FF"/>
                 </a:solidFill>
               </a:defRPr>
             </a:lvl4pPr>
             <a:lvl5pPr>
-              <a:defRPr sz="2100" b="0">
-                <a:solidFill>
-                  <a:srgbClr val="061A35"/>
+              <a:defRPr sz="3450" b="1">
+                <a:solidFill>
+                  <a:srgbClr val="0860FF"/>
                 </a:solidFill>
               </a:defRPr>
             </a:lvl5pPr>
             <a:lvl6pPr>
-              <a:defRPr sz="2100" b="0">
-                <a:solidFill>
-                  <a:srgbClr val="061A35"/>
+              <a:defRPr sz="3450" b="1">
+                <a:solidFill>
+                  <a:srgbClr val="0860FF"/>
                 </a:solidFill>
               </a:defRPr>
             </a:lvl6pPr>
             <a:lvl7pPr>
-              <a:defRPr sz="2100" b="0">
-                <a:solidFill>
-                  <a:srgbClr val="061A35"/>
+              <a:defRPr sz="3450" b="1">
+                <a:solidFill>
+                  <a:srgbClr val="0860FF"/>
                 </a:solidFill>
               </a:defRPr>
             </a:lvl7pPr>
             <a:lvl8pPr>
-              <a:defRPr sz="2100" b="0">
-                <a:solidFill>
-                  <a:srgbClr val="061A35"/>
+              <a:defRPr sz="3450" b="1">
+                <a:solidFill>
+                  <a:srgbClr val="0860FF"/>
                 </a:solidFill>
               </a:defRPr>
             </a:lvl8pPr>
             <a:lvl9pPr>
-              <a:defRPr sz="2100" b="0">
-                <a:solidFill>
-                  <a:srgbClr val="061A35"/>
+              <a:defRPr sz="3450" b="1">
+                <a:solidFill>
+                  <a:srgbClr val="0860FF"/>
                 </a:solidFill>
               </a:defRPr>
             </a:lvl9pPr>
           </a:lstStyle>
           <a:p xmlns:a="http://schemas.openxmlformats.org/drawingml/2006/main">
             <a:pPr>
-              <a:defRPr sz="2100" b="0">
-                <a:solidFill>
-                  <a:srgbClr val="061A35"/>
+              <a:defRPr sz="3450" b="1">
+                <a:solidFill>
+                  <a:srgbClr val="0860FF"/>
                 </a:solidFill>
               </a:defRPr>
             </a:pPr>
             <a:r>
-              <a:rPr sz="2100" b="0">
-                <a:solidFill>
-                  <a:srgbClr val="061A35"/>
+              <a:rPr sz="3450" b="1">
+                <a:solidFill>
+                  <a:srgbClr val="0860FF"/>
                 </a:solidFill>
               </a:rPr>
-              <a:t>Expo y React Native</a:t>
-            </a:r>
-          </a:p>
-          <a:p xmlns:a="http://schemas.openxmlformats.org/drawingml/2006/main">
-            <a:pPr>
-              <a:defRPr sz="2100" b="0">
-                <a:solidFill>
-                  <a:srgbClr val="061A35"/>
-                </a:solidFill>
-              </a:defRPr>
-            </a:pPr>
-            <a:r>
-              <a:rPr sz="2100" b="0">
-                <a:solidFill>
-                  <a:srgbClr val="061A35"/>
-                </a:solidFill>
-              </a:rPr>
-              <a:t>Pantallas y navegación</a:t>
+              <a:t>01</a:t>
             </a:r>
           </a:p>
         </p:txBody>
@@ -16932,7 +15550,7 @@
           <p:cNvPr id="5" name="">
             <a:extLst xmlns:a="http://schemas.openxmlformats.org/drawingml/2006/main">
               <a:ext uri="{FF2B5EF4-FFF2-40B4-BE49-F238E27FC236}">
-                <a16:creationId xmlns:a16="http://schemas.microsoft.com/office/drawing/2014/main" id="{90E4A4FA-D8FF-4F17-8B04-4CFF17E96665}"/>
+                <a16:creationId xmlns:a16="http://schemas.microsoft.com/office/drawing/2014/main" id="{702DB1E1-3E05-42A0-A415-159D63313D66}"/>
               </a:ext>
             </a:extLst>
           </p:cNvPr>
@@ -16943,8 +15561,8 @@
         </p:nvSpPr>
         <p:spPr>
           <a:xfrm xmlns:a="http://schemas.openxmlformats.org/drawingml/2006/main">
-            <a:off x="4333875" y="1571625"/>
-            <a:ext cx="3333750" cy="495300"/>
+            <a:off x="1666875" y="1838325"/>
+            <a:ext cx="3381375" cy="428625"/>
           </a:xfrm>
           <a:prstGeom xmlns:a="http://schemas.openxmlformats.org/drawingml/2006/main" prst="rect">
             <a:avLst/>
@@ -16958,91 +15576,91 @@
           <a:bodyPr xmlns:a="http://schemas.openxmlformats.org/drawingml/2006/main"/>
           <a:lstStyle xmlns:a="http://schemas.openxmlformats.org/drawingml/2006/main">
             <a:defPPr>
-              <a:defRPr sz="2475" b="1">
-                <a:solidFill>
-                  <a:srgbClr val="0860FF"/>
+              <a:defRPr sz="2325" b="1">
+                <a:solidFill>
+                  <a:srgbClr val="061A35"/>
                 </a:solidFill>
               </a:defRPr>
             </a:defPPr>
             <a:lvl1pPr>
-              <a:defRPr sz="2475" b="1">
-                <a:solidFill>
-                  <a:srgbClr val="0860FF"/>
+              <a:defRPr sz="2325" b="1">
+                <a:solidFill>
+                  <a:srgbClr val="061A35"/>
                 </a:solidFill>
               </a:defRPr>
             </a:lvl1pPr>
             <a:lvl2pPr>
-              <a:defRPr sz="2475" b="1">
-                <a:solidFill>
-                  <a:srgbClr val="0860FF"/>
+              <a:defRPr sz="2325" b="1">
+                <a:solidFill>
+                  <a:srgbClr val="061A35"/>
                 </a:solidFill>
               </a:defRPr>
             </a:lvl2pPr>
             <a:lvl3pPr>
-              <a:defRPr sz="2475" b="1">
-                <a:solidFill>
-                  <a:srgbClr val="0860FF"/>
+              <a:defRPr sz="2325" b="1">
+                <a:solidFill>
+                  <a:srgbClr val="061A35"/>
                 </a:solidFill>
               </a:defRPr>
             </a:lvl3pPr>
             <a:lvl4pPr>
-              <a:defRPr sz="2475" b="1">
-                <a:solidFill>
-                  <a:srgbClr val="0860FF"/>
+              <a:defRPr sz="2325" b="1">
+                <a:solidFill>
+                  <a:srgbClr val="061A35"/>
                 </a:solidFill>
               </a:defRPr>
             </a:lvl4pPr>
             <a:lvl5pPr>
-              <a:defRPr sz="2475" b="1">
-                <a:solidFill>
-                  <a:srgbClr val="0860FF"/>
+              <a:defRPr sz="2325" b="1">
+                <a:solidFill>
+                  <a:srgbClr val="061A35"/>
                 </a:solidFill>
               </a:defRPr>
             </a:lvl5pPr>
             <a:lvl6pPr>
-              <a:defRPr sz="2475" b="1">
-                <a:solidFill>
-                  <a:srgbClr val="0860FF"/>
+              <a:defRPr sz="2325" b="1">
+                <a:solidFill>
+                  <a:srgbClr val="061A35"/>
                 </a:solidFill>
               </a:defRPr>
             </a:lvl6pPr>
             <a:lvl7pPr>
-              <a:defRPr sz="2475" b="1">
-                <a:solidFill>
-                  <a:srgbClr val="0860FF"/>
+              <a:defRPr sz="2325" b="1">
+                <a:solidFill>
+                  <a:srgbClr val="061A35"/>
                 </a:solidFill>
               </a:defRPr>
             </a:lvl7pPr>
             <a:lvl8pPr>
-              <a:defRPr sz="2475" b="1">
-                <a:solidFill>
-                  <a:srgbClr val="0860FF"/>
+              <a:defRPr sz="2325" b="1">
+                <a:solidFill>
+                  <a:srgbClr val="061A35"/>
                 </a:solidFill>
               </a:defRPr>
             </a:lvl8pPr>
             <a:lvl9pPr>
-              <a:defRPr sz="2475" b="1">
-                <a:solidFill>
-                  <a:srgbClr val="0860FF"/>
+              <a:defRPr sz="2325" b="1">
+                <a:solidFill>
+                  <a:srgbClr val="061A35"/>
                 </a:solidFill>
               </a:defRPr>
             </a:lvl9pPr>
           </a:lstStyle>
           <a:p xmlns:a="http://schemas.openxmlformats.org/drawingml/2006/main">
             <a:pPr>
-              <a:defRPr sz="2475" b="1">
-                <a:solidFill>
-                  <a:srgbClr val="0860FF"/>
+              <a:defRPr sz="2325" b="1">
+                <a:solidFill>
+                  <a:srgbClr val="061A35"/>
                 </a:solidFill>
               </a:defRPr>
             </a:pPr>
             <a:r>
-              <a:rPr sz="2475" b="1">
-                <a:solidFill>
-                  <a:srgbClr val="0860FF"/>
+              <a:rPr sz="2325" b="1">
+                <a:solidFill>
+                  <a:srgbClr val="061A35"/>
                 </a:solidFill>
               </a:rPr>
-              <a:t>API</a:t>
+              <a:t>Frontend</a:t>
             </a:r>
           </a:p>
         </p:txBody>
@@ -17052,7 +15670,7 @@
           <p:cNvPr id="6" name="">
             <a:extLst xmlns:a="http://schemas.openxmlformats.org/drawingml/2006/main">
               <a:ext uri="{FF2B5EF4-FFF2-40B4-BE49-F238E27FC236}">
-                <a16:creationId xmlns:a16="http://schemas.microsoft.com/office/drawing/2014/main" id="{743CF897-6FFC-4846-B578-0063540665B3}"/>
+                <a16:creationId xmlns:a16="http://schemas.microsoft.com/office/drawing/2014/main" id="{932F43C8-83DC-46A4-B717-C3109F017105}"/>
               </a:ext>
             </a:extLst>
           </p:cNvPr>
@@ -17063,8 +15681,8 @@
         </p:nvSpPr>
         <p:spPr>
           <a:xfrm xmlns:a="http://schemas.openxmlformats.org/drawingml/2006/main">
-            <a:off x="4333875" y="2209800"/>
-            <a:ext cx="3333750" cy="952500"/>
+            <a:off x="5048250" y="1905000"/>
+            <a:ext cx="3190875" cy="361950"/>
           </a:xfrm>
           <a:prstGeom xmlns:a="http://schemas.openxmlformats.org/drawingml/2006/main" prst="rect">
             <a:avLst/>
@@ -17078,108 +15696,91 @@
           <a:bodyPr xmlns:a="http://schemas.openxmlformats.org/drawingml/2006/main"/>
           <a:lstStyle xmlns:a="http://schemas.openxmlformats.org/drawingml/2006/main">
             <a:defPPr>
-              <a:defRPr sz="2100" b="0">
-                <a:solidFill>
-                  <a:srgbClr val="061A35"/>
+              <a:defRPr sz="1725" b="0">
+                <a:solidFill>
+                  <a:srgbClr val="0860FF"/>
                 </a:solidFill>
               </a:defRPr>
             </a:defPPr>
             <a:lvl1pPr>
-              <a:defRPr sz="2100" b="0">
-                <a:solidFill>
-                  <a:srgbClr val="061A35"/>
+              <a:defRPr sz="1725" b="0">
+                <a:solidFill>
+                  <a:srgbClr val="0860FF"/>
                 </a:solidFill>
               </a:defRPr>
             </a:lvl1pPr>
             <a:lvl2pPr>
-              <a:defRPr sz="2100" b="0">
-                <a:solidFill>
-                  <a:srgbClr val="061A35"/>
+              <a:defRPr sz="1725" b="0">
+                <a:solidFill>
+                  <a:srgbClr val="0860FF"/>
                 </a:solidFill>
               </a:defRPr>
             </a:lvl2pPr>
             <a:lvl3pPr>
-              <a:defRPr sz="2100" b="0">
-                <a:solidFill>
-                  <a:srgbClr val="061A35"/>
+              <a:defRPr sz="1725" b="0">
+                <a:solidFill>
+                  <a:srgbClr val="0860FF"/>
                 </a:solidFill>
               </a:defRPr>
             </a:lvl3pPr>
             <a:lvl4pPr>
-              <a:defRPr sz="2100" b="0">
-                <a:solidFill>
-                  <a:srgbClr val="061A35"/>
+              <a:defRPr sz="1725" b="0">
+                <a:solidFill>
+                  <a:srgbClr val="0860FF"/>
                 </a:solidFill>
               </a:defRPr>
             </a:lvl4pPr>
             <a:lvl5pPr>
-              <a:defRPr sz="2100" b="0">
-                <a:solidFill>
-                  <a:srgbClr val="061A35"/>
+              <a:defRPr sz="1725" b="0">
+                <a:solidFill>
+                  <a:srgbClr val="0860FF"/>
                 </a:solidFill>
               </a:defRPr>
             </a:lvl5pPr>
             <a:lvl6pPr>
-              <a:defRPr sz="2100" b="0">
-                <a:solidFill>
-                  <a:srgbClr val="061A35"/>
+              <a:defRPr sz="1725" b="0">
+                <a:solidFill>
+                  <a:srgbClr val="0860FF"/>
                 </a:solidFill>
               </a:defRPr>
             </a:lvl6pPr>
             <a:lvl7pPr>
-              <a:defRPr sz="2100" b="0">
-                <a:solidFill>
-                  <a:srgbClr val="061A35"/>
+              <a:defRPr sz="1725" b="0">
+                <a:solidFill>
+                  <a:srgbClr val="0860FF"/>
                 </a:solidFill>
               </a:defRPr>
             </a:lvl7pPr>
             <a:lvl8pPr>
-              <a:defRPr sz="2100" b="0">
-                <a:solidFill>
-                  <a:srgbClr val="061A35"/>
+              <a:defRPr sz="1725" b="0">
+                <a:solidFill>
+                  <a:srgbClr val="0860FF"/>
                 </a:solidFill>
               </a:defRPr>
             </a:lvl8pPr>
             <a:lvl9pPr>
-              <a:defRPr sz="2100" b="0">
-                <a:solidFill>
-                  <a:srgbClr val="061A35"/>
+              <a:defRPr sz="1725" b="0">
+                <a:solidFill>
+                  <a:srgbClr val="0860FF"/>
                 </a:solidFill>
               </a:defRPr>
             </a:lvl9pPr>
           </a:lstStyle>
           <a:p xmlns:a="http://schemas.openxmlformats.org/drawingml/2006/main">
             <a:pPr>
-              <a:defRPr sz="2100" b="0">
-                <a:solidFill>
-                  <a:srgbClr val="061A35"/>
+              <a:defRPr sz="1725" b="0">
+                <a:solidFill>
+                  <a:srgbClr val="0860FF"/>
                 </a:solidFill>
               </a:defRPr>
             </a:pPr>
             <a:r>
-              <a:rPr sz="2100" b="0">
-                <a:solidFill>
-                  <a:srgbClr val="061A35"/>
+              <a:rPr sz="1725" b="0">
+                <a:solidFill>
+                  <a:srgbClr val="0860FF"/>
                 </a:solidFill>
               </a:rPr>
-              <a:t>Node.js y Express</a:t>
-            </a:r>
-          </a:p>
-          <a:p xmlns:a="http://schemas.openxmlformats.org/drawingml/2006/main">
-            <a:pPr>
-              <a:defRPr sz="2100" b="0">
-                <a:solidFill>
-                  <a:srgbClr val="061A35"/>
-                </a:solidFill>
-              </a:defRPr>
-            </a:pPr>
-            <a:r>
-              <a:rPr sz="2100" b="0">
-                <a:solidFill>
-                  <a:srgbClr val="061A35"/>
-                </a:solidFill>
-              </a:rPr>
-              <a:t>Reglas de la operación</a:t>
+              <a:t>React Native + Expo</a:t>
             </a:r>
           </a:p>
         </p:txBody>
@@ -17189,7 +15790,7 @@
           <p:cNvPr id="7" name="">
             <a:extLst xmlns:a="http://schemas.openxmlformats.org/drawingml/2006/main">
               <a:ext uri="{FF2B5EF4-FFF2-40B4-BE49-F238E27FC236}">
-                <a16:creationId xmlns:a16="http://schemas.microsoft.com/office/drawing/2014/main" id="{28A8A667-BA60-4A99-AAC1-F2023529CE39}"/>
+                <a16:creationId xmlns:a16="http://schemas.microsoft.com/office/drawing/2014/main" id="{F84D57AA-BCCE-45D3-93D3-786E30BF04F4}"/>
               </a:ext>
             </a:extLst>
           </p:cNvPr>
@@ -17200,8 +15801,8 @@
         </p:nvSpPr>
         <p:spPr>
           <a:xfrm xmlns:a="http://schemas.openxmlformats.org/drawingml/2006/main">
-            <a:off x="8048625" y="1571625"/>
-            <a:ext cx="3333750" cy="495300"/>
+            <a:off x="1666875" y="2266950"/>
+            <a:ext cx="3381375" cy="381000"/>
           </a:xfrm>
           <a:prstGeom xmlns:a="http://schemas.openxmlformats.org/drawingml/2006/main" prst="rect">
             <a:avLst/>
@@ -17215,91 +15816,91 @@
           <a:bodyPr xmlns:a="http://schemas.openxmlformats.org/drawingml/2006/main"/>
           <a:lstStyle xmlns:a="http://schemas.openxmlformats.org/drawingml/2006/main">
             <a:defPPr>
-              <a:defRPr sz="2475" b="1">
-                <a:solidFill>
-                  <a:srgbClr val="0860FF"/>
+              <a:defRPr sz="1800" b="0">
+                <a:solidFill>
+                  <a:srgbClr val="536B91"/>
                 </a:solidFill>
               </a:defRPr>
             </a:defPPr>
             <a:lvl1pPr>
-              <a:defRPr sz="2475" b="1">
-                <a:solidFill>
-                  <a:srgbClr val="0860FF"/>
+              <a:defRPr sz="1800" b="0">
+                <a:solidFill>
+                  <a:srgbClr val="536B91"/>
                 </a:solidFill>
               </a:defRPr>
             </a:lvl1pPr>
             <a:lvl2pPr>
-              <a:defRPr sz="2475" b="1">
-                <a:solidFill>
-                  <a:srgbClr val="0860FF"/>
+              <a:defRPr sz="1800" b="0">
+                <a:solidFill>
+                  <a:srgbClr val="536B91"/>
                 </a:solidFill>
               </a:defRPr>
             </a:lvl2pPr>
             <a:lvl3pPr>
-              <a:defRPr sz="2475" b="1">
-                <a:solidFill>
-                  <a:srgbClr val="0860FF"/>
+              <a:defRPr sz="1800" b="0">
+                <a:solidFill>
+                  <a:srgbClr val="536B91"/>
                 </a:solidFill>
               </a:defRPr>
             </a:lvl3pPr>
             <a:lvl4pPr>
-              <a:defRPr sz="2475" b="1">
-                <a:solidFill>
-                  <a:srgbClr val="0860FF"/>
+              <a:defRPr sz="1800" b="0">
+                <a:solidFill>
+                  <a:srgbClr val="536B91"/>
                 </a:solidFill>
               </a:defRPr>
             </a:lvl4pPr>
             <a:lvl5pPr>
-              <a:defRPr sz="2475" b="1">
-                <a:solidFill>
-                  <a:srgbClr val="0860FF"/>
+              <a:defRPr sz="1800" b="0">
+                <a:solidFill>
+                  <a:srgbClr val="536B91"/>
                 </a:solidFill>
               </a:defRPr>
             </a:lvl5pPr>
             <a:lvl6pPr>
-              <a:defRPr sz="2475" b="1">
-                <a:solidFill>
-                  <a:srgbClr val="0860FF"/>
+              <a:defRPr sz="1800" b="0">
+                <a:solidFill>
+                  <a:srgbClr val="536B91"/>
                 </a:solidFill>
               </a:defRPr>
             </a:lvl6pPr>
             <a:lvl7pPr>
-              <a:defRPr sz="2475" b="1">
-                <a:solidFill>
-                  <a:srgbClr val="0860FF"/>
+              <a:defRPr sz="1800" b="0">
+                <a:solidFill>
+                  <a:srgbClr val="536B91"/>
                 </a:solidFill>
               </a:defRPr>
             </a:lvl7pPr>
             <a:lvl8pPr>
-              <a:defRPr sz="2475" b="1">
-                <a:solidFill>
-                  <a:srgbClr val="0860FF"/>
+              <a:defRPr sz="1800" b="0">
+                <a:solidFill>
+                  <a:srgbClr val="536B91"/>
                 </a:solidFill>
               </a:defRPr>
             </a:lvl8pPr>
             <a:lvl9pPr>
-              <a:defRPr sz="2475" b="1">
-                <a:solidFill>
-                  <a:srgbClr val="0860FF"/>
+              <a:defRPr sz="1800" b="0">
+                <a:solidFill>
+                  <a:srgbClr val="536B91"/>
                 </a:solidFill>
               </a:defRPr>
             </a:lvl9pPr>
           </a:lstStyle>
           <a:p xmlns:a="http://schemas.openxmlformats.org/drawingml/2006/main">
             <a:pPr>
-              <a:defRPr sz="2475" b="1">
-                <a:solidFill>
-                  <a:srgbClr val="0860FF"/>
+              <a:defRPr sz="1800" b="0">
+                <a:solidFill>
+                  <a:srgbClr val="536B91"/>
                 </a:solidFill>
               </a:defRPr>
             </a:pPr>
             <a:r>
-              <a:rPr sz="2475" b="1">
-                <a:solidFill>
-                  <a:srgbClr val="0860FF"/>
+              <a:rPr sz="1800" b="0">
+                <a:solidFill>
+                  <a:srgbClr val="536B91"/>
                 </a:solidFill>
               </a:rPr>
-              <a:t>Base de datos</a:t>
+              <a:t>Lo que vemos</a:t>
             </a:r>
           </a:p>
         </p:txBody>
@@ -17309,7 +15910,7 @@
           <p:cNvPr id="8" name="">
             <a:extLst xmlns:a="http://schemas.openxmlformats.org/drawingml/2006/main">
               <a:ext uri="{FF2B5EF4-FFF2-40B4-BE49-F238E27FC236}">
-                <a16:creationId xmlns:a16="http://schemas.microsoft.com/office/drawing/2014/main" id="{367BA272-0B6D-4ABD-ACBE-1758B46B37B5}"/>
+                <a16:creationId xmlns:a16="http://schemas.microsoft.com/office/drawing/2014/main" id="{408AF391-E33D-4258-9074-8F8925EF78F2}"/>
               </a:ext>
             </a:extLst>
           </p:cNvPr>
@@ -17320,8 +15921,8 @@
         </p:nvSpPr>
         <p:spPr>
           <a:xfrm xmlns:a="http://schemas.openxmlformats.org/drawingml/2006/main">
-            <a:off x="8048625" y="2209800"/>
-            <a:ext cx="3381375" cy="952500"/>
+            <a:off x="5048250" y="2305050"/>
+            <a:ext cx="3143250" cy="619125"/>
           </a:xfrm>
           <a:prstGeom xmlns:a="http://schemas.openxmlformats.org/drawingml/2006/main" prst="rect">
             <a:avLst/>
@@ -17335,70 +15936,70 @@
           <a:bodyPr xmlns:a="http://schemas.openxmlformats.org/drawingml/2006/main"/>
           <a:lstStyle xmlns:a="http://schemas.openxmlformats.org/drawingml/2006/main">
             <a:defPPr>
-              <a:defRPr sz="2100" b="0">
+              <a:defRPr sz="1725" b="0">
                 <a:solidFill>
                   <a:srgbClr val="061A35"/>
                 </a:solidFill>
               </a:defRPr>
             </a:defPPr>
             <a:lvl1pPr>
-              <a:defRPr sz="2100" b="0">
+              <a:defRPr sz="1725" b="0">
                 <a:solidFill>
                   <a:srgbClr val="061A35"/>
                 </a:solidFill>
               </a:defRPr>
             </a:lvl1pPr>
             <a:lvl2pPr>
-              <a:defRPr sz="2100" b="0">
+              <a:defRPr sz="1725" b="0">
                 <a:solidFill>
                   <a:srgbClr val="061A35"/>
                 </a:solidFill>
               </a:defRPr>
             </a:lvl2pPr>
             <a:lvl3pPr>
-              <a:defRPr sz="2100" b="0">
+              <a:defRPr sz="1725" b="0">
                 <a:solidFill>
                   <a:srgbClr val="061A35"/>
                 </a:solidFill>
               </a:defRPr>
             </a:lvl3pPr>
             <a:lvl4pPr>
-              <a:defRPr sz="2100" b="0">
+              <a:defRPr sz="1725" b="0">
                 <a:solidFill>
                   <a:srgbClr val="061A35"/>
                 </a:solidFill>
               </a:defRPr>
             </a:lvl4pPr>
             <a:lvl5pPr>
-              <a:defRPr sz="2100" b="0">
+              <a:defRPr sz="1725" b="0">
                 <a:solidFill>
                   <a:srgbClr val="061A35"/>
                 </a:solidFill>
               </a:defRPr>
             </a:lvl5pPr>
             <a:lvl6pPr>
-              <a:defRPr sz="2100" b="0">
+              <a:defRPr sz="1725" b="0">
                 <a:solidFill>
                   <a:srgbClr val="061A35"/>
                 </a:solidFill>
               </a:defRPr>
             </a:lvl6pPr>
             <a:lvl7pPr>
-              <a:defRPr sz="2100" b="0">
+              <a:defRPr sz="1725" b="0">
                 <a:solidFill>
                   <a:srgbClr val="061A35"/>
                 </a:solidFill>
               </a:defRPr>
             </a:lvl7pPr>
             <a:lvl8pPr>
-              <a:defRPr sz="2100" b="0">
+              <a:defRPr sz="1725" b="0">
                 <a:solidFill>
                   <a:srgbClr val="061A35"/>
                 </a:solidFill>
               </a:defRPr>
             </a:lvl8pPr>
             <a:lvl9pPr>
-              <a:defRPr sz="2100" b="0">
+              <a:defRPr sz="1725" b="0">
                 <a:solidFill>
                   <a:srgbClr val="061A35"/>
                 </a:solidFill>
@@ -17407,36 +16008,19 @@
           </a:lstStyle>
           <a:p xmlns:a="http://schemas.openxmlformats.org/drawingml/2006/main">
             <a:pPr>
-              <a:defRPr sz="2100" b="0">
+              <a:defRPr sz="1725" b="0">
                 <a:solidFill>
                   <a:srgbClr val="061A35"/>
                 </a:solidFill>
               </a:defRPr>
             </a:pPr>
             <a:r>
-              <a:rPr sz="2100" b="0">
+              <a:rPr sz="1725" b="0">
                 <a:solidFill>
                   <a:srgbClr val="061A35"/>
                 </a:solidFill>
               </a:rPr>
-              <a:t>Prisma y PostgreSQL</a:t>
-            </a:r>
-          </a:p>
-          <a:p xmlns:a="http://schemas.openxmlformats.org/drawingml/2006/main">
-            <a:pPr>
-              <a:defRPr sz="2100" b="0">
-                <a:solidFill>
-                  <a:srgbClr val="061A35"/>
-                </a:solidFill>
-              </a:defRPr>
-            </a:pPr>
-            <a:r>
-              <a:rPr sz="2100" b="0">
-                <a:solidFill>
-                  <a:srgbClr val="061A35"/>
-                </a:solidFill>
-              </a:rPr>
-              <a:t>Persistencia y transacciones</a:t>
+              <a:t>El empleado confirma una venta</a:t>
             </a:r>
           </a:p>
         </p:txBody>
@@ -17446,7 +16030,7 @@
           <p:cNvPr id="9" name="">
             <a:extLst xmlns:a="http://schemas.openxmlformats.org/drawingml/2006/main">
               <a:ext uri="{FF2B5EF4-FFF2-40B4-BE49-F238E27FC236}">
-                <a16:creationId xmlns:a16="http://schemas.microsoft.com/office/drawing/2014/main" id="{682866DA-21F3-45B5-A965-6ED705D3364D}"/>
+                <a16:creationId xmlns:a16="http://schemas.microsoft.com/office/drawing/2014/main" id="{3F8D9AEF-3A39-4154-BDEB-23201259D5AD}"/>
               </a:ext>
             </a:extLst>
           </p:cNvPr>
@@ -17457,8 +16041,38 @@
         </p:nvSpPr>
         <p:spPr>
           <a:xfrm xmlns:a="http://schemas.openxmlformats.org/drawingml/2006/main">
-            <a:off x="609600" y="3495675"/>
-            <a:ext cx="10858500" cy="476250"/>
+            <a:off x="952500" y="2505075"/>
+            <a:ext cx="19050" cy="342900"/>
+          </a:xfrm>
+          <a:prstGeom xmlns:a="http://schemas.openxmlformats.org/drawingml/2006/main" prst="rect">
+            <a:avLst/>
+          </a:prstGeom>
+          <a:solidFill xmlns:a="http://schemas.openxmlformats.org/drawingml/2006/main">
+            <a:srgbClr val="ACC8F1"/>
+          </a:solidFill>
+          <a:ln xmlns:a="http://schemas.openxmlformats.org/drawingml/2006/main" w="0">
+            <a:noFill/>
+          </a:ln>
+        </p:spPr>
+      </p:sp>
+      <p:sp>
+        <p:nvSpPr>
+          <p:cNvPr id="10" name="">
+            <a:extLst xmlns:a="http://schemas.openxmlformats.org/drawingml/2006/main">
+              <a:ext uri="{FF2B5EF4-FFF2-40B4-BE49-F238E27FC236}">
+                <a16:creationId xmlns:a16="http://schemas.microsoft.com/office/drawing/2014/main" id="{42DD3248-A3D0-48EE-8D5D-8EABE5DCF08D}"/>
+              </a:ext>
+            </a:extLst>
+          </p:cNvPr>
+          <p:cNvSpPr>
+            <a:spLocks xmlns:a="http://schemas.openxmlformats.org/drawingml/2006/main" noGrp="1"/>
+          </p:cNvSpPr>
+          <p:nvPr/>
+        </p:nvSpPr>
+        <p:spPr>
+          <a:xfrm xmlns:a="http://schemas.openxmlformats.org/drawingml/2006/main">
+            <a:off x="609600" y="3009900"/>
+            <a:ext cx="857250" cy="619125"/>
           </a:xfrm>
           <a:prstGeom xmlns:a="http://schemas.openxmlformats.org/drawingml/2006/main" prst="rect">
             <a:avLst/>
@@ -17472,101 +16086,101 @@
           <a:bodyPr xmlns:a="http://schemas.openxmlformats.org/drawingml/2006/main"/>
           <a:lstStyle xmlns:a="http://schemas.openxmlformats.org/drawingml/2006/main">
             <a:defPPr>
-              <a:defRPr sz="2100" b="1">
-                <a:solidFill>
-                  <a:srgbClr val="061A35"/>
+              <a:defRPr sz="3450" b="1">
+                <a:solidFill>
+                  <a:srgbClr val="0860FF"/>
                 </a:solidFill>
               </a:defRPr>
             </a:defPPr>
             <a:lvl1pPr>
-              <a:defRPr sz="2100" b="1">
-                <a:solidFill>
-                  <a:srgbClr val="061A35"/>
+              <a:defRPr sz="3450" b="1">
+                <a:solidFill>
+                  <a:srgbClr val="0860FF"/>
                 </a:solidFill>
               </a:defRPr>
             </a:lvl1pPr>
             <a:lvl2pPr>
-              <a:defRPr sz="2100" b="1">
-                <a:solidFill>
-                  <a:srgbClr val="061A35"/>
+              <a:defRPr sz="3450" b="1">
+                <a:solidFill>
+                  <a:srgbClr val="0860FF"/>
                 </a:solidFill>
               </a:defRPr>
             </a:lvl2pPr>
             <a:lvl3pPr>
-              <a:defRPr sz="2100" b="1">
-                <a:solidFill>
-                  <a:srgbClr val="061A35"/>
+              <a:defRPr sz="3450" b="1">
+                <a:solidFill>
+                  <a:srgbClr val="0860FF"/>
                 </a:solidFill>
               </a:defRPr>
             </a:lvl3pPr>
             <a:lvl4pPr>
-              <a:defRPr sz="2100" b="1">
-                <a:solidFill>
-                  <a:srgbClr val="061A35"/>
+              <a:defRPr sz="3450" b="1">
+                <a:solidFill>
+                  <a:srgbClr val="0860FF"/>
                 </a:solidFill>
               </a:defRPr>
             </a:lvl4pPr>
             <a:lvl5pPr>
-              <a:defRPr sz="2100" b="1">
-                <a:solidFill>
-                  <a:srgbClr val="061A35"/>
+              <a:defRPr sz="3450" b="1">
+                <a:solidFill>
+                  <a:srgbClr val="0860FF"/>
                 </a:solidFill>
               </a:defRPr>
             </a:lvl5pPr>
             <a:lvl6pPr>
-              <a:defRPr sz="2100" b="1">
-                <a:solidFill>
-                  <a:srgbClr val="061A35"/>
+              <a:defRPr sz="3450" b="1">
+                <a:solidFill>
+                  <a:srgbClr val="0860FF"/>
                 </a:solidFill>
               </a:defRPr>
             </a:lvl6pPr>
             <a:lvl7pPr>
-              <a:defRPr sz="2100" b="1">
-                <a:solidFill>
-                  <a:srgbClr val="061A35"/>
+              <a:defRPr sz="3450" b="1">
+                <a:solidFill>
+                  <a:srgbClr val="0860FF"/>
                 </a:solidFill>
               </a:defRPr>
             </a:lvl7pPr>
             <a:lvl8pPr>
-              <a:defRPr sz="2100" b="1">
-                <a:solidFill>
-                  <a:srgbClr val="061A35"/>
+              <a:defRPr sz="3450" b="1">
+                <a:solidFill>
+                  <a:srgbClr val="0860FF"/>
                 </a:solidFill>
               </a:defRPr>
             </a:lvl8pPr>
             <a:lvl9pPr>
-              <a:defRPr sz="2100" b="1">
-                <a:solidFill>
-                  <a:srgbClr val="061A35"/>
+              <a:defRPr sz="3450" b="1">
+                <a:solidFill>
+                  <a:srgbClr val="0860FF"/>
                 </a:solidFill>
               </a:defRPr>
             </a:lvl9pPr>
           </a:lstStyle>
           <a:p xmlns:a="http://schemas.openxmlformats.org/drawingml/2006/main">
             <a:pPr>
-              <a:defRPr sz="2100" b="1">
-                <a:solidFill>
-                  <a:srgbClr val="061A35"/>
+              <a:defRPr sz="3450" b="1">
+                <a:solidFill>
+                  <a:srgbClr val="0860FF"/>
                 </a:solidFill>
               </a:defRPr>
             </a:pPr>
             <a:r>
-              <a:rPr sz="2100" b="1">
-                <a:solidFill>
-                  <a:srgbClr val="061A35"/>
+              <a:rPr sz="3450" b="1">
+                <a:solidFill>
+                  <a:srgbClr val="0860FF"/>
                 </a:solidFill>
               </a:rPr>
-              <a:t>Contratos TypeScript compartidos entre aplicación y API</a:t>
+              <a:t>02</a:t>
             </a:r>
           </a:p>
         </p:txBody>
       </p:sp>
       <p:sp>
         <p:nvSpPr>
-          <p:cNvPr id="10" name="">
+          <p:cNvPr id="11" name="">
             <a:extLst xmlns:a="http://schemas.openxmlformats.org/drawingml/2006/main">
               <a:ext uri="{FF2B5EF4-FFF2-40B4-BE49-F238E27FC236}">
-                <a16:creationId xmlns:a16="http://schemas.microsoft.com/office/drawing/2014/main" id="{69B8FFB0-A907-4F96-B8D9-EBB0F4C286FE}"/>
+                <a16:creationId xmlns:a16="http://schemas.microsoft.com/office/drawing/2014/main" id="{DDB34A50-5613-4219-AEA3-9E9D5C95E183}"/>
               </a:ext>
             </a:extLst>
           </p:cNvPr>
@@ -17577,8 +16191,1176 @@
         </p:nvSpPr>
         <p:spPr>
           <a:xfrm xmlns:a="http://schemas.openxmlformats.org/drawingml/2006/main">
-            <a:off x="609600" y="4381500"/>
-            <a:ext cx="3238500" cy="428625"/>
+            <a:off x="1666875" y="3009900"/>
+            <a:ext cx="3381375" cy="428625"/>
+          </a:xfrm>
+          <a:prstGeom xmlns:a="http://schemas.openxmlformats.org/drawingml/2006/main" prst="rect">
+            <a:avLst/>
+          </a:prstGeom>
+          <a:noFill xmlns:a="http://schemas.openxmlformats.org/drawingml/2006/main"/>
+          <a:ln xmlns:a="http://schemas.openxmlformats.org/drawingml/2006/main" w="0">
+            <a:noFill/>
+          </a:ln>
+        </p:spPr>
+        <p:txBody>
+          <a:bodyPr xmlns:a="http://schemas.openxmlformats.org/drawingml/2006/main"/>
+          <a:lstStyle xmlns:a="http://schemas.openxmlformats.org/drawingml/2006/main">
+            <a:defPPr>
+              <a:defRPr sz="2325" b="1">
+                <a:solidFill>
+                  <a:srgbClr val="061A35"/>
+                </a:solidFill>
+              </a:defRPr>
+            </a:defPPr>
+            <a:lvl1pPr>
+              <a:defRPr sz="2325" b="1">
+                <a:solidFill>
+                  <a:srgbClr val="061A35"/>
+                </a:solidFill>
+              </a:defRPr>
+            </a:lvl1pPr>
+            <a:lvl2pPr>
+              <a:defRPr sz="2325" b="1">
+                <a:solidFill>
+                  <a:srgbClr val="061A35"/>
+                </a:solidFill>
+              </a:defRPr>
+            </a:lvl2pPr>
+            <a:lvl3pPr>
+              <a:defRPr sz="2325" b="1">
+                <a:solidFill>
+                  <a:srgbClr val="061A35"/>
+                </a:solidFill>
+              </a:defRPr>
+            </a:lvl3pPr>
+            <a:lvl4pPr>
+              <a:defRPr sz="2325" b="1">
+                <a:solidFill>
+                  <a:srgbClr val="061A35"/>
+                </a:solidFill>
+              </a:defRPr>
+            </a:lvl4pPr>
+            <a:lvl5pPr>
+              <a:defRPr sz="2325" b="1">
+                <a:solidFill>
+                  <a:srgbClr val="061A35"/>
+                </a:solidFill>
+              </a:defRPr>
+            </a:lvl5pPr>
+            <a:lvl6pPr>
+              <a:defRPr sz="2325" b="1">
+                <a:solidFill>
+                  <a:srgbClr val="061A35"/>
+                </a:solidFill>
+              </a:defRPr>
+            </a:lvl6pPr>
+            <a:lvl7pPr>
+              <a:defRPr sz="2325" b="1">
+                <a:solidFill>
+                  <a:srgbClr val="061A35"/>
+                </a:solidFill>
+              </a:defRPr>
+            </a:lvl7pPr>
+            <a:lvl8pPr>
+              <a:defRPr sz="2325" b="1">
+                <a:solidFill>
+                  <a:srgbClr val="061A35"/>
+                </a:solidFill>
+              </a:defRPr>
+            </a:lvl8pPr>
+            <a:lvl9pPr>
+              <a:defRPr sz="2325" b="1">
+                <a:solidFill>
+                  <a:srgbClr val="061A35"/>
+                </a:solidFill>
+              </a:defRPr>
+            </a:lvl9pPr>
+          </a:lstStyle>
+          <a:p xmlns:a="http://schemas.openxmlformats.org/drawingml/2006/main">
+            <a:pPr>
+              <a:defRPr sz="2325" b="1">
+                <a:solidFill>
+                  <a:srgbClr val="061A35"/>
+                </a:solidFill>
+              </a:defRPr>
+            </a:pPr>
+            <a:r>
+              <a:rPr sz="2325" b="1">
+                <a:solidFill>
+                  <a:srgbClr val="061A35"/>
+                </a:solidFill>
+              </a:rPr>
+              <a:t>Backend</a:t>
+            </a:r>
+          </a:p>
+        </p:txBody>
+      </p:sp>
+      <p:sp>
+        <p:nvSpPr>
+          <p:cNvPr id="12" name="">
+            <a:extLst xmlns:a="http://schemas.openxmlformats.org/drawingml/2006/main">
+              <a:ext uri="{FF2B5EF4-FFF2-40B4-BE49-F238E27FC236}">
+                <a16:creationId xmlns:a16="http://schemas.microsoft.com/office/drawing/2014/main" id="{B93490D9-3FB6-41F6-BC26-C21297FA3EAA}"/>
+              </a:ext>
+            </a:extLst>
+          </p:cNvPr>
+          <p:cNvSpPr>
+            <a:spLocks xmlns:a="http://schemas.openxmlformats.org/drawingml/2006/main" noGrp="1"/>
+          </p:cNvSpPr>
+          <p:nvPr/>
+        </p:nvSpPr>
+        <p:spPr>
+          <a:xfrm xmlns:a="http://schemas.openxmlformats.org/drawingml/2006/main">
+            <a:off x="5048250" y="3076575"/>
+            <a:ext cx="3190875" cy="361950"/>
+          </a:xfrm>
+          <a:prstGeom xmlns:a="http://schemas.openxmlformats.org/drawingml/2006/main" prst="rect">
+            <a:avLst/>
+          </a:prstGeom>
+          <a:noFill xmlns:a="http://schemas.openxmlformats.org/drawingml/2006/main"/>
+          <a:ln xmlns:a="http://schemas.openxmlformats.org/drawingml/2006/main" w="0">
+            <a:noFill/>
+          </a:ln>
+        </p:spPr>
+        <p:txBody>
+          <a:bodyPr xmlns:a="http://schemas.openxmlformats.org/drawingml/2006/main"/>
+          <a:lstStyle xmlns:a="http://schemas.openxmlformats.org/drawingml/2006/main">
+            <a:defPPr>
+              <a:defRPr sz="1725" b="0">
+                <a:solidFill>
+                  <a:srgbClr val="0860FF"/>
+                </a:solidFill>
+              </a:defRPr>
+            </a:defPPr>
+            <a:lvl1pPr>
+              <a:defRPr sz="1725" b="0">
+                <a:solidFill>
+                  <a:srgbClr val="0860FF"/>
+                </a:solidFill>
+              </a:defRPr>
+            </a:lvl1pPr>
+            <a:lvl2pPr>
+              <a:defRPr sz="1725" b="0">
+                <a:solidFill>
+                  <a:srgbClr val="0860FF"/>
+                </a:solidFill>
+              </a:defRPr>
+            </a:lvl2pPr>
+            <a:lvl3pPr>
+              <a:defRPr sz="1725" b="0">
+                <a:solidFill>
+                  <a:srgbClr val="0860FF"/>
+                </a:solidFill>
+              </a:defRPr>
+            </a:lvl3pPr>
+            <a:lvl4pPr>
+              <a:defRPr sz="1725" b="0">
+                <a:solidFill>
+                  <a:srgbClr val="0860FF"/>
+                </a:solidFill>
+              </a:defRPr>
+            </a:lvl4pPr>
+            <a:lvl5pPr>
+              <a:defRPr sz="1725" b="0">
+                <a:solidFill>
+                  <a:srgbClr val="0860FF"/>
+                </a:solidFill>
+              </a:defRPr>
+            </a:lvl5pPr>
+            <a:lvl6pPr>
+              <a:defRPr sz="1725" b="0">
+                <a:solidFill>
+                  <a:srgbClr val="0860FF"/>
+                </a:solidFill>
+              </a:defRPr>
+            </a:lvl6pPr>
+            <a:lvl7pPr>
+              <a:defRPr sz="1725" b="0">
+                <a:solidFill>
+                  <a:srgbClr val="0860FF"/>
+                </a:solidFill>
+              </a:defRPr>
+            </a:lvl7pPr>
+            <a:lvl8pPr>
+              <a:defRPr sz="1725" b="0">
+                <a:solidFill>
+                  <a:srgbClr val="0860FF"/>
+                </a:solidFill>
+              </a:defRPr>
+            </a:lvl8pPr>
+            <a:lvl9pPr>
+              <a:defRPr sz="1725" b="0">
+                <a:solidFill>
+                  <a:srgbClr val="0860FF"/>
+                </a:solidFill>
+              </a:defRPr>
+            </a:lvl9pPr>
+          </a:lstStyle>
+          <a:p xmlns:a="http://schemas.openxmlformats.org/drawingml/2006/main">
+            <a:pPr>
+              <a:defRPr sz="1725" b="0">
+                <a:solidFill>
+                  <a:srgbClr val="0860FF"/>
+                </a:solidFill>
+              </a:defRPr>
+            </a:pPr>
+            <a:r>
+              <a:rPr sz="1725" b="0">
+                <a:solidFill>
+                  <a:srgbClr val="0860FF"/>
+                </a:solidFill>
+              </a:rPr>
+              <a:t>Node.js + Express</a:t>
+            </a:r>
+          </a:p>
+        </p:txBody>
+      </p:sp>
+      <p:sp>
+        <p:nvSpPr>
+          <p:cNvPr id="13" name="">
+            <a:extLst xmlns:a="http://schemas.openxmlformats.org/drawingml/2006/main">
+              <a:ext uri="{FF2B5EF4-FFF2-40B4-BE49-F238E27FC236}">
+                <a16:creationId xmlns:a16="http://schemas.microsoft.com/office/drawing/2014/main" id="{DD3C2673-9363-45D1-ACAD-16C6F27B4425}"/>
+              </a:ext>
+            </a:extLst>
+          </p:cNvPr>
+          <p:cNvSpPr>
+            <a:spLocks xmlns:a="http://schemas.openxmlformats.org/drawingml/2006/main" noGrp="1"/>
+          </p:cNvSpPr>
+          <p:nvPr/>
+        </p:nvSpPr>
+        <p:spPr>
+          <a:xfrm xmlns:a="http://schemas.openxmlformats.org/drawingml/2006/main">
+            <a:off x="1666875" y="3438525"/>
+            <a:ext cx="3381375" cy="381000"/>
+          </a:xfrm>
+          <a:prstGeom xmlns:a="http://schemas.openxmlformats.org/drawingml/2006/main" prst="rect">
+            <a:avLst/>
+          </a:prstGeom>
+          <a:noFill xmlns:a="http://schemas.openxmlformats.org/drawingml/2006/main"/>
+          <a:ln xmlns:a="http://schemas.openxmlformats.org/drawingml/2006/main" w="0">
+            <a:noFill/>
+          </a:ln>
+        </p:spPr>
+        <p:txBody>
+          <a:bodyPr xmlns:a="http://schemas.openxmlformats.org/drawingml/2006/main"/>
+          <a:lstStyle xmlns:a="http://schemas.openxmlformats.org/drawingml/2006/main">
+            <a:defPPr>
+              <a:defRPr sz="1800" b="0">
+                <a:solidFill>
+                  <a:srgbClr val="536B91"/>
+                </a:solidFill>
+              </a:defRPr>
+            </a:defPPr>
+            <a:lvl1pPr>
+              <a:defRPr sz="1800" b="0">
+                <a:solidFill>
+                  <a:srgbClr val="536B91"/>
+                </a:solidFill>
+              </a:defRPr>
+            </a:lvl1pPr>
+            <a:lvl2pPr>
+              <a:defRPr sz="1800" b="0">
+                <a:solidFill>
+                  <a:srgbClr val="536B91"/>
+                </a:solidFill>
+              </a:defRPr>
+            </a:lvl2pPr>
+            <a:lvl3pPr>
+              <a:defRPr sz="1800" b="0">
+                <a:solidFill>
+                  <a:srgbClr val="536B91"/>
+                </a:solidFill>
+              </a:defRPr>
+            </a:lvl3pPr>
+            <a:lvl4pPr>
+              <a:defRPr sz="1800" b="0">
+                <a:solidFill>
+                  <a:srgbClr val="536B91"/>
+                </a:solidFill>
+              </a:defRPr>
+            </a:lvl4pPr>
+            <a:lvl5pPr>
+              <a:defRPr sz="1800" b="0">
+                <a:solidFill>
+                  <a:srgbClr val="536B91"/>
+                </a:solidFill>
+              </a:defRPr>
+            </a:lvl5pPr>
+            <a:lvl6pPr>
+              <a:defRPr sz="1800" b="0">
+                <a:solidFill>
+                  <a:srgbClr val="536B91"/>
+                </a:solidFill>
+              </a:defRPr>
+            </a:lvl6pPr>
+            <a:lvl7pPr>
+              <a:defRPr sz="1800" b="0">
+                <a:solidFill>
+                  <a:srgbClr val="536B91"/>
+                </a:solidFill>
+              </a:defRPr>
+            </a:lvl7pPr>
+            <a:lvl8pPr>
+              <a:defRPr sz="1800" b="0">
+                <a:solidFill>
+                  <a:srgbClr val="536B91"/>
+                </a:solidFill>
+              </a:defRPr>
+            </a:lvl8pPr>
+            <a:lvl9pPr>
+              <a:defRPr sz="1800" b="0">
+                <a:solidFill>
+                  <a:srgbClr val="536B91"/>
+                </a:solidFill>
+              </a:defRPr>
+            </a:lvl9pPr>
+          </a:lstStyle>
+          <a:p xmlns:a="http://schemas.openxmlformats.org/drawingml/2006/main">
+            <a:pPr>
+              <a:defRPr sz="1800" b="0">
+                <a:solidFill>
+                  <a:srgbClr val="536B91"/>
+                </a:solidFill>
+              </a:defRPr>
+            </a:pPr>
+            <a:r>
+              <a:rPr sz="1800" b="0">
+                <a:solidFill>
+                  <a:srgbClr val="536B91"/>
+                </a:solidFill>
+              </a:rPr>
+              <a:t>Procesa las operaciones</a:t>
+            </a:r>
+          </a:p>
+        </p:txBody>
+      </p:sp>
+      <p:sp>
+        <p:nvSpPr>
+          <p:cNvPr id="14" name="">
+            <a:extLst xmlns:a="http://schemas.openxmlformats.org/drawingml/2006/main">
+              <a:ext uri="{FF2B5EF4-FFF2-40B4-BE49-F238E27FC236}">
+                <a16:creationId xmlns:a16="http://schemas.microsoft.com/office/drawing/2014/main" id="{3AAAB9F0-9D9B-4945-B440-A42F271F2B3A}"/>
+              </a:ext>
+            </a:extLst>
+          </p:cNvPr>
+          <p:cNvSpPr>
+            <a:spLocks xmlns:a="http://schemas.openxmlformats.org/drawingml/2006/main" noGrp="1"/>
+          </p:cNvSpPr>
+          <p:nvPr/>
+        </p:nvSpPr>
+        <p:spPr>
+          <a:xfrm xmlns:a="http://schemas.openxmlformats.org/drawingml/2006/main">
+            <a:off x="5048250" y="3476625"/>
+            <a:ext cx="3143250" cy="619125"/>
+          </a:xfrm>
+          <a:prstGeom xmlns:a="http://schemas.openxmlformats.org/drawingml/2006/main" prst="rect">
+            <a:avLst/>
+          </a:prstGeom>
+          <a:noFill xmlns:a="http://schemas.openxmlformats.org/drawingml/2006/main"/>
+          <a:ln xmlns:a="http://schemas.openxmlformats.org/drawingml/2006/main" w="0">
+            <a:noFill/>
+          </a:ln>
+        </p:spPr>
+        <p:txBody>
+          <a:bodyPr xmlns:a="http://schemas.openxmlformats.org/drawingml/2006/main"/>
+          <a:lstStyle xmlns:a="http://schemas.openxmlformats.org/drawingml/2006/main">
+            <a:defPPr>
+              <a:defRPr sz="1725" b="0">
+                <a:solidFill>
+                  <a:srgbClr val="061A35"/>
+                </a:solidFill>
+              </a:defRPr>
+            </a:defPPr>
+            <a:lvl1pPr>
+              <a:defRPr sz="1725" b="0">
+                <a:solidFill>
+                  <a:srgbClr val="061A35"/>
+                </a:solidFill>
+              </a:defRPr>
+            </a:lvl1pPr>
+            <a:lvl2pPr>
+              <a:defRPr sz="1725" b="0">
+                <a:solidFill>
+                  <a:srgbClr val="061A35"/>
+                </a:solidFill>
+              </a:defRPr>
+            </a:lvl2pPr>
+            <a:lvl3pPr>
+              <a:defRPr sz="1725" b="0">
+                <a:solidFill>
+                  <a:srgbClr val="061A35"/>
+                </a:solidFill>
+              </a:defRPr>
+            </a:lvl3pPr>
+            <a:lvl4pPr>
+              <a:defRPr sz="1725" b="0">
+                <a:solidFill>
+                  <a:srgbClr val="061A35"/>
+                </a:solidFill>
+              </a:defRPr>
+            </a:lvl4pPr>
+            <a:lvl5pPr>
+              <a:defRPr sz="1725" b="0">
+                <a:solidFill>
+                  <a:srgbClr val="061A35"/>
+                </a:solidFill>
+              </a:defRPr>
+            </a:lvl5pPr>
+            <a:lvl6pPr>
+              <a:defRPr sz="1725" b="0">
+                <a:solidFill>
+                  <a:srgbClr val="061A35"/>
+                </a:solidFill>
+              </a:defRPr>
+            </a:lvl6pPr>
+            <a:lvl7pPr>
+              <a:defRPr sz="1725" b="0">
+                <a:solidFill>
+                  <a:srgbClr val="061A35"/>
+                </a:solidFill>
+              </a:defRPr>
+            </a:lvl7pPr>
+            <a:lvl8pPr>
+              <a:defRPr sz="1725" b="0">
+                <a:solidFill>
+                  <a:srgbClr val="061A35"/>
+                </a:solidFill>
+              </a:defRPr>
+            </a:lvl8pPr>
+            <a:lvl9pPr>
+              <a:defRPr sz="1725" b="0">
+                <a:solidFill>
+                  <a:srgbClr val="061A35"/>
+                </a:solidFill>
+              </a:defRPr>
+            </a:lvl9pPr>
+          </a:lstStyle>
+          <a:p xmlns:a="http://schemas.openxmlformats.org/drawingml/2006/main">
+            <a:pPr>
+              <a:defRPr sz="1725" b="0">
+                <a:solidFill>
+                  <a:srgbClr val="061A35"/>
+                </a:solidFill>
+              </a:defRPr>
+            </a:pPr>
+            <a:r>
+              <a:rPr sz="1725" b="0">
+                <a:solidFill>
+                  <a:srgbClr val="061A35"/>
+                </a:solidFill>
+              </a:rPr>
+              <a:t>El sistema procesa la operación</a:t>
+            </a:r>
+          </a:p>
+        </p:txBody>
+      </p:sp>
+      <p:sp>
+        <p:nvSpPr>
+          <p:cNvPr id="15" name="">
+            <a:extLst xmlns:a="http://schemas.openxmlformats.org/drawingml/2006/main">
+              <a:ext uri="{FF2B5EF4-FFF2-40B4-BE49-F238E27FC236}">
+                <a16:creationId xmlns:a16="http://schemas.microsoft.com/office/drawing/2014/main" id="{DBF91280-915E-49B8-A066-8EE9D6586F4A}"/>
+              </a:ext>
+            </a:extLst>
+          </p:cNvPr>
+          <p:cNvSpPr>
+            <a:spLocks xmlns:a="http://schemas.openxmlformats.org/drawingml/2006/main" noGrp="1"/>
+          </p:cNvSpPr>
+          <p:nvPr/>
+        </p:nvSpPr>
+        <p:spPr>
+          <a:xfrm xmlns:a="http://schemas.openxmlformats.org/drawingml/2006/main">
+            <a:off x="952500" y="3676650"/>
+            <a:ext cx="19050" cy="342900"/>
+          </a:xfrm>
+          <a:prstGeom xmlns:a="http://schemas.openxmlformats.org/drawingml/2006/main" prst="rect">
+            <a:avLst/>
+          </a:prstGeom>
+          <a:solidFill xmlns:a="http://schemas.openxmlformats.org/drawingml/2006/main">
+            <a:srgbClr val="ACC8F1"/>
+          </a:solidFill>
+          <a:ln xmlns:a="http://schemas.openxmlformats.org/drawingml/2006/main" w="0">
+            <a:noFill/>
+          </a:ln>
+        </p:spPr>
+      </p:sp>
+      <p:sp>
+        <p:nvSpPr>
+          <p:cNvPr id="16" name="">
+            <a:extLst xmlns:a="http://schemas.openxmlformats.org/drawingml/2006/main">
+              <a:ext uri="{FF2B5EF4-FFF2-40B4-BE49-F238E27FC236}">
+                <a16:creationId xmlns:a16="http://schemas.microsoft.com/office/drawing/2014/main" id="{14AEB35F-0498-4520-9408-9F967219BC38}"/>
+              </a:ext>
+            </a:extLst>
+          </p:cNvPr>
+          <p:cNvSpPr>
+            <a:spLocks xmlns:a="http://schemas.openxmlformats.org/drawingml/2006/main" noGrp="1"/>
+          </p:cNvSpPr>
+          <p:nvPr/>
+        </p:nvSpPr>
+        <p:spPr>
+          <a:xfrm xmlns:a="http://schemas.openxmlformats.org/drawingml/2006/main">
+            <a:off x="609600" y="4181475"/>
+            <a:ext cx="857250" cy="619125"/>
+          </a:xfrm>
+          <a:prstGeom xmlns:a="http://schemas.openxmlformats.org/drawingml/2006/main" prst="rect">
+            <a:avLst/>
+          </a:prstGeom>
+          <a:noFill xmlns:a="http://schemas.openxmlformats.org/drawingml/2006/main"/>
+          <a:ln xmlns:a="http://schemas.openxmlformats.org/drawingml/2006/main" w="0">
+            <a:noFill/>
+          </a:ln>
+        </p:spPr>
+        <p:txBody>
+          <a:bodyPr xmlns:a="http://schemas.openxmlformats.org/drawingml/2006/main"/>
+          <a:lstStyle xmlns:a="http://schemas.openxmlformats.org/drawingml/2006/main">
+            <a:defPPr>
+              <a:defRPr sz="3450" b="1">
+                <a:solidFill>
+                  <a:srgbClr val="0860FF"/>
+                </a:solidFill>
+              </a:defRPr>
+            </a:defPPr>
+            <a:lvl1pPr>
+              <a:defRPr sz="3450" b="1">
+                <a:solidFill>
+                  <a:srgbClr val="0860FF"/>
+                </a:solidFill>
+              </a:defRPr>
+            </a:lvl1pPr>
+            <a:lvl2pPr>
+              <a:defRPr sz="3450" b="1">
+                <a:solidFill>
+                  <a:srgbClr val="0860FF"/>
+                </a:solidFill>
+              </a:defRPr>
+            </a:lvl2pPr>
+            <a:lvl3pPr>
+              <a:defRPr sz="3450" b="1">
+                <a:solidFill>
+                  <a:srgbClr val="0860FF"/>
+                </a:solidFill>
+              </a:defRPr>
+            </a:lvl3pPr>
+            <a:lvl4pPr>
+              <a:defRPr sz="3450" b="1">
+                <a:solidFill>
+                  <a:srgbClr val="0860FF"/>
+                </a:solidFill>
+              </a:defRPr>
+            </a:lvl4pPr>
+            <a:lvl5pPr>
+              <a:defRPr sz="3450" b="1">
+                <a:solidFill>
+                  <a:srgbClr val="0860FF"/>
+                </a:solidFill>
+              </a:defRPr>
+            </a:lvl5pPr>
+            <a:lvl6pPr>
+              <a:defRPr sz="3450" b="1">
+                <a:solidFill>
+                  <a:srgbClr val="0860FF"/>
+                </a:solidFill>
+              </a:defRPr>
+            </a:lvl6pPr>
+            <a:lvl7pPr>
+              <a:defRPr sz="3450" b="1">
+                <a:solidFill>
+                  <a:srgbClr val="0860FF"/>
+                </a:solidFill>
+              </a:defRPr>
+            </a:lvl7pPr>
+            <a:lvl8pPr>
+              <a:defRPr sz="3450" b="1">
+                <a:solidFill>
+                  <a:srgbClr val="0860FF"/>
+                </a:solidFill>
+              </a:defRPr>
+            </a:lvl8pPr>
+            <a:lvl9pPr>
+              <a:defRPr sz="3450" b="1">
+                <a:solidFill>
+                  <a:srgbClr val="0860FF"/>
+                </a:solidFill>
+              </a:defRPr>
+            </a:lvl9pPr>
+          </a:lstStyle>
+          <a:p xmlns:a="http://schemas.openxmlformats.org/drawingml/2006/main">
+            <a:pPr>
+              <a:defRPr sz="3450" b="1">
+                <a:solidFill>
+                  <a:srgbClr val="0860FF"/>
+                </a:solidFill>
+              </a:defRPr>
+            </a:pPr>
+            <a:r>
+              <a:rPr sz="3450" b="1">
+                <a:solidFill>
+                  <a:srgbClr val="0860FF"/>
+                </a:solidFill>
+              </a:rPr>
+              <a:t>03</a:t>
+            </a:r>
+          </a:p>
+        </p:txBody>
+      </p:sp>
+      <p:sp>
+        <p:nvSpPr>
+          <p:cNvPr id="17" name="">
+            <a:extLst xmlns:a="http://schemas.openxmlformats.org/drawingml/2006/main">
+              <a:ext uri="{FF2B5EF4-FFF2-40B4-BE49-F238E27FC236}">
+                <a16:creationId xmlns:a16="http://schemas.microsoft.com/office/drawing/2014/main" id="{8A37463A-D4F3-4B08-83C3-405F9AAC8530}"/>
+              </a:ext>
+            </a:extLst>
+          </p:cNvPr>
+          <p:cNvSpPr>
+            <a:spLocks xmlns:a="http://schemas.openxmlformats.org/drawingml/2006/main" noGrp="1"/>
+          </p:cNvSpPr>
+          <p:nvPr/>
+        </p:nvSpPr>
+        <p:spPr>
+          <a:xfrm xmlns:a="http://schemas.openxmlformats.org/drawingml/2006/main">
+            <a:off x="1666875" y="4181475"/>
+            <a:ext cx="3381375" cy="428625"/>
+          </a:xfrm>
+          <a:prstGeom xmlns:a="http://schemas.openxmlformats.org/drawingml/2006/main" prst="rect">
+            <a:avLst/>
+          </a:prstGeom>
+          <a:noFill xmlns:a="http://schemas.openxmlformats.org/drawingml/2006/main"/>
+          <a:ln xmlns:a="http://schemas.openxmlformats.org/drawingml/2006/main" w="0">
+            <a:noFill/>
+          </a:ln>
+        </p:spPr>
+        <p:txBody>
+          <a:bodyPr xmlns:a="http://schemas.openxmlformats.org/drawingml/2006/main"/>
+          <a:lstStyle xmlns:a="http://schemas.openxmlformats.org/drawingml/2006/main">
+            <a:defPPr>
+              <a:defRPr sz="2325" b="1">
+                <a:solidFill>
+                  <a:srgbClr val="061A35"/>
+                </a:solidFill>
+              </a:defRPr>
+            </a:defPPr>
+            <a:lvl1pPr>
+              <a:defRPr sz="2325" b="1">
+                <a:solidFill>
+                  <a:srgbClr val="061A35"/>
+                </a:solidFill>
+              </a:defRPr>
+            </a:lvl1pPr>
+            <a:lvl2pPr>
+              <a:defRPr sz="2325" b="1">
+                <a:solidFill>
+                  <a:srgbClr val="061A35"/>
+                </a:solidFill>
+              </a:defRPr>
+            </a:lvl2pPr>
+            <a:lvl3pPr>
+              <a:defRPr sz="2325" b="1">
+                <a:solidFill>
+                  <a:srgbClr val="061A35"/>
+                </a:solidFill>
+              </a:defRPr>
+            </a:lvl3pPr>
+            <a:lvl4pPr>
+              <a:defRPr sz="2325" b="1">
+                <a:solidFill>
+                  <a:srgbClr val="061A35"/>
+                </a:solidFill>
+              </a:defRPr>
+            </a:lvl4pPr>
+            <a:lvl5pPr>
+              <a:defRPr sz="2325" b="1">
+                <a:solidFill>
+                  <a:srgbClr val="061A35"/>
+                </a:solidFill>
+              </a:defRPr>
+            </a:lvl5pPr>
+            <a:lvl6pPr>
+              <a:defRPr sz="2325" b="1">
+                <a:solidFill>
+                  <a:srgbClr val="061A35"/>
+                </a:solidFill>
+              </a:defRPr>
+            </a:lvl6pPr>
+            <a:lvl7pPr>
+              <a:defRPr sz="2325" b="1">
+                <a:solidFill>
+                  <a:srgbClr val="061A35"/>
+                </a:solidFill>
+              </a:defRPr>
+            </a:lvl7pPr>
+            <a:lvl8pPr>
+              <a:defRPr sz="2325" b="1">
+                <a:solidFill>
+                  <a:srgbClr val="061A35"/>
+                </a:solidFill>
+              </a:defRPr>
+            </a:lvl8pPr>
+            <a:lvl9pPr>
+              <a:defRPr sz="2325" b="1">
+                <a:solidFill>
+                  <a:srgbClr val="061A35"/>
+                </a:solidFill>
+              </a:defRPr>
+            </a:lvl9pPr>
+          </a:lstStyle>
+          <a:p xmlns:a="http://schemas.openxmlformats.org/drawingml/2006/main">
+            <a:pPr>
+              <a:defRPr sz="2325" b="1">
+                <a:solidFill>
+                  <a:srgbClr val="061A35"/>
+                </a:solidFill>
+              </a:defRPr>
+            </a:pPr>
+            <a:r>
+              <a:rPr sz="2325" b="1">
+                <a:solidFill>
+                  <a:srgbClr val="061A35"/>
+                </a:solidFill>
+              </a:rPr>
+              <a:t>Base de datos</a:t>
+            </a:r>
+          </a:p>
+        </p:txBody>
+      </p:sp>
+      <p:sp>
+        <p:nvSpPr>
+          <p:cNvPr id="18" name="">
+            <a:extLst xmlns:a="http://schemas.openxmlformats.org/drawingml/2006/main">
+              <a:ext uri="{FF2B5EF4-FFF2-40B4-BE49-F238E27FC236}">
+                <a16:creationId xmlns:a16="http://schemas.microsoft.com/office/drawing/2014/main" id="{A4430C21-BB72-4F80-B080-C3267C1025FA}"/>
+              </a:ext>
+            </a:extLst>
+          </p:cNvPr>
+          <p:cNvSpPr>
+            <a:spLocks xmlns:a="http://schemas.openxmlformats.org/drawingml/2006/main" noGrp="1"/>
+          </p:cNvSpPr>
+          <p:nvPr/>
+        </p:nvSpPr>
+        <p:spPr>
+          <a:xfrm xmlns:a="http://schemas.openxmlformats.org/drawingml/2006/main">
+            <a:off x="5048250" y="4248150"/>
+            <a:ext cx="3190875" cy="361950"/>
+          </a:xfrm>
+          <a:prstGeom xmlns:a="http://schemas.openxmlformats.org/drawingml/2006/main" prst="rect">
+            <a:avLst/>
+          </a:prstGeom>
+          <a:noFill xmlns:a="http://schemas.openxmlformats.org/drawingml/2006/main"/>
+          <a:ln xmlns:a="http://schemas.openxmlformats.org/drawingml/2006/main" w="0">
+            <a:noFill/>
+          </a:ln>
+        </p:spPr>
+        <p:txBody>
+          <a:bodyPr xmlns:a="http://schemas.openxmlformats.org/drawingml/2006/main"/>
+          <a:lstStyle xmlns:a="http://schemas.openxmlformats.org/drawingml/2006/main">
+            <a:defPPr>
+              <a:defRPr sz="1725" b="0">
+                <a:solidFill>
+                  <a:srgbClr val="0860FF"/>
+                </a:solidFill>
+              </a:defRPr>
+            </a:defPPr>
+            <a:lvl1pPr>
+              <a:defRPr sz="1725" b="0">
+                <a:solidFill>
+                  <a:srgbClr val="0860FF"/>
+                </a:solidFill>
+              </a:defRPr>
+            </a:lvl1pPr>
+            <a:lvl2pPr>
+              <a:defRPr sz="1725" b="0">
+                <a:solidFill>
+                  <a:srgbClr val="0860FF"/>
+                </a:solidFill>
+              </a:defRPr>
+            </a:lvl2pPr>
+            <a:lvl3pPr>
+              <a:defRPr sz="1725" b="0">
+                <a:solidFill>
+                  <a:srgbClr val="0860FF"/>
+                </a:solidFill>
+              </a:defRPr>
+            </a:lvl3pPr>
+            <a:lvl4pPr>
+              <a:defRPr sz="1725" b="0">
+                <a:solidFill>
+                  <a:srgbClr val="0860FF"/>
+                </a:solidFill>
+              </a:defRPr>
+            </a:lvl4pPr>
+            <a:lvl5pPr>
+              <a:defRPr sz="1725" b="0">
+                <a:solidFill>
+                  <a:srgbClr val="0860FF"/>
+                </a:solidFill>
+              </a:defRPr>
+            </a:lvl5pPr>
+            <a:lvl6pPr>
+              <a:defRPr sz="1725" b="0">
+                <a:solidFill>
+                  <a:srgbClr val="0860FF"/>
+                </a:solidFill>
+              </a:defRPr>
+            </a:lvl6pPr>
+            <a:lvl7pPr>
+              <a:defRPr sz="1725" b="0">
+                <a:solidFill>
+                  <a:srgbClr val="0860FF"/>
+                </a:solidFill>
+              </a:defRPr>
+            </a:lvl7pPr>
+            <a:lvl8pPr>
+              <a:defRPr sz="1725" b="0">
+                <a:solidFill>
+                  <a:srgbClr val="0860FF"/>
+                </a:solidFill>
+              </a:defRPr>
+            </a:lvl8pPr>
+            <a:lvl9pPr>
+              <a:defRPr sz="1725" b="0">
+                <a:solidFill>
+                  <a:srgbClr val="0860FF"/>
+                </a:solidFill>
+              </a:defRPr>
+            </a:lvl9pPr>
+          </a:lstStyle>
+          <a:p xmlns:a="http://schemas.openxmlformats.org/drawingml/2006/main">
+            <a:pPr>
+              <a:defRPr sz="1725" b="0">
+                <a:solidFill>
+                  <a:srgbClr val="0860FF"/>
+                </a:solidFill>
+              </a:defRPr>
+            </a:pPr>
+            <a:r>
+              <a:rPr sz="1725" b="0">
+                <a:solidFill>
+                  <a:srgbClr val="0860FF"/>
+                </a:solidFill>
+              </a:rPr>
+              <a:t>PostgreSQL</a:t>
+            </a:r>
+          </a:p>
+        </p:txBody>
+      </p:sp>
+      <p:sp>
+        <p:nvSpPr>
+          <p:cNvPr id="19" name="">
+            <a:extLst xmlns:a="http://schemas.openxmlformats.org/drawingml/2006/main">
+              <a:ext uri="{FF2B5EF4-FFF2-40B4-BE49-F238E27FC236}">
+                <a16:creationId xmlns:a16="http://schemas.microsoft.com/office/drawing/2014/main" id="{38F6C3E1-8BF8-450F-9267-6D702EDEABA6}"/>
+              </a:ext>
+            </a:extLst>
+          </p:cNvPr>
+          <p:cNvSpPr>
+            <a:spLocks xmlns:a="http://schemas.openxmlformats.org/drawingml/2006/main" noGrp="1"/>
+          </p:cNvSpPr>
+          <p:nvPr/>
+        </p:nvSpPr>
+        <p:spPr>
+          <a:xfrm xmlns:a="http://schemas.openxmlformats.org/drawingml/2006/main">
+            <a:off x="1666875" y="4610100"/>
+            <a:ext cx="3381375" cy="381000"/>
+          </a:xfrm>
+          <a:prstGeom xmlns:a="http://schemas.openxmlformats.org/drawingml/2006/main" prst="rect">
+            <a:avLst/>
+          </a:prstGeom>
+          <a:noFill xmlns:a="http://schemas.openxmlformats.org/drawingml/2006/main"/>
+          <a:ln xmlns:a="http://schemas.openxmlformats.org/drawingml/2006/main" w="0">
+            <a:noFill/>
+          </a:ln>
+        </p:spPr>
+        <p:txBody>
+          <a:bodyPr xmlns:a="http://schemas.openxmlformats.org/drawingml/2006/main"/>
+          <a:lstStyle xmlns:a="http://schemas.openxmlformats.org/drawingml/2006/main">
+            <a:defPPr>
+              <a:defRPr sz="1800" b="0">
+                <a:solidFill>
+                  <a:srgbClr val="536B91"/>
+                </a:solidFill>
+              </a:defRPr>
+            </a:defPPr>
+            <a:lvl1pPr>
+              <a:defRPr sz="1800" b="0">
+                <a:solidFill>
+                  <a:srgbClr val="536B91"/>
+                </a:solidFill>
+              </a:defRPr>
+            </a:lvl1pPr>
+            <a:lvl2pPr>
+              <a:defRPr sz="1800" b="0">
+                <a:solidFill>
+                  <a:srgbClr val="536B91"/>
+                </a:solidFill>
+              </a:defRPr>
+            </a:lvl2pPr>
+            <a:lvl3pPr>
+              <a:defRPr sz="1800" b="0">
+                <a:solidFill>
+                  <a:srgbClr val="536B91"/>
+                </a:solidFill>
+              </a:defRPr>
+            </a:lvl3pPr>
+            <a:lvl4pPr>
+              <a:defRPr sz="1800" b="0">
+                <a:solidFill>
+                  <a:srgbClr val="536B91"/>
+                </a:solidFill>
+              </a:defRPr>
+            </a:lvl4pPr>
+            <a:lvl5pPr>
+              <a:defRPr sz="1800" b="0">
+                <a:solidFill>
+                  <a:srgbClr val="536B91"/>
+                </a:solidFill>
+              </a:defRPr>
+            </a:lvl5pPr>
+            <a:lvl6pPr>
+              <a:defRPr sz="1800" b="0">
+                <a:solidFill>
+                  <a:srgbClr val="536B91"/>
+                </a:solidFill>
+              </a:defRPr>
+            </a:lvl6pPr>
+            <a:lvl7pPr>
+              <a:defRPr sz="1800" b="0">
+                <a:solidFill>
+                  <a:srgbClr val="536B91"/>
+                </a:solidFill>
+              </a:defRPr>
+            </a:lvl7pPr>
+            <a:lvl8pPr>
+              <a:defRPr sz="1800" b="0">
+                <a:solidFill>
+                  <a:srgbClr val="536B91"/>
+                </a:solidFill>
+              </a:defRPr>
+            </a:lvl8pPr>
+            <a:lvl9pPr>
+              <a:defRPr sz="1800" b="0">
+                <a:solidFill>
+                  <a:srgbClr val="536B91"/>
+                </a:solidFill>
+              </a:defRPr>
+            </a:lvl9pPr>
+          </a:lstStyle>
+          <a:p xmlns:a="http://schemas.openxmlformats.org/drawingml/2006/main">
+            <a:pPr>
+              <a:defRPr sz="1800" b="0">
+                <a:solidFill>
+                  <a:srgbClr val="536B91"/>
+                </a:solidFill>
+              </a:defRPr>
+            </a:pPr>
+            <a:r>
+              <a:rPr sz="1800" b="0">
+                <a:solidFill>
+                  <a:srgbClr val="536B91"/>
+                </a:solidFill>
+              </a:rPr>
+              <a:t>Guarda la información</a:t>
+            </a:r>
+          </a:p>
+        </p:txBody>
+      </p:sp>
+      <p:sp>
+        <p:nvSpPr>
+          <p:cNvPr id="20" name="">
+            <a:extLst xmlns:a="http://schemas.openxmlformats.org/drawingml/2006/main">
+              <a:ext uri="{FF2B5EF4-FFF2-40B4-BE49-F238E27FC236}">
+                <a16:creationId xmlns:a16="http://schemas.microsoft.com/office/drawing/2014/main" id="{1300ED34-4FD4-40CD-A343-20B3B1E1CA9F}"/>
+              </a:ext>
+            </a:extLst>
+          </p:cNvPr>
+          <p:cNvSpPr>
+            <a:spLocks xmlns:a="http://schemas.openxmlformats.org/drawingml/2006/main" noGrp="1"/>
+          </p:cNvSpPr>
+          <p:nvPr/>
+        </p:nvSpPr>
+        <p:spPr>
+          <a:xfrm xmlns:a="http://schemas.openxmlformats.org/drawingml/2006/main">
+            <a:off x="5048250" y="4648200"/>
+            <a:ext cx="3143250" cy="619125"/>
+          </a:xfrm>
+          <a:prstGeom xmlns:a="http://schemas.openxmlformats.org/drawingml/2006/main" prst="rect">
+            <a:avLst/>
+          </a:prstGeom>
+          <a:noFill xmlns:a="http://schemas.openxmlformats.org/drawingml/2006/main"/>
+          <a:ln xmlns:a="http://schemas.openxmlformats.org/drawingml/2006/main" w="0">
+            <a:noFill/>
+          </a:ln>
+        </p:spPr>
+        <p:txBody>
+          <a:bodyPr xmlns:a="http://schemas.openxmlformats.org/drawingml/2006/main"/>
+          <a:lstStyle xmlns:a="http://schemas.openxmlformats.org/drawingml/2006/main">
+            <a:defPPr>
+              <a:defRPr sz="1725" b="0">
+                <a:solidFill>
+                  <a:srgbClr val="061A35"/>
+                </a:solidFill>
+              </a:defRPr>
+            </a:defPPr>
+            <a:lvl1pPr>
+              <a:defRPr sz="1725" b="0">
+                <a:solidFill>
+                  <a:srgbClr val="061A35"/>
+                </a:solidFill>
+              </a:defRPr>
+            </a:lvl1pPr>
+            <a:lvl2pPr>
+              <a:defRPr sz="1725" b="0">
+                <a:solidFill>
+                  <a:srgbClr val="061A35"/>
+                </a:solidFill>
+              </a:defRPr>
+            </a:lvl2pPr>
+            <a:lvl3pPr>
+              <a:defRPr sz="1725" b="0">
+                <a:solidFill>
+                  <a:srgbClr val="061A35"/>
+                </a:solidFill>
+              </a:defRPr>
+            </a:lvl3pPr>
+            <a:lvl4pPr>
+              <a:defRPr sz="1725" b="0">
+                <a:solidFill>
+                  <a:srgbClr val="061A35"/>
+                </a:solidFill>
+              </a:defRPr>
+            </a:lvl4pPr>
+            <a:lvl5pPr>
+              <a:defRPr sz="1725" b="0">
+                <a:solidFill>
+                  <a:srgbClr val="061A35"/>
+                </a:solidFill>
+              </a:defRPr>
+            </a:lvl5pPr>
+            <a:lvl6pPr>
+              <a:defRPr sz="1725" b="0">
+                <a:solidFill>
+                  <a:srgbClr val="061A35"/>
+                </a:solidFill>
+              </a:defRPr>
+            </a:lvl6pPr>
+            <a:lvl7pPr>
+              <a:defRPr sz="1725" b="0">
+                <a:solidFill>
+                  <a:srgbClr val="061A35"/>
+                </a:solidFill>
+              </a:defRPr>
+            </a:lvl7pPr>
+            <a:lvl8pPr>
+              <a:defRPr sz="1725" b="0">
+                <a:solidFill>
+                  <a:srgbClr val="061A35"/>
+                </a:solidFill>
+              </a:defRPr>
+            </a:lvl8pPr>
+            <a:lvl9pPr>
+              <a:defRPr sz="1725" b="0">
+                <a:solidFill>
+                  <a:srgbClr val="061A35"/>
+                </a:solidFill>
+              </a:defRPr>
+            </a:lvl9pPr>
+          </a:lstStyle>
+          <a:p xmlns:a="http://schemas.openxmlformats.org/drawingml/2006/main">
+            <a:pPr>
+              <a:defRPr sz="1725" b="0">
+                <a:solidFill>
+                  <a:srgbClr val="061A35"/>
+                </a:solidFill>
+              </a:defRPr>
+            </a:pPr>
+            <a:r>
+              <a:rPr sz="1725" b="0">
+                <a:solidFill>
+                  <a:srgbClr val="061A35"/>
+                </a:solidFill>
+              </a:rPr>
+              <a:t>Guarda venta y nuevas cantidades</a:t>
+            </a:r>
+          </a:p>
+        </p:txBody>
+      </p:sp>
+      <p:pic>
+        <p:nvPicPr>
+          <p:cNvPr id="21" name="">
+            <a:extLst xmlns:a="http://schemas.openxmlformats.org/drawingml/2006/main">
+              <a:ext uri="{FF2B5EF4-FFF2-40B4-BE49-F238E27FC236}">
+                <a16:creationId xmlns:a16="http://schemas.microsoft.com/office/drawing/2014/main" id="{F8DFF032-984D-4D76-8B05-688D435D15C9}"/>
+              </a:ext>
+            </a:extLst>
+          </p:cNvPr>
+          <p:cNvPicPr>
+            <a:picLocks xmlns:a="http://schemas.openxmlformats.org/drawingml/2006/main" noChangeAspect="1"/>
+          </p:cNvPicPr>
+          <p:nvPr/>
+        </p:nvPicPr>
+        <p:blipFill>
+          <a:blip xmlns:r="http://schemas.openxmlformats.org/officeDocument/2006/relationships" xmlns:a="http://schemas.openxmlformats.org/drawingml/2006/main" r:embed="R9b95bce867de4cd9"/>
+          <a:stretch xmlns:a="http://schemas.openxmlformats.org/drawingml/2006/main"/>
+        </p:blipFill>
+        <p:spPr>
+          <a:xfrm xmlns:a="http://schemas.openxmlformats.org/drawingml/2006/main">
+            <a:off x="9026064" y="1504950"/>
+            <a:ext cx="2207547" cy="4048125"/>
+          </a:xfrm>
+          <a:prstGeom xmlns:a="http://schemas.openxmlformats.org/drawingml/2006/main" prst="rect">
+            <a:avLst/>
+          </a:prstGeom>
+        </p:spPr>
+      </p:pic>
+      <p:sp>
+        <p:nvSpPr>
+          <p:cNvPr id="22" name="">
+            <a:extLst xmlns:a="http://schemas.openxmlformats.org/drawingml/2006/main">
+              <a:ext uri="{FF2B5EF4-FFF2-40B4-BE49-F238E27FC236}">
+                <a16:creationId xmlns:a16="http://schemas.microsoft.com/office/drawing/2014/main" id="{41CCF1CF-02BD-48AC-88E7-6DC46E511E18}"/>
+              </a:ext>
+            </a:extLst>
+          </p:cNvPr>
+          <p:cNvSpPr>
+            <a:spLocks xmlns:a="http://schemas.openxmlformats.org/drawingml/2006/main" noGrp="1"/>
+          </p:cNvSpPr>
+          <p:nvPr/>
+        </p:nvSpPr>
+        <p:spPr>
+          <a:xfrm xmlns:a="http://schemas.openxmlformats.org/drawingml/2006/main">
+            <a:off x="609600" y="5457825"/>
+            <a:ext cx="7620000" cy="19050"/>
+          </a:xfrm>
+          <a:prstGeom xmlns:a="http://schemas.openxmlformats.org/drawingml/2006/main" prst="rect">
+            <a:avLst/>
+          </a:prstGeom>
+          <a:solidFill xmlns:a="http://schemas.openxmlformats.org/drawingml/2006/main">
+            <a:srgbClr val="BED2EF"/>
+          </a:solidFill>
+          <a:ln xmlns:a="http://schemas.openxmlformats.org/drawingml/2006/main" w="0">
+            <a:noFill/>
+          </a:ln>
+        </p:spPr>
+      </p:sp>
+      <p:sp>
+        <p:nvSpPr>
+          <p:cNvPr id="23" name="">
+            <a:extLst xmlns:a="http://schemas.openxmlformats.org/drawingml/2006/main">
+              <a:ext uri="{FF2B5EF4-FFF2-40B4-BE49-F238E27FC236}">
+                <a16:creationId xmlns:a16="http://schemas.microsoft.com/office/drawing/2014/main" id="{A2A6AEE3-6CB3-480E-9BDE-D4DA0C10D478}"/>
+              </a:ext>
+            </a:extLst>
+          </p:cNvPr>
+          <p:cNvSpPr>
+            <a:spLocks xmlns:a="http://schemas.openxmlformats.org/drawingml/2006/main" noGrp="1"/>
+          </p:cNvSpPr>
+          <p:nvPr/>
+        </p:nvSpPr>
+        <p:spPr>
+          <a:xfrm xmlns:a="http://schemas.openxmlformats.org/drawingml/2006/main">
+            <a:off x="609600" y="5667375"/>
+            <a:ext cx="3476625" cy="400050"/>
           </a:xfrm>
           <a:prstGeom xmlns:a="http://schemas.openxmlformats.org/drawingml/2006/main" prst="rect">
             <a:avLst/>
@@ -17676,17 +17458,17 @@
                   <a:srgbClr val="0860FF"/>
                 </a:solidFill>
               </a:rPr>
-              <a:t>Consistencia</a:t>
+              <a:t>Diseño que orienta</a:t>
             </a:r>
           </a:p>
         </p:txBody>
       </p:sp>
       <p:sp>
         <p:nvSpPr>
-          <p:cNvPr id="11" name="">
+          <p:cNvPr id="24" name="">
             <a:extLst xmlns:a="http://schemas.openxmlformats.org/drawingml/2006/main">
               <a:ext uri="{FF2B5EF4-FFF2-40B4-BE49-F238E27FC236}">
-                <a16:creationId xmlns:a16="http://schemas.microsoft.com/office/drawing/2014/main" id="{225BD256-1542-401D-A263-3B95DAF2A263}"/>
+                <a16:creationId xmlns:a16="http://schemas.microsoft.com/office/drawing/2014/main" id="{A2AFFA9A-8CA2-48E0-AE8D-F2C4B9F3E784}"/>
               </a:ext>
             </a:extLst>
           </p:cNvPr>
@@ -17697,8 +17479,8 @@
         </p:nvSpPr>
         <p:spPr>
           <a:xfrm xmlns:a="http://schemas.openxmlformats.org/drawingml/2006/main">
-            <a:off x="609600" y="4914900"/>
-            <a:ext cx="3286125" cy="904875"/>
+            <a:off x="609600" y="6086475"/>
+            <a:ext cx="4286250" cy="619125"/>
           </a:xfrm>
           <a:prstGeom xmlns:a="http://schemas.openxmlformats.org/drawingml/2006/main" prst="rect">
             <a:avLst/>
@@ -17712,70 +17494,70 @@
           <a:bodyPr xmlns:a="http://schemas.openxmlformats.org/drawingml/2006/main"/>
           <a:lstStyle xmlns:a="http://schemas.openxmlformats.org/drawingml/2006/main">
             <a:defPPr>
-              <a:defRPr sz="1875" b="0">
+              <a:defRPr sz="1575" b="0">
                 <a:solidFill>
                   <a:srgbClr val="061A35"/>
                 </a:solidFill>
               </a:defRPr>
             </a:defPPr>
             <a:lvl1pPr>
-              <a:defRPr sz="1875" b="0">
+              <a:defRPr sz="1575" b="0">
                 <a:solidFill>
                   <a:srgbClr val="061A35"/>
                 </a:solidFill>
               </a:defRPr>
             </a:lvl1pPr>
             <a:lvl2pPr>
-              <a:defRPr sz="1875" b="0">
+              <a:defRPr sz="1575" b="0">
                 <a:solidFill>
                   <a:srgbClr val="061A35"/>
                 </a:solidFill>
               </a:defRPr>
             </a:lvl2pPr>
             <a:lvl3pPr>
-              <a:defRPr sz="1875" b="0">
+              <a:defRPr sz="1575" b="0">
                 <a:solidFill>
                   <a:srgbClr val="061A35"/>
                 </a:solidFill>
               </a:defRPr>
             </a:lvl3pPr>
             <a:lvl4pPr>
-              <a:defRPr sz="1875" b="0">
+              <a:defRPr sz="1575" b="0">
                 <a:solidFill>
                   <a:srgbClr val="061A35"/>
                 </a:solidFill>
               </a:defRPr>
             </a:lvl4pPr>
             <a:lvl5pPr>
-              <a:defRPr sz="1875" b="0">
+              <a:defRPr sz="1575" b="0">
                 <a:solidFill>
                   <a:srgbClr val="061A35"/>
                 </a:solidFill>
               </a:defRPr>
             </a:lvl5pPr>
             <a:lvl6pPr>
-              <a:defRPr sz="1875" b="0">
+              <a:defRPr sz="1575" b="0">
                 <a:solidFill>
                   <a:srgbClr val="061A35"/>
                 </a:solidFill>
               </a:defRPr>
             </a:lvl6pPr>
             <a:lvl7pPr>
-              <a:defRPr sz="1875" b="0">
+              <a:defRPr sz="1575" b="0">
                 <a:solidFill>
                   <a:srgbClr val="061A35"/>
                 </a:solidFill>
               </a:defRPr>
             </a:lvl7pPr>
             <a:lvl8pPr>
-              <a:defRPr sz="1875" b="0">
+              <a:defRPr sz="1575" b="0">
                 <a:solidFill>
                   <a:srgbClr val="061A35"/>
                 </a:solidFill>
               </a:defRPr>
             </a:lvl8pPr>
             <a:lvl9pPr>
-              <a:defRPr sz="1875" b="0">
+              <a:defRPr sz="1575" b="0">
                 <a:solidFill>
                   <a:srgbClr val="061A35"/>
                 </a:solidFill>
@@ -17784,46 +17566,46 @@
           </a:lstStyle>
           <a:p xmlns:a="http://schemas.openxmlformats.org/drawingml/2006/main">
             <a:pPr>
-              <a:defRPr sz="1875" b="0">
+              <a:defRPr sz="1575" b="0">
                 <a:solidFill>
                   <a:srgbClr val="061A35"/>
                 </a:solidFill>
               </a:defRPr>
             </a:pPr>
             <a:r>
-              <a:rPr sz="1875" b="0">
+              <a:rPr sz="1575" b="0">
                 <a:solidFill>
                   <a:srgbClr val="061A35"/>
                 </a:solidFill>
               </a:rPr>
-              <a:t>Compras, ventas y stock</a:t>
+              <a:t>Botones que guían. Pantallas consistentes.</a:t>
             </a:r>
           </a:p>
           <a:p xmlns:a="http://schemas.openxmlformats.org/drawingml/2006/main">
             <a:pPr>
-              <a:defRPr sz="1875" b="0">
+              <a:defRPr sz="1575" b="0">
                 <a:solidFill>
                   <a:srgbClr val="061A35"/>
                 </a:solidFill>
               </a:defRPr>
             </a:pPr>
             <a:r>
-              <a:rPr sz="1875" b="0">
+              <a:rPr sz="1575" b="0">
                 <a:solidFill>
                   <a:srgbClr val="061A35"/>
                 </a:solidFill>
               </a:rPr>
-              <a:t>dentro de transacciones</a:t>
+              <a:t>Tipografía clara y textos breves.</a:t>
             </a:r>
           </a:p>
         </p:txBody>
       </p:sp>
       <p:sp>
         <p:nvSpPr>
-          <p:cNvPr id="12" name="">
+          <p:cNvPr id="25" name="">
             <a:extLst xmlns:a="http://schemas.openxmlformats.org/drawingml/2006/main">
               <a:ext uri="{FF2B5EF4-FFF2-40B4-BE49-F238E27FC236}">
-                <a16:creationId xmlns:a16="http://schemas.microsoft.com/office/drawing/2014/main" id="{D041745F-56EA-4E8A-8656-415AADCCCB72}"/>
+                <a16:creationId xmlns:a16="http://schemas.microsoft.com/office/drawing/2014/main" id="{E03325AC-E095-4864-A1F1-7A1EBDBA8B80}"/>
               </a:ext>
             </a:extLst>
           </p:cNvPr>
@@ -17834,8 +17616,8 @@
         </p:nvSpPr>
         <p:spPr>
           <a:xfrm xmlns:a="http://schemas.openxmlformats.org/drawingml/2006/main">
-            <a:off x="4333875" y="4381500"/>
-            <a:ext cx="3238500" cy="428625"/>
+            <a:off x="5238750" y="5667375"/>
+            <a:ext cx="3810000" cy="400050"/>
           </a:xfrm>
           <a:prstGeom xmlns:a="http://schemas.openxmlformats.org/drawingml/2006/main" prst="rect">
             <a:avLst/>
@@ -17933,17 +17715,17 @@
                   <a:srgbClr val="0860FF"/>
                 </a:solidFill>
               </a:rPr>
-              <a:t>Seguridad</a:t>
+              <a:t>Cuidado de las personas</a:t>
             </a:r>
           </a:p>
         </p:txBody>
       </p:sp>
       <p:sp>
         <p:nvSpPr>
-          <p:cNvPr id="13" name="">
+          <p:cNvPr id="26" name="">
             <a:extLst xmlns:a="http://schemas.openxmlformats.org/drawingml/2006/main">
               <a:ext uri="{FF2B5EF4-FFF2-40B4-BE49-F238E27FC236}">
-                <a16:creationId xmlns:a16="http://schemas.microsoft.com/office/drawing/2014/main" id="{DE97F84B-7D5F-4B19-A6FE-1061CDB4EB4E}"/>
+                <a16:creationId xmlns:a16="http://schemas.microsoft.com/office/drawing/2014/main" id="{E96706BD-BA82-40E6-AE44-6013345C8704}"/>
               </a:ext>
             </a:extLst>
           </p:cNvPr>
@@ -17954,8 +17736,8 @@
         </p:nvSpPr>
         <p:spPr>
           <a:xfrm xmlns:a="http://schemas.openxmlformats.org/drawingml/2006/main">
-            <a:off x="4333875" y="4914900"/>
-            <a:ext cx="3381375" cy="904875"/>
+            <a:off x="5238750" y="6086475"/>
+            <a:ext cx="4095750" cy="619125"/>
           </a:xfrm>
           <a:prstGeom xmlns:a="http://schemas.openxmlformats.org/drawingml/2006/main" prst="rect">
             <a:avLst/>
@@ -17969,70 +17751,70 @@
           <a:bodyPr xmlns:a="http://schemas.openxmlformats.org/drawingml/2006/main"/>
           <a:lstStyle xmlns:a="http://schemas.openxmlformats.org/drawingml/2006/main">
             <a:defPPr>
-              <a:defRPr sz="1875" b="0">
+              <a:defRPr sz="1575" b="0">
                 <a:solidFill>
                   <a:srgbClr val="061A35"/>
                 </a:solidFill>
               </a:defRPr>
             </a:defPPr>
             <a:lvl1pPr>
-              <a:defRPr sz="1875" b="0">
+              <a:defRPr sz="1575" b="0">
                 <a:solidFill>
                   <a:srgbClr val="061A35"/>
                 </a:solidFill>
               </a:defRPr>
             </a:lvl1pPr>
             <a:lvl2pPr>
-              <a:defRPr sz="1875" b="0">
+              <a:defRPr sz="1575" b="0">
                 <a:solidFill>
                   <a:srgbClr val="061A35"/>
                 </a:solidFill>
               </a:defRPr>
             </a:lvl2pPr>
             <a:lvl3pPr>
-              <a:defRPr sz="1875" b="0">
+              <a:defRPr sz="1575" b="0">
                 <a:solidFill>
                   <a:srgbClr val="061A35"/>
                 </a:solidFill>
               </a:defRPr>
             </a:lvl3pPr>
             <a:lvl4pPr>
-              <a:defRPr sz="1875" b="0">
+              <a:defRPr sz="1575" b="0">
                 <a:solidFill>
                   <a:srgbClr val="061A35"/>
                 </a:solidFill>
               </a:defRPr>
             </a:lvl4pPr>
             <a:lvl5pPr>
-              <a:defRPr sz="1875" b="0">
+              <a:defRPr sz="1575" b="0">
                 <a:solidFill>
                   <a:srgbClr val="061A35"/>
                 </a:solidFill>
               </a:defRPr>
             </a:lvl5pPr>
             <a:lvl6pPr>
-              <a:defRPr sz="1875" b="0">
+              <a:defRPr sz="1575" b="0">
                 <a:solidFill>
                   <a:srgbClr val="061A35"/>
                 </a:solidFill>
               </a:defRPr>
             </a:lvl6pPr>
             <a:lvl7pPr>
-              <a:defRPr sz="1875" b="0">
+              <a:defRPr sz="1575" b="0">
                 <a:solidFill>
                   <a:srgbClr val="061A35"/>
                 </a:solidFill>
               </a:defRPr>
             </a:lvl7pPr>
             <a:lvl8pPr>
-              <a:defRPr sz="1875" b="0">
+              <a:defRPr sz="1575" b="0">
                 <a:solidFill>
                   <a:srgbClr val="061A35"/>
                 </a:solidFill>
               </a:defRPr>
             </a:lvl8pPr>
             <a:lvl9pPr>
-              <a:defRPr sz="1875" b="0">
+              <a:defRPr sz="1575" b="0">
                 <a:solidFill>
                   <a:srgbClr val="061A35"/>
                 </a:solidFill>
@@ -18041,293 +17823,36 @@
           </a:lstStyle>
           <a:p xmlns:a="http://schemas.openxmlformats.org/drawingml/2006/main">
             <a:pPr>
-              <a:defRPr sz="1875" b="0">
+              <a:defRPr sz="1575" b="0">
                 <a:solidFill>
                   <a:srgbClr val="061A35"/>
                 </a:solidFill>
               </a:defRPr>
             </a:pPr>
             <a:r>
-              <a:rPr sz="1875" b="0">
+              <a:rPr sz="1575" b="0">
                 <a:solidFill>
                   <a:srgbClr val="061A35"/>
                 </a:solidFill>
               </a:rPr>
-              <a:t>Hash scrypt con salt</a:t>
+              <a:t>Comercios de barrio. Autonomía.</a:t>
             </a:r>
           </a:p>
           <a:p xmlns:a="http://schemas.openxmlformats.org/drawingml/2006/main">
             <a:pPr>
-              <a:defRPr sz="1875" b="0">
+              <a:defRPr sz="1575" b="0">
                 <a:solidFill>
                   <a:srgbClr val="061A35"/>
                 </a:solidFill>
               </a:defRPr>
             </a:pPr>
             <a:r>
-              <a:rPr sz="1875" b="0">
+              <a:rPr sz="1575" b="0">
                 <a:solidFill>
                   <a:srgbClr val="061A35"/>
                 </a:solidFill>
               </a:rPr>
-              <a:t>Autorización API por reforzar</a:t>
-            </a:r>
-          </a:p>
-        </p:txBody>
-      </p:sp>
-      <p:sp>
-        <p:nvSpPr>
-          <p:cNvPr id="14" name="">
-            <a:extLst xmlns:a="http://schemas.openxmlformats.org/drawingml/2006/main">
-              <a:ext uri="{FF2B5EF4-FFF2-40B4-BE49-F238E27FC236}">
-                <a16:creationId xmlns:a16="http://schemas.microsoft.com/office/drawing/2014/main" id="{26B33034-8592-434D-A91D-D6EB7B598CAF}"/>
-              </a:ext>
-            </a:extLst>
-          </p:cNvPr>
-          <p:cNvSpPr>
-            <a:spLocks xmlns:a="http://schemas.openxmlformats.org/drawingml/2006/main" noGrp="1"/>
-          </p:cNvSpPr>
-          <p:nvPr/>
-        </p:nvSpPr>
-        <p:spPr>
-          <a:xfrm xmlns:a="http://schemas.openxmlformats.org/drawingml/2006/main">
-            <a:off x="8048625" y="4381500"/>
-            <a:ext cx="3333750" cy="428625"/>
-          </a:xfrm>
-          <a:prstGeom xmlns:a="http://schemas.openxmlformats.org/drawingml/2006/main" prst="rect">
-            <a:avLst/>
-          </a:prstGeom>
-          <a:noFill xmlns:a="http://schemas.openxmlformats.org/drawingml/2006/main"/>
-          <a:ln xmlns:a="http://schemas.openxmlformats.org/drawingml/2006/main" w="0">
-            <a:noFill/>
-          </a:ln>
-        </p:spPr>
-        <p:txBody>
-          <a:bodyPr xmlns:a="http://schemas.openxmlformats.org/drawingml/2006/main"/>
-          <a:lstStyle xmlns:a="http://schemas.openxmlformats.org/drawingml/2006/main">
-            <a:defPPr>
-              <a:defRPr sz="2025" b="1">
-                <a:solidFill>
-                  <a:srgbClr val="0860FF"/>
-                </a:solidFill>
-              </a:defRPr>
-            </a:defPPr>
-            <a:lvl1pPr>
-              <a:defRPr sz="2025" b="1">
-                <a:solidFill>
-                  <a:srgbClr val="0860FF"/>
-                </a:solidFill>
-              </a:defRPr>
-            </a:lvl1pPr>
-            <a:lvl2pPr>
-              <a:defRPr sz="2025" b="1">
-                <a:solidFill>
-                  <a:srgbClr val="0860FF"/>
-                </a:solidFill>
-              </a:defRPr>
-            </a:lvl2pPr>
-            <a:lvl3pPr>
-              <a:defRPr sz="2025" b="1">
-                <a:solidFill>
-                  <a:srgbClr val="0860FF"/>
-                </a:solidFill>
-              </a:defRPr>
-            </a:lvl3pPr>
-            <a:lvl4pPr>
-              <a:defRPr sz="2025" b="1">
-                <a:solidFill>
-                  <a:srgbClr val="0860FF"/>
-                </a:solidFill>
-              </a:defRPr>
-            </a:lvl4pPr>
-            <a:lvl5pPr>
-              <a:defRPr sz="2025" b="1">
-                <a:solidFill>
-                  <a:srgbClr val="0860FF"/>
-                </a:solidFill>
-              </a:defRPr>
-            </a:lvl5pPr>
-            <a:lvl6pPr>
-              <a:defRPr sz="2025" b="1">
-                <a:solidFill>
-                  <a:srgbClr val="0860FF"/>
-                </a:solidFill>
-              </a:defRPr>
-            </a:lvl6pPr>
-            <a:lvl7pPr>
-              <a:defRPr sz="2025" b="1">
-                <a:solidFill>
-                  <a:srgbClr val="0860FF"/>
-                </a:solidFill>
-              </a:defRPr>
-            </a:lvl7pPr>
-            <a:lvl8pPr>
-              <a:defRPr sz="2025" b="1">
-                <a:solidFill>
-                  <a:srgbClr val="0860FF"/>
-                </a:solidFill>
-              </a:defRPr>
-            </a:lvl8pPr>
-            <a:lvl9pPr>
-              <a:defRPr sz="2025" b="1">
-                <a:solidFill>
-                  <a:srgbClr val="0860FF"/>
-                </a:solidFill>
-              </a:defRPr>
-            </a:lvl9pPr>
-          </a:lstStyle>
-          <a:p xmlns:a="http://schemas.openxmlformats.org/drawingml/2006/main">
-            <a:pPr>
-              <a:defRPr sz="2025" b="1">
-                <a:solidFill>
-                  <a:srgbClr val="0860FF"/>
-                </a:solidFill>
-              </a:defRPr>
-            </a:pPr>
-            <a:r>
-              <a:rPr sz="2025" b="1">
-                <a:solidFill>
-                  <a:srgbClr val="0860FF"/>
-                </a:solidFill>
-              </a:rPr>
-              <a:t>Accesibilidad</a:t>
-            </a:r>
-          </a:p>
-        </p:txBody>
-      </p:sp>
-      <p:sp>
-        <p:nvSpPr>
-          <p:cNvPr id="15" name="">
-            <a:extLst xmlns:a="http://schemas.openxmlformats.org/drawingml/2006/main">
-              <a:ext uri="{FF2B5EF4-FFF2-40B4-BE49-F238E27FC236}">
-                <a16:creationId xmlns:a16="http://schemas.microsoft.com/office/drawing/2014/main" id="{A03398A3-FD18-4167-A3E5-05EA24A69CCA}"/>
-              </a:ext>
-            </a:extLst>
-          </p:cNvPr>
-          <p:cNvSpPr>
-            <a:spLocks xmlns:a="http://schemas.openxmlformats.org/drawingml/2006/main" noGrp="1"/>
-          </p:cNvSpPr>
-          <p:nvPr/>
-        </p:nvSpPr>
-        <p:spPr>
-          <a:xfrm xmlns:a="http://schemas.openxmlformats.org/drawingml/2006/main">
-            <a:off x="8048625" y="4914900"/>
-            <a:ext cx="3333750" cy="904875"/>
-          </a:xfrm>
-          <a:prstGeom xmlns:a="http://schemas.openxmlformats.org/drawingml/2006/main" prst="rect">
-            <a:avLst/>
-          </a:prstGeom>
-          <a:noFill xmlns:a="http://schemas.openxmlformats.org/drawingml/2006/main"/>
-          <a:ln xmlns:a="http://schemas.openxmlformats.org/drawingml/2006/main" w="0">
-            <a:noFill/>
-          </a:ln>
-        </p:spPr>
-        <p:txBody>
-          <a:bodyPr xmlns:a="http://schemas.openxmlformats.org/drawingml/2006/main"/>
-          <a:lstStyle xmlns:a="http://schemas.openxmlformats.org/drawingml/2006/main">
-            <a:defPPr>
-              <a:defRPr sz="1875" b="0">
-                <a:solidFill>
-                  <a:srgbClr val="061A35"/>
-                </a:solidFill>
-              </a:defRPr>
-            </a:defPPr>
-            <a:lvl1pPr>
-              <a:defRPr sz="1875" b="0">
-                <a:solidFill>
-                  <a:srgbClr val="061A35"/>
-                </a:solidFill>
-              </a:defRPr>
-            </a:lvl1pPr>
-            <a:lvl2pPr>
-              <a:defRPr sz="1875" b="0">
-                <a:solidFill>
-                  <a:srgbClr val="061A35"/>
-                </a:solidFill>
-              </a:defRPr>
-            </a:lvl2pPr>
-            <a:lvl3pPr>
-              <a:defRPr sz="1875" b="0">
-                <a:solidFill>
-                  <a:srgbClr val="061A35"/>
-                </a:solidFill>
-              </a:defRPr>
-            </a:lvl3pPr>
-            <a:lvl4pPr>
-              <a:defRPr sz="1875" b="0">
-                <a:solidFill>
-                  <a:srgbClr val="061A35"/>
-                </a:solidFill>
-              </a:defRPr>
-            </a:lvl4pPr>
-            <a:lvl5pPr>
-              <a:defRPr sz="1875" b="0">
-                <a:solidFill>
-                  <a:srgbClr val="061A35"/>
-                </a:solidFill>
-              </a:defRPr>
-            </a:lvl5pPr>
-            <a:lvl6pPr>
-              <a:defRPr sz="1875" b="0">
-                <a:solidFill>
-                  <a:srgbClr val="061A35"/>
-                </a:solidFill>
-              </a:defRPr>
-            </a:lvl6pPr>
-            <a:lvl7pPr>
-              <a:defRPr sz="1875" b="0">
-                <a:solidFill>
-                  <a:srgbClr val="061A35"/>
-                </a:solidFill>
-              </a:defRPr>
-            </a:lvl7pPr>
-            <a:lvl8pPr>
-              <a:defRPr sz="1875" b="0">
-                <a:solidFill>
-                  <a:srgbClr val="061A35"/>
-                </a:solidFill>
-              </a:defRPr>
-            </a:lvl8pPr>
-            <a:lvl9pPr>
-              <a:defRPr sz="1875" b="0">
-                <a:solidFill>
-                  <a:srgbClr val="061A35"/>
-                </a:solidFill>
-              </a:defRPr>
-            </a:lvl9pPr>
-          </a:lstStyle>
-          <a:p xmlns:a="http://schemas.openxmlformats.org/drawingml/2006/main">
-            <a:pPr>
-              <a:defRPr sz="1875" b="0">
-                <a:solidFill>
-                  <a:srgbClr val="061A35"/>
-                </a:solidFill>
-              </a:defRPr>
-            </a:pPr>
-            <a:r>
-              <a:rPr sz="1875" b="0">
-                <a:solidFill>
-                  <a:srgbClr val="061A35"/>
-                </a:solidFill>
-              </a:rPr>
-              <a:t>Etiquetas en controles</a:t>
-            </a:r>
-          </a:p>
-          <a:p xmlns:a="http://schemas.openxmlformats.org/drawingml/2006/main">
-            <a:pPr>
-              <a:defRPr sz="1875" b="0">
-                <a:solidFill>
-                  <a:srgbClr val="061A35"/>
-                </a:solidFill>
-              </a:defRPr>
-            </a:pPr>
-            <a:r>
-              <a:rPr sz="1875" b="0">
-                <a:solidFill>
-                  <a:srgbClr val="061A35"/>
-                </a:solidFill>
-              </a:rPr>
-              <a:t>Temas claro y oscuro</a:t>
+              <a:t>Cuidado de los datos.</a:t>
             </a:r>
           </a:p>
         </p:txBody>
@@ -18335,7 +17860,7 @@
     </p:spTree>
     <p:extLst>
       <p:ext uri="{BB962C8B-B14F-4D97-AF65-F5344CB8AC3E}">
-        <p14:creationId xmlns:p14="http://schemas.microsoft.com/office/powerpoint/2010/main" val="1854479317"/>
+        <p14:creationId xmlns:p14="http://schemas.microsoft.com/office/powerpoint/2010/main" val="1674233161"/>
       </p:ext>
     </p:extLst>
   </p:cSld>
@@ -18348,7 +17873,7 @@
     <p:bg>
       <p:bgPr>
         <a:solidFill xmlns:a="http://schemas.openxmlformats.org/drawingml/2006/main">
-          <a:srgbClr val="F1F7FF"/>
+          <a:srgbClr val="061A35"/>
         </a:solidFill>
       </p:bgPr>
     </p:bg>
@@ -18363,10 +17888,10 @@
       </p:grpSpPr>
       <p:sp>
         <p:nvSpPr>
-          <p:cNvPr id="8" name="">
+          <p:cNvPr id="14" name="">
             <a:extLst xmlns:a="http://schemas.openxmlformats.org/drawingml/2006/main">
               <a:ext uri="{FF2B5EF4-FFF2-40B4-BE49-F238E27FC236}">
-                <a16:creationId xmlns:a16="http://schemas.microsoft.com/office/drawing/2014/main" id="{CA9364CB-7D10-44F1-8074-6E416298C0DD}"/>
+                <a16:creationId xmlns:a16="http://schemas.microsoft.com/office/drawing/2014/main" id="{24150DCA-2058-49F2-BDA8-54F91E576BC5}"/>
               </a:ext>
             </a:extLst>
           </p:cNvPr>
@@ -18476,7 +18001,7 @@
                   <a:srgbClr val="061A35"/>
                 </a:solidFill>
               </a:rPr>
-              <a:t>Resultados y futuro</a:t>
+              <a:t>Conclusiones y futuro</a:t>
             </a:r>
           </a:p>
         </p:txBody>
@@ -18486,7 +18011,7 @@
           <p:cNvPr id="2" name="">
             <a:extLst xmlns:a="http://schemas.openxmlformats.org/drawingml/2006/main">
               <a:ext uri="{FF2B5EF4-FFF2-40B4-BE49-F238E27FC236}">
-                <a16:creationId xmlns:a16="http://schemas.microsoft.com/office/drawing/2014/main" id="{2F41AAEF-05D5-45DE-979F-A4A7AB5FB2D0}"/>
+                <a16:creationId xmlns:a16="http://schemas.microsoft.com/office/drawing/2014/main" id="{4278CEB0-F5E4-4688-A965-8D7587533C7B}"/>
               </a:ext>
             </a:extLst>
           </p:cNvPr>
@@ -18606,7 +18131,7 @@
           <p:cNvPr id="3" name="">
             <a:extLst xmlns:a="http://schemas.openxmlformats.org/drawingml/2006/main">
               <a:ext uri="{FF2B5EF4-FFF2-40B4-BE49-F238E27FC236}">
-                <a16:creationId xmlns:a16="http://schemas.microsoft.com/office/drawing/2014/main" id="{1767A9D2-C68A-440A-82AB-1E7DD4EC004D}"/>
+                <a16:creationId xmlns:a16="http://schemas.microsoft.com/office/drawing/2014/main" id="{26D78750-70D0-477F-BF68-AFB604E4D7DF}"/>
               </a:ext>
             </a:extLst>
           </p:cNvPr>
@@ -18617,8 +18142,8 @@
         </p:nvSpPr>
         <p:spPr>
           <a:xfrm xmlns:a="http://schemas.openxmlformats.org/drawingml/2006/main">
-            <a:off x="609600" y="1571625"/>
-            <a:ext cx="7524750" cy="1047750"/>
+            <a:off x="609600" y="457200"/>
+            <a:ext cx="10972800" cy="742950"/>
           </a:xfrm>
           <a:prstGeom xmlns:a="http://schemas.openxmlformats.org/drawingml/2006/main" prst="rect">
             <a:avLst/>
@@ -18632,108 +18157,91 @@
           <a:bodyPr xmlns:a="http://schemas.openxmlformats.org/drawingml/2006/main"/>
           <a:lstStyle xmlns:a="http://schemas.openxmlformats.org/drawingml/2006/main">
             <a:defPPr>
-              <a:defRPr sz="3000" b="1">
-                <a:solidFill>
-                  <a:srgbClr val="0860FF"/>
+              <a:defRPr sz="3300" b="1">
+                <a:solidFill>
+                  <a:srgbClr val="B6CCE9"/>
                 </a:solidFill>
               </a:defRPr>
             </a:defPPr>
             <a:lvl1pPr>
-              <a:defRPr sz="3000" b="1">
-                <a:solidFill>
-                  <a:srgbClr val="0860FF"/>
+              <a:defRPr sz="3300" b="1">
+                <a:solidFill>
+                  <a:srgbClr val="B6CCE9"/>
                 </a:solidFill>
               </a:defRPr>
             </a:lvl1pPr>
             <a:lvl2pPr>
-              <a:defRPr sz="3000" b="1">
-                <a:solidFill>
-                  <a:srgbClr val="0860FF"/>
+              <a:defRPr sz="3300" b="1">
+                <a:solidFill>
+                  <a:srgbClr val="B6CCE9"/>
                 </a:solidFill>
               </a:defRPr>
             </a:lvl2pPr>
             <a:lvl3pPr>
-              <a:defRPr sz="3000" b="1">
-                <a:solidFill>
-                  <a:srgbClr val="0860FF"/>
+              <a:defRPr sz="3300" b="1">
+                <a:solidFill>
+                  <a:srgbClr val="B6CCE9"/>
                 </a:solidFill>
               </a:defRPr>
             </a:lvl3pPr>
             <a:lvl4pPr>
-              <a:defRPr sz="3000" b="1">
-                <a:solidFill>
-                  <a:srgbClr val="0860FF"/>
+              <a:defRPr sz="3300" b="1">
+                <a:solidFill>
+                  <a:srgbClr val="B6CCE9"/>
                 </a:solidFill>
               </a:defRPr>
             </a:lvl4pPr>
             <a:lvl5pPr>
-              <a:defRPr sz="3000" b="1">
-                <a:solidFill>
-                  <a:srgbClr val="0860FF"/>
+              <a:defRPr sz="3300" b="1">
+                <a:solidFill>
+                  <a:srgbClr val="B6CCE9"/>
                 </a:solidFill>
               </a:defRPr>
             </a:lvl5pPr>
             <a:lvl6pPr>
-              <a:defRPr sz="3000" b="1">
-                <a:solidFill>
-                  <a:srgbClr val="0860FF"/>
+              <a:defRPr sz="3300" b="1">
+                <a:solidFill>
+                  <a:srgbClr val="B6CCE9"/>
                 </a:solidFill>
               </a:defRPr>
             </a:lvl6pPr>
             <a:lvl7pPr>
-              <a:defRPr sz="3000" b="1">
-                <a:solidFill>
-                  <a:srgbClr val="0860FF"/>
+              <a:defRPr sz="3300" b="1">
+                <a:solidFill>
+                  <a:srgbClr val="B6CCE9"/>
                 </a:solidFill>
               </a:defRPr>
             </a:lvl7pPr>
             <a:lvl8pPr>
-              <a:defRPr sz="3000" b="1">
-                <a:solidFill>
-                  <a:srgbClr val="0860FF"/>
+              <a:defRPr sz="3300" b="1">
+                <a:solidFill>
+                  <a:srgbClr val="B6CCE9"/>
                 </a:solidFill>
               </a:defRPr>
             </a:lvl8pPr>
             <a:lvl9pPr>
-              <a:defRPr sz="3000" b="1">
-                <a:solidFill>
-                  <a:srgbClr val="0860FF"/>
+              <a:defRPr sz="3300" b="1">
+                <a:solidFill>
+                  <a:srgbClr val="B6CCE9"/>
                 </a:solidFill>
               </a:defRPr>
             </a:lvl9pPr>
           </a:lstStyle>
           <a:p xmlns:a="http://schemas.openxmlformats.org/drawingml/2006/main">
             <a:pPr>
-              <a:defRPr sz="3000" b="1">
-                <a:solidFill>
-                  <a:srgbClr val="0860FF"/>
+              <a:defRPr sz="3300" b="1">
+                <a:solidFill>
+                  <a:srgbClr val="B6CCE9"/>
                 </a:solidFill>
               </a:defRPr>
             </a:pPr>
             <a:r>
-              <a:rPr sz="3000" b="1">
-                <a:solidFill>
-                  <a:srgbClr val="0860FF"/>
+              <a:rPr sz="3300" b="1">
+                <a:solidFill>
+                  <a:srgbClr val="B6CCE9"/>
                 </a:solidFill>
               </a:rPr>
-              <a:t>Juan puede consultar</a:t>
-            </a:r>
-          </a:p>
-          <a:p xmlns:a="http://schemas.openxmlformats.org/drawingml/2006/main">
-            <a:pPr>
-              <a:defRPr sz="3000" b="1">
-                <a:solidFill>
-                  <a:srgbClr val="0860FF"/>
-                </a:solidFill>
-              </a:defRPr>
-            </a:pPr>
-            <a:r>
-              <a:rPr sz="3000" b="1">
-                <a:solidFill>
-                  <a:srgbClr val="0860FF"/>
-                </a:solidFill>
-              </a:rPr>
-              <a:t>la actividad de su comercio</a:t>
+              <a:t>Conclusiones y futuro</a:t>
             </a:r>
           </a:p>
         </p:txBody>
@@ -18743,7 +18251,7 @@
           <p:cNvPr id="4" name="">
             <a:extLst xmlns:a="http://schemas.openxmlformats.org/drawingml/2006/main">
               <a:ext uri="{FF2B5EF4-FFF2-40B4-BE49-F238E27FC236}">
-                <a16:creationId xmlns:a16="http://schemas.microsoft.com/office/drawing/2014/main" id="{49E2E224-25B2-4730-9465-459CB108B750}"/>
+                <a16:creationId xmlns:a16="http://schemas.microsoft.com/office/drawing/2014/main" id="{B191CE6F-D516-426E-BF6F-3ABE308CC1E2}"/>
               </a:ext>
             </a:extLst>
           </p:cNvPr>
@@ -18754,8 +18262,8 @@
         </p:nvSpPr>
         <p:spPr>
           <a:xfrm xmlns:a="http://schemas.openxmlformats.org/drawingml/2006/main">
-            <a:off x="609600" y="2905125"/>
-            <a:ext cx="7239000" cy="1381125"/>
+            <a:off x="609600" y="1381125"/>
+            <a:ext cx="7620000" cy="1047750"/>
           </a:xfrm>
           <a:prstGeom xmlns:a="http://schemas.openxmlformats.org/drawingml/2006/main" prst="rect">
             <a:avLst/>
@@ -18769,125 +18277,108 @@
           <a:bodyPr xmlns:a="http://schemas.openxmlformats.org/drawingml/2006/main"/>
           <a:lstStyle xmlns:a="http://schemas.openxmlformats.org/drawingml/2006/main">
             <a:defPPr>
-              <a:defRPr sz="2100" b="0">
-                <a:solidFill>
-                  <a:srgbClr val="061A35"/>
+              <a:defRPr sz="3225" b="1">
+                <a:solidFill>
+                  <a:srgbClr val="67B9FF"/>
                 </a:solidFill>
               </a:defRPr>
             </a:defPPr>
             <a:lvl1pPr>
-              <a:defRPr sz="2100" b="0">
-                <a:solidFill>
-                  <a:srgbClr val="061A35"/>
+              <a:defRPr sz="3225" b="1">
+                <a:solidFill>
+                  <a:srgbClr val="67B9FF"/>
                 </a:solidFill>
               </a:defRPr>
             </a:lvl1pPr>
             <a:lvl2pPr>
-              <a:defRPr sz="2100" b="0">
-                <a:solidFill>
-                  <a:srgbClr val="061A35"/>
+              <a:defRPr sz="3225" b="1">
+                <a:solidFill>
+                  <a:srgbClr val="67B9FF"/>
                 </a:solidFill>
               </a:defRPr>
             </a:lvl2pPr>
             <a:lvl3pPr>
-              <a:defRPr sz="2100" b="0">
-                <a:solidFill>
-                  <a:srgbClr val="061A35"/>
+              <a:defRPr sz="3225" b="1">
+                <a:solidFill>
+                  <a:srgbClr val="67B9FF"/>
                 </a:solidFill>
               </a:defRPr>
             </a:lvl3pPr>
             <a:lvl4pPr>
-              <a:defRPr sz="2100" b="0">
-                <a:solidFill>
-                  <a:srgbClr val="061A35"/>
+              <a:defRPr sz="3225" b="1">
+                <a:solidFill>
+                  <a:srgbClr val="67B9FF"/>
                 </a:solidFill>
               </a:defRPr>
             </a:lvl4pPr>
             <a:lvl5pPr>
-              <a:defRPr sz="2100" b="0">
-                <a:solidFill>
-                  <a:srgbClr val="061A35"/>
+              <a:defRPr sz="3225" b="1">
+                <a:solidFill>
+                  <a:srgbClr val="67B9FF"/>
                 </a:solidFill>
               </a:defRPr>
             </a:lvl5pPr>
             <a:lvl6pPr>
-              <a:defRPr sz="2100" b="0">
-                <a:solidFill>
-                  <a:srgbClr val="061A35"/>
+              <a:defRPr sz="3225" b="1">
+                <a:solidFill>
+                  <a:srgbClr val="67B9FF"/>
                 </a:solidFill>
               </a:defRPr>
             </a:lvl6pPr>
             <a:lvl7pPr>
-              <a:defRPr sz="2100" b="0">
-                <a:solidFill>
-                  <a:srgbClr val="061A35"/>
+              <a:defRPr sz="3225" b="1">
+                <a:solidFill>
+                  <a:srgbClr val="67B9FF"/>
                 </a:solidFill>
               </a:defRPr>
             </a:lvl7pPr>
             <a:lvl8pPr>
-              <a:defRPr sz="2100" b="0">
-                <a:solidFill>
-                  <a:srgbClr val="061A35"/>
+              <a:defRPr sz="3225" b="1">
+                <a:solidFill>
+                  <a:srgbClr val="67B9FF"/>
                 </a:solidFill>
               </a:defRPr>
             </a:lvl8pPr>
             <a:lvl9pPr>
-              <a:defRPr sz="2100" b="0">
-                <a:solidFill>
-                  <a:srgbClr val="061A35"/>
+              <a:defRPr sz="3225" b="1">
+                <a:solidFill>
+                  <a:srgbClr val="67B9FF"/>
                 </a:solidFill>
               </a:defRPr>
             </a:lvl9pPr>
           </a:lstStyle>
           <a:p xmlns:a="http://schemas.openxmlformats.org/drawingml/2006/main">
             <a:pPr>
-              <a:defRPr sz="2100" b="0">
-                <a:solidFill>
-                  <a:srgbClr val="061A35"/>
+              <a:defRPr sz="3225" b="1">
+                <a:solidFill>
+                  <a:srgbClr val="67B9FF"/>
                 </a:solidFill>
               </a:defRPr>
             </a:pPr>
             <a:r>
-              <a:rPr sz="2100" b="0">
-                <a:solidFill>
-                  <a:srgbClr val="061A35"/>
+              <a:rPr sz="3225" b="1">
+                <a:solidFill>
+                  <a:srgbClr val="67B9FF"/>
                 </a:solidFill>
               </a:rPr>
-              <a:t>Compras y ventas conectadas con el stock</a:t>
+              <a:t>El comercio de Juan,</a:t>
             </a:r>
           </a:p>
           <a:p xmlns:a="http://schemas.openxmlformats.org/drawingml/2006/main">
             <a:pPr>
-              <a:defRPr sz="2100" b="0">
-                <a:solidFill>
-                  <a:srgbClr val="061A35"/>
+              <a:defRPr sz="3225" b="1">
+                <a:solidFill>
+                  <a:srgbClr val="67B9FF"/>
                 </a:solidFill>
               </a:defRPr>
             </a:pPr>
             <a:r>
-              <a:rPr sz="2100" b="0">
-                <a:solidFill>
-                  <a:srgbClr val="061A35"/>
+              <a:rPr sz="3225" b="1">
+                <a:solidFill>
+                  <a:srgbClr val="67B9FF"/>
                 </a:solidFill>
               </a:rPr>
-              <a:t>Historial de operaciones</a:t>
-            </a:r>
-          </a:p>
-          <a:p xmlns:a="http://schemas.openxmlformats.org/drawingml/2006/main">
-            <a:pPr>
-              <a:defRPr sz="2100" b="0">
-                <a:solidFill>
-                  <a:srgbClr val="061A35"/>
-                </a:solidFill>
-              </a:defRPr>
-            </a:pPr>
-            <a:r>
-              <a:rPr sz="2100" b="0">
-                <a:solidFill>
-                  <a:srgbClr val="061A35"/>
-                </a:solidFill>
-              </a:rPr>
-              <a:t>Organización de empleados y turnos</a:t>
+              <a:t>con información reunida</a:t>
             </a:r>
           </a:p>
         </p:txBody>
@@ -18897,7 +18388,7 @@
           <p:cNvPr id="5" name="">
             <a:extLst xmlns:a="http://schemas.openxmlformats.org/drawingml/2006/main">
               <a:ext uri="{FF2B5EF4-FFF2-40B4-BE49-F238E27FC236}">
-                <a16:creationId xmlns:a16="http://schemas.microsoft.com/office/drawing/2014/main" id="{B4466175-6192-4105-B568-3B95A1611F74}"/>
+                <a16:creationId xmlns:a16="http://schemas.microsoft.com/office/drawing/2014/main" id="{D0FDDAF7-3B4E-456E-9EFA-18F32C6B7E46}"/>
               </a:ext>
             </a:extLst>
           </p:cNvPr>
@@ -18908,8 +18399,8 @@
         </p:nvSpPr>
         <p:spPr>
           <a:xfrm xmlns:a="http://schemas.openxmlformats.org/drawingml/2006/main">
-            <a:off x="609600" y="4524375"/>
-            <a:ext cx="7239000" cy="476250"/>
+            <a:off x="609600" y="2781300"/>
+            <a:ext cx="6953250" cy="333375"/>
           </a:xfrm>
           <a:prstGeom xmlns:a="http://schemas.openxmlformats.org/drawingml/2006/main" prst="rect">
             <a:avLst/>
@@ -18923,91 +18414,91 @@
           <a:bodyPr xmlns:a="http://schemas.openxmlformats.org/drawingml/2006/main"/>
           <a:lstStyle xmlns:a="http://schemas.openxmlformats.org/drawingml/2006/main">
             <a:defPPr>
-              <a:defRPr sz="2325" b="1">
-                <a:solidFill>
-                  <a:srgbClr val="061A35"/>
+              <a:defRPr sz="1350" b="1">
+                <a:solidFill>
+                  <a:srgbClr val="B6CCE9"/>
                 </a:solidFill>
               </a:defRPr>
             </a:defPPr>
             <a:lvl1pPr>
-              <a:defRPr sz="2325" b="1">
-                <a:solidFill>
-                  <a:srgbClr val="061A35"/>
+              <a:defRPr sz="1350" b="1">
+                <a:solidFill>
+                  <a:srgbClr val="B6CCE9"/>
                 </a:solidFill>
               </a:defRPr>
             </a:lvl1pPr>
             <a:lvl2pPr>
-              <a:defRPr sz="2325" b="1">
-                <a:solidFill>
-                  <a:srgbClr val="061A35"/>
+              <a:defRPr sz="1350" b="1">
+                <a:solidFill>
+                  <a:srgbClr val="B6CCE9"/>
                 </a:solidFill>
               </a:defRPr>
             </a:lvl2pPr>
             <a:lvl3pPr>
-              <a:defRPr sz="2325" b="1">
-                <a:solidFill>
-                  <a:srgbClr val="061A35"/>
+              <a:defRPr sz="1350" b="1">
+                <a:solidFill>
+                  <a:srgbClr val="B6CCE9"/>
                 </a:solidFill>
               </a:defRPr>
             </a:lvl3pPr>
             <a:lvl4pPr>
-              <a:defRPr sz="2325" b="1">
-                <a:solidFill>
-                  <a:srgbClr val="061A35"/>
+              <a:defRPr sz="1350" b="1">
+                <a:solidFill>
+                  <a:srgbClr val="B6CCE9"/>
                 </a:solidFill>
               </a:defRPr>
             </a:lvl4pPr>
             <a:lvl5pPr>
-              <a:defRPr sz="2325" b="1">
-                <a:solidFill>
-                  <a:srgbClr val="061A35"/>
+              <a:defRPr sz="1350" b="1">
+                <a:solidFill>
+                  <a:srgbClr val="B6CCE9"/>
                 </a:solidFill>
               </a:defRPr>
             </a:lvl5pPr>
             <a:lvl6pPr>
-              <a:defRPr sz="2325" b="1">
-                <a:solidFill>
-                  <a:srgbClr val="061A35"/>
+              <a:defRPr sz="1350" b="1">
+                <a:solidFill>
+                  <a:srgbClr val="B6CCE9"/>
                 </a:solidFill>
               </a:defRPr>
             </a:lvl6pPr>
             <a:lvl7pPr>
-              <a:defRPr sz="2325" b="1">
-                <a:solidFill>
-                  <a:srgbClr val="061A35"/>
+              <a:defRPr sz="1350" b="1">
+                <a:solidFill>
+                  <a:srgbClr val="B6CCE9"/>
                 </a:solidFill>
               </a:defRPr>
             </a:lvl7pPr>
             <a:lvl8pPr>
-              <a:defRPr sz="2325" b="1">
-                <a:solidFill>
-                  <a:srgbClr val="061A35"/>
+              <a:defRPr sz="1350" b="1">
+                <a:solidFill>
+                  <a:srgbClr val="B6CCE9"/>
                 </a:solidFill>
               </a:defRPr>
             </a:lvl8pPr>
             <a:lvl9pPr>
-              <a:defRPr sz="2325" b="1">
-                <a:solidFill>
-                  <a:srgbClr val="061A35"/>
+              <a:defRPr sz="1350" b="1">
+                <a:solidFill>
+                  <a:srgbClr val="B6CCE9"/>
                 </a:solidFill>
               </a:defRPr>
             </a:lvl9pPr>
           </a:lstStyle>
           <a:p xmlns:a="http://schemas.openxmlformats.org/drawingml/2006/main">
             <a:pPr>
-              <a:defRPr sz="2325" b="1">
-                <a:solidFill>
-                  <a:srgbClr val="061A35"/>
+              <a:defRPr sz="1350" b="1">
+                <a:solidFill>
+                  <a:srgbClr val="B6CCE9"/>
                 </a:solidFill>
               </a:defRPr>
             </a:pPr>
             <a:r>
-              <a:rPr sz="2325" b="1">
-                <a:solidFill>
-                  <a:srgbClr val="061A35"/>
+              <a:rPr sz="1350" b="1">
+                <a:solidFill>
+                  <a:srgbClr val="B6CCE9"/>
                 </a:solidFill>
               </a:rPr>
-              <a:t>Próximas prioridades</a:t>
+              <a:t>APORTE DEL PROYECTO</a:t>
             </a:r>
           </a:p>
         </p:txBody>
@@ -19017,7 +18508,7 @@
           <p:cNvPr id="6" name="">
             <a:extLst xmlns:a="http://schemas.openxmlformats.org/drawingml/2006/main">
               <a:ext uri="{FF2B5EF4-FFF2-40B4-BE49-F238E27FC236}">
-                <a16:creationId xmlns:a16="http://schemas.microsoft.com/office/drawing/2014/main" id="{8B215F83-FFE4-479A-B75E-369C5A2C79DD}"/>
+                <a16:creationId xmlns:a16="http://schemas.microsoft.com/office/drawing/2014/main" id="{D294920E-1FC4-4BC3-BD3B-CFFDA91C8329}"/>
               </a:ext>
             </a:extLst>
           </p:cNvPr>
@@ -19028,8 +18519,8 @@
         </p:nvSpPr>
         <p:spPr>
           <a:xfrm xmlns:a="http://schemas.openxmlformats.org/drawingml/2006/main">
-            <a:off x="609600" y="5143500"/>
-            <a:ext cx="7334250" cy="857250"/>
+            <a:off x="609600" y="3219450"/>
+            <a:ext cx="7524750" cy="714375"/>
           </a:xfrm>
           <a:prstGeom xmlns:a="http://schemas.openxmlformats.org/drawingml/2006/main" prst="rect">
             <a:avLst/>
@@ -19043,118 +18534,358 @@
           <a:bodyPr xmlns:a="http://schemas.openxmlformats.org/drawingml/2006/main"/>
           <a:lstStyle xmlns:a="http://schemas.openxmlformats.org/drawingml/2006/main">
             <a:defPPr>
-              <a:defRPr sz="2025" b="0">
-                <a:solidFill>
-                  <a:srgbClr val="536B91"/>
+              <a:defRPr sz="2175" b="1">
+                <a:solidFill>
+                  <a:srgbClr val="FFFFFF"/>
                 </a:solidFill>
               </a:defRPr>
             </a:defPPr>
             <a:lvl1pPr>
-              <a:defRPr sz="2025" b="0">
-                <a:solidFill>
-                  <a:srgbClr val="536B91"/>
+              <a:defRPr sz="2175" b="1">
+                <a:solidFill>
+                  <a:srgbClr val="FFFFFF"/>
                 </a:solidFill>
               </a:defRPr>
             </a:lvl1pPr>
             <a:lvl2pPr>
-              <a:defRPr sz="2025" b="0">
-                <a:solidFill>
-                  <a:srgbClr val="536B91"/>
+              <a:defRPr sz="2175" b="1">
+                <a:solidFill>
+                  <a:srgbClr val="FFFFFF"/>
                 </a:solidFill>
               </a:defRPr>
             </a:lvl2pPr>
             <a:lvl3pPr>
-              <a:defRPr sz="2025" b="0">
-                <a:solidFill>
-                  <a:srgbClr val="536B91"/>
+              <a:defRPr sz="2175" b="1">
+                <a:solidFill>
+                  <a:srgbClr val="FFFFFF"/>
                 </a:solidFill>
               </a:defRPr>
             </a:lvl3pPr>
             <a:lvl4pPr>
-              <a:defRPr sz="2025" b="0">
-                <a:solidFill>
-                  <a:srgbClr val="536B91"/>
+              <a:defRPr sz="2175" b="1">
+                <a:solidFill>
+                  <a:srgbClr val="FFFFFF"/>
                 </a:solidFill>
               </a:defRPr>
             </a:lvl4pPr>
             <a:lvl5pPr>
-              <a:defRPr sz="2025" b="0">
-                <a:solidFill>
-                  <a:srgbClr val="536B91"/>
+              <a:defRPr sz="2175" b="1">
+                <a:solidFill>
+                  <a:srgbClr val="FFFFFF"/>
                 </a:solidFill>
               </a:defRPr>
             </a:lvl5pPr>
             <a:lvl6pPr>
-              <a:defRPr sz="2025" b="0">
-                <a:solidFill>
-                  <a:srgbClr val="536B91"/>
+              <a:defRPr sz="2175" b="1">
+                <a:solidFill>
+                  <a:srgbClr val="FFFFFF"/>
                 </a:solidFill>
               </a:defRPr>
             </a:lvl6pPr>
             <a:lvl7pPr>
-              <a:defRPr sz="2025" b="0">
-                <a:solidFill>
-                  <a:srgbClr val="536B91"/>
+              <a:defRPr sz="2175" b="1">
+                <a:solidFill>
+                  <a:srgbClr val="FFFFFF"/>
                 </a:solidFill>
               </a:defRPr>
             </a:lvl7pPr>
             <a:lvl8pPr>
-              <a:defRPr sz="2025" b="0">
-                <a:solidFill>
-                  <a:srgbClr val="536B91"/>
+              <a:defRPr sz="2175" b="1">
+                <a:solidFill>
+                  <a:srgbClr val="FFFFFF"/>
                 </a:solidFill>
               </a:defRPr>
             </a:lvl8pPr>
             <a:lvl9pPr>
-              <a:defRPr sz="2025" b="0">
-                <a:solidFill>
-                  <a:srgbClr val="536B91"/>
+              <a:defRPr sz="2175" b="1">
+                <a:solidFill>
+                  <a:srgbClr val="FFFFFF"/>
                 </a:solidFill>
               </a:defRPr>
             </a:lvl9pPr>
           </a:lstStyle>
           <a:p xmlns:a="http://schemas.openxmlformats.org/drawingml/2006/main">
             <a:pPr>
-              <a:defRPr sz="2025" b="0">
-                <a:solidFill>
-                  <a:srgbClr val="536B91"/>
+              <a:defRPr sz="2175" b="1">
+                <a:solidFill>
+                  <a:srgbClr val="FFFFFF"/>
                 </a:solidFill>
               </a:defRPr>
             </a:pPr>
             <a:r>
-              <a:rPr sz="2025" b="0">
-                <a:solidFill>
-                  <a:srgbClr val="536B91"/>
+              <a:rPr sz="2175" b="1">
+                <a:solidFill>
+                  <a:srgbClr val="FFFFFF"/>
                 </a:solidFill>
               </a:rPr>
-              <a:t>Autorización en API y pruebas</a:t>
+              <a:t>Continuidad entre turnos y gestión desde el celular</a:t>
+            </a:r>
+          </a:p>
+        </p:txBody>
+      </p:sp>
+      <p:sp>
+        <p:nvSpPr>
+          <p:cNvPr id="7" name="">
+            <a:extLst xmlns:a="http://schemas.openxmlformats.org/drawingml/2006/main">
+              <a:ext uri="{FF2B5EF4-FFF2-40B4-BE49-F238E27FC236}">
+                <a16:creationId xmlns:a16="http://schemas.microsoft.com/office/drawing/2014/main" id="{129E14FA-3F2D-4FEF-B4D6-F50003C69B87}"/>
+              </a:ext>
+            </a:extLst>
+          </p:cNvPr>
+          <p:cNvSpPr>
+            <a:spLocks xmlns:a="http://schemas.openxmlformats.org/drawingml/2006/main" noGrp="1"/>
+          </p:cNvSpPr>
+          <p:nvPr/>
+        </p:nvSpPr>
+        <p:spPr>
+          <a:xfrm xmlns:a="http://schemas.openxmlformats.org/drawingml/2006/main">
+            <a:off x="609600" y="4171950"/>
+            <a:ext cx="7143750" cy="304800"/>
+          </a:xfrm>
+          <a:prstGeom xmlns:a="http://schemas.openxmlformats.org/drawingml/2006/main" prst="rect">
+            <a:avLst/>
+          </a:prstGeom>
+          <a:noFill xmlns:a="http://schemas.openxmlformats.org/drawingml/2006/main"/>
+          <a:ln xmlns:a="http://schemas.openxmlformats.org/drawingml/2006/main" w="0">
+            <a:noFill/>
+          </a:ln>
+        </p:spPr>
+        <p:txBody>
+          <a:bodyPr xmlns:a="http://schemas.openxmlformats.org/drawingml/2006/main"/>
+          <a:lstStyle xmlns:a="http://schemas.openxmlformats.org/drawingml/2006/main">
+            <a:defPPr>
+              <a:defRPr sz="1350" b="1">
+                <a:solidFill>
+                  <a:srgbClr val="B6CCE9"/>
+                </a:solidFill>
+              </a:defRPr>
+            </a:defPPr>
+            <a:lvl1pPr>
+              <a:defRPr sz="1350" b="1">
+                <a:solidFill>
+                  <a:srgbClr val="B6CCE9"/>
+                </a:solidFill>
+              </a:defRPr>
+            </a:lvl1pPr>
+            <a:lvl2pPr>
+              <a:defRPr sz="1350" b="1">
+                <a:solidFill>
+                  <a:srgbClr val="B6CCE9"/>
+                </a:solidFill>
+              </a:defRPr>
+            </a:lvl2pPr>
+            <a:lvl3pPr>
+              <a:defRPr sz="1350" b="1">
+                <a:solidFill>
+                  <a:srgbClr val="B6CCE9"/>
+                </a:solidFill>
+              </a:defRPr>
+            </a:lvl3pPr>
+            <a:lvl4pPr>
+              <a:defRPr sz="1350" b="1">
+                <a:solidFill>
+                  <a:srgbClr val="B6CCE9"/>
+                </a:solidFill>
+              </a:defRPr>
+            </a:lvl4pPr>
+            <a:lvl5pPr>
+              <a:defRPr sz="1350" b="1">
+                <a:solidFill>
+                  <a:srgbClr val="B6CCE9"/>
+                </a:solidFill>
+              </a:defRPr>
+            </a:lvl5pPr>
+            <a:lvl6pPr>
+              <a:defRPr sz="1350" b="1">
+                <a:solidFill>
+                  <a:srgbClr val="B6CCE9"/>
+                </a:solidFill>
+              </a:defRPr>
+            </a:lvl6pPr>
+            <a:lvl7pPr>
+              <a:defRPr sz="1350" b="1">
+                <a:solidFill>
+                  <a:srgbClr val="B6CCE9"/>
+                </a:solidFill>
+              </a:defRPr>
+            </a:lvl7pPr>
+            <a:lvl8pPr>
+              <a:defRPr sz="1350" b="1">
+                <a:solidFill>
+                  <a:srgbClr val="B6CCE9"/>
+                </a:solidFill>
+              </a:defRPr>
+            </a:lvl8pPr>
+            <a:lvl9pPr>
+              <a:defRPr sz="1350" b="1">
+                <a:solidFill>
+                  <a:srgbClr val="B6CCE9"/>
+                </a:solidFill>
+              </a:defRPr>
+            </a:lvl9pPr>
+          </a:lstStyle>
+          <a:p xmlns:a="http://schemas.openxmlformats.org/drawingml/2006/main">
+            <a:pPr>
+              <a:defRPr sz="1350" b="1">
+                <a:solidFill>
+                  <a:srgbClr val="B6CCE9"/>
+                </a:solidFill>
+              </a:defRPr>
+            </a:pPr>
+            <a:r>
+              <a:rPr sz="1350" b="1">
+                <a:solidFill>
+                  <a:srgbClr val="B6CCE9"/>
+                </a:solidFill>
+              </a:rPr>
+              <a:t>LÍMITES DE LA VERSIÓN ACTUAL</a:t>
+            </a:r>
+          </a:p>
+        </p:txBody>
+      </p:sp>
+      <p:sp>
+        <p:nvSpPr>
+          <p:cNvPr id="8" name="">
+            <a:extLst xmlns:a="http://schemas.openxmlformats.org/drawingml/2006/main">
+              <a:ext uri="{FF2B5EF4-FFF2-40B4-BE49-F238E27FC236}">
+                <a16:creationId xmlns:a16="http://schemas.microsoft.com/office/drawing/2014/main" id="{EE1F6750-3BB6-4600-939D-A65783478778}"/>
+              </a:ext>
+            </a:extLst>
+          </p:cNvPr>
+          <p:cNvSpPr>
+            <a:spLocks xmlns:a="http://schemas.openxmlformats.org/drawingml/2006/main" noGrp="1"/>
+          </p:cNvSpPr>
+          <p:nvPr/>
+        </p:nvSpPr>
+        <p:spPr>
+          <a:xfrm xmlns:a="http://schemas.openxmlformats.org/drawingml/2006/main">
+            <a:off x="609600" y="4581525"/>
+            <a:ext cx="7620000" cy="819150"/>
+          </a:xfrm>
+          <a:prstGeom xmlns:a="http://schemas.openxmlformats.org/drawingml/2006/main" prst="rect">
+            <a:avLst/>
+          </a:prstGeom>
+          <a:noFill xmlns:a="http://schemas.openxmlformats.org/drawingml/2006/main"/>
+          <a:ln xmlns:a="http://schemas.openxmlformats.org/drawingml/2006/main" w="0">
+            <a:noFill/>
+          </a:ln>
+        </p:spPr>
+        <p:txBody>
+          <a:bodyPr xmlns:a="http://schemas.openxmlformats.org/drawingml/2006/main"/>
+          <a:lstStyle xmlns:a="http://schemas.openxmlformats.org/drawingml/2006/main">
+            <a:defPPr>
+              <a:defRPr sz="1875" b="0">
+                <a:solidFill>
+                  <a:srgbClr val="FFFFFF"/>
+                </a:solidFill>
+              </a:defRPr>
+            </a:defPPr>
+            <a:lvl1pPr>
+              <a:defRPr sz="1875" b="0">
+                <a:solidFill>
+                  <a:srgbClr val="FFFFFF"/>
+                </a:solidFill>
+              </a:defRPr>
+            </a:lvl1pPr>
+            <a:lvl2pPr>
+              <a:defRPr sz="1875" b="0">
+                <a:solidFill>
+                  <a:srgbClr val="FFFFFF"/>
+                </a:solidFill>
+              </a:defRPr>
+            </a:lvl2pPr>
+            <a:lvl3pPr>
+              <a:defRPr sz="1875" b="0">
+                <a:solidFill>
+                  <a:srgbClr val="FFFFFF"/>
+                </a:solidFill>
+              </a:defRPr>
+            </a:lvl3pPr>
+            <a:lvl4pPr>
+              <a:defRPr sz="1875" b="0">
+                <a:solidFill>
+                  <a:srgbClr val="FFFFFF"/>
+                </a:solidFill>
+              </a:defRPr>
+            </a:lvl4pPr>
+            <a:lvl5pPr>
+              <a:defRPr sz="1875" b="0">
+                <a:solidFill>
+                  <a:srgbClr val="FFFFFF"/>
+                </a:solidFill>
+              </a:defRPr>
+            </a:lvl5pPr>
+            <a:lvl6pPr>
+              <a:defRPr sz="1875" b="0">
+                <a:solidFill>
+                  <a:srgbClr val="FFFFFF"/>
+                </a:solidFill>
+              </a:defRPr>
+            </a:lvl6pPr>
+            <a:lvl7pPr>
+              <a:defRPr sz="1875" b="0">
+                <a:solidFill>
+                  <a:srgbClr val="FFFFFF"/>
+                </a:solidFill>
+              </a:defRPr>
+            </a:lvl7pPr>
+            <a:lvl8pPr>
+              <a:defRPr sz="1875" b="0">
+                <a:solidFill>
+                  <a:srgbClr val="FFFFFF"/>
+                </a:solidFill>
+              </a:defRPr>
+            </a:lvl8pPr>
+            <a:lvl9pPr>
+              <a:defRPr sz="1875" b="0">
+                <a:solidFill>
+                  <a:srgbClr val="FFFFFF"/>
+                </a:solidFill>
+              </a:defRPr>
+            </a:lvl9pPr>
+          </a:lstStyle>
+          <a:p xmlns:a="http://schemas.openxmlformats.org/drawingml/2006/main">
+            <a:pPr>
+              <a:defRPr sz="1875" b="0">
+                <a:solidFill>
+                  <a:srgbClr val="FFFFFF"/>
+                </a:solidFill>
+              </a:defRPr>
+            </a:pPr>
+            <a:r>
+              <a:rPr sz="1875" b="0">
+                <a:solidFill>
+                  <a:srgbClr val="FFFFFF"/>
+                </a:solidFill>
+              </a:rPr>
+              <a:t>Sin separación por comercio. Funciones con alcance inicial.</a:t>
             </a:r>
           </a:p>
           <a:p xmlns:a="http://schemas.openxmlformats.org/drawingml/2006/main">
             <a:pPr>
-              <a:defRPr sz="2025" b="0">
-                <a:solidFill>
-                  <a:srgbClr val="536B91"/>
+              <a:defRPr sz="1875" b="0">
+                <a:solidFill>
+                  <a:srgbClr val="FFFFFF"/>
                 </a:solidFill>
               </a:defRPr>
             </a:pPr>
             <a:r>
-              <a:rPr sz="2025" b="0">
-                <a:solidFill>
-                  <a:srgbClr val="536B91"/>
+              <a:rPr sz="1875" b="0">
+                <a:solidFill>
+                  <a:srgbClr val="FFFFFF"/>
                 </a:solidFill>
               </a:rPr>
-              <a:t>Evaluación de accesibilidad con usuarios</a:t>
+              <a:t>Sin modo de trabajo offline.</a:t>
             </a:r>
           </a:p>
         </p:txBody>
       </p:sp>
       <p:pic>
         <p:nvPicPr>
-          <p:cNvPr id="7" name="">
+          <p:cNvPr id="9" name="">
             <a:extLst xmlns:a="http://schemas.openxmlformats.org/drawingml/2006/main">
               <a:ext uri="{FF2B5EF4-FFF2-40B4-BE49-F238E27FC236}">
-                <a16:creationId xmlns:a16="http://schemas.microsoft.com/office/drawing/2014/main" id="{E93A400C-E6C5-4DA8-A6AC-2943161090F4}"/>
+                <a16:creationId xmlns:a16="http://schemas.microsoft.com/office/drawing/2014/main" id="{1D1C1331-EA2A-41E5-8782-A974158E1297}"/>
               </a:ext>
             </a:extLst>
           </p:cNvPr>
@@ -19164,23 +18895,503 @@
           <p:nvPr/>
         </p:nvPicPr>
         <p:blipFill>
-          <a:blip xmlns:r="http://schemas.openxmlformats.org/officeDocument/2006/relationships" xmlns:a="http://schemas.openxmlformats.org/drawingml/2006/main" r:embed="Rf21931e70cef4475"/>
+          <a:blip xmlns:r="http://schemas.openxmlformats.org/officeDocument/2006/relationships" xmlns:a="http://schemas.openxmlformats.org/drawingml/2006/main" r:embed="R2c85d00e1d3841ae"/>
           <a:stretch xmlns:a="http://schemas.openxmlformats.org/drawingml/2006/main"/>
         </p:blipFill>
         <p:spPr>
           <a:xfrm xmlns:a="http://schemas.openxmlformats.org/drawingml/2006/main">
-            <a:off x="8564135" y="1381125"/>
-            <a:ext cx="2493229" cy="4572000"/>
+            <a:off x="9051178" y="1428750"/>
+            <a:ext cx="2233518" cy="4095750"/>
           </a:xfrm>
           <a:prstGeom xmlns:a="http://schemas.openxmlformats.org/drawingml/2006/main" prst="rect">
             <a:avLst/>
           </a:prstGeom>
         </p:spPr>
       </p:pic>
+      <p:sp>
+        <p:nvSpPr>
+          <p:cNvPr id="10" name="">
+            <a:extLst xmlns:a="http://schemas.openxmlformats.org/drawingml/2006/main">
+              <a:ext uri="{FF2B5EF4-FFF2-40B4-BE49-F238E27FC236}">
+                <a16:creationId xmlns:a16="http://schemas.microsoft.com/office/drawing/2014/main" id="{91E58230-62B7-417B-8DB6-158B34317FB0}"/>
+              </a:ext>
+            </a:extLst>
+          </p:cNvPr>
+          <p:cNvSpPr>
+            <a:spLocks xmlns:a="http://schemas.openxmlformats.org/drawingml/2006/main" noGrp="1"/>
+          </p:cNvSpPr>
+          <p:nvPr/>
+        </p:nvSpPr>
+        <p:spPr>
+          <a:xfrm xmlns:a="http://schemas.openxmlformats.org/drawingml/2006/main">
+            <a:off x="609600" y="5695950"/>
+            <a:ext cx="2667000" cy="476250"/>
+          </a:xfrm>
+          <a:prstGeom xmlns:a="http://schemas.openxmlformats.org/drawingml/2006/main" prst="rect">
+            <a:avLst/>
+          </a:prstGeom>
+          <a:noFill xmlns:a="http://schemas.openxmlformats.org/drawingml/2006/main"/>
+          <a:ln xmlns:a="http://schemas.openxmlformats.org/drawingml/2006/main" w="0">
+            <a:noFill/>
+          </a:ln>
+        </p:spPr>
+        <p:txBody>
+          <a:bodyPr xmlns:a="http://schemas.openxmlformats.org/drawingml/2006/main"/>
+          <a:lstStyle xmlns:a="http://schemas.openxmlformats.org/drawingml/2006/main">
+            <a:defPPr>
+              <a:defRPr sz="2250" b="1">
+                <a:solidFill>
+                  <a:srgbClr val="67B9FF"/>
+                </a:solidFill>
+              </a:defRPr>
+            </a:defPPr>
+            <a:lvl1pPr>
+              <a:defRPr sz="2250" b="1">
+                <a:solidFill>
+                  <a:srgbClr val="67B9FF"/>
+                </a:solidFill>
+              </a:defRPr>
+            </a:lvl1pPr>
+            <a:lvl2pPr>
+              <a:defRPr sz="2250" b="1">
+                <a:solidFill>
+                  <a:srgbClr val="67B9FF"/>
+                </a:solidFill>
+              </a:defRPr>
+            </a:lvl2pPr>
+            <a:lvl3pPr>
+              <a:defRPr sz="2250" b="1">
+                <a:solidFill>
+                  <a:srgbClr val="67B9FF"/>
+                </a:solidFill>
+              </a:defRPr>
+            </a:lvl3pPr>
+            <a:lvl4pPr>
+              <a:defRPr sz="2250" b="1">
+                <a:solidFill>
+                  <a:srgbClr val="67B9FF"/>
+                </a:solidFill>
+              </a:defRPr>
+            </a:lvl4pPr>
+            <a:lvl5pPr>
+              <a:defRPr sz="2250" b="1">
+                <a:solidFill>
+                  <a:srgbClr val="67B9FF"/>
+                </a:solidFill>
+              </a:defRPr>
+            </a:lvl5pPr>
+            <a:lvl6pPr>
+              <a:defRPr sz="2250" b="1">
+                <a:solidFill>
+                  <a:srgbClr val="67B9FF"/>
+                </a:solidFill>
+              </a:defRPr>
+            </a:lvl6pPr>
+            <a:lvl7pPr>
+              <a:defRPr sz="2250" b="1">
+                <a:solidFill>
+                  <a:srgbClr val="67B9FF"/>
+                </a:solidFill>
+              </a:defRPr>
+            </a:lvl7pPr>
+            <a:lvl8pPr>
+              <a:defRPr sz="2250" b="1">
+                <a:solidFill>
+                  <a:srgbClr val="67B9FF"/>
+                </a:solidFill>
+              </a:defRPr>
+            </a:lvl8pPr>
+            <a:lvl9pPr>
+              <a:defRPr sz="2250" b="1">
+                <a:solidFill>
+                  <a:srgbClr val="67B9FF"/>
+                </a:solidFill>
+              </a:defRPr>
+            </a:lvl9pPr>
+          </a:lstStyle>
+          <a:p xmlns:a="http://schemas.openxmlformats.org/drawingml/2006/main">
+            <a:pPr>
+              <a:defRPr sz="2250" b="1">
+                <a:solidFill>
+                  <a:srgbClr val="67B9FF"/>
+                </a:solidFill>
+              </a:defRPr>
+            </a:pPr>
+            <a:r>
+              <a:rPr sz="2250" b="1">
+                <a:solidFill>
+                  <a:srgbClr val="67B9FF"/>
+                </a:solidFill>
+              </a:rPr>
+              <a:t>Futura versión</a:t>
+            </a:r>
+          </a:p>
+        </p:txBody>
+      </p:sp>
+      <p:sp>
+        <p:nvSpPr>
+          <p:cNvPr id="11" name="">
+            <a:extLst xmlns:a="http://schemas.openxmlformats.org/drawingml/2006/main">
+              <a:ext uri="{FF2B5EF4-FFF2-40B4-BE49-F238E27FC236}">
+                <a16:creationId xmlns:a16="http://schemas.microsoft.com/office/drawing/2014/main" id="{0ED4495F-8D03-4F23-8071-4EA83920E382}"/>
+              </a:ext>
+            </a:extLst>
+          </p:cNvPr>
+          <p:cNvSpPr>
+            <a:spLocks xmlns:a="http://schemas.openxmlformats.org/drawingml/2006/main" noGrp="1"/>
+          </p:cNvSpPr>
+          <p:nvPr/>
+        </p:nvSpPr>
+        <p:spPr>
+          <a:xfrm xmlns:a="http://schemas.openxmlformats.org/drawingml/2006/main">
+            <a:off x="3381375" y="5695950"/>
+            <a:ext cx="8096250" cy="571500"/>
+          </a:xfrm>
+          <a:prstGeom xmlns:a="http://schemas.openxmlformats.org/drawingml/2006/main" prst="rect">
+            <a:avLst/>
+          </a:prstGeom>
+          <a:noFill xmlns:a="http://schemas.openxmlformats.org/drawingml/2006/main"/>
+          <a:ln xmlns:a="http://schemas.openxmlformats.org/drawingml/2006/main" w="0">
+            <a:noFill/>
+          </a:ln>
+        </p:spPr>
+        <p:txBody>
+          <a:bodyPr xmlns:a="http://schemas.openxmlformats.org/drawingml/2006/main"/>
+          <a:lstStyle xmlns:a="http://schemas.openxmlformats.org/drawingml/2006/main">
+            <a:defPPr>
+              <a:defRPr sz="1875" b="1">
+                <a:solidFill>
+                  <a:srgbClr val="FFFFFF"/>
+                </a:solidFill>
+              </a:defRPr>
+            </a:defPPr>
+            <a:lvl1pPr>
+              <a:defRPr sz="1875" b="1">
+                <a:solidFill>
+                  <a:srgbClr val="FFFFFF"/>
+                </a:solidFill>
+              </a:defRPr>
+            </a:lvl1pPr>
+            <a:lvl2pPr>
+              <a:defRPr sz="1875" b="1">
+                <a:solidFill>
+                  <a:srgbClr val="FFFFFF"/>
+                </a:solidFill>
+              </a:defRPr>
+            </a:lvl2pPr>
+            <a:lvl3pPr>
+              <a:defRPr sz="1875" b="1">
+                <a:solidFill>
+                  <a:srgbClr val="FFFFFF"/>
+                </a:solidFill>
+              </a:defRPr>
+            </a:lvl3pPr>
+            <a:lvl4pPr>
+              <a:defRPr sz="1875" b="1">
+                <a:solidFill>
+                  <a:srgbClr val="FFFFFF"/>
+                </a:solidFill>
+              </a:defRPr>
+            </a:lvl4pPr>
+            <a:lvl5pPr>
+              <a:defRPr sz="1875" b="1">
+                <a:solidFill>
+                  <a:srgbClr val="FFFFFF"/>
+                </a:solidFill>
+              </a:defRPr>
+            </a:lvl5pPr>
+            <a:lvl6pPr>
+              <a:defRPr sz="1875" b="1">
+                <a:solidFill>
+                  <a:srgbClr val="FFFFFF"/>
+                </a:solidFill>
+              </a:defRPr>
+            </a:lvl6pPr>
+            <a:lvl7pPr>
+              <a:defRPr sz="1875" b="1">
+                <a:solidFill>
+                  <a:srgbClr val="FFFFFF"/>
+                </a:solidFill>
+              </a:defRPr>
+            </a:lvl7pPr>
+            <a:lvl8pPr>
+              <a:defRPr sz="1875" b="1">
+                <a:solidFill>
+                  <a:srgbClr val="FFFFFF"/>
+                </a:solidFill>
+              </a:defRPr>
+            </a:lvl8pPr>
+            <a:lvl9pPr>
+              <a:defRPr sz="1875" b="1">
+                <a:solidFill>
+                  <a:srgbClr val="FFFFFF"/>
+                </a:solidFill>
+              </a:defRPr>
+            </a:lvl9pPr>
+          </a:lstStyle>
+          <a:p xmlns:a="http://schemas.openxmlformats.org/drawingml/2006/main">
+            <a:pPr>
+              <a:defRPr sz="1875" b="1">
+                <a:solidFill>
+                  <a:srgbClr val="FFFFFF"/>
+                </a:solidFill>
+              </a:defRPr>
+            </a:pPr>
+            <a:r>
+              <a:rPr sz="1875" b="1">
+                <a:solidFill>
+                  <a:srgbClr val="FFFFFF"/>
+                </a:solidFill>
+              </a:rPr>
+              <a:t>Base propia por comercio y mejora de las funciones actuales</a:t>
+            </a:r>
+          </a:p>
+        </p:txBody>
+      </p:sp>
+      <p:sp>
+        <p:nvSpPr>
+          <p:cNvPr id="12" name="">
+            <a:extLst xmlns:a="http://schemas.openxmlformats.org/drawingml/2006/main">
+              <a:ext uri="{FF2B5EF4-FFF2-40B4-BE49-F238E27FC236}">
+                <a16:creationId xmlns:a16="http://schemas.microsoft.com/office/drawing/2014/main" id="{0D3877B3-275C-4601-A6B7-93EAECFFBE59}"/>
+              </a:ext>
+            </a:extLst>
+          </p:cNvPr>
+          <p:cNvSpPr>
+            <a:spLocks xmlns:a="http://schemas.openxmlformats.org/drawingml/2006/main" noGrp="1"/>
+          </p:cNvSpPr>
+          <p:nvPr/>
+        </p:nvSpPr>
+        <p:spPr>
+          <a:xfrm xmlns:a="http://schemas.openxmlformats.org/drawingml/2006/main">
+            <a:off x="3381375" y="6238875"/>
+            <a:ext cx="8191500" cy="352425"/>
+          </a:xfrm>
+          <a:prstGeom xmlns:a="http://schemas.openxmlformats.org/drawingml/2006/main" prst="rect">
+            <a:avLst/>
+          </a:prstGeom>
+          <a:noFill xmlns:a="http://schemas.openxmlformats.org/drawingml/2006/main"/>
+          <a:ln xmlns:a="http://schemas.openxmlformats.org/drawingml/2006/main" w="0">
+            <a:noFill/>
+          </a:ln>
+        </p:spPr>
+        <p:txBody>
+          <a:bodyPr xmlns:a="http://schemas.openxmlformats.org/drawingml/2006/main"/>
+          <a:lstStyle xmlns:a="http://schemas.openxmlformats.org/drawingml/2006/main">
+            <a:defPPr>
+              <a:defRPr sz="1500" b="0">
+                <a:solidFill>
+                  <a:srgbClr val="B6CCE9"/>
+                </a:solidFill>
+              </a:defRPr>
+            </a:defPPr>
+            <a:lvl1pPr>
+              <a:defRPr sz="1500" b="0">
+                <a:solidFill>
+                  <a:srgbClr val="B6CCE9"/>
+                </a:solidFill>
+              </a:defRPr>
+            </a:lvl1pPr>
+            <a:lvl2pPr>
+              <a:defRPr sz="1500" b="0">
+                <a:solidFill>
+                  <a:srgbClr val="B6CCE9"/>
+                </a:solidFill>
+              </a:defRPr>
+            </a:lvl2pPr>
+            <a:lvl3pPr>
+              <a:defRPr sz="1500" b="0">
+                <a:solidFill>
+                  <a:srgbClr val="B6CCE9"/>
+                </a:solidFill>
+              </a:defRPr>
+            </a:lvl3pPr>
+            <a:lvl4pPr>
+              <a:defRPr sz="1500" b="0">
+                <a:solidFill>
+                  <a:srgbClr val="B6CCE9"/>
+                </a:solidFill>
+              </a:defRPr>
+            </a:lvl4pPr>
+            <a:lvl5pPr>
+              <a:defRPr sz="1500" b="0">
+                <a:solidFill>
+                  <a:srgbClr val="B6CCE9"/>
+                </a:solidFill>
+              </a:defRPr>
+            </a:lvl5pPr>
+            <a:lvl6pPr>
+              <a:defRPr sz="1500" b="0">
+                <a:solidFill>
+                  <a:srgbClr val="B6CCE9"/>
+                </a:solidFill>
+              </a:defRPr>
+            </a:lvl6pPr>
+            <a:lvl7pPr>
+              <a:defRPr sz="1500" b="0">
+                <a:solidFill>
+                  <a:srgbClr val="B6CCE9"/>
+                </a:solidFill>
+              </a:defRPr>
+            </a:lvl7pPr>
+            <a:lvl8pPr>
+              <a:defRPr sz="1500" b="0">
+                <a:solidFill>
+                  <a:srgbClr val="B6CCE9"/>
+                </a:solidFill>
+              </a:defRPr>
+            </a:lvl8pPr>
+            <a:lvl9pPr>
+              <a:defRPr sz="1500" b="0">
+                <a:solidFill>
+                  <a:srgbClr val="B6CCE9"/>
+                </a:solidFill>
+              </a:defRPr>
+            </a:lvl9pPr>
+          </a:lstStyle>
+          <a:p xmlns:a="http://schemas.openxmlformats.org/drawingml/2006/main">
+            <a:pPr>
+              <a:defRPr sz="1500" b="0">
+                <a:solidFill>
+                  <a:srgbClr val="B6CCE9"/>
+                </a:solidFill>
+              </a:defRPr>
+            </a:pPr>
+            <a:r>
+              <a:rPr sz="1500" b="0">
+                <a:solidFill>
+                  <a:srgbClr val="B6CCE9"/>
+                </a:solidFill>
+              </a:rPr>
+              <a:t>Escaneo SKU  /  Operaciones sin conexión  /  Productos sin ventas recientes</a:t>
+            </a:r>
+          </a:p>
+        </p:txBody>
+      </p:sp>
+      <p:sp>
+        <p:nvSpPr>
+          <p:cNvPr id="13" name="">
+            <a:extLst xmlns:a="http://schemas.openxmlformats.org/drawingml/2006/main">
+              <a:ext uri="{FF2B5EF4-FFF2-40B4-BE49-F238E27FC236}">
+                <a16:creationId xmlns:a16="http://schemas.microsoft.com/office/drawing/2014/main" id="{0921E5B7-F237-4777-8B63-752B01F55AB5}"/>
+              </a:ext>
+            </a:extLst>
+          </p:cNvPr>
+          <p:cNvSpPr>
+            <a:spLocks xmlns:a="http://schemas.openxmlformats.org/drawingml/2006/main" noGrp="1"/>
+          </p:cNvSpPr>
+          <p:nvPr/>
+        </p:nvSpPr>
+        <p:spPr>
+          <a:xfrm xmlns:a="http://schemas.openxmlformats.org/drawingml/2006/main">
+            <a:off x="609600" y="6257925"/>
+            <a:ext cx="2857500" cy="352425"/>
+          </a:xfrm>
+          <a:prstGeom xmlns:a="http://schemas.openxmlformats.org/drawingml/2006/main" prst="rect">
+            <a:avLst/>
+          </a:prstGeom>
+          <a:noFill xmlns:a="http://schemas.openxmlformats.org/drawingml/2006/main"/>
+          <a:ln xmlns:a="http://schemas.openxmlformats.org/drawingml/2006/main" w="0">
+            <a:noFill/>
+          </a:ln>
+        </p:spPr>
+        <p:txBody>
+          <a:bodyPr xmlns:a="http://schemas.openxmlformats.org/drawingml/2006/main"/>
+          <a:lstStyle xmlns:a="http://schemas.openxmlformats.org/drawingml/2006/main">
+            <a:defPPr>
+              <a:defRPr sz="1800" b="1">
+                <a:solidFill>
+                  <a:srgbClr val="FFFFFF"/>
+                </a:solidFill>
+              </a:defRPr>
+            </a:defPPr>
+            <a:lvl1pPr>
+              <a:defRPr sz="1800" b="1">
+                <a:solidFill>
+                  <a:srgbClr val="FFFFFF"/>
+                </a:solidFill>
+              </a:defRPr>
+            </a:lvl1pPr>
+            <a:lvl2pPr>
+              <a:defRPr sz="1800" b="1">
+                <a:solidFill>
+                  <a:srgbClr val="FFFFFF"/>
+                </a:solidFill>
+              </a:defRPr>
+            </a:lvl2pPr>
+            <a:lvl3pPr>
+              <a:defRPr sz="1800" b="1">
+                <a:solidFill>
+                  <a:srgbClr val="FFFFFF"/>
+                </a:solidFill>
+              </a:defRPr>
+            </a:lvl3pPr>
+            <a:lvl4pPr>
+              <a:defRPr sz="1800" b="1">
+                <a:solidFill>
+                  <a:srgbClr val="FFFFFF"/>
+                </a:solidFill>
+              </a:defRPr>
+            </a:lvl4pPr>
+            <a:lvl5pPr>
+              <a:defRPr sz="1800" b="1">
+                <a:solidFill>
+                  <a:srgbClr val="FFFFFF"/>
+                </a:solidFill>
+              </a:defRPr>
+            </a:lvl5pPr>
+            <a:lvl6pPr>
+              <a:defRPr sz="1800" b="1">
+                <a:solidFill>
+                  <a:srgbClr val="FFFFFF"/>
+                </a:solidFill>
+              </a:defRPr>
+            </a:lvl6pPr>
+            <a:lvl7pPr>
+              <a:defRPr sz="1800" b="1">
+                <a:solidFill>
+                  <a:srgbClr val="FFFFFF"/>
+                </a:solidFill>
+              </a:defRPr>
+            </a:lvl7pPr>
+            <a:lvl8pPr>
+              <a:defRPr sz="1800" b="1">
+                <a:solidFill>
+                  <a:srgbClr val="FFFFFF"/>
+                </a:solidFill>
+              </a:defRPr>
+            </a:lvl8pPr>
+            <a:lvl9pPr>
+              <a:defRPr sz="1800" b="1">
+                <a:solidFill>
+                  <a:srgbClr val="FFFFFF"/>
+                </a:solidFill>
+              </a:defRPr>
+            </a:lvl9pPr>
+          </a:lstStyle>
+          <a:p xmlns:a="http://schemas.openxmlformats.org/drawingml/2006/main">
+            <a:pPr>
+              <a:defRPr sz="1800" b="1">
+                <a:solidFill>
+                  <a:srgbClr val="FFFFFF"/>
+                </a:solidFill>
+              </a:defRPr>
+            </a:pPr>
+            <a:r>
+              <a:rPr sz="1800" b="1">
+                <a:solidFill>
+                  <a:srgbClr val="FFFFFF"/>
+                </a:solidFill>
+              </a:rPr>
+              <a:t>Gracias. ¿Preguntas?</a:t>
+            </a:r>
+          </a:p>
+        </p:txBody>
+      </p:sp>
     </p:spTree>
     <p:extLst>
       <p:ext uri="{BB962C8B-B14F-4D97-AF65-F5344CB8AC3E}">
-        <p14:creationId xmlns:p14="http://schemas.microsoft.com/office/powerpoint/2010/main" val="134245832"/>
+        <p14:creationId xmlns:p14="http://schemas.microsoft.com/office/powerpoint/2010/main" val="146996009"/>
       </p:ext>
     </p:extLst>
   </p:cSld>
